--- a/lecons/F2T/21_S15_L5_P2_Formal_Informal_Sectors.pptx
+++ b/lecons/F2T/21_S15_L5_P2_Formal_Informal_Sectors.pptx
@@ -58,11 +58,9 @@
     <p:sldId id="306" r:id="rId52"/>
     <p:sldId id="307" r:id="rId53"/>
     <p:sldId id="308" r:id="rId54"/>
-    <p:sldId id="309" r:id="rId55"/>
-    <p:sldId id="310" r:id="rId56"/>
   </p:sldIdLst>
   <p:notesMasterIdLst>
-    <p:notesMasterId r:id="rId57"/>
+    <p:notesMasterId r:id="rId55"/>
   </p:notesMasterIdLst>
   <p:sldSz cx="12192000" cy="6858000"/>
   <p:notesSz cx="6858000" cy="12192000"/>
@@ -644,7 +642,7 @@
           <a:p>
             <a:r>
               <a:rPr lang="en-US" dirty="0"/>
-              <a:t>Let us first remember what you already know. The economy has four sectors: primary, secondary, tertiary and quaternary. The primary sector extracts, the secondary transforms, the tertiary serves and the quaternary researches. Keep this in mind, because we shall build on it today.</a:t>
+              <a:t>Listen carefully to this situation from real life. Mr Bello works in a bank in Garoua: he has a contract and a salary every month. His neighbour Moussa is a moto-taxi driver: he has no contract, and his money changes every day. Moussa's son asks: "Why are the two jobs so different?" Think about it, because I am going to ask you some questions.</a:t>
             </a:r>
             <a:endParaRPr lang="en-US" dirty="0"/>
           </a:p>
@@ -732,7 +730,7 @@
           <a:p>
             <a:r>
               <a:rPr lang="en-US" dirty="0"/>
-              <a:t>Listen carefully to this situation from real life. Mr Bello works in a bank in Garoua. He has a contract, a salary every month and a pension later. His neighbour Moussa is a moto-taxi driver. He has no contract, and his money changes every day. Think about it, because I am going to ask you some questions.</a:t>
+              <a:t>Question 1: What is the problem in the situation? Think for a moment, then raise your hand to answer.</a:t>
             </a:r>
             <a:endParaRPr lang="en-US" dirty="0"/>
           </a:p>
@@ -820,7 +818,7 @@
           <a:p>
             <a:r>
               <a:rPr lang="en-US" dirty="0"/>
-              <a:t>Question 1: What is the problem in the situation? Think for a moment, then raise your hand to answer.</a:t>
+              <a:t>Good. The son does not know the difference between the formal and the informal sectors.</a:t>
             </a:r>
             <a:endParaRPr lang="en-US" dirty="0"/>
           </a:p>
@@ -908,7 +906,7 @@
           <a:p>
             <a:r>
               <a:rPr lang="en-US" dirty="0"/>
-              <a:t>Good. Moussa has no contract and no regular money.</a:t>
+              <a:t>Question 2: Where does Mr Bello work? Think for a moment, then raise your hand to answer.</a:t>
             </a:r>
             <a:endParaRPr lang="en-US" dirty="0"/>
           </a:p>
@@ -996,7 +994,7 @@
           <a:p>
             <a:r>
               <a:rPr lang="en-US" dirty="0"/>
-              <a:t>Question 2: What does Mr Bello have that Moussa does not have? Think for a moment, then raise your hand to answer.</a:t>
+              <a:t>Good. In a bank.</a:t>
             </a:r>
             <a:endParaRPr lang="en-US" dirty="0"/>
           </a:p>
@@ -1084,7 +1082,7 @@
           <a:p>
             <a:r>
               <a:rPr lang="en-US" dirty="0"/>
-              <a:t>Good. A contract, a monthly salary and a pension.</a:t>
+              <a:t>Question 3: What is Moussa's job? Think for a moment, then raise your hand to answer.</a:t>
             </a:r>
             <a:endParaRPr lang="en-US" dirty="0"/>
           </a:p>
@@ -1172,7 +1170,7 @@
           <a:p>
             <a:r>
               <a:rPr lang="en-US" dirty="0"/>
-              <a:t>Question 3: What can Moussa do? Think for a moment, then raise your hand to answer.</a:t>
+              <a:t>Good. Moto-taxi driver.</a:t>
             </a:r>
             <a:endParaRPr lang="en-US" dirty="0"/>
           </a:p>
@@ -1260,7 +1258,7 @@
           <a:p>
             <a:r>
               <a:rPr lang="en-US" dirty="0"/>
-              <a:t>Good. Register his work and join the CNPS.</a:t>
+              <a:t>From this situation, the action we are working towards in this lesson is the following: encourage small workers to register their work and join the CNPS.</a:t>
             </a:r>
             <a:endParaRPr lang="en-US" dirty="0"/>
           </a:p>
@@ -1348,7 +1346,7 @@
           <a:p>
             <a:r>
               <a:rPr lang="en-US" dirty="0"/>
-              <a:t>From this situation, the action we are working towards in this lesson is the following: encourage small workers to register their work and join the CNPS.</a:t>
+              <a:t>Why is this lesson important for you? This lesson helps us to know the difference between the formal and the informal sector.</a:t>
             </a:r>
             <a:endParaRPr lang="en-US" dirty="0"/>
           </a:p>
@@ -1436,7 +1434,7 @@
           <a:p>
             <a:r>
               <a:rPr lang="en-US" dirty="0"/>
-              <a:t>Why is this lesson important for you? This lesson helps us to know the difference between the formal and the informal sector.</a:t>
+              <a:t>Activity 1. Look carefully at this picture: a bank. Observe every detail before I ask the question.</a:t>
             </a:r>
             <a:endParaRPr lang="en-US" dirty="0"/>
           </a:p>
@@ -1612,7 +1610,7 @@
           <a:p>
             <a:r>
               <a:rPr lang="en-US" dirty="0"/>
-              <a:t>Activity 1. Look carefully at this picture: a bank in an African city. Observe every detail before I ask the question.</a:t>
+              <a:t>Here is the question for Activity 1: The bank is registered and pays taxes. Which sector is it? Take one minute to think and write your answer in your rough notebook.</a:t>
             </a:r>
             <a:endParaRPr lang="en-US" dirty="0"/>
           </a:p>
@@ -1700,7 +1698,7 @@
           <a:p>
             <a:r>
               <a:rPr lang="en-US" dirty="0"/>
-              <a:t>Here is the question for Activity 1: The bank is registered and pays taxes. Which sector does it belong to? Take one minute to think and write your answer in your rough notebook.</a:t>
+              <a:t>Let us check the answer together. The formal sector.</a:t>
             </a:r>
             <a:endParaRPr lang="en-US" dirty="0"/>
           </a:p>
@@ -1788,7 +1786,7 @@
           <a:p>
             <a:r>
               <a:rPr lang="en-US" dirty="0"/>
-              <a:t>Let us check the answer together. The formal sector.</a:t>
+              <a:t>Activity 2. Look carefully at this picture: factory workers. Observe every detail before I ask the question.</a:t>
             </a:r>
             <a:endParaRPr lang="en-US" dirty="0"/>
           </a:p>
@@ -1876,7 +1874,7 @@
           <a:p>
             <a:r>
               <a:rPr lang="en-US" dirty="0"/>
-              <a:t>Activity 2. Look carefully at this picture: workers in a food factory. Observe every detail before I ask the question.</a:t>
+              <a:t>Here is the question for Activity 2: How are these workers paid? Take one minute to think and write your answer in your rough notebook.</a:t>
             </a:r>
             <a:endParaRPr lang="en-US" dirty="0"/>
           </a:p>
@@ -1964,7 +1962,7 @@
           <a:p>
             <a:r>
               <a:rPr lang="en-US" dirty="0"/>
-              <a:t>Here is the question for Activity 2: These workers have contracts and a salary. Give one advantage. Take one minute to think and write your answer in your rough notebook.</a:t>
+              <a:t>Let us check the answer together. They receive a salary every month.</a:t>
             </a:r>
             <a:endParaRPr lang="en-US" dirty="0"/>
           </a:p>
@@ -2052,7 +2050,7 @@
           <a:p>
             <a:r>
               <a:rPr lang="en-US" dirty="0"/>
-              <a:t>Let us check the answer together. They are paid every month and get a pension.</a:t>
+              <a:t>Activity 3. Look carefully at this picture: moto-taxis. Observe every detail before I ask the question.</a:t>
             </a:r>
             <a:endParaRPr lang="en-US" dirty="0"/>
           </a:p>
@@ -2140,7 +2138,7 @@
           <a:p>
             <a:r>
               <a:rPr lang="en-US" dirty="0"/>
-              <a:t>Activity 3. Look carefully at this picture: moto-taxis in a Cameroonian town. Observe every detail before I ask the question.</a:t>
+              <a:t>Here is the question for Activity 3: Is the moto-taxi driver usually registered? Take one minute to think and write your answer in your rough notebook.</a:t>
             </a:r>
             <a:endParaRPr lang="en-US" dirty="0"/>
           </a:p>
@@ -2228,7 +2226,7 @@
           <a:p>
             <a:r>
               <a:rPr lang="en-US" dirty="0"/>
-              <a:t>Here is the question for Activity 3: Is the moto-taxi driver registered? Which sector is this? Take one minute to think and write your answer in your rough notebook.</a:t>
+              <a:t>Let us check the answer together. No: it is the informal sector.</a:t>
             </a:r>
             <a:endParaRPr lang="en-US" dirty="0"/>
           </a:p>
@@ -2316,7 +2314,7 @@
           <a:p>
             <a:r>
               <a:rPr lang="en-US" dirty="0"/>
-              <a:t>Let us check the answer together. Usually not. It is the informal sector.</a:t>
+              <a:t>Activity 4. Look carefully at this picture: a street seller. Observe every detail before I ask the question.</a:t>
             </a:r>
             <a:endParaRPr lang="en-US" dirty="0"/>
           </a:p>
@@ -2404,7 +2402,7 @@
           <a:p>
             <a:r>
               <a:rPr lang="en-US" dirty="0"/>
-              <a:t>Activity 4. Look carefully at this picture: a woman sells roasted maize in the street. Observe every detail before I ask the question.</a:t>
+              <a:t>Here is the question for Activity 4: Why is it easy to start work in the informal sector? Take one minute to think and write your answer in your rough notebook.</a:t>
             </a:r>
             <a:endParaRPr lang="en-US" dirty="0"/>
           </a:p>
@@ -2580,7 +2578,7 @@
           <a:p>
             <a:r>
               <a:rPr lang="en-US" dirty="0"/>
-              <a:t>Here is the question for Activity 4: Why do many young people work in the informal sector? Take one minute to think and write your answer in your rough notebook.</a:t>
+              <a:t>Let us check the answer together. It needs little money and no papers.</a:t>
             </a:r>
             <a:endParaRPr lang="en-US" dirty="0"/>
           </a:p>
@@ -2668,7 +2666,7 @@
           <a:p>
             <a:r>
               <a:rPr lang="en-US" dirty="0"/>
-              <a:t>Let us check the answer together. It is easy to start and needs little money.</a:t>
+              <a:t>Activity 5. Look carefully at this diagram: formal and informal sectors. Observe every detail before I ask the question.</a:t>
             </a:r>
             <a:endParaRPr lang="en-US" dirty="0"/>
           </a:p>
@@ -2756,7 +2754,7 @@
           <a:p>
             <a:r>
               <a:rPr lang="en-US" dirty="0"/>
-              <a:t>Activity 5. Look carefully at this diagram: formal and informal sectors. Observe every detail before I ask the question.</a:t>
+              <a:t>Here is the question for Activity 5: Which sector gives workers a pension? Take one minute to think and write your answer in your rough notebook.</a:t>
             </a:r>
             <a:endParaRPr lang="en-US" dirty="0"/>
           </a:p>
@@ -2844,7 +2842,7 @@
           <a:p>
             <a:r>
               <a:rPr lang="en-US" dirty="0"/>
-              <a:t>Here is the question for Activity 5: Give two problems of working in the informal sector. Take one minute to think and write your answer in your rough notebook.</a:t>
+              <a:t>Let us check the answer together. The formal sector.</a:t>
             </a:r>
             <a:endParaRPr lang="en-US" dirty="0"/>
           </a:p>
@@ -2932,7 +2930,7 @@
           <a:p>
             <a:r>
               <a:rPr lang="en-US" dirty="0"/>
-              <a:t>Let us check the answer together. No contract and no pension. The money is not regular.</a:t>
+              <a:t>Now we are going to copy the board summary. Write the title and the headings neatly in your notebooks. I will give you enough time for each slide, so do not rush.</a:t>
             </a:r>
             <a:endParaRPr lang="en-US" dirty="0"/>
           </a:p>
@@ -3020,7 +3018,7 @@
           <a:p>
             <a:r>
               <a:rPr lang="en-US" dirty="0"/>
-              <a:t>Now we are going to copy the board summary. Write the title and the headings neatly in your notebooks. I will give you enough time for each slide, so do not rush.</a:t>
+              <a:t>Let us copy the definitions. The key terms of this lesson are defined as follows. On this slide we have Formal sector and Informal sector. Write each point on a new line, with the key term first, and explain it in your own words when we revise.</a:t>
             </a:r>
             <a:endParaRPr lang="en-US" dirty="0"/>
           </a:p>
@@ -3108,7 +3106,7 @@
           <a:p>
             <a:r>
               <a:rPr lang="en-US" dirty="0"/>
-              <a:t>Let us copy the definitions. The key terms of this lesson are defined as follows. On this slide we have Formal sector and Informal sector. Write each point on a new line, with the key term first, and explain it in your own words when we revise. When you finish, we go to the next slide.</a:t>
+              <a:t>Let us copy The Formal Sector. The formal sector has the following characteristics. Copy the point on Registered on the left, then draw the diagram on the right: a bank. Give it a title and label it clearly.</a:t>
             </a:r>
             <a:endParaRPr lang="en-US" dirty="0"/>
           </a:p>
@@ -3196,7 +3194,7 @@
           <a:p>
             <a:r>
               <a:rPr lang="en-US" dirty="0"/>
-              <a:t>We continue with the definitions. On this slide we have Pension. Write each point on a new line, with the key term first, and explain it in your own words when we revise.</a:t>
+              <a:t>We continue with The Formal Sector. On this slide we have Contracts and salaries, Social security and Examples. Write each point on a new line, with the key term first, and explain it in your own words when we revise.</a:t>
             </a:r>
             <a:endParaRPr lang="en-US" dirty="0"/>
           </a:p>
@@ -3284,7 +3282,7 @@
           <a:p>
             <a:r>
               <a:rPr lang="en-US" dirty="0"/>
-              <a:t>Let us copy The Formal Sector. The formal sector has the following characteristics. On this slide we have Registration and Contracts. Write each point on a new line, with the key term first, and explain it in your own words when we revise. When you finish, we go to the next slide.</a:t>
+              <a:t>Let us copy The Informal Sector. The informal sector has the following characteristics. Copy the point on Not registered on the left, then draw the diagram on the right: moto-taxis. Give it a title and label it clearly.</a:t>
             </a:r>
             <a:endParaRPr lang="en-US" dirty="0"/>
           </a:p>
@@ -3372,7 +3370,7 @@
           <a:p>
             <a:r>
               <a:rPr lang="en-US" dirty="0"/>
-              <a:t>We continue with The Formal Sector. On this slide we have Protection and Examples. Write each point on a new line, with the key term first, and explain it in your own words when we revise.</a:t>
+              <a:t>We continue with The Informal Sector. On this slide we have No contract and Small capital. Write each point on a new line, with the key term first, and explain it in your own words when we revise.</a:t>
             </a:r>
             <a:endParaRPr lang="en-US" dirty="0"/>
           </a:p>
@@ -3548,7 +3546,7 @@
           <a:p>
             <a:r>
               <a:rPr lang="en-US" dirty="0"/>
-              <a:t>Let us copy The Informal Sector. The informal sector is described as follows. On this slide we have Examples and Importance. Write each point on a new line, with the key term first, and explain it in your own words when we revise. When you finish, we go to the next slide.</a:t>
+              <a:t>Copy the point on Examples on the left, then draw the diagram on the right: a street seller. Give it a title and label it clearly.</a:t>
             </a:r>
             <a:endParaRPr lang="en-US" dirty="0"/>
           </a:p>
@@ -3636,7 +3634,7 @@
           <a:p>
             <a:r>
               <a:rPr lang="en-US" dirty="0"/>
-              <a:t>We continue with The Informal Sector. On this slide we have Problems and Solutions. Write each point on a new line, with the key term first, and explain it in your own words when we revise.</a:t>
+              <a:t>Now let us check what you have understood. Question 1: What is the informal sector? Answer in your exercise book.</a:t>
             </a:r>
             <a:endParaRPr lang="en-US" dirty="0"/>
           </a:p>
@@ -3724,7 +3722,7 @@
           <a:p>
             <a:r>
               <a:rPr lang="en-US" dirty="0"/>
-              <a:t>Now draw this illustration in your notebook: formal and informal sectors compared. Give it a title and label it clearly.</a:t>
+              <a:t>The expected answer is: small activities that are not registered. If you got it right, well done.</a:t>
             </a:r>
             <a:endParaRPr lang="en-US" dirty="0"/>
           </a:p>
@@ -3812,7 +3810,7 @@
           <a:p>
             <a:r>
               <a:rPr lang="en-US" dirty="0"/>
-              <a:t>Now let us check what you have understood. Question 1: What is the informal sector? Answer in your exercise book.</a:t>
+              <a:t>Now let us check what you have understood. Question 2: Give one characteristic of the formal sector. Answer in your exercise book.</a:t>
             </a:r>
             <a:endParaRPr lang="en-US" dirty="0"/>
           </a:p>
@@ -3900,7 +3898,7 @@
           <a:p>
             <a:r>
               <a:rPr lang="en-US" dirty="0"/>
-              <a:t>The expected answer is: small work that is not registered with the state. If you got it right, well done.</a:t>
+              <a:t>The expected answer is: workers have contracts and monthly salaries (or it is registered and pays taxes). If you got it right, well done.</a:t>
             </a:r>
             <a:endParaRPr lang="en-US" dirty="0"/>
           </a:p>
@@ -3988,7 +3986,7 @@
           <a:p>
             <a:r>
               <a:rPr lang="en-US" dirty="0"/>
-              <a:t>Now let us check what you have understood. Question 2: Give one problem of informal workers. Answer in your exercise book.</a:t>
+              <a:t>Take your time to copy this part; we will continue together.</a:t>
             </a:r>
             <a:endParaRPr lang="en-US" dirty="0"/>
           </a:p>
@@ -4076,7 +4074,7 @@
           <a:p>
             <a:r>
               <a:rPr lang="en-US" dirty="0"/>
-              <a:t>The expected answer is: they have no pension (or no contract). If you got it right, well done.</a:t>
+              <a:t>For those who need more practice, fill in the blanks in your exercise book. The answers are: number 1, formal; number 2, informal; number 3, pension.</a:t>
             </a:r>
             <a:endParaRPr lang="en-US" dirty="0"/>
           </a:p>
@@ -4164,7 +4162,7 @@
           <a:p>
             <a:r>
               <a:rPr lang="en-US" dirty="0"/>
-              <a:t>Take your time to copy this part; we will continue together.</a:t>
+              <a:t>For your homework: List four products of farming, fishing, forestry or mining found in the Garoua market, and say where each comes from. We shall correct it at the beginning of our next lesson.</a:t>
             </a:r>
             <a:endParaRPr lang="en-US" dirty="0"/>
           </a:p>
@@ -4252,7 +4250,7 @@
           <a:p>
             <a:r>
               <a:rPr lang="en-US" dirty="0"/>
-              <a:t>For those who need more practice, fill in the blanks in your exercise book. The answers are: number 1, formal; number 2, informal; number 3, pension.</a:t>
+              <a:t>Our next lesson will be on Lesson 5 (Part 3): The Sectors of the Economy: The Primary Sector (Definition and Examples). Thank you for your attention, and see you next time.</a:t>
             </a:r>
             <a:endParaRPr lang="en-US" dirty="0"/>
           </a:p>
@@ -4340,7 +4338,7 @@
           <a:p>
             <a:r>
               <a:rPr lang="en-US" dirty="0"/>
-              <a:t>For your homework: List four products of farming, fishing, forestry or mining found in the Garoua market, and say where each comes from. We shall correct it at the beginning of our next lesson.</a:t>
+              <a:t>Let us play the bilingual game. I say a word in English, and you give me the French word. Then we do the reverse.</a:t>
             </a:r>
             <a:endParaRPr lang="en-US" dirty="0"/>
           </a:p>
@@ -4516,7 +4514,7 @@
           <a:p>
             <a:r>
               <a:rPr lang="en-US" dirty="0"/>
-              <a:t>Our next lesson will be on Lesson 5 (Part 3): The Sectors of the Economy: The Primary Sector (Definition and Examples). Thank you for your attention, and see you next time.</a:t>
+              <a:t>I record this information in the official logbook of the class after the lesson.</a:t>
             </a:r>
             <a:endParaRPr lang="en-US" dirty="0"/>
           </a:p>
@@ -4604,7 +4602,7 @@
           <a:p>
             <a:r>
               <a:rPr lang="en-US" dirty="0"/>
-              <a:t>Let us play the bilingual game. I say a word in English, and you give me the French word. Then we do the reverse.</a:t>
+              <a:t>I complete the second page of the logbook: the matter taught, the evaluation, the homework and the attendance.</a:t>
             </a:r>
             <a:endParaRPr lang="en-US" dirty="0"/>
           </a:p>
@@ -4692,7 +4690,7 @@
           <a:p>
             <a:r>
               <a:rPr lang="en-US" dirty="0"/>
-              <a:t>I record this information in the official logbook of the class after the lesson.</a:t>
+              <a:t>This slide is for me, the teacher: it gives the timing of the lesson and what to do if the projector is not available.</a:t>
             </a:r>
             <a:endParaRPr lang="en-US" dirty="0"/>
           </a:p>
@@ -4780,7 +4778,7 @@
           <a:p>
             <a:r>
               <a:rPr lang="en-US" dirty="0"/>
-              <a:t>I complete the second page of the logbook: the matter taught, the evaluation, the homework and the attendance.</a:t>
+              <a:t>These are the references and picture credits used to prepare this lesson.</a:t>
             </a:r>
             <a:endParaRPr lang="en-US" dirty="0"/>
           </a:p>
@@ -4804,182 +4802,6 @@
             <a:fld id="{F7021451-1387-4CA6-816F-3879F97B5CBC}" type="slidenum">
               <a:rPr lang="en-US"/>
               <a:t>53</a:t>
-            </a:fld>
-            <a:endParaRPr lang="en-US"/>
-          </a:p>
-        </p:txBody>
-      </p:sp>
-    </p:spTree>
-    <p:extLst>
-      <p:ext uri="{BB962C8B-B14F-4D97-AF65-F5344CB8AC3E}">
-        <p14:creationId xmlns:p14="http://schemas.microsoft.com/office/powerpoint/2010/main" val="1024086991"/>
-      </p:ext>
-    </p:extLst>
-  </p:cSld>
-  <p:clrMapOvr>
-    <a:masterClrMapping/>
-  </p:clrMapOvr>
-</p:notes>
-</file>
-
-<file path=ppt/notesSlides/notesSlide54.xml><?xml version="1.0" encoding="utf-8"?>
-<p:notes xmlns:a="http://schemas.openxmlformats.org/drawingml/2006/main" xmlns:r="http://schemas.openxmlformats.org/officeDocument/2006/relationships" xmlns:p="http://schemas.openxmlformats.org/presentationml/2006/main">
-  <p:cSld>
-    <p:spTree>
-      <p:nvGrpSpPr>
-        <p:cNvPr id="1" name=""/>
-        <p:cNvGrpSpPr/>
-        <p:nvPr/>
-      </p:nvGrpSpPr>
-      <p:grpSpPr>
-        <a:xfrm>
-          <a:off x="0" y="0"/>
-          <a:ext cx="0" cy="0"/>
-          <a:chOff x="0" y="0"/>
-          <a:chExt cx="0" cy="0"/>
-        </a:xfrm>
-      </p:grpSpPr>
-      <p:sp>
-        <p:nvSpPr>
-          <p:cNvPr id="2" name="Slide Image Placeholder 1"/>
-          <p:cNvSpPr>
-            <a:spLocks noGrp="1" noRot="1" noChangeAspect="1"/>
-          </p:cNvSpPr>
-          <p:nvPr>
-            <p:ph type="sldImg"/>
-          </p:nvPr>
-        </p:nvSpPr>
-        <p:spPr/>
-      </p:sp>
-      <p:sp>
-        <p:nvSpPr>
-          <p:cNvPr id="3" name="Notes Placeholder 2"/>
-          <p:cNvSpPr>
-            <a:spLocks noGrp="1"/>
-          </p:cNvSpPr>
-          <p:nvPr>
-            <p:ph type="body" idx="1"/>
-          </p:nvPr>
-        </p:nvSpPr>
-        <p:spPr/>
-        <p:txBody>
-          <a:bodyPr/>
-          <a:lstStyle/>
-          <a:p>
-            <a:r>
-              <a:rPr lang="en-US" dirty="0"/>
-              <a:t>This slide is for me, the teacher: it gives the timing of the lesson and what to do if the projector is not available.</a:t>
-            </a:r>
-            <a:endParaRPr lang="en-US" dirty="0"/>
-          </a:p>
-        </p:txBody>
-      </p:sp>
-      <p:sp>
-        <p:nvSpPr>
-          <p:cNvPr id="4" name="Slide Number Placeholder 3"/>
-          <p:cNvSpPr>
-            <a:spLocks noGrp="1"/>
-          </p:cNvSpPr>
-          <p:nvPr>
-            <p:ph type="sldNum" sz="quarter" idx="10"/>
-          </p:nvPr>
-        </p:nvSpPr>
-        <p:spPr/>
-        <p:txBody>
-          <a:bodyPr/>
-          <a:lstStyle/>
-          <a:p>
-            <a:fld id="{F7021451-1387-4CA6-816F-3879F97B5CBC}" type="slidenum">
-              <a:rPr lang="en-US"/>
-              <a:t>54</a:t>
-            </a:fld>
-            <a:endParaRPr lang="en-US"/>
-          </a:p>
-        </p:txBody>
-      </p:sp>
-    </p:spTree>
-    <p:extLst>
-      <p:ext uri="{BB962C8B-B14F-4D97-AF65-F5344CB8AC3E}">
-        <p14:creationId xmlns:p14="http://schemas.microsoft.com/office/powerpoint/2010/main" val="1024086991"/>
-      </p:ext>
-    </p:extLst>
-  </p:cSld>
-  <p:clrMapOvr>
-    <a:masterClrMapping/>
-  </p:clrMapOvr>
-</p:notes>
-</file>
-
-<file path=ppt/notesSlides/notesSlide55.xml><?xml version="1.0" encoding="utf-8"?>
-<p:notes xmlns:a="http://schemas.openxmlformats.org/drawingml/2006/main" xmlns:r="http://schemas.openxmlformats.org/officeDocument/2006/relationships" xmlns:p="http://schemas.openxmlformats.org/presentationml/2006/main">
-  <p:cSld>
-    <p:spTree>
-      <p:nvGrpSpPr>
-        <p:cNvPr id="1" name=""/>
-        <p:cNvGrpSpPr/>
-        <p:nvPr/>
-      </p:nvGrpSpPr>
-      <p:grpSpPr>
-        <a:xfrm>
-          <a:off x="0" y="0"/>
-          <a:ext cx="0" cy="0"/>
-          <a:chOff x="0" y="0"/>
-          <a:chExt cx="0" cy="0"/>
-        </a:xfrm>
-      </p:grpSpPr>
-      <p:sp>
-        <p:nvSpPr>
-          <p:cNvPr id="2" name="Slide Image Placeholder 1"/>
-          <p:cNvSpPr>
-            <a:spLocks noGrp="1" noRot="1" noChangeAspect="1"/>
-          </p:cNvSpPr>
-          <p:nvPr>
-            <p:ph type="sldImg"/>
-          </p:nvPr>
-        </p:nvSpPr>
-        <p:spPr/>
-      </p:sp>
-      <p:sp>
-        <p:nvSpPr>
-          <p:cNvPr id="3" name="Notes Placeholder 2"/>
-          <p:cNvSpPr>
-            <a:spLocks noGrp="1"/>
-          </p:cNvSpPr>
-          <p:nvPr>
-            <p:ph type="body" idx="1"/>
-          </p:nvPr>
-        </p:nvSpPr>
-        <p:spPr/>
-        <p:txBody>
-          <a:bodyPr/>
-          <a:lstStyle/>
-          <a:p>
-            <a:r>
-              <a:rPr lang="en-US" dirty="0"/>
-              <a:t>These are the references and picture credits used to prepare this lesson.</a:t>
-            </a:r>
-            <a:endParaRPr lang="en-US" dirty="0"/>
-          </a:p>
-        </p:txBody>
-      </p:sp>
-      <p:sp>
-        <p:nvSpPr>
-          <p:cNvPr id="4" name="Slide Number Placeholder 3"/>
-          <p:cNvSpPr>
-            <a:spLocks noGrp="1"/>
-          </p:cNvSpPr>
-          <p:nvPr>
-            <p:ph type="sldNum" sz="quarter" idx="10"/>
-          </p:nvPr>
-        </p:nvSpPr>
-        <p:spPr/>
-        <p:txBody>
-          <a:bodyPr/>
-          <a:lstStyle/>
-          <a:p>
-            <a:fld id="{F7021451-1387-4CA6-816F-3879F97B5CBC}" type="slidenum">
-              <a:rPr lang="en-US"/>
-              <a:t>55</a:t>
             </a:fld>
             <a:endParaRPr lang="en-US"/>
           </a:p>
@@ -5220,7 +5042,7 @@
           <a:p>
             <a:r>
               <a:rPr lang="en-US" dirty="0"/>
-              <a:t>Take your time to copy this part; we will continue together.</a:t>
+              <a:t>By the end of this lesson, you should be able to do three things. Number 1: define the formal and the informal sectors. Number 2: give the characteristics of each sector. Number 3: give examples of each sector in Cameroon.</a:t>
             </a:r>
             <a:endParaRPr lang="en-US" dirty="0"/>
           </a:p>
@@ -5308,7 +5130,7 @@
           <a:p>
             <a:r>
               <a:rPr lang="en-US" dirty="0"/>
-              <a:t>By the end of this lesson, you should be able to do three things. Number 1: define the formal and informal sectors. Number 2: give the characteristics of each sector with examples from Cameroon. Number 3: give the advantages and problems of the informal sector.</a:t>
+              <a:t>Let us first remember what you already know. The economy has four sectors: primary, secondary, tertiary and quaternary. The primary sector extracts, the secondary transforms, the tertiary serves and the quaternary researches. Keep this in mind, because we shall build on it today.</a:t>
             </a:r>
             <a:endParaRPr lang="en-US" dirty="0"/>
           </a:p>
@@ -6665,7 +6487,7 @@
                 <a:ea typeface="Calibri" pitchFamily="34" charset="-122"/>
                 <a:cs typeface="Calibri" pitchFamily="34" charset="-120"/>
               </a:rPr>
-              <a:t>PREVIOUS KNOWLEDGE</a:t>
+              <a:t>REAL-LIFE SITUATION</a:t>
             </a:r>
             <a:endParaRPr lang="en-US" sz="1400" dirty="0"/>
           </a:p>
@@ -6688,7 +6510,7 @@
         <p:spPr>
           <a:xfrm>
             <a:off x="0" y="658368"/>
-            <a:ext cx="3840480" cy="5833872"/>
+            <a:ext cx="2468880" cy="5833872"/>
           </a:xfrm>
           <a:prstGeom prst="rect">
             <a:avLst/>
@@ -6703,8 +6525,8 @@
         </p:nvSpPr>
         <p:spPr>
           <a:xfrm>
-            <a:off x="4069080" y="1005840"/>
-            <a:ext cx="7802575" cy="731520"/>
+            <a:off x="2697480" y="1005840"/>
+            <a:ext cx="9174175" cy="731520"/>
           </a:xfrm>
           <a:prstGeom prst="rect">
             <a:avLst/>
@@ -6730,7 +6552,7 @@
                 <a:ea typeface="Times New Roman" pitchFamily="34" charset="-122"/>
                 <a:cs typeface="Times New Roman" pitchFamily="34" charset="-120"/>
               </a:rPr>
-              <a:t>Previous Knowledge</a:t>
+              <a:t>Situation in Real Life</a:t>
             </a:r>
             <a:endParaRPr lang="en-US" sz="3600" dirty="0"/>
           </a:p>
@@ -6744,8 +6566,8 @@
         </p:nvSpPr>
         <p:spPr>
           <a:xfrm>
-            <a:off x="4069080" y="1783080"/>
-            <a:ext cx="7802575" cy="4663440"/>
+            <a:off x="2697480" y="1783080"/>
+            <a:ext cx="9174175" cy="4663440"/>
           </a:xfrm>
           <a:prstGeom prst="rect">
             <a:avLst/>
@@ -6757,12 +6579,11 @@
           <a:bodyPr wrap="square" lIns="0" tIns="0" rIns="0" bIns="0" rtlCol="0" anchor="t"/>
           <a:lstStyle/>
           <a:p>
-            <a:pPr algn="l" marL="342900" indent="-342900">
+            <a:pPr algn="l" indent="0" marL="0">
               <a:spcAft>
                 <a:spcPts val="800"/>
               </a:spcAft>
-              <a:buSzPct val="100000"/>
-              <a:buChar char="•"/>
+              <a:buNone/>
             </a:pPr>
             <a:r>
               <a:rPr lang="en-US" sz="4000" dirty="0">
@@ -6773,28 +6594,7 @@
                 <a:ea typeface="Times New Roman" pitchFamily="34" charset="-122"/>
                 <a:cs typeface="Times New Roman" pitchFamily="34" charset="-120"/>
               </a:rPr>
-              <a:t>The economy has four sectors: primary, secondary, tertiary and quaternary.</a:t>
-            </a:r>
-            <a:endParaRPr lang="en-US" sz="4000" dirty="0"/>
-          </a:p>
-          <a:p>
-            <a:pPr algn="l" marL="342900" indent="-342900">
-              <a:spcAft>
-                <a:spcPts val="800"/>
-              </a:spcAft>
-              <a:buSzPct val="100000"/>
-              <a:buChar char="•"/>
-            </a:pPr>
-            <a:r>
-              <a:rPr lang="en-US" sz="4000" dirty="0">
-                <a:solidFill>
-                  <a:srgbClr val="111111"/>
-                </a:solidFill>
-                <a:latin typeface="Times New Roman" pitchFamily="34" charset="0"/>
-                <a:ea typeface="Times New Roman" pitchFamily="34" charset="-122"/>
-                <a:cs typeface="Times New Roman" pitchFamily="34" charset="-120"/>
-              </a:rPr>
-              <a:t>The primary sector extracts, the secondary transforms, the tertiary serves and the quaternary researches.</a:t>
+              <a:t>Mr Bello works in a bank in Garoua: he has a contract and a salary every month. His neighbour Moussa is a moto-taxi driver: he has no contract, and his money changes every day. Moussa's son asks: "Why are the two jobs so different?"</a:t>
             </a:r>
             <a:endParaRPr lang="en-US" sz="4000" dirty="0"/>
           </a:p>
@@ -6929,7 +6729,7 @@
         <p:spPr>
           <a:xfrm>
             <a:off x="0" y="658368"/>
-            <a:ext cx="3840480" cy="5833872"/>
+            <a:ext cx="5120640" cy="5833872"/>
           </a:xfrm>
           <a:prstGeom prst="rect">
             <a:avLst/>
@@ -6944,8 +6744,8 @@
         </p:nvSpPr>
         <p:spPr>
           <a:xfrm>
-            <a:off x="4069080" y="1005840"/>
-            <a:ext cx="7802575" cy="731520"/>
+            <a:off x="5349240" y="1005840"/>
+            <a:ext cx="6522415" cy="731520"/>
           </a:xfrm>
           <a:prstGeom prst="rect">
             <a:avLst/>
@@ -6971,7 +6771,7 @@
                 <a:ea typeface="Times New Roman" pitchFamily="34" charset="-122"/>
                 <a:cs typeface="Times New Roman" pitchFamily="34" charset="-120"/>
               </a:rPr>
-              <a:t>Situation in Real Life</a:t>
+              <a:t>Situation: Question 1</a:t>
             </a:r>
             <a:endParaRPr lang="en-US" sz="3600" dirty="0"/>
           </a:p>
@@ -6985,8 +6785,8 @@
         </p:nvSpPr>
         <p:spPr>
           <a:xfrm>
-            <a:off x="4069080" y="1783080"/>
-            <a:ext cx="7802575" cy="4663440"/>
+            <a:off x="5349240" y="1783080"/>
+            <a:ext cx="6522415" cy="4663440"/>
           </a:xfrm>
           <a:prstGeom prst="rect">
             <a:avLst/>
@@ -7013,7 +6813,7 @@
                 <a:ea typeface="Times New Roman" pitchFamily="34" charset="-122"/>
                 <a:cs typeface="Times New Roman" pitchFamily="34" charset="-120"/>
               </a:rPr>
-              <a:t>Mr Bello works in a bank in Garoua. He has a contract, a salary every month and a pension later. His neighbour Moussa is a moto-taxi driver. He has no contract, and his money changes every day.</a:t>
+              <a:t>What is the problem in the situation?</a:t>
             </a:r>
             <a:endParaRPr lang="en-US" sz="4000" dirty="0"/>
           </a:p>
@@ -7190,7 +6990,7 @@
                 <a:ea typeface="Times New Roman" pitchFamily="34" charset="-122"/>
                 <a:cs typeface="Times New Roman" pitchFamily="34" charset="-120"/>
               </a:rPr>
-              <a:t>Situation: Question 1</a:t>
+              <a:t>Answer</a:t>
             </a:r>
             <a:endParaRPr lang="en-US" sz="3600" dirty="0"/>
           </a:p>
@@ -7232,7 +7032,7 @@
                 <a:ea typeface="Times New Roman" pitchFamily="34" charset="-122"/>
                 <a:cs typeface="Times New Roman" pitchFamily="34" charset="-120"/>
               </a:rPr>
-              <a:t>What is the problem in the situation?</a:t>
+              <a:t>The son does not know the difference between the formal and the informal sectors.</a:t>
             </a:r>
             <a:endParaRPr lang="en-US" sz="4000" dirty="0"/>
           </a:p>
@@ -7409,7 +7209,7 @@
                 <a:ea typeface="Times New Roman" pitchFamily="34" charset="-122"/>
                 <a:cs typeface="Times New Roman" pitchFamily="34" charset="-120"/>
               </a:rPr>
-              <a:t>Answer</a:t>
+              <a:t>Situation: Question 2</a:t>
             </a:r>
             <a:endParaRPr lang="en-US" sz="3600" dirty="0"/>
           </a:p>
@@ -7451,7 +7251,7 @@
                 <a:ea typeface="Times New Roman" pitchFamily="34" charset="-122"/>
                 <a:cs typeface="Times New Roman" pitchFamily="34" charset="-120"/>
               </a:rPr>
-              <a:t>Moussa has no contract and no regular money.</a:t>
+              <a:t>Where does Mr Bello work?</a:t>
             </a:r>
             <a:endParaRPr lang="en-US" sz="4000" dirty="0"/>
           </a:p>
@@ -7628,7 +7428,7 @@
                 <a:ea typeface="Times New Roman" pitchFamily="34" charset="-122"/>
                 <a:cs typeface="Times New Roman" pitchFamily="34" charset="-120"/>
               </a:rPr>
-              <a:t>Situation: Question 2</a:t>
+              <a:t>Answer</a:t>
             </a:r>
             <a:endParaRPr lang="en-US" sz="3600" dirty="0"/>
           </a:p>
@@ -7670,7 +7470,7 @@
                 <a:ea typeface="Times New Roman" pitchFamily="34" charset="-122"/>
                 <a:cs typeface="Times New Roman" pitchFamily="34" charset="-120"/>
               </a:rPr>
-              <a:t>What does Mr Bello have that Moussa does not have?</a:t>
+              <a:t>In a bank.</a:t>
             </a:r>
             <a:endParaRPr lang="en-US" sz="4000" dirty="0"/>
           </a:p>
@@ -7847,7 +7647,7 @@
                 <a:ea typeface="Times New Roman" pitchFamily="34" charset="-122"/>
                 <a:cs typeface="Times New Roman" pitchFamily="34" charset="-120"/>
               </a:rPr>
-              <a:t>Answer</a:t>
+              <a:t>Situation: Question 3</a:t>
             </a:r>
             <a:endParaRPr lang="en-US" sz="3600" dirty="0"/>
           </a:p>
@@ -7889,7 +7689,7 @@
                 <a:ea typeface="Times New Roman" pitchFamily="34" charset="-122"/>
                 <a:cs typeface="Times New Roman" pitchFamily="34" charset="-120"/>
               </a:rPr>
-              <a:t>A contract, a monthly salary and a pension.</a:t>
+              <a:t>What is Moussa's job?</a:t>
             </a:r>
             <a:endParaRPr lang="en-US" sz="4000" dirty="0"/>
           </a:p>
@@ -8066,7 +7866,7 @@
                 <a:ea typeface="Times New Roman" pitchFamily="34" charset="-122"/>
                 <a:cs typeface="Times New Roman" pitchFamily="34" charset="-120"/>
               </a:rPr>
-              <a:t>Situation: Question 3</a:t>
+              <a:t>Possible Answer</a:t>
             </a:r>
             <a:endParaRPr lang="en-US" sz="3600" dirty="0"/>
           </a:p>
@@ -8108,7 +7908,7 @@
                 <a:ea typeface="Times New Roman" pitchFamily="34" charset="-122"/>
                 <a:cs typeface="Times New Roman" pitchFamily="34" charset="-120"/>
               </a:rPr>
-              <a:t>What can Moussa do?</a:t>
+              <a:t>Moto-taxi driver.</a:t>
             </a:r>
             <a:endParaRPr lang="en-US" sz="4000" dirty="0"/>
           </a:p>
@@ -8220,7 +8020,7 @@
                 <a:ea typeface="Calibri" pitchFamily="34" charset="-122"/>
                 <a:cs typeface="Calibri" pitchFamily="34" charset="-120"/>
               </a:rPr>
-              <a:t>REAL-LIFE SITUATION</a:t>
+              <a:t>ACTION TO TAKE</a:t>
             </a:r>
             <a:endParaRPr lang="en-US" sz="1400" dirty="0"/>
           </a:p>
@@ -8285,7 +8085,7 @@
                 <a:ea typeface="Times New Roman" pitchFamily="34" charset="-122"/>
                 <a:cs typeface="Times New Roman" pitchFamily="34" charset="-120"/>
               </a:rPr>
-              <a:t>Possible Answer</a:t>
+              <a:t>Action to Take</a:t>
             </a:r>
             <a:endParaRPr lang="en-US" sz="3600" dirty="0"/>
           </a:p>
@@ -8327,7 +8127,7 @@
                 <a:ea typeface="Times New Roman" pitchFamily="34" charset="-122"/>
                 <a:cs typeface="Times New Roman" pitchFamily="34" charset="-120"/>
               </a:rPr>
-              <a:t>Register his work and join the CNPS.</a:t>
+              <a:t>Encourage small workers to register their work and join the CNPS.</a:t>
             </a:r>
             <a:endParaRPr lang="en-US" sz="4000" dirty="0"/>
           </a:p>
@@ -8439,7 +8239,7 @@
                 <a:ea typeface="Calibri" pitchFamily="34" charset="-122"/>
                 <a:cs typeface="Calibri" pitchFamily="34" charset="-120"/>
               </a:rPr>
-              <a:t>ACTION TO TAKE</a:t>
+              <a:t>JUSTIFICATION</a:t>
             </a:r>
             <a:endParaRPr lang="en-US" sz="1400" dirty="0"/>
           </a:p>
@@ -8504,7 +8304,7 @@
                 <a:ea typeface="Times New Roman" pitchFamily="34" charset="-122"/>
                 <a:cs typeface="Times New Roman" pitchFamily="34" charset="-120"/>
               </a:rPr>
-              <a:t>Action to Take</a:t>
+              <a:t>Justification of the Lesson</a:t>
             </a:r>
             <a:endParaRPr lang="en-US" sz="3600" dirty="0"/>
           </a:p>
@@ -8546,7 +8346,7 @@
                 <a:ea typeface="Times New Roman" pitchFamily="34" charset="-122"/>
                 <a:cs typeface="Times New Roman" pitchFamily="34" charset="-120"/>
               </a:rPr>
-              <a:t>Encourage small workers to register their work and join the CNPS.</a:t>
+              <a:t>This lesson helps us to know the difference between the formal and the informal sector.</a:t>
             </a:r>
             <a:endParaRPr lang="en-US" sz="4000" dirty="0"/>
           </a:p>
@@ -8658,15 +8458,54 @@
                 <a:ea typeface="Calibri" pitchFamily="34" charset="-122"/>
                 <a:cs typeface="Calibri" pitchFamily="34" charset="-120"/>
               </a:rPr>
-              <a:t>JUSTIFICATION</a:t>
+              <a:t>1. FORMAL SECTOR</a:t>
             </a:r>
             <a:endParaRPr lang="en-US" sz="1400" dirty="0"/>
+          </a:p>
+        </p:txBody>
+      </p:sp>
+      <p:sp>
+        <p:nvSpPr>
+          <p:cNvPr id="3" name="Text 1"/>
+          <p:cNvSpPr/>
+          <p:nvPr/>
+        </p:nvSpPr>
+        <p:spPr>
+          <a:xfrm>
+            <a:off x="457200" y="1005840"/>
+            <a:ext cx="11277295" cy="731520"/>
+          </a:xfrm>
+          <a:prstGeom prst="rect">
+            <a:avLst/>
+          </a:prstGeom>
+          <a:noFill/>
+          <a:ln/>
+        </p:spPr>
+        <p:txBody>
+          <a:bodyPr wrap="square" lIns="0" tIns="0" rIns="0" bIns="0" rtlCol="0" anchor="ctr"/>
+          <a:lstStyle/>
+          <a:p>
+            <a:pPr algn="ctr" indent="0" marL="0">
+              <a:buNone/>
+            </a:pPr>
+            <a:r>
+              <a:rPr lang="en-US" sz="3600" b="1" dirty="0">
+                <a:solidFill>
+                  <a:srgbClr val="990011"/>
+                </a:solidFill>
+                <a:latin typeface="Times New Roman" pitchFamily="34" charset="0"/>
+                <a:ea typeface="Times New Roman" pitchFamily="34" charset="-122"/>
+                <a:cs typeface="Times New Roman" pitchFamily="34" charset="-120"/>
+              </a:rPr>
+              <a:t>Activity 1</a:t>
+            </a:r>
+            <a:endParaRPr lang="en-US" sz="3600" dirty="0"/>
           </a:p>
         </p:txBody>
       </p:sp>
       <p:pic>
         <p:nvPicPr>
-          <p:cNvPr id="3" name="Image 0" descr="/home/claude/f4/img/minesec_sheet.png">    </p:cNvPr>
+          <p:cNvPr id="4" name="Image 0" descr="/home/claude/f4/img/v2/f2t_bank.jpg">    </p:cNvPr>
           <p:cNvPicPr>
             <a:picLocks noChangeAspect="1"/>
           </p:cNvPicPr>
@@ -8680,8 +8519,8 @@
         </p:blipFill>
         <p:spPr>
           <a:xfrm>
-            <a:off x="0" y="658368"/>
-            <a:ext cx="5120640" cy="5833872"/>
+            <a:off x="2246610" y="1783080"/>
+            <a:ext cx="7698475" cy="4270248"/>
           </a:xfrm>
           <a:prstGeom prst="rect">
             <a:avLst/>
@@ -8690,14 +8529,14 @@
       </p:pic>
       <p:sp>
         <p:nvSpPr>
-          <p:cNvPr id="4" name="Text 1"/>
+          <p:cNvPr id="5" name="Text 2"/>
           <p:cNvSpPr/>
           <p:nvPr/>
         </p:nvSpPr>
         <p:spPr>
           <a:xfrm>
-            <a:off x="5349240" y="1005840"/>
-            <a:ext cx="6522415" cy="731520"/>
+            <a:off x="457200" y="6089904"/>
+            <a:ext cx="11277295" cy="347472"/>
           </a:xfrm>
           <a:prstGeom prst="rect">
             <a:avLst/>
@@ -8706,68 +8545,24 @@
           <a:ln/>
         </p:spPr>
         <p:txBody>
-          <a:bodyPr wrap="square" lIns="0" tIns="0" rIns="0" bIns="0" rtlCol="0" anchor="ctr">
-            <a:normAutofit/>
-          </a:bodyPr>
+          <a:bodyPr wrap="square" lIns="0" tIns="0" rIns="0" bIns="0" rtlCol="0" anchor="ctr"/>
           <a:lstStyle/>
           <a:p>
             <a:pPr algn="ctr" indent="0" marL="0">
               <a:buNone/>
             </a:pPr>
             <a:r>
-              <a:rPr lang="en-US" sz="3600" b="1" dirty="0">
-                <a:solidFill>
-                  <a:srgbClr val="990011"/>
+              <a:rPr lang="en-US" sz="1800" i="1" dirty="0">
+                <a:solidFill>
+                  <a:srgbClr val="555555"/>
                 </a:solidFill>
                 <a:latin typeface="Times New Roman" pitchFamily="34" charset="0"/>
                 <a:ea typeface="Times New Roman" pitchFamily="34" charset="-122"/>
                 <a:cs typeface="Times New Roman" pitchFamily="34" charset="-120"/>
               </a:rPr>
-              <a:t>Justification of the Lesson</a:t>
-            </a:r>
-            <a:endParaRPr lang="en-US" sz="3600" dirty="0"/>
-          </a:p>
-        </p:txBody>
-      </p:sp>
-      <p:sp>
-        <p:nvSpPr>
-          <p:cNvPr id="5" name="Text 2"/>
-          <p:cNvSpPr/>
-          <p:nvPr/>
-        </p:nvSpPr>
-        <p:spPr>
-          <a:xfrm>
-            <a:off x="5349240" y="1783080"/>
-            <a:ext cx="6522415" cy="4663440"/>
-          </a:xfrm>
-          <a:prstGeom prst="rect">
-            <a:avLst/>
-          </a:prstGeom>
-          <a:noFill/>
-          <a:ln/>
-        </p:spPr>
-        <p:txBody>
-          <a:bodyPr wrap="square" lIns="0" tIns="0" rIns="0" bIns="0" rtlCol="0" anchor="t"/>
-          <a:lstStyle/>
-          <a:p>
-            <a:pPr algn="l" indent="0" marL="0">
-              <a:spcAft>
-                <a:spcPts val="800"/>
-              </a:spcAft>
-              <a:buNone/>
-            </a:pPr>
-            <a:r>
-              <a:rPr lang="en-US" sz="4000" dirty="0">
-                <a:solidFill>
-                  <a:srgbClr val="111111"/>
-                </a:solidFill>
-                <a:latin typeface="Times New Roman" pitchFamily="34" charset="0"/>
-                <a:ea typeface="Times New Roman" pitchFamily="34" charset="-122"/>
-                <a:cs typeface="Times New Roman" pitchFamily="34" charset="-120"/>
-              </a:rPr>
-              <a:t>This lesson helps us to know the difference between the formal and the informal sector.</a:t>
-            </a:r>
-            <a:endParaRPr lang="en-US" sz="4000" dirty="0"/>
+              <a:t>A bank.</a:t>
+            </a:r>
+            <a:endParaRPr lang="en-US" sz="1800" dirty="0"/>
           </a:p>
         </p:txBody>
       </p:sp>
@@ -9472,54 +9267,15 @@
                 <a:ea typeface="Calibri" pitchFamily="34" charset="-122"/>
                 <a:cs typeface="Calibri" pitchFamily="34" charset="-120"/>
               </a:rPr>
-              <a:t>1. THE FORMAL SECTOR</a:t>
+              <a:t>1. FORMAL SECTOR</a:t>
             </a:r>
             <a:endParaRPr lang="en-US" sz="1400" dirty="0"/>
-          </a:p>
-        </p:txBody>
-      </p:sp>
-      <p:sp>
-        <p:nvSpPr>
-          <p:cNvPr id="3" name="Text 1"/>
-          <p:cNvSpPr/>
-          <p:nvPr/>
-        </p:nvSpPr>
-        <p:spPr>
-          <a:xfrm>
-            <a:off x="457200" y="1005840"/>
-            <a:ext cx="11277295" cy="731520"/>
-          </a:xfrm>
-          <a:prstGeom prst="rect">
-            <a:avLst/>
-          </a:prstGeom>
-          <a:noFill/>
-          <a:ln/>
-        </p:spPr>
-        <p:txBody>
-          <a:bodyPr wrap="square" lIns="0" tIns="0" rIns="0" bIns="0" rtlCol="0" anchor="ctr"/>
-          <a:lstStyle/>
-          <a:p>
-            <a:pPr algn="ctr" indent="0" marL="0">
-              <a:buNone/>
-            </a:pPr>
-            <a:r>
-              <a:rPr lang="en-US" sz="3600" b="1" dirty="0">
-                <a:solidFill>
-                  <a:srgbClr val="990011"/>
-                </a:solidFill>
-                <a:latin typeface="Times New Roman" pitchFamily="34" charset="0"/>
-                <a:ea typeface="Times New Roman" pitchFamily="34" charset="-122"/>
-                <a:cs typeface="Times New Roman" pitchFamily="34" charset="-120"/>
-              </a:rPr>
-              <a:t>Activity 1</a:t>
-            </a:r>
-            <a:endParaRPr lang="en-US" sz="3600" dirty="0"/>
           </a:p>
         </p:txBody>
       </p:sp>
       <p:pic>
         <p:nvPicPr>
-          <p:cNvPr id="4" name="Image 0" descr="/home/claude/f4/img/v2/f2t_bank.jpg">    </p:cNvPr>
+          <p:cNvPr id="3" name="Image 0" descr="/home/claude/f4/img/minesec_sheet.png">    </p:cNvPr>
           <p:cNvPicPr>
             <a:picLocks noChangeAspect="1"/>
           </p:cNvPicPr>
@@ -9533,8 +9289,8 @@
         </p:blipFill>
         <p:spPr>
           <a:xfrm>
-            <a:off x="2246610" y="1783080"/>
-            <a:ext cx="7698475" cy="4270248"/>
+            <a:off x="0" y="658368"/>
+            <a:ext cx="5120640" cy="5833872"/>
           </a:xfrm>
           <a:prstGeom prst="rect">
             <a:avLst/>
@@ -9543,14 +9299,14 @@
       </p:pic>
       <p:sp>
         <p:nvSpPr>
-          <p:cNvPr id="5" name="Text 2"/>
+          <p:cNvPr id="4" name="Text 1"/>
           <p:cNvSpPr/>
           <p:nvPr/>
         </p:nvSpPr>
         <p:spPr>
           <a:xfrm>
-            <a:off x="457200" y="6089904"/>
-            <a:ext cx="11277295" cy="347472"/>
+            <a:off x="5349240" y="1005840"/>
+            <a:ext cx="6522415" cy="731520"/>
           </a:xfrm>
           <a:prstGeom prst="rect">
             <a:avLst/>
@@ -9559,24 +9315,68 @@
           <a:ln/>
         </p:spPr>
         <p:txBody>
-          <a:bodyPr wrap="square" lIns="0" tIns="0" rIns="0" bIns="0" rtlCol="0" anchor="ctr"/>
+          <a:bodyPr wrap="square" lIns="0" tIns="0" rIns="0" bIns="0" rtlCol="0" anchor="ctr">
+            <a:normAutofit/>
+          </a:bodyPr>
           <a:lstStyle/>
           <a:p>
             <a:pPr algn="ctr" indent="0" marL="0">
               <a:buNone/>
             </a:pPr>
             <a:r>
-              <a:rPr lang="en-US" sz="1800" i="1" dirty="0">
-                <a:solidFill>
-                  <a:srgbClr val="555555"/>
+              <a:rPr lang="en-US" sz="3600" b="1" dirty="0">
+                <a:solidFill>
+                  <a:srgbClr val="990011"/>
                 </a:solidFill>
                 <a:latin typeface="Times New Roman" pitchFamily="34" charset="0"/>
                 <a:ea typeface="Times New Roman" pitchFamily="34" charset="-122"/>
                 <a:cs typeface="Times New Roman" pitchFamily="34" charset="-120"/>
               </a:rPr>
-              <a:t>A bank in an African city.</a:t>
-            </a:r>
-            <a:endParaRPr lang="en-US" sz="1800" dirty="0"/>
+              <a:t>Activity 1: Question</a:t>
+            </a:r>
+            <a:endParaRPr lang="en-US" sz="3600" dirty="0"/>
+          </a:p>
+        </p:txBody>
+      </p:sp>
+      <p:sp>
+        <p:nvSpPr>
+          <p:cNvPr id="5" name="Text 2"/>
+          <p:cNvSpPr/>
+          <p:nvPr/>
+        </p:nvSpPr>
+        <p:spPr>
+          <a:xfrm>
+            <a:off x="5349240" y="1783080"/>
+            <a:ext cx="6522415" cy="4663440"/>
+          </a:xfrm>
+          <a:prstGeom prst="rect">
+            <a:avLst/>
+          </a:prstGeom>
+          <a:noFill/>
+          <a:ln/>
+        </p:spPr>
+        <p:txBody>
+          <a:bodyPr wrap="square" lIns="0" tIns="0" rIns="0" bIns="0" rtlCol="0" anchor="t"/>
+          <a:lstStyle/>
+          <a:p>
+            <a:pPr algn="l" indent="0" marL="0">
+              <a:spcAft>
+                <a:spcPts val="800"/>
+              </a:spcAft>
+              <a:buNone/>
+            </a:pPr>
+            <a:r>
+              <a:rPr lang="en-US" sz="4000" dirty="0">
+                <a:solidFill>
+                  <a:srgbClr val="111111"/>
+                </a:solidFill>
+                <a:latin typeface="Times New Roman" pitchFamily="34" charset="0"/>
+                <a:ea typeface="Times New Roman" pitchFamily="34" charset="-122"/>
+                <a:cs typeface="Times New Roman" pitchFamily="34" charset="-120"/>
+              </a:rPr>
+              <a:t>The bank is registered and pays taxes. Which sector is it?</a:t>
+            </a:r>
+            <a:endParaRPr lang="en-US" sz="4000" dirty="0"/>
           </a:p>
         </p:txBody>
       </p:sp>
@@ -9686,7 +9486,7 @@
                 <a:ea typeface="Calibri" pitchFamily="34" charset="-122"/>
                 <a:cs typeface="Calibri" pitchFamily="34" charset="-120"/>
               </a:rPr>
-              <a:t>1. THE FORMAL SECTOR</a:t>
+              <a:t>1. FORMAL SECTOR</a:t>
             </a:r>
             <a:endParaRPr lang="en-US" sz="1400" dirty="0"/>
           </a:p>
@@ -9751,7 +9551,7 @@
                 <a:ea typeface="Times New Roman" pitchFamily="34" charset="-122"/>
                 <a:cs typeface="Times New Roman" pitchFamily="34" charset="-120"/>
               </a:rPr>
-              <a:t>Activity 1: Question</a:t>
+              <a:t>Activity 1: Answer</a:t>
             </a:r>
             <a:endParaRPr lang="en-US" sz="3600" dirty="0"/>
           </a:p>
@@ -9793,7 +9593,7 @@
                 <a:ea typeface="Times New Roman" pitchFamily="34" charset="-122"/>
                 <a:cs typeface="Times New Roman" pitchFamily="34" charset="-120"/>
               </a:rPr>
-              <a:t>The bank is registered and pays taxes. Which sector does it belong to?</a:t>
+              <a:t>The formal sector.</a:t>
             </a:r>
             <a:endParaRPr lang="en-US" sz="4000" dirty="0"/>
           </a:p>
@@ -9905,15 +9705,54 @@
                 <a:ea typeface="Calibri" pitchFamily="34" charset="-122"/>
                 <a:cs typeface="Calibri" pitchFamily="34" charset="-120"/>
               </a:rPr>
-              <a:t>1. THE FORMAL SECTOR</a:t>
+              <a:t>1. FORMAL SECTOR</a:t>
             </a:r>
             <a:endParaRPr lang="en-US" sz="1400" dirty="0"/>
+          </a:p>
+        </p:txBody>
+      </p:sp>
+      <p:sp>
+        <p:nvSpPr>
+          <p:cNvPr id="3" name="Text 1"/>
+          <p:cNvSpPr/>
+          <p:nvPr/>
+        </p:nvSpPr>
+        <p:spPr>
+          <a:xfrm>
+            <a:off x="457200" y="1005840"/>
+            <a:ext cx="11277295" cy="731520"/>
+          </a:xfrm>
+          <a:prstGeom prst="rect">
+            <a:avLst/>
+          </a:prstGeom>
+          <a:noFill/>
+          <a:ln/>
+        </p:spPr>
+        <p:txBody>
+          <a:bodyPr wrap="square" lIns="0" tIns="0" rIns="0" bIns="0" rtlCol="0" anchor="ctr"/>
+          <a:lstStyle/>
+          <a:p>
+            <a:pPr algn="ctr" indent="0" marL="0">
+              <a:buNone/>
+            </a:pPr>
+            <a:r>
+              <a:rPr lang="en-US" sz="3600" b="1" dirty="0">
+                <a:solidFill>
+                  <a:srgbClr val="990011"/>
+                </a:solidFill>
+                <a:latin typeface="Times New Roman" pitchFamily="34" charset="0"/>
+                <a:ea typeface="Times New Roman" pitchFamily="34" charset="-122"/>
+                <a:cs typeface="Times New Roman" pitchFamily="34" charset="-120"/>
+              </a:rPr>
+              <a:t>Activity 2</a:t>
+            </a:r>
+            <a:endParaRPr lang="en-US" sz="3600" dirty="0"/>
           </a:p>
         </p:txBody>
       </p:sp>
       <p:pic>
         <p:nvPicPr>
-          <p:cNvPr id="3" name="Image 0" descr="/home/claude/f4/img/minesec_sheet.png">    </p:cNvPr>
+          <p:cNvPr id="4" name="Image 0" descr="/home/claude/f4/img/v2/f2t_factory_workers.jpg">    </p:cNvPr>
           <p:cNvPicPr>
             <a:picLocks noChangeAspect="1"/>
           </p:cNvPicPr>
@@ -9927,8 +9766,8 @@
         </p:blipFill>
         <p:spPr>
           <a:xfrm>
-            <a:off x="0" y="658368"/>
-            <a:ext cx="5120640" cy="5833872"/>
+            <a:off x="2251442" y="1783080"/>
+            <a:ext cx="7688812" cy="4270248"/>
           </a:xfrm>
           <a:prstGeom prst="rect">
             <a:avLst/>
@@ -9937,14 +9776,14 @@
       </p:pic>
       <p:sp>
         <p:nvSpPr>
-          <p:cNvPr id="4" name="Text 1"/>
+          <p:cNvPr id="5" name="Text 2"/>
           <p:cNvSpPr/>
           <p:nvPr/>
         </p:nvSpPr>
         <p:spPr>
           <a:xfrm>
-            <a:off x="5349240" y="1005840"/>
-            <a:ext cx="6522415" cy="731520"/>
+            <a:off x="457200" y="6089904"/>
+            <a:ext cx="11277295" cy="347472"/>
           </a:xfrm>
           <a:prstGeom prst="rect">
             <a:avLst/>
@@ -9953,68 +9792,24 @@
           <a:ln/>
         </p:spPr>
         <p:txBody>
-          <a:bodyPr wrap="square" lIns="0" tIns="0" rIns="0" bIns="0" rtlCol="0" anchor="ctr">
-            <a:normAutofit/>
-          </a:bodyPr>
+          <a:bodyPr wrap="square" lIns="0" tIns="0" rIns="0" bIns="0" rtlCol="0" anchor="ctr"/>
           <a:lstStyle/>
           <a:p>
             <a:pPr algn="ctr" indent="0" marL="0">
               <a:buNone/>
             </a:pPr>
             <a:r>
-              <a:rPr lang="en-US" sz="3600" b="1" dirty="0">
-                <a:solidFill>
-                  <a:srgbClr val="990011"/>
+              <a:rPr lang="en-US" sz="1800" i="1" dirty="0">
+                <a:solidFill>
+                  <a:srgbClr val="555555"/>
                 </a:solidFill>
                 <a:latin typeface="Times New Roman" pitchFamily="34" charset="0"/>
                 <a:ea typeface="Times New Roman" pitchFamily="34" charset="-122"/>
                 <a:cs typeface="Times New Roman" pitchFamily="34" charset="-120"/>
               </a:rPr>
-              <a:t>Activity 1: Answer</a:t>
-            </a:r>
-            <a:endParaRPr lang="en-US" sz="3600" dirty="0"/>
-          </a:p>
-        </p:txBody>
-      </p:sp>
-      <p:sp>
-        <p:nvSpPr>
-          <p:cNvPr id="5" name="Text 2"/>
-          <p:cNvSpPr/>
-          <p:nvPr/>
-        </p:nvSpPr>
-        <p:spPr>
-          <a:xfrm>
-            <a:off x="5349240" y="1783080"/>
-            <a:ext cx="6522415" cy="4663440"/>
-          </a:xfrm>
-          <a:prstGeom prst="rect">
-            <a:avLst/>
-          </a:prstGeom>
-          <a:noFill/>
-          <a:ln/>
-        </p:spPr>
-        <p:txBody>
-          <a:bodyPr wrap="square" lIns="0" tIns="0" rIns="0" bIns="0" rtlCol="0" anchor="t"/>
-          <a:lstStyle/>
-          <a:p>
-            <a:pPr algn="l" indent="0" marL="0">
-              <a:spcAft>
-                <a:spcPts val="800"/>
-              </a:spcAft>
-              <a:buNone/>
-            </a:pPr>
-            <a:r>
-              <a:rPr lang="en-US" sz="4000" dirty="0">
-                <a:solidFill>
-                  <a:srgbClr val="111111"/>
-                </a:solidFill>
-                <a:latin typeface="Times New Roman" pitchFamily="34" charset="0"/>
-                <a:ea typeface="Times New Roman" pitchFamily="34" charset="-122"/>
-                <a:cs typeface="Times New Roman" pitchFamily="34" charset="-120"/>
-              </a:rPr>
-              <a:t>The formal sector.</a:t>
-            </a:r>
-            <a:endParaRPr lang="en-US" sz="4000" dirty="0"/>
+              <a:t>Factory workers.</a:t>
+            </a:r>
+            <a:endParaRPr lang="en-US" sz="1800" dirty="0"/>
           </a:p>
         </p:txBody>
       </p:sp>
@@ -10124,54 +9919,15 @@
                 <a:ea typeface="Calibri" pitchFamily="34" charset="-122"/>
                 <a:cs typeface="Calibri" pitchFamily="34" charset="-120"/>
               </a:rPr>
-              <a:t>1. THE FORMAL SECTOR</a:t>
+              <a:t>1. FORMAL SECTOR</a:t>
             </a:r>
             <a:endParaRPr lang="en-US" sz="1400" dirty="0"/>
-          </a:p>
-        </p:txBody>
-      </p:sp>
-      <p:sp>
-        <p:nvSpPr>
-          <p:cNvPr id="3" name="Text 1"/>
-          <p:cNvSpPr/>
-          <p:nvPr/>
-        </p:nvSpPr>
-        <p:spPr>
-          <a:xfrm>
-            <a:off x="457200" y="1005840"/>
-            <a:ext cx="11277295" cy="731520"/>
-          </a:xfrm>
-          <a:prstGeom prst="rect">
-            <a:avLst/>
-          </a:prstGeom>
-          <a:noFill/>
-          <a:ln/>
-        </p:spPr>
-        <p:txBody>
-          <a:bodyPr wrap="square" lIns="0" tIns="0" rIns="0" bIns="0" rtlCol="0" anchor="ctr"/>
-          <a:lstStyle/>
-          <a:p>
-            <a:pPr algn="ctr" indent="0" marL="0">
-              <a:buNone/>
-            </a:pPr>
-            <a:r>
-              <a:rPr lang="en-US" sz="3600" b="1" dirty="0">
-                <a:solidFill>
-                  <a:srgbClr val="990011"/>
-                </a:solidFill>
-                <a:latin typeface="Times New Roman" pitchFamily="34" charset="0"/>
-                <a:ea typeface="Times New Roman" pitchFamily="34" charset="-122"/>
-                <a:cs typeface="Times New Roman" pitchFamily="34" charset="-120"/>
-              </a:rPr>
-              <a:t>Activity 2</a:t>
-            </a:r>
-            <a:endParaRPr lang="en-US" sz="3600" dirty="0"/>
           </a:p>
         </p:txBody>
       </p:sp>
       <p:pic>
         <p:nvPicPr>
-          <p:cNvPr id="4" name="Image 0" descr="/home/claude/f4/img/v2/f2t_factory_workers.jpg">    </p:cNvPr>
+          <p:cNvPr id="3" name="Image 0" descr="/home/claude/f4/img/minesec_sheet.png">    </p:cNvPr>
           <p:cNvPicPr>
             <a:picLocks noChangeAspect="1"/>
           </p:cNvPicPr>
@@ -10185,8 +9941,8 @@
         </p:blipFill>
         <p:spPr>
           <a:xfrm>
-            <a:off x="2251442" y="1783080"/>
-            <a:ext cx="7688812" cy="4270248"/>
+            <a:off x="0" y="658368"/>
+            <a:ext cx="5120640" cy="5833872"/>
           </a:xfrm>
           <a:prstGeom prst="rect">
             <a:avLst/>
@@ -10195,14 +9951,14 @@
       </p:pic>
       <p:sp>
         <p:nvSpPr>
-          <p:cNvPr id="5" name="Text 2"/>
+          <p:cNvPr id="4" name="Text 1"/>
           <p:cNvSpPr/>
           <p:nvPr/>
         </p:nvSpPr>
         <p:spPr>
           <a:xfrm>
-            <a:off x="457200" y="6089904"/>
-            <a:ext cx="11277295" cy="347472"/>
+            <a:off x="5349240" y="1005840"/>
+            <a:ext cx="6522415" cy="731520"/>
           </a:xfrm>
           <a:prstGeom prst="rect">
             <a:avLst/>
@@ -10211,24 +9967,68 @@
           <a:ln/>
         </p:spPr>
         <p:txBody>
-          <a:bodyPr wrap="square" lIns="0" tIns="0" rIns="0" bIns="0" rtlCol="0" anchor="ctr"/>
+          <a:bodyPr wrap="square" lIns="0" tIns="0" rIns="0" bIns="0" rtlCol="0" anchor="ctr">
+            <a:normAutofit/>
+          </a:bodyPr>
           <a:lstStyle/>
           <a:p>
             <a:pPr algn="ctr" indent="0" marL="0">
               <a:buNone/>
             </a:pPr>
             <a:r>
-              <a:rPr lang="en-US" sz="1800" i="1" dirty="0">
-                <a:solidFill>
-                  <a:srgbClr val="555555"/>
+              <a:rPr lang="en-US" sz="3600" b="1" dirty="0">
+                <a:solidFill>
+                  <a:srgbClr val="990011"/>
                 </a:solidFill>
                 <a:latin typeface="Times New Roman" pitchFamily="34" charset="0"/>
                 <a:ea typeface="Times New Roman" pitchFamily="34" charset="-122"/>
                 <a:cs typeface="Times New Roman" pitchFamily="34" charset="-120"/>
               </a:rPr>
-              <a:t>Workers in a food factory.</a:t>
-            </a:r>
-            <a:endParaRPr lang="en-US" sz="1800" dirty="0"/>
+              <a:t>Activity 2: Question</a:t>
+            </a:r>
+            <a:endParaRPr lang="en-US" sz="3600" dirty="0"/>
+          </a:p>
+        </p:txBody>
+      </p:sp>
+      <p:sp>
+        <p:nvSpPr>
+          <p:cNvPr id="5" name="Text 2"/>
+          <p:cNvSpPr/>
+          <p:nvPr/>
+        </p:nvSpPr>
+        <p:spPr>
+          <a:xfrm>
+            <a:off x="5349240" y="1783080"/>
+            <a:ext cx="6522415" cy="4663440"/>
+          </a:xfrm>
+          <a:prstGeom prst="rect">
+            <a:avLst/>
+          </a:prstGeom>
+          <a:noFill/>
+          <a:ln/>
+        </p:spPr>
+        <p:txBody>
+          <a:bodyPr wrap="square" lIns="0" tIns="0" rIns="0" bIns="0" rtlCol="0" anchor="t"/>
+          <a:lstStyle/>
+          <a:p>
+            <a:pPr algn="l" indent="0" marL="0">
+              <a:spcAft>
+                <a:spcPts val="800"/>
+              </a:spcAft>
+              <a:buNone/>
+            </a:pPr>
+            <a:r>
+              <a:rPr lang="en-US" sz="4000" dirty="0">
+                <a:solidFill>
+                  <a:srgbClr val="111111"/>
+                </a:solidFill>
+                <a:latin typeface="Times New Roman" pitchFamily="34" charset="0"/>
+                <a:ea typeface="Times New Roman" pitchFamily="34" charset="-122"/>
+                <a:cs typeface="Times New Roman" pitchFamily="34" charset="-120"/>
+              </a:rPr>
+              <a:t>How are these workers paid?</a:t>
+            </a:r>
+            <a:endParaRPr lang="en-US" sz="4000" dirty="0"/>
           </a:p>
         </p:txBody>
       </p:sp>
@@ -10338,7 +10138,7 @@
                 <a:ea typeface="Calibri" pitchFamily="34" charset="-122"/>
                 <a:cs typeface="Calibri" pitchFamily="34" charset="-120"/>
               </a:rPr>
-              <a:t>1. THE FORMAL SECTOR</a:t>
+              <a:t>1. FORMAL SECTOR</a:t>
             </a:r>
             <a:endParaRPr lang="en-US" sz="1400" dirty="0"/>
           </a:p>
@@ -10403,7 +10203,7 @@
                 <a:ea typeface="Times New Roman" pitchFamily="34" charset="-122"/>
                 <a:cs typeface="Times New Roman" pitchFamily="34" charset="-120"/>
               </a:rPr>
-              <a:t>Activity 2: Question</a:t>
+              <a:t>Activity 2: Answer</a:t>
             </a:r>
             <a:endParaRPr lang="en-US" sz="3600" dirty="0"/>
           </a:p>
@@ -10445,7 +10245,7 @@
                 <a:ea typeface="Times New Roman" pitchFamily="34" charset="-122"/>
                 <a:cs typeface="Times New Roman" pitchFamily="34" charset="-120"/>
               </a:rPr>
-              <a:t>These workers have contracts and a salary. Give one advantage.</a:t>
+              <a:t>They receive a salary every month.</a:t>
             </a:r>
             <a:endParaRPr lang="en-US" sz="4000" dirty="0"/>
           </a:p>
@@ -10557,15 +10357,54 @@
                 <a:ea typeface="Calibri" pitchFamily="34" charset="-122"/>
                 <a:cs typeface="Calibri" pitchFamily="34" charset="-120"/>
               </a:rPr>
-              <a:t>1. THE FORMAL SECTOR</a:t>
+              <a:t>2. INFORMAL SECTOR</a:t>
             </a:r>
             <a:endParaRPr lang="en-US" sz="1400" dirty="0"/>
+          </a:p>
+        </p:txBody>
+      </p:sp>
+      <p:sp>
+        <p:nvSpPr>
+          <p:cNvPr id="3" name="Text 1"/>
+          <p:cNvSpPr/>
+          <p:nvPr/>
+        </p:nvSpPr>
+        <p:spPr>
+          <a:xfrm>
+            <a:off x="457200" y="1005840"/>
+            <a:ext cx="11277295" cy="731520"/>
+          </a:xfrm>
+          <a:prstGeom prst="rect">
+            <a:avLst/>
+          </a:prstGeom>
+          <a:noFill/>
+          <a:ln/>
+        </p:spPr>
+        <p:txBody>
+          <a:bodyPr wrap="square" lIns="0" tIns="0" rIns="0" bIns="0" rtlCol="0" anchor="ctr"/>
+          <a:lstStyle/>
+          <a:p>
+            <a:pPr algn="ctr" indent="0" marL="0">
+              <a:buNone/>
+            </a:pPr>
+            <a:r>
+              <a:rPr lang="en-US" sz="3600" b="1" dirty="0">
+                <a:solidFill>
+                  <a:srgbClr val="990011"/>
+                </a:solidFill>
+                <a:latin typeface="Times New Roman" pitchFamily="34" charset="0"/>
+                <a:ea typeface="Times New Roman" pitchFamily="34" charset="-122"/>
+                <a:cs typeface="Times New Roman" pitchFamily="34" charset="-120"/>
+              </a:rPr>
+              <a:t>Activity 3</a:t>
+            </a:r>
+            <a:endParaRPr lang="en-US" sz="3600" dirty="0"/>
           </a:p>
         </p:txBody>
       </p:sp>
       <p:pic>
         <p:nvPicPr>
-          <p:cNvPr id="3" name="Image 0" descr="/home/claude/f4/img/minesec_sheet.png">    </p:cNvPr>
+          <p:cNvPr id="4" name="Image 0" descr="/home/claude/f4/img/v2/f2t_moto_taxi.jpg">    </p:cNvPr>
           <p:cNvPicPr>
             <a:picLocks noChangeAspect="1"/>
           </p:cNvPicPr>
@@ -10579,8 +10418,8 @@
         </p:blipFill>
         <p:spPr>
           <a:xfrm>
-            <a:off x="0" y="658368"/>
-            <a:ext cx="5120640" cy="5833872"/>
+            <a:off x="2246610" y="1783080"/>
+            <a:ext cx="7698475" cy="4270248"/>
           </a:xfrm>
           <a:prstGeom prst="rect">
             <a:avLst/>
@@ -10589,14 +10428,14 @@
       </p:pic>
       <p:sp>
         <p:nvSpPr>
-          <p:cNvPr id="4" name="Text 1"/>
+          <p:cNvPr id="5" name="Text 2"/>
           <p:cNvSpPr/>
           <p:nvPr/>
         </p:nvSpPr>
         <p:spPr>
           <a:xfrm>
-            <a:off x="5349240" y="1005840"/>
-            <a:ext cx="6522415" cy="731520"/>
+            <a:off x="457200" y="6089904"/>
+            <a:ext cx="11277295" cy="347472"/>
           </a:xfrm>
           <a:prstGeom prst="rect">
             <a:avLst/>
@@ -10605,68 +10444,24 @@
           <a:ln/>
         </p:spPr>
         <p:txBody>
-          <a:bodyPr wrap="square" lIns="0" tIns="0" rIns="0" bIns="0" rtlCol="0" anchor="ctr">
-            <a:normAutofit/>
-          </a:bodyPr>
+          <a:bodyPr wrap="square" lIns="0" tIns="0" rIns="0" bIns="0" rtlCol="0" anchor="ctr"/>
           <a:lstStyle/>
           <a:p>
             <a:pPr algn="ctr" indent="0" marL="0">
               <a:buNone/>
             </a:pPr>
             <a:r>
-              <a:rPr lang="en-US" sz="3600" b="1" dirty="0">
-                <a:solidFill>
-                  <a:srgbClr val="990011"/>
+              <a:rPr lang="en-US" sz="1800" i="1" dirty="0">
+                <a:solidFill>
+                  <a:srgbClr val="555555"/>
                 </a:solidFill>
                 <a:latin typeface="Times New Roman" pitchFamily="34" charset="0"/>
                 <a:ea typeface="Times New Roman" pitchFamily="34" charset="-122"/>
                 <a:cs typeface="Times New Roman" pitchFamily="34" charset="-120"/>
               </a:rPr>
-              <a:t>Activity 2: Answer</a:t>
-            </a:r>
-            <a:endParaRPr lang="en-US" sz="3600" dirty="0"/>
-          </a:p>
-        </p:txBody>
-      </p:sp>
-      <p:sp>
-        <p:nvSpPr>
-          <p:cNvPr id="5" name="Text 2"/>
-          <p:cNvSpPr/>
-          <p:nvPr/>
-        </p:nvSpPr>
-        <p:spPr>
-          <a:xfrm>
-            <a:off x="5349240" y="1783080"/>
-            <a:ext cx="6522415" cy="4663440"/>
-          </a:xfrm>
-          <a:prstGeom prst="rect">
-            <a:avLst/>
-          </a:prstGeom>
-          <a:noFill/>
-          <a:ln/>
-        </p:spPr>
-        <p:txBody>
-          <a:bodyPr wrap="square" lIns="0" tIns="0" rIns="0" bIns="0" rtlCol="0" anchor="t"/>
-          <a:lstStyle/>
-          <a:p>
-            <a:pPr algn="l" indent="0" marL="0">
-              <a:spcAft>
-                <a:spcPts val="800"/>
-              </a:spcAft>
-              <a:buNone/>
-            </a:pPr>
-            <a:r>
-              <a:rPr lang="en-US" sz="4000" dirty="0">
-                <a:solidFill>
-                  <a:srgbClr val="111111"/>
-                </a:solidFill>
-                <a:latin typeface="Times New Roman" pitchFamily="34" charset="0"/>
-                <a:ea typeface="Times New Roman" pitchFamily="34" charset="-122"/>
-                <a:cs typeface="Times New Roman" pitchFamily="34" charset="-120"/>
-              </a:rPr>
-              <a:t>They are paid every month and get a pension.</a:t>
-            </a:r>
-            <a:endParaRPr lang="en-US" sz="4000" dirty="0"/>
+              <a:t>Moto-taxis.</a:t>
+            </a:r>
+            <a:endParaRPr lang="en-US" sz="1800" dirty="0"/>
           </a:p>
         </p:txBody>
       </p:sp>
@@ -10776,54 +10571,15 @@
                 <a:ea typeface="Calibri" pitchFamily="34" charset="-122"/>
                 <a:cs typeface="Calibri" pitchFamily="34" charset="-120"/>
               </a:rPr>
-              <a:t>2. THE INFORMAL SECTOR</a:t>
+              <a:t>2. INFORMAL SECTOR</a:t>
             </a:r>
             <a:endParaRPr lang="en-US" sz="1400" dirty="0"/>
-          </a:p>
-        </p:txBody>
-      </p:sp>
-      <p:sp>
-        <p:nvSpPr>
-          <p:cNvPr id="3" name="Text 1"/>
-          <p:cNvSpPr/>
-          <p:nvPr/>
-        </p:nvSpPr>
-        <p:spPr>
-          <a:xfrm>
-            <a:off x="457200" y="1005840"/>
-            <a:ext cx="11277295" cy="731520"/>
-          </a:xfrm>
-          <a:prstGeom prst="rect">
-            <a:avLst/>
-          </a:prstGeom>
-          <a:noFill/>
-          <a:ln/>
-        </p:spPr>
-        <p:txBody>
-          <a:bodyPr wrap="square" lIns="0" tIns="0" rIns="0" bIns="0" rtlCol="0" anchor="ctr"/>
-          <a:lstStyle/>
-          <a:p>
-            <a:pPr algn="ctr" indent="0" marL="0">
-              <a:buNone/>
-            </a:pPr>
-            <a:r>
-              <a:rPr lang="en-US" sz="3600" b="1" dirty="0">
-                <a:solidFill>
-                  <a:srgbClr val="990011"/>
-                </a:solidFill>
-                <a:latin typeface="Times New Roman" pitchFamily="34" charset="0"/>
-                <a:ea typeface="Times New Roman" pitchFamily="34" charset="-122"/>
-                <a:cs typeface="Times New Roman" pitchFamily="34" charset="-120"/>
-              </a:rPr>
-              <a:t>Activity 3</a:t>
-            </a:r>
-            <a:endParaRPr lang="en-US" sz="3600" dirty="0"/>
           </a:p>
         </p:txBody>
       </p:sp>
       <p:pic>
         <p:nvPicPr>
-          <p:cNvPr id="4" name="Image 0" descr="/home/claude/f4/img/v2/f2t_moto_taxi.jpg">    </p:cNvPr>
+          <p:cNvPr id="3" name="Image 0" descr="/home/claude/f4/img/minesec_sheet.png">    </p:cNvPr>
           <p:cNvPicPr>
             <a:picLocks noChangeAspect="1"/>
           </p:cNvPicPr>
@@ -10837,8 +10593,8 @@
         </p:blipFill>
         <p:spPr>
           <a:xfrm>
-            <a:off x="2246610" y="1783080"/>
-            <a:ext cx="7698475" cy="4270248"/>
+            <a:off x="0" y="658368"/>
+            <a:ext cx="5120640" cy="5833872"/>
           </a:xfrm>
           <a:prstGeom prst="rect">
             <a:avLst/>
@@ -10847,14 +10603,14 @@
       </p:pic>
       <p:sp>
         <p:nvSpPr>
-          <p:cNvPr id="5" name="Text 2"/>
+          <p:cNvPr id="4" name="Text 1"/>
           <p:cNvSpPr/>
           <p:nvPr/>
         </p:nvSpPr>
         <p:spPr>
           <a:xfrm>
-            <a:off x="457200" y="6089904"/>
-            <a:ext cx="11277295" cy="347472"/>
+            <a:off x="5349240" y="1005840"/>
+            <a:ext cx="6522415" cy="731520"/>
           </a:xfrm>
           <a:prstGeom prst="rect">
             <a:avLst/>
@@ -10863,24 +10619,68 @@
           <a:ln/>
         </p:spPr>
         <p:txBody>
-          <a:bodyPr wrap="square" lIns="0" tIns="0" rIns="0" bIns="0" rtlCol="0" anchor="ctr"/>
+          <a:bodyPr wrap="square" lIns="0" tIns="0" rIns="0" bIns="0" rtlCol="0" anchor="ctr">
+            <a:normAutofit/>
+          </a:bodyPr>
           <a:lstStyle/>
           <a:p>
             <a:pPr algn="ctr" indent="0" marL="0">
               <a:buNone/>
             </a:pPr>
             <a:r>
-              <a:rPr lang="en-US" sz="1800" i="1" dirty="0">
-                <a:solidFill>
-                  <a:srgbClr val="555555"/>
+              <a:rPr lang="en-US" sz="3600" b="1" dirty="0">
+                <a:solidFill>
+                  <a:srgbClr val="990011"/>
                 </a:solidFill>
                 <a:latin typeface="Times New Roman" pitchFamily="34" charset="0"/>
                 <a:ea typeface="Times New Roman" pitchFamily="34" charset="-122"/>
                 <a:cs typeface="Times New Roman" pitchFamily="34" charset="-120"/>
               </a:rPr>
-              <a:t>Moto-taxis in a Cameroonian town.</a:t>
-            </a:r>
-            <a:endParaRPr lang="en-US" sz="1800" dirty="0"/>
+              <a:t>Activity 3: Question</a:t>
+            </a:r>
+            <a:endParaRPr lang="en-US" sz="3600" dirty="0"/>
+          </a:p>
+        </p:txBody>
+      </p:sp>
+      <p:sp>
+        <p:nvSpPr>
+          <p:cNvPr id="5" name="Text 2"/>
+          <p:cNvSpPr/>
+          <p:nvPr/>
+        </p:nvSpPr>
+        <p:spPr>
+          <a:xfrm>
+            <a:off x="5349240" y="1783080"/>
+            <a:ext cx="6522415" cy="4663440"/>
+          </a:xfrm>
+          <a:prstGeom prst="rect">
+            <a:avLst/>
+          </a:prstGeom>
+          <a:noFill/>
+          <a:ln/>
+        </p:spPr>
+        <p:txBody>
+          <a:bodyPr wrap="square" lIns="0" tIns="0" rIns="0" bIns="0" rtlCol="0" anchor="t"/>
+          <a:lstStyle/>
+          <a:p>
+            <a:pPr algn="l" indent="0" marL="0">
+              <a:spcAft>
+                <a:spcPts val="800"/>
+              </a:spcAft>
+              <a:buNone/>
+            </a:pPr>
+            <a:r>
+              <a:rPr lang="en-US" sz="4000" dirty="0">
+                <a:solidFill>
+                  <a:srgbClr val="111111"/>
+                </a:solidFill>
+                <a:latin typeface="Times New Roman" pitchFamily="34" charset="0"/>
+                <a:ea typeface="Times New Roman" pitchFamily="34" charset="-122"/>
+                <a:cs typeface="Times New Roman" pitchFamily="34" charset="-120"/>
+              </a:rPr>
+              <a:t>Is the moto-taxi driver usually registered?</a:t>
+            </a:r>
+            <a:endParaRPr lang="en-US" sz="4000" dirty="0"/>
           </a:p>
         </p:txBody>
       </p:sp>
@@ -10990,7 +10790,7 @@
                 <a:ea typeface="Calibri" pitchFamily="34" charset="-122"/>
                 <a:cs typeface="Calibri" pitchFamily="34" charset="-120"/>
               </a:rPr>
-              <a:t>2. THE INFORMAL SECTOR</a:t>
+              <a:t>2. INFORMAL SECTOR</a:t>
             </a:r>
             <a:endParaRPr lang="en-US" sz="1400" dirty="0"/>
           </a:p>
@@ -11055,7 +10855,7 @@
                 <a:ea typeface="Times New Roman" pitchFamily="34" charset="-122"/>
                 <a:cs typeface="Times New Roman" pitchFamily="34" charset="-120"/>
               </a:rPr>
-              <a:t>Activity 3: Question</a:t>
+              <a:t>Activity 3: Answer</a:t>
             </a:r>
             <a:endParaRPr lang="en-US" sz="3600" dirty="0"/>
           </a:p>
@@ -11097,7 +10897,7 @@
                 <a:ea typeface="Times New Roman" pitchFamily="34" charset="-122"/>
                 <a:cs typeface="Times New Roman" pitchFamily="34" charset="-120"/>
               </a:rPr>
-              <a:t>Is the moto-taxi driver registered? Which sector is this?</a:t>
+              <a:t>No: it is the informal sector.</a:t>
             </a:r>
             <a:endParaRPr lang="en-US" sz="4000" dirty="0"/>
           </a:p>
@@ -11209,15 +11009,54 @@
                 <a:ea typeface="Calibri" pitchFamily="34" charset="-122"/>
                 <a:cs typeface="Calibri" pitchFamily="34" charset="-120"/>
               </a:rPr>
-              <a:t>2. THE INFORMAL SECTOR</a:t>
+              <a:t>2. INFORMAL SECTOR</a:t>
             </a:r>
             <a:endParaRPr lang="en-US" sz="1400" dirty="0"/>
+          </a:p>
+        </p:txBody>
+      </p:sp>
+      <p:sp>
+        <p:nvSpPr>
+          <p:cNvPr id="3" name="Text 1"/>
+          <p:cNvSpPr/>
+          <p:nvPr/>
+        </p:nvSpPr>
+        <p:spPr>
+          <a:xfrm>
+            <a:off x="457200" y="1005840"/>
+            <a:ext cx="11277295" cy="731520"/>
+          </a:xfrm>
+          <a:prstGeom prst="rect">
+            <a:avLst/>
+          </a:prstGeom>
+          <a:noFill/>
+          <a:ln/>
+        </p:spPr>
+        <p:txBody>
+          <a:bodyPr wrap="square" lIns="0" tIns="0" rIns="0" bIns="0" rtlCol="0" anchor="ctr"/>
+          <a:lstStyle/>
+          <a:p>
+            <a:pPr algn="ctr" indent="0" marL="0">
+              <a:buNone/>
+            </a:pPr>
+            <a:r>
+              <a:rPr lang="en-US" sz="3600" b="1" dirty="0">
+                <a:solidFill>
+                  <a:srgbClr val="990011"/>
+                </a:solidFill>
+                <a:latin typeface="Times New Roman" pitchFamily="34" charset="0"/>
+                <a:ea typeface="Times New Roman" pitchFamily="34" charset="-122"/>
+                <a:cs typeface="Times New Roman" pitchFamily="34" charset="-120"/>
+              </a:rPr>
+              <a:t>Activity 4</a:t>
+            </a:r>
+            <a:endParaRPr lang="en-US" sz="3600" dirty="0"/>
           </a:p>
         </p:txBody>
       </p:sp>
       <p:pic>
         <p:nvPicPr>
-          <p:cNvPr id="3" name="Image 0" descr="/home/claude/f4/img/minesec_sheet.png">    </p:cNvPr>
+          <p:cNvPr id="4" name="Image 0" descr="/home/claude/f4/img/v2/f2t_street_vendor.jpg">    </p:cNvPr>
           <p:cNvPicPr>
             <a:picLocks noChangeAspect="1"/>
           </p:cNvPicPr>
@@ -11231,8 +11070,8 @@
         </p:blipFill>
         <p:spPr>
           <a:xfrm>
-            <a:off x="0" y="658368"/>
-            <a:ext cx="5120640" cy="5833872"/>
+            <a:off x="2246610" y="1783080"/>
+            <a:ext cx="7698475" cy="4270248"/>
           </a:xfrm>
           <a:prstGeom prst="rect">
             <a:avLst/>
@@ -11241,14 +11080,14 @@
       </p:pic>
       <p:sp>
         <p:nvSpPr>
-          <p:cNvPr id="4" name="Text 1"/>
+          <p:cNvPr id="5" name="Text 2"/>
           <p:cNvSpPr/>
           <p:nvPr/>
         </p:nvSpPr>
         <p:spPr>
           <a:xfrm>
-            <a:off x="5349240" y="1005840"/>
-            <a:ext cx="6522415" cy="731520"/>
+            <a:off x="457200" y="6089904"/>
+            <a:ext cx="11277295" cy="347472"/>
           </a:xfrm>
           <a:prstGeom prst="rect">
             <a:avLst/>
@@ -11257,68 +11096,24 @@
           <a:ln/>
         </p:spPr>
         <p:txBody>
-          <a:bodyPr wrap="square" lIns="0" tIns="0" rIns="0" bIns="0" rtlCol="0" anchor="ctr">
-            <a:normAutofit/>
-          </a:bodyPr>
+          <a:bodyPr wrap="square" lIns="0" tIns="0" rIns="0" bIns="0" rtlCol="0" anchor="ctr"/>
           <a:lstStyle/>
           <a:p>
             <a:pPr algn="ctr" indent="0" marL="0">
               <a:buNone/>
             </a:pPr>
             <a:r>
-              <a:rPr lang="en-US" sz="3600" b="1" dirty="0">
-                <a:solidFill>
-                  <a:srgbClr val="990011"/>
+              <a:rPr lang="en-US" sz="1800" i="1" dirty="0">
+                <a:solidFill>
+                  <a:srgbClr val="555555"/>
                 </a:solidFill>
                 <a:latin typeface="Times New Roman" pitchFamily="34" charset="0"/>
                 <a:ea typeface="Times New Roman" pitchFamily="34" charset="-122"/>
                 <a:cs typeface="Times New Roman" pitchFamily="34" charset="-120"/>
               </a:rPr>
-              <a:t>Activity 3: Answer</a:t>
-            </a:r>
-            <a:endParaRPr lang="en-US" sz="3600" dirty="0"/>
-          </a:p>
-        </p:txBody>
-      </p:sp>
-      <p:sp>
-        <p:nvSpPr>
-          <p:cNvPr id="5" name="Text 2"/>
-          <p:cNvSpPr/>
-          <p:nvPr/>
-        </p:nvSpPr>
-        <p:spPr>
-          <a:xfrm>
-            <a:off x="5349240" y="1783080"/>
-            <a:ext cx="6522415" cy="4663440"/>
-          </a:xfrm>
-          <a:prstGeom prst="rect">
-            <a:avLst/>
-          </a:prstGeom>
-          <a:noFill/>
-          <a:ln/>
-        </p:spPr>
-        <p:txBody>
-          <a:bodyPr wrap="square" lIns="0" tIns="0" rIns="0" bIns="0" rtlCol="0" anchor="t"/>
-          <a:lstStyle/>
-          <a:p>
-            <a:pPr algn="l" indent="0" marL="0">
-              <a:spcAft>
-                <a:spcPts val="800"/>
-              </a:spcAft>
-              <a:buNone/>
-            </a:pPr>
-            <a:r>
-              <a:rPr lang="en-US" sz="4000" dirty="0">
-                <a:solidFill>
-                  <a:srgbClr val="111111"/>
-                </a:solidFill>
-                <a:latin typeface="Times New Roman" pitchFamily="34" charset="0"/>
-                <a:ea typeface="Times New Roman" pitchFamily="34" charset="-122"/>
-                <a:cs typeface="Times New Roman" pitchFamily="34" charset="-120"/>
-              </a:rPr>
-              <a:t>Usually not. It is the informal sector.</a:t>
-            </a:r>
-            <a:endParaRPr lang="en-US" sz="4000" dirty="0"/>
+              <a:t>A street seller.</a:t>
+            </a:r>
+            <a:endParaRPr lang="en-US" sz="1800" dirty="0"/>
           </a:p>
         </p:txBody>
       </p:sp>
@@ -11428,54 +11223,15 @@
                 <a:ea typeface="Calibri" pitchFamily="34" charset="-122"/>
                 <a:cs typeface="Calibri" pitchFamily="34" charset="-120"/>
               </a:rPr>
-              <a:t>2. THE INFORMAL SECTOR</a:t>
+              <a:t>2. INFORMAL SECTOR</a:t>
             </a:r>
             <a:endParaRPr lang="en-US" sz="1400" dirty="0"/>
-          </a:p>
-        </p:txBody>
-      </p:sp>
-      <p:sp>
-        <p:nvSpPr>
-          <p:cNvPr id="3" name="Text 1"/>
-          <p:cNvSpPr/>
-          <p:nvPr/>
-        </p:nvSpPr>
-        <p:spPr>
-          <a:xfrm>
-            <a:off x="457200" y="1005840"/>
-            <a:ext cx="11277295" cy="731520"/>
-          </a:xfrm>
-          <a:prstGeom prst="rect">
-            <a:avLst/>
-          </a:prstGeom>
-          <a:noFill/>
-          <a:ln/>
-        </p:spPr>
-        <p:txBody>
-          <a:bodyPr wrap="square" lIns="0" tIns="0" rIns="0" bIns="0" rtlCol="0" anchor="ctr"/>
-          <a:lstStyle/>
-          <a:p>
-            <a:pPr algn="ctr" indent="0" marL="0">
-              <a:buNone/>
-            </a:pPr>
-            <a:r>
-              <a:rPr lang="en-US" sz="3600" b="1" dirty="0">
-                <a:solidFill>
-                  <a:srgbClr val="990011"/>
-                </a:solidFill>
-                <a:latin typeface="Times New Roman" pitchFamily="34" charset="0"/>
-                <a:ea typeface="Times New Roman" pitchFamily="34" charset="-122"/>
-                <a:cs typeface="Times New Roman" pitchFamily="34" charset="-120"/>
-              </a:rPr>
-              <a:t>Activity 4</a:t>
-            </a:r>
-            <a:endParaRPr lang="en-US" sz="3600" dirty="0"/>
           </a:p>
         </p:txBody>
       </p:sp>
       <p:pic>
         <p:nvPicPr>
-          <p:cNvPr id="4" name="Image 0" descr="/home/claude/f4/img/v2/f2t_street_vendor.jpg">    </p:cNvPr>
+          <p:cNvPr id="3" name="Image 0" descr="/home/claude/f4/img/minesec_sheet.png">    </p:cNvPr>
           <p:cNvPicPr>
             <a:picLocks noChangeAspect="1"/>
           </p:cNvPicPr>
@@ -11489,8 +11245,8 @@
         </p:blipFill>
         <p:spPr>
           <a:xfrm>
-            <a:off x="2246610" y="1783080"/>
-            <a:ext cx="7698475" cy="4270248"/>
+            <a:off x="0" y="658368"/>
+            <a:ext cx="5120640" cy="5833872"/>
           </a:xfrm>
           <a:prstGeom prst="rect">
             <a:avLst/>
@@ -11499,14 +11255,14 @@
       </p:pic>
       <p:sp>
         <p:nvSpPr>
-          <p:cNvPr id="5" name="Text 2"/>
+          <p:cNvPr id="4" name="Text 1"/>
           <p:cNvSpPr/>
           <p:nvPr/>
         </p:nvSpPr>
         <p:spPr>
           <a:xfrm>
-            <a:off x="457200" y="6089904"/>
-            <a:ext cx="11277295" cy="347472"/>
+            <a:off x="5349240" y="1005840"/>
+            <a:ext cx="6522415" cy="731520"/>
           </a:xfrm>
           <a:prstGeom prst="rect">
             <a:avLst/>
@@ -11515,24 +11271,68 @@
           <a:ln/>
         </p:spPr>
         <p:txBody>
-          <a:bodyPr wrap="square" lIns="0" tIns="0" rIns="0" bIns="0" rtlCol="0" anchor="ctr"/>
+          <a:bodyPr wrap="square" lIns="0" tIns="0" rIns="0" bIns="0" rtlCol="0" anchor="ctr">
+            <a:normAutofit/>
+          </a:bodyPr>
           <a:lstStyle/>
           <a:p>
             <a:pPr algn="ctr" indent="0" marL="0">
               <a:buNone/>
             </a:pPr>
             <a:r>
-              <a:rPr lang="en-US" sz="1800" i="1" dirty="0">
-                <a:solidFill>
-                  <a:srgbClr val="555555"/>
+              <a:rPr lang="en-US" sz="3600" b="1" dirty="0">
+                <a:solidFill>
+                  <a:srgbClr val="990011"/>
                 </a:solidFill>
                 <a:latin typeface="Times New Roman" pitchFamily="34" charset="0"/>
                 <a:ea typeface="Times New Roman" pitchFamily="34" charset="-122"/>
                 <a:cs typeface="Times New Roman" pitchFamily="34" charset="-120"/>
               </a:rPr>
-              <a:t>A woman sells roasted maize in the street.</a:t>
-            </a:r>
-            <a:endParaRPr lang="en-US" sz="1800" dirty="0"/>
+              <a:t>Activity 4: Question</a:t>
+            </a:r>
+            <a:endParaRPr lang="en-US" sz="3600" dirty="0"/>
+          </a:p>
+        </p:txBody>
+      </p:sp>
+      <p:sp>
+        <p:nvSpPr>
+          <p:cNvPr id="5" name="Text 2"/>
+          <p:cNvSpPr/>
+          <p:nvPr/>
+        </p:nvSpPr>
+        <p:spPr>
+          <a:xfrm>
+            <a:off x="5349240" y="1783080"/>
+            <a:ext cx="6522415" cy="4663440"/>
+          </a:xfrm>
+          <a:prstGeom prst="rect">
+            <a:avLst/>
+          </a:prstGeom>
+          <a:noFill/>
+          <a:ln/>
+        </p:spPr>
+        <p:txBody>
+          <a:bodyPr wrap="square" lIns="0" tIns="0" rIns="0" bIns="0" rtlCol="0" anchor="t"/>
+          <a:lstStyle/>
+          <a:p>
+            <a:pPr algn="l" indent="0" marL="0">
+              <a:spcAft>
+                <a:spcPts val="800"/>
+              </a:spcAft>
+              <a:buNone/>
+            </a:pPr>
+            <a:r>
+              <a:rPr lang="en-US" sz="4000" dirty="0">
+                <a:solidFill>
+                  <a:srgbClr val="111111"/>
+                </a:solidFill>
+                <a:latin typeface="Times New Roman" pitchFamily="34" charset="0"/>
+                <a:ea typeface="Times New Roman" pitchFamily="34" charset="-122"/>
+                <a:cs typeface="Times New Roman" pitchFamily="34" charset="-120"/>
+              </a:rPr>
+              <a:t>Why is it easy to start work in the informal sector?</a:t>
+            </a:r>
+            <a:endParaRPr lang="en-US" sz="4000" dirty="0"/>
           </a:p>
         </p:txBody>
       </p:sp>
@@ -12651,7 +12451,7 @@
                 <a:ea typeface="Calibri" pitchFamily="34" charset="-122"/>
                 <a:cs typeface="Calibri" pitchFamily="34" charset="-120"/>
               </a:rPr>
-              <a:t>2. THE INFORMAL SECTOR</a:t>
+              <a:t>2. INFORMAL SECTOR</a:t>
             </a:r>
             <a:endParaRPr lang="en-US" sz="1400" dirty="0"/>
           </a:p>
@@ -12716,7 +12516,7 @@
                 <a:ea typeface="Times New Roman" pitchFamily="34" charset="-122"/>
                 <a:cs typeface="Times New Roman" pitchFamily="34" charset="-120"/>
               </a:rPr>
-              <a:t>Activity 4: Question</a:t>
+              <a:t>Activity 4: Answer</a:t>
             </a:r>
             <a:endParaRPr lang="en-US" sz="3600" dirty="0"/>
           </a:p>
@@ -12758,7 +12558,7 @@
                 <a:ea typeface="Times New Roman" pitchFamily="34" charset="-122"/>
                 <a:cs typeface="Times New Roman" pitchFamily="34" charset="-120"/>
               </a:rPr>
-              <a:t>Why do many young people work in the informal sector?</a:t>
+              <a:t>It needs little money and no papers.</a:t>
             </a:r>
             <a:endParaRPr lang="en-US" sz="4000" dirty="0"/>
           </a:p>
@@ -12870,15 +12670,54 @@
                 <a:ea typeface="Calibri" pitchFamily="34" charset="-122"/>
                 <a:cs typeface="Calibri" pitchFamily="34" charset="-120"/>
               </a:rPr>
-              <a:t>2. THE INFORMAL SECTOR</a:t>
+              <a:t>2. INFORMAL SECTOR</a:t>
             </a:r>
             <a:endParaRPr lang="en-US" sz="1400" dirty="0"/>
+          </a:p>
+        </p:txBody>
+      </p:sp>
+      <p:sp>
+        <p:nvSpPr>
+          <p:cNvPr id="3" name="Text 1"/>
+          <p:cNvSpPr/>
+          <p:nvPr/>
+        </p:nvSpPr>
+        <p:spPr>
+          <a:xfrm>
+            <a:off x="457200" y="1005840"/>
+            <a:ext cx="11277295" cy="731520"/>
+          </a:xfrm>
+          <a:prstGeom prst="rect">
+            <a:avLst/>
+          </a:prstGeom>
+          <a:noFill/>
+          <a:ln/>
+        </p:spPr>
+        <p:txBody>
+          <a:bodyPr wrap="square" lIns="0" tIns="0" rIns="0" bIns="0" rtlCol="0" anchor="ctr"/>
+          <a:lstStyle/>
+          <a:p>
+            <a:pPr algn="ctr" indent="0" marL="0">
+              <a:buNone/>
+            </a:pPr>
+            <a:r>
+              <a:rPr lang="en-US" sz="3600" b="1" dirty="0">
+                <a:solidFill>
+                  <a:srgbClr val="990011"/>
+                </a:solidFill>
+                <a:latin typeface="Times New Roman" pitchFamily="34" charset="0"/>
+                <a:ea typeface="Times New Roman" pitchFamily="34" charset="-122"/>
+                <a:cs typeface="Times New Roman" pitchFamily="34" charset="-120"/>
+              </a:rPr>
+              <a:t>Activity 5</a:t>
+            </a:r>
+            <a:endParaRPr lang="en-US" sz="3600" dirty="0"/>
           </a:p>
         </p:txBody>
       </p:sp>
       <p:pic>
         <p:nvPicPr>
-          <p:cNvPr id="3" name="Image 0" descr="/home/claude/f4/img/minesec_sheet.png">    </p:cNvPr>
+          <p:cNvPr id="4" name="Image 0" descr="/home/claude/f4/img/v2/formal_informal_big.png">    </p:cNvPr>
           <p:cNvPicPr>
             <a:picLocks noChangeAspect="1"/>
           </p:cNvPicPr>
@@ -12892,8 +12731,8 @@
         </p:blipFill>
         <p:spPr>
           <a:xfrm>
-            <a:off x="0" y="658368"/>
-            <a:ext cx="5120640" cy="5833872"/>
+            <a:off x="629930" y="1783080"/>
+            <a:ext cx="10931835" cy="4270248"/>
           </a:xfrm>
           <a:prstGeom prst="rect">
             <a:avLst/>
@@ -12902,14 +12741,14 @@
       </p:pic>
       <p:sp>
         <p:nvSpPr>
-          <p:cNvPr id="4" name="Text 1"/>
+          <p:cNvPr id="5" name="Text 2"/>
           <p:cNvSpPr/>
           <p:nvPr/>
         </p:nvSpPr>
         <p:spPr>
           <a:xfrm>
-            <a:off x="5349240" y="1005840"/>
-            <a:ext cx="6522415" cy="731520"/>
+            <a:off x="457200" y="6089904"/>
+            <a:ext cx="11277295" cy="347472"/>
           </a:xfrm>
           <a:prstGeom prst="rect">
             <a:avLst/>
@@ -12918,68 +12757,24 @@
           <a:ln/>
         </p:spPr>
         <p:txBody>
-          <a:bodyPr wrap="square" lIns="0" tIns="0" rIns="0" bIns="0" rtlCol="0" anchor="ctr">
-            <a:normAutofit/>
-          </a:bodyPr>
+          <a:bodyPr wrap="square" lIns="0" tIns="0" rIns="0" bIns="0" rtlCol="0" anchor="ctr"/>
           <a:lstStyle/>
           <a:p>
             <a:pPr algn="ctr" indent="0" marL="0">
               <a:buNone/>
             </a:pPr>
             <a:r>
-              <a:rPr lang="en-US" sz="3600" b="1" dirty="0">
-                <a:solidFill>
-                  <a:srgbClr val="990011"/>
+              <a:rPr lang="en-US" sz="1800" i="1" dirty="0">
+                <a:solidFill>
+                  <a:srgbClr val="555555"/>
                 </a:solidFill>
                 <a:latin typeface="Times New Roman" pitchFamily="34" charset="0"/>
                 <a:ea typeface="Times New Roman" pitchFamily="34" charset="-122"/>
                 <a:cs typeface="Times New Roman" pitchFamily="34" charset="-120"/>
               </a:rPr>
-              <a:t>Activity 4: Answer</a:t>
-            </a:r>
-            <a:endParaRPr lang="en-US" sz="3600" dirty="0"/>
-          </a:p>
-        </p:txBody>
-      </p:sp>
-      <p:sp>
-        <p:nvSpPr>
-          <p:cNvPr id="5" name="Text 2"/>
-          <p:cNvSpPr/>
-          <p:nvPr/>
-        </p:nvSpPr>
-        <p:spPr>
-          <a:xfrm>
-            <a:off x="5349240" y="1783080"/>
-            <a:ext cx="6522415" cy="4663440"/>
-          </a:xfrm>
-          <a:prstGeom prst="rect">
-            <a:avLst/>
-          </a:prstGeom>
-          <a:noFill/>
-          <a:ln/>
-        </p:spPr>
-        <p:txBody>
-          <a:bodyPr wrap="square" lIns="0" tIns="0" rIns="0" bIns="0" rtlCol="0" anchor="t"/>
-          <a:lstStyle/>
-          <a:p>
-            <a:pPr algn="l" indent="0" marL="0">
-              <a:spcAft>
-                <a:spcPts val="800"/>
-              </a:spcAft>
-              <a:buNone/>
-            </a:pPr>
-            <a:r>
-              <a:rPr lang="en-US" sz="4000" dirty="0">
-                <a:solidFill>
-                  <a:srgbClr val="111111"/>
-                </a:solidFill>
-                <a:latin typeface="Times New Roman" pitchFamily="34" charset="0"/>
-                <a:ea typeface="Times New Roman" pitchFamily="34" charset="-122"/>
-                <a:cs typeface="Times New Roman" pitchFamily="34" charset="-120"/>
-              </a:rPr>
-              <a:t>It is easy to start and needs little money.</a:t>
-            </a:r>
-            <a:endParaRPr lang="en-US" sz="4000" dirty="0"/>
+              <a:t>Formal and informal sectors.</a:t>
+            </a:r>
+            <a:endParaRPr lang="en-US" sz="1800" dirty="0"/>
           </a:p>
         </p:txBody>
       </p:sp>
@@ -13089,54 +12884,15 @@
                 <a:ea typeface="Calibri" pitchFamily="34" charset="-122"/>
                 <a:cs typeface="Calibri" pitchFamily="34" charset="-120"/>
               </a:rPr>
-              <a:t>3. COMPARISON</a:t>
+              <a:t>2. INFORMAL SECTOR</a:t>
             </a:r>
             <a:endParaRPr lang="en-US" sz="1400" dirty="0"/>
-          </a:p>
-        </p:txBody>
-      </p:sp>
-      <p:sp>
-        <p:nvSpPr>
-          <p:cNvPr id="3" name="Text 1"/>
-          <p:cNvSpPr/>
-          <p:nvPr/>
-        </p:nvSpPr>
-        <p:spPr>
-          <a:xfrm>
-            <a:off x="457200" y="1005840"/>
-            <a:ext cx="11277295" cy="731520"/>
-          </a:xfrm>
-          <a:prstGeom prst="rect">
-            <a:avLst/>
-          </a:prstGeom>
-          <a:noFill/>
-          <a:ln/>
-        </p:spPr>
-        <p:txBody>
-          <a:bodyPr wrap="square" lIns="0" tIns="0" rIns="0" bIns="0" rtlCol="0" anchor="ctr"/>
-          <a:lstStyle/>
-          <a:p>
-            <a:pPr algn="ctr" indent="0" marL="0">
-              <a:buNone/>
-            </a:pPr>
-            <a:r>
-              <a:rPr lang="en-US" sz="3600" b="1" dirty="0">
-                <a:solidFill>
-                  <a:srgbClr val="990011"/>
-                </a:solidFill>
-                <a:latin typeface="Times New Roman" pitchFamily="34" charset="0"/>
-                <a:ea typeface="Times New Roman" pitchFamily="34" charset="-122"/>
-                <a:cs typeface="Times New Roman" pitchFamily="34" charset="-120"/>
-              </a:rPr>
-              <a:t>Activity 5</a:t>
-            </a:r>
-            <a:endParaRPr lang="en-US" sz="3600" dirty="0"/>
           </a:p>
         </p:txBody>
       </p:sp>
       <p:pic>
         <p:nvPicPr>
-          <p:cNvPr id="4" name="Image 0" descr="/home/claude/f4/img/v2/formal_informal_big.png">    </p:cNvPr>
+          <p:cNvPr id="3" name="Image 0" descr="/home/claude/f4/img/minesec_sheet.png">    </p:cNvPr>
           <p:cNvPicPr>
             <a:picLocks noChangeAspect="1"/>
           </p:cNvPicPr>
@@ -13150,8 +12906,8 @@
         </p:blipFill>
         <p:spPr>
           <a:xfrm>
-            <a:off x="629930" y="1783080"/>
-            <a:ext cx="10931835" cy="4270248"/>
+            <a:off x="0" y="658368"/>
+            <a:ext cx="5120640" cy="5833872"/>
           </a:xfrm>
           <a:prstGeom prst="rect">
             <a:avLst/>
@@ -13160,14 +12916,14 @@
       </p:pic>
       <p:sp>
         <p:nvSpPr>
-          <p:cNvPr id="5" name="Text 2"/>
+          <p:cNvPr id="4" name="Text 1"/>
           <p:cNvSpPr/>
           <p:nvPr/>
         </p:nvSpPr>
         <p:spPr>
           <a:xfrm>
-            <a:off x="457200" y="6089904"/>
-            <a:ext cx="11277295" cy="347472"/>
+            <a:off x="5349240" y="1005840"/>
+            <a:ext cx="6522415" cy="731520"/>
           </a:xfrm>
           <a:prstGeom prst="rect">
             <a:avLst/>
@@ -13176,24 +12932,68 @@
           <a:ln/>
         </p:spPr>
         <p:txBody>
-          <a:bodyPr wrap="square" lIns="0" tIns="0" rIns="0" bIns="0" rtlCol="0" anchor="ctr"/>
+          <a:bodyPr wrap="square" lIns="0" tIns="0" rIns="0" bIns="0" rtlCol="0" anchor="ctr">
+            <a:normAutofit/>
+          </a:bodyPr>
           <a:lstStyle/>
           <a:p>
             <a:pPr algn="ctr" indent="0" marL="0">
               <a:buNone/>
             </a:pPr>
             <a:r>
-              <a:rPr lang="en-US" sz="1800" i="1" dirty="0">
-                <a:solidFill>
-                  <a:srgbClr val="555555"/>
+              <a:rPr lang="en-US" sz="3600" b="1" dirty="0">
+                <a:solidFill>
+                  <a:srgbClr val="990011"/>
                 </a:solidFill>
                 <a:latin typeface="Times New Roman" pitchFamily="34" charset="0"/>
                 <a:ea typeface="Times New Roman" pitchFamily="34" charset="-122"/>
                 <a:cs typeface="Times New Roman" pitchFamily="34" charset="-120"/>
               </a:rPr>
-              <a:t>Formal and informal sectors.</a:t>
-            </a:r>
-            <a:endParaRPr lang="en-US" sz="1800" dirty="0"/>
+              <a:t>Activity 5: Question</a:t>
+            </a:r>
+            <a:endParaRPr lang="en-US" sz="3600" dirty="0"/>
+          </a:p>
+        </p:txBody>
+      </p:sp>
+      <p:sp>
+        <p:nvSpPr>
+          <p:cNvPr id="5" name="Text 2"/>
+          <p:cNvSpPr/>
+          <p:nvPr/>
+        </p:nvSpPr>
+        <p:spPr>
+          <a:xfrm>
+            <a:off x="5349240" y="1783080"/>
+            <a:ext cx="6522415" cy="4663440"/>
+          </a:xfrm>
+          <a:prstGeom prst="rect">
+            <a:avLst/>
+          </a:prstGeom>
+          <a:noFill/>
+          <a:ln/>
+        </p:spPr>
+        <p:txBody>
+          <a:bodyPr wrap="square" lIns="0" tIns="0" rIns="0" bIns="0" rtlCol="0" anchor="t"/>
+          <a:lstStyle/>
+          <a:p>
+            <a:pPr algn="l" indent="0" marL="0">
+              <a:spcAft>
+                <a:spcPts val="800"/>
+              </a:spcAft>
+              <a:buNone/>
+            </a:pPr>
+            <a:r>
+              <a:rPr lang="en-US" sz="4000" dirty="0">
+                <a:solidFill>
+                  <a:srgbClr val="111111"/>
+                </a:solidFill>
+                <a:latin typeface="Times New Roman" pitchFamily="34" charset="0"/>
+                <a:ea typeface="Times New Roman" pitchFamily="34" charset="-122"/>
+                <a:cs typeface="Times New Roman" pitchFamily="34" charset="-120"/>
+              </a:rPr>
+              <a:t>Which sector gives workers a pension?</a:t>
+            </a:r>
+            <a:endParaRPr lang="en-US" sz="4000" dirty="0"/>
           </a:p>
         </p:txBody>
       </p:sp>
@@ -13303,7 +13103,7 @@
                 <a:ea typeface="Calibri" pitchFamily="34" charset="-122"/>
                 <a:cs typeface="Calibri" pitchFamily="34" charset="-120"/>
               </a:rPr>
-              <a:t>3. COMPARISON</a:t>
+              <a:t>2. INFORMAL SECTOR</a:t>
             </a:r>
             <a:endParaRPr lang="en-US" sz="1400" dirty="0"/>
           </a:p>
@@ -13368,7 +13168,7 @@
                 <a:ea typeface="Times New Roman" pitchFamily="34" charset="-122"/>
                 <a:cs typeface="Times New Roman" pitchFamily="34" charset="-120"/>
               </a:rPr>
-              <a:t>Activity 5: Question</a:t>
+              <a:t>Activity 5: Answer</a:t>
             </a:r>
             <a:endParaRPr lang="en-US" sz="3600" dirty="0"/>
           </a:p>
@@ -13410,7 +13210,7 @@
                 <a:ea typeface="Times New Roman" pitchFamily="34" charset="-122"/>
                 <a:cs typeface="Times New Roman" pitchFamily="34" charset="-120"/>
               </a:rPr>
-              <a:t>Give two problems of working in the informal sector.</a:t>
+              <a:t>The formal sector.</a:t>
             </a:r>
             <a:endParaRPr lang="en-US" sz="4000" dirty="0"/>
           </a:p>
@@ -13522,7 +13322,7 @@
                 <a:ea typeface="Calibri" pitchFamily="34" charset="-122"/>
                 <a:cs typeface="Calibri" pitchFamily="34" charset="-120"/>
               </a:rPr>
-              <a:t>3. COMPARISON</a:t>
+              <a:t>BOARD SUMMARY</a:t>
             </a:r>
             <a:endParaRPr lang="en-US" sz="1400" dirty="0"/>
           </a:p>
@@ -13587,7 +13387,7 @@
                 <a:ea typeface="Times New Roman" pitchFamily="34" charset="-122"/>
                 <a:cs typeface="Times New Roman" pitchFamily="34" charset="-120"/>
               </a:rPr>
-              <a:t>Activity 5: Answer</a:t>
+              <a:t>Board Summary</a:t>
             </a:r>
             <a:endParaRPr lang="en-US" sz="3600" dirty="0"/>
           </a:p>
@@ -13621,7 +13421,7 @@
               <a:buNone/>
             </a:pPr>
             <a:r>
-              <a:rPr lang="en-US" sz="4000" dirty="0">
+              <a:rPr lang="en-US" sz="3200" b="1" dirty="0">
                 <a:solidFill>
                   <a:srgbClr val="111111"/>
                 </a:solidFill>
@@ -13629,9 +13429,49 @@
                 <a:ea typeface="Times New Roman" pitchFamily="34" charset="-122"/>
                 <a:cs typeface="Times New Roman" pitchFamily="34" charset="-120"/>
               </a:rPr>
-              <a:t>No contract and no pension. The money is not regular.</a:t>
-            </a:r>
-            <a:endParaRPr lang="en-US" sz="4000" dirty="0"/>
+              <a:t>Topic: Economic Activities</a:t>
+            </a:r>
+            <a:endParaRPr lang="en-US" sz="3200" dirty="0"/>
+          </a:p>
+          <a:p>
+            <a:pPr algn="l" indent="0" marL="0">
+              <a:spcAft>
+                <a:spcPts val="800"/>
+              </a:spcAft>
+              <a:buNone/>
+            </a:pPr>
+            <a:r>
+              <a:rPr lang="en-US" sz="3200" b="1" dirty="0">
+                <a:solidFill>
+                  <a:srgbClr val="111111"/>
+                </a:solidFill>
+                <a:latin typeface="Times New Roman" pitchFamily="34" charset="0"/>
+                <a:ea typeface="Times New Roman" pitchFamily="34" charset="-122"/>
+                <a:cs typeface="Times New Roman" pitchFamily="34" charset="-120"/>
+              </a:rPr>
+              <a:t>Sub-topic: Sectors of the Economy</a:t>
+            </a:r>
+            <a:endParaRPr lang="en-US" sz="3200" dirty="0"/>
+          </a:p>
+          <a:p>
+            <a:pPr algn="l" indent="0" marL="0">
+              <a:spcAft>
+                <a:spcPts val="800"/>
+              </a:spcAft>
+              <a:buNone/>
+            </a:pPr>
+            <a:r>
+              <a:rPr lang="en-US" sz="3200" b="1" dirty="0">
+                <a:solidFill>
+                  <a:srgbClr val="990011"/>
+                </a:solidFill>
+                <a:latin typeface="Times New Roman" pitchFamily="34" charset="0"/>
+                <a:ea typeface="Times New Roman" pitchFamily="34" charset="-122"/>
+                <a:cs typeface="Times New Roman" pitchFamily="34" charset="-120"/>
+              </a:rPr>
+              <a:t>Lesson 5 (Part 2): The Sectors of the Economy: Formal and Informal Sectors of the Economy</a:t>
+            </a:r>
+            <a:endParaRPr lang="en-US" sz="3200" dirty="0"/>
           </a:p>
         </p:txBody>
       </p:sp>
@@ -13764,7 +13604,7 @@
         <p:spPr>
           <a:xfrm>
             <a:off x="0" y="658368"/>
-            <a:ext cx="5120640" cy="5833872"/>
+            <a:ext cx="2468880" cy="5833872"/>
           </a:xfrm>
           <a:prstGeom prst="rect">
             <a:avLst/>
@@ -13779,8 +13619,8 @@
         </p:nvSpPr>
         <p:spPr>
           <a:xfrm>
-            <a:off x="5349240" y="1005840"/>
-            <a:ext cx="6522415" cy="731520"/>
+            <a:off x="2697480" y="1005840"/>
+            <a:ext cx="9174175" cy="731520"/>
           </a:xfrm>
           <a:prstGeom prst="rect">
             <a:avLst/>
@@ -13806,7 +13646,7 @@
                 <a:ea typeface="Times New Roman" pitchFamily="34" charset="-122"/>
                 <a:cs typeface="Times New Roman" pitchFamily="34" charset="-120"/>
               </a:rPr>
-              <a:t>Board Summary</a:t>
+              <a:t>DEFINITIONS</a:t>
             </a:r>
             <a:endParaRPr lang="en-US" sz="3600" dirty="0"/>
           </a:p>
@@ -13820,8 +13660,8 @@
         </p:nvSpPr>
         <p:spPr>
           <a:xfrm>
-            <a:off x="5349240" y="1783080"/>
-            <a:ext cx="6522415" cy="4663440"/>
+            <a:off x="2697480" y="1783080"/>
+            <a:ext cx="9174175" cy="4663440"/>
           </a:xfrm>
           <a:prstGeom prst="rect">
             <a:avLst/>
@@ -13840,7 +13680,7 @@
               <a:buNone/>
             </a:pPr>
             <a:r>
-              <a:rPr lang="en-US" sz="4000" b="1" dirty="0">
+              <a:rPr lang="en-US" sz="4000" i="1" dirty="0">
                 <a:solidFill>
                   <a:srgbClr val="111111"/>
                 </a:solidFill>
@@ -13848,16 +13688,17 @@
                 <a:ea typeface="Times New Roman" pitchFamily="34" charset="-122"/>
                 <a:cs typeface="Times New Roman" pitchFamily="34" charset="-120"/>
               </a:rPr>
-              <a:t>Topic: Economic Activities</a:t>
+              <a:t>The key terms of this lesson are defined as follows:</a:t>
             </a:r>
             <a:endParaRPr lang="en-US" sz="4000" dirty="0"/>
           </a:p>
           <a:p>
-            <a:pPr algn="l" indent="0" marL="0">
+            <a:pPr algn="l" marL="342900" indent="-342900">
               <a:spcAft>
                 <a:spcPts val="800"/>
               </a:spcAft>
-              <a:buNone/>
+              <a:buSzPct val="100000"/>
+              <a:buChar char="•"/>
             </a:pPr>
             <a:r>
               <a:rPr lang="en-US" sz="4000" b="1" dirty="0">
@@ -13868,27 +13709,64 @@
                 <a:ea typeface="Times New Roman" pitchFamily="34" charset="-122"/>
                 <a:cs typeface="Times New Roman" pitchFamily="34" charset="-120"/>
               </a:rPr>
-              <a:t>Sub-topic: Sectors of the Economy</a:t>
-            </a:r>
-            <a:endParaRPr lang="en-US" sz="4000" dirty="0"/>
-          </a:p>
-          <a:p>
-            <a:pPr algn="l" indent="0" marL="0">
+              <a:t>Formal sector: </a:t>
+            </a:r>
+            <a:pPr algn="l" marL="342900" indent="-342900">
               <a:spcAft>
                 <a:spcPts val="800"/>
               </a:spcAft>
-              <a:buNone/>
+              <a:buSzPct val="100000"/>
+              <a:buChar char="•"/>
             </a:pPr>
             <a:r>
-              <a:rPr lang="en-US" sz="4000" b="1" dirty="0">
-                <a:solidFill>
-                  <a:srgbClr val="990011"/>
+              <a:rPr lang="en-US" sz="4000" dirty="0">
+                <a:solidFill>
+                  <a:srgbClr val="111111"/>
                 </a:solidFill>
                 <a:latin typeface="Times New Roman" pitchFamily="34" charset="0"/>
                 <a:ea typeface="Times New Roman" pitchFamily="34" charset="-122"/>
                 <a:cs typeface="Times New Roman" pitchFamily="34" charset="-120"/>
               </a:rPr>
-              <a:t>Lesson 5 (Part 2): The Sectors of the Economy: Formal and Informal Sectors of the Economy</a:t>
+              <a:t>It is made of registered activities that pay taxes.</a:t>
+            </a:r>
+            <a:endParaRPr lang="en-US" sz="4000" dirty="0"/>
+          </a:p>
+          <a:p>
+            <a:pPr algn="l" marL="342900" indent="-342900">
+              <a:spcAft>
+                <a:spcPts val="800"/>
+              </a:spcAft>
+              <a:buSzPct val="100000"/>
+              <a:buChar char="•"/>
+            </a:pPr>
+            <a:r>
+              <a:rPr lang="en-US" sz="4000" b="1" dirty="0">
+                <a:solidFill>
+                  <a:srgbClr val="111111"/>
+                </a:solidFill>
+                <a:latin typeface="Times New Roman" pitchFamily="34" charset="0"/>
+                <a:ea typeface="Times New Roman" pitchFamily="34" charset="-122"/>
+                <a:cs typeface="Times New Roman" pitchFamily="34" charset="-120"/>
+              </a:rPr>
+              <a:t>Informal sector: </a:t>
+            </a:r>
+            <a:pPr algn="l" marL="342900" indent="-342900">
+              <a:spcAft>
+                <a:spcPts val="800"/>
+              </a:spcAft>
+              <a:buSzPct val="100000"/>
+              <a:buChar char="•"/>
+            </a:pPr>
+            <a:r>
+              <a:rPr lang="en-US" sz="4000" dirty="0">
+                <a:solidFill>
+                  <a:srgbClr val="111111"/>
+                </a:solidFill>
+                <a:latin typeface="Times New Roman" pitchFamily="34" charset="0"/>
+                <a:ea typeface="Times New Roman" pitchFamily="34" charset="-122"/>
+                <a:cs typeface="Times New Roman" pitchFamily="34" charset="-120"/>
+              </a:rPr>
+              <a:t>It is made of small activities that are not registered.</a:t>
             </a:r>
             <a:endParaRPr lang="en-US" sz="4000" dirty="0"/>
           </a:p>
@@ -14006,9 +13884,131 @@
           </a:p>
         </p:txBody>
       </p:sp>
+      <p:sp>
+        <p:nvSpPr>
+          <p:cNvPr id="3" name="Text 1"/>
+          <p:cNvSpPr/>
+          <p:nvPr/>
+        </p:nvSpPr>
+        <p:spPr>
+          <a:xfrm>
+            <a:off x="365760" y="1005840"/>
+            <a:ext cx="11460175" cy="731520"/>
+          </a:xfrm>
+          <a:prstGeom prst="rect">
+            <a:avLst/>
+          </a:prstGeom>
+          <a:noFill/>
+          <a:ln/>
+        </p:spPr>
+        <p:txBody>
+          <a:bodyPr wrap="square" lIns="0" tIns="0" rIns="0" bIns="0" rtlCol="0" anchor="ctr">
+            <a:normAutofit/>
+          </a:bodyPr>
+          <a:lstStyle/>
+          <a:p>
+            <a:pPr algn="ctr" indent="0" marL="0">
+              <a:buNone/>
+            </a:pPr>
+            <a:r>
+              <a:rPr lang="en-US" sz="3600" b="1" dirty="0">
+                <a:solidFill>
+                  <a:srgbClr val="990011"/>
+                </a:solidFill>
+                <a:latin typeface="Times New Roman" pitchFamily="34" charset="0"/>
+                <a:ea typeface="Times New Roman" pitchFamily="34" charset="-122"/>
+                <a:cs typeface="Times New Roman" pitchFamily="34" charset="-120"/>
+              </a:rPr>
+              <a:t>1. The Formal Sector</a:t>
+            </a:r>
+            <a:endParaRPr lang="en-US" sz="3600" dirty="0"/>
+          </a:p>
+        </p:txBody>
+      </p:sp>
+      <p:sp>
+        <p:nvSpPr>
+          <p:cNvPr id="4" name="Text 2"/>
+          <p:cNvSpPr/>
+          <p:nvPr/>
+        </p:nvSpPr>
+        <p:spPr>
+          <a:xfrm>
+            <a:off x="365760" y="1783080"/>
+            <a:ext cx="4846320" cy="4617720"/>
+          </a:xfrm>
+          <a:prstGeom prst="rect">
+            <a:avLst/>
+          </a:prstGeom>
+          <a:noFill/>
+          <a:ln/>
+        </p:spPr>
+        <p:txBody>
+          <a:bodyPr wrap="square" lIns="0" tIns="0" rIns="0" bIns="0" rtlCol="0" anchor="t"/>
+          <a:lstStyle/>
+          <a:p>
+            <a:pPr algn="l" indent="0" marL="0">
+              <a:spcAft>
+                <a:spcPts val="800"/>
+              </a:spcAft>
+              <a:buNone/>
+            </a:pPr>
+            <a:r>
+              <a:rPr lang="en-US" sz="3600" i="1" dirty="0">
+                <a:solidFill>
+                  <a:srgbClr val="111111"/>
+                </a:solidFill>
+                <a:latin typeface="Times New Roman" pitchFamily="34" charset="0"/>
+                <a:ea typeface="Times New Roman" pitchFamily="34" charset="-122"/>
+                <a:cs typeface="Times New Roman" pitchFamily="34" charset="-120"/>
+              </a:rPr>
+              <a:t>The formal sector has the following characteristics:</a:t>
+            </a:r>
+            <a:endParaRPr lang="en-US" sz="3600" dirty="0"/>
+          </a:p>
+          <a:p>
+            <a:pPr algn="l" marL="342900" indent="-342900">
+              <a:spcAft>
+                <a:spcPts val="800"/>
+              </a:spcAft>
+              <a:buSzPct val="100000"/>
+              <a:buChar char="•"/>
+            </a:pPr>
+            <a:r>
+              <a:rPr lang="en-US" sz="3600" b="1" dirty="0">
+                <a:solidFill>
+                  <a:srgbClr val="111111"/>
+                </a:solidFill>
+                <a:latin typeface="Times New Roman" pitchFamily="34" charset="0"/>
+                <a:ea typeface="Times New Roman" pitchFamily="34" charset="-122"/>
+                <a:cs typeface="Times New Roman" pitchFamily="34" charset="-120"/>
+              </a:rPr>
+              <a:t>Registered: </a:t>
+            </a:r>
+            <a:pPr algn="l" marL="342900" indent="-342900">
+              <a:spcAft>
+                <a:spcPts val="800"/>
+              </a:spcAft>
+              <a:buSzPct val="100000"/>
+              <a:buChar char="•"/>
+            </a:pPr>
+            <a:r>
+              <a:rPr lang="en-US" sz="3600" dirty="0">
+                <a:solidFill>
+                  <a:srgbClr val="111111"/>
+                </a:solidFill>
+                <a:latin typeface="Times New Roman" pitchFamily="34" charset="0"/>
+                <a:ea typeface="Times New Roman" pitchFamily="34" charset="-122"/>
+                <a:cs typeface="Times New Roman" pitchFamily="34" charset="-120"/>
+              </a:rPr>
+              <a:t>Businesses are registered and pay taxes.</a:t>
+            </a:r>
+            <a:endParaRPr lang="en-US" sz="3600" dirty="0"/>
+          </a:p>
+        </p:txBody>
+      </p:sp>
       <p:pic>
         <p:nvPicPr>
-          <p:cNvPr id="3" name="Image 0" descr="/home/claude/f4/img/minesec_sheet.png">    </p:cNvPr>
+          <p:cNvPr id="5" name="Image 0" descr="/home/claude/f4/img/v2/f2t_bank.jpg">    </p:cNvPr>
           <p:cNvPicPr>
             <a:picLocks noChangeAspect="1"/>
           </p:cNvPicPr>
@@ -14022,8 +14022,8 @@
         </p:blipFill>
         <p:spPr>
           <a:xfrm>
-            <a:off x="0" y="658368"/>
-            <a:ext cx="2468880" cy="5833872"/>
+            <a:off x="5349240" y="2071212"/>
+            <a:ext cx="6659575" cy="3693983"/>
           </a:xfrm>
           <a:prstGeom prst="rect">
             <a:avLst/>
@@ -14032,14 +14032,14 @@
       </p:pic>
       <p:sp>
         <p:nvSpPr>
-          <p:cNvPr id="4" name="Text 1"/>
+          <p:cNvPr id="6" name="Text 3"/>
           <p:cNvSpPr/>
           <p:nvPr/>
         </p:nvSpPr>
         <p:spPr>
           <a:xfrm>
-            <a:off x="2697480" y="1005840"/>
-            <a:ext cx="9174175" cy="731520"/>
+            <a:off x="5349240" y="6089904"/>
+            <a:ext cx="6659575" cy="347472"/>
           </a:xfrm>
           <a:prstGeom prst="rect">
             <a:avLst/>
@@ -14048,142 +14048,24 @@
           <a:ln/>
         </p:spPr>
         <p:txBody>
-          <a:bodyPr wrap="square" lIns="0" tIns="0" rIns="0" bIns="0" rtlCol="0" anchor="ctr">
-            <a:normAutofit/>
-          </a:bodyPr>
+          <a:bodyPr wrap="square" lIns="0" tIns="0" rIns="0" bIns="0" rtlCol="0" anchor="ctr"/>
           <a:lstStyle/>
           <a:p>
             <a:pPr algn="ctr" indent="0" marL="0">
               <a:buNone/>
             </a:pPr>
             <a:r>
-              <a:rPr lang="en-US" sz="3600" b="1" dirty="0">
-                <a:solidFill>
-                  <a:srgbClr val="990011"/>
+              <a:rPr lang="en-US" sz="1600" i="1" dirty="0">
+                <a:solidFill>
+                  <a:srgbClr val="555555"/>
                 </a:solidFill>
                 <a:latin typeface="Times New Roman" pitchFamily="34" charset="0"/>
                 <a:ea typeface="Times New Roman" pitchFamily="34" charset="-122"/>
                 <a:cs typeface="Times New Roman" pitchFamily="34" charset="-120"/>
               </a:rPr>
-              <a:t>DEFINITIONS</a:t>
-            </a:r>
-            <a:endParaRPr lang="en-US" sz="3600" dirty="0"/>
-          </a:p>
-        </p:txBody>
-      </p:sp>
-      <p:sp>
-        <p:nvSpPr>
-          <p:cNvPr id="5" name="Text 2"/>
-          <p:cNvSpPr/>
-          <p:nvPr/>
-        </p:nvSpPr>
-        <p:spPr>
-          <a:xfrm>
-            <a:off x="2697480" y="1783080"/>
-            <a:ext cx="9174175" cy="4663440"/>
-          </a:xfrm>
-          <a:prstGeom prst="rect">
-            <a:avLst/>
-          </a:prstGeom>
-          <a:noFill/>
-          <a:ln/>
-        </p:spPr>
-        <p:txBody>
-          <a:bodyPr wrap="square" lIns="0" tIns="0" rIns="0" bIns="0" rtlCol="0" anchor="t"/>
-          <a:lstStyle/>
-          <a:p>
-            <a:pPr algn="l" indent="0" marL="0">
-              <a:spcAft>
-                <a:spcPts val="800"/>
-              </a:spcAft>
-              <a:buNone/>
-            </a:pPr>
-            <a:r>
-              <a:rPr lang="en-US" sz="4000" i="1" dirty="0">
-                <a:solidFill>
-                  <a:srgbClr val="111111"/>
-                </a:solidFill>
-                <a:latin typeface="Times New Roman" pitchFamily="34" charset="0"/>
-                <a:ea typeface="Times New Roman" pitchFamily="34" charset="-122"/>
-                <a:cs typeface="Times New Roman" pitchFamily="34" charset="-120"/>
-              </a:rPr>
-              <a:t>The key terms of this lesson are defined as follows:</a:t>
-            </a:r>
-            <a:endParaRPr lang="en-US" sz="4000" dirty="0"/>
-          </a:p>
-          <a:p>
-            <a:pPr algn="l" indent="0" marL="0">
-              <a:spcAft>
-                <a:spcPts val="800"/>
-              </a:spcAft>
-              <a:buNone/>
-            </a:pPr>
-            <a:r>
-              <a:rPr lang="en-US" sz="4000" b="1" dirty="0">
-                <a:solidFill>
-                  <a:srgbClr val="111111"/>
-                </a:solidFill>
-                <a:latin typeface="Times New Roman" pitchFamily="34" charset="0"/>
-                <a:ea typeface="Times New Roman" pitchFamily="34" charset="-122"/>
-                <a:cs typeface="Times New Roman" pitchFamily="34" charset="-120"/>
-              </a:rPr>
-              <a:t>Formal sector: </a:t>
-            </a:r>
-            <a:pPr algn="l" indent="0" marL="0">
-              <a:spcAft>
-                <a:spcPts val="800"/>
-              </a:spcAft>
-              <a:buNone/>
-            </a:pPr>
-            <a:r>
-              <a:rPr lang="en-US" sz="4000" dirty="0">
-                <a:solidFill>
-                  <a:srgbClr val="111111"/>
-                </a:solidFill>
-                <a:latin typeface="Times New Roman" pitchFamily="34" charset="0"/>
-                <a:ea typeface="Times New Roman" pitchFamily="34" charset="-122"/>
-                <a:cs typeface="Times New Roman" pitchFamily="34" charset="-120"/>
-              </a:rPr>
-              <a:t>It is work that is registered with the state and pays taxes.</a:t>
-            </a:r>
-            <a:endParaRPr lang="en-US" sz="4000" dirty="0"/>
-          </a:p>
-          <a:p>
-            <a:pPr algn="l" indent="0" marL="0">
-              <a:spcAft>
-                <a:spcPts val="800"/>
-              </a:spcAft>
-              <a:buNone/>
-            </a:pPr>
-            <a:r>
-              <a:rPr lang="en-US" sz="4000" b="1" dirty="0">
-                <a:solidFill>
-                  <a:srgbClr val="111111"/>
-                </a:solidFill>
-                <a:latin typeface="Times New Roman" pitchFamily="34" charset="0"/>
-                <a:ea typeface="Times New Roman" pitchFamily="34" charset="-122"/>
-                <a:cs typeface="Times New Roman" pitchFamily="34" charset="-120"/>
-              </a:rPr>
-              <a:t>Informal sector: </a:t>
-            </a:r>
-            <a:pPr algn="l" indent="0" marL="0">
-              <a:spcAft>
-                <a:spcPts val="800"/>
-              </a:spcAft>
-              <a:buNone/>
-            </a:pPr>
-            <a:r>
-              <a:rPr lang="en-US" sz="4000" dirty="0">
-                <a:solidFill>
-                  <a:srgbClr val="111111"/>
-                </a:solidFill>
-                <a:latin typeface="Times New Roman" pitchFamily="34" charset="0"/>
-                <a:ea typeface="Times New Roman" pitchFamily="34" charset="-122"/>
-                <a:cs typeface="Times New Roman" pitchFamily="34" charset="-120"/>
-              </a:rPr>
-              <a:t>It is small work that is not registered with the state.</a:t>
-            </a:r>
-            <a:endParaRPr lang="en-US" sz="4000" dirty="0"/>
+              <a:t>Illustration: a bank</a:t>
+            </a:r>
+            <a:endParaRPr lang="en-US" sz="1600" dirty="0"/>
           </a:p>
         </p:txBody>
       </p:sp>
@@ -14316,7 +14198,7 @@
         <p:spPr>
           <a:xfrm>
             <a:off x="0" y="658368"/>
-            <a:ext cx="5120640" cy="5833872"/>
+            <a:ext cx="2468880" cy="5833872"/>
           </a:xfrm>
           <a:prstGeom prst="rect">
             <a:avLst/>
@@ -14331,8 +14213,8 @@
         </p:nvSpPr>
         <p:spPr>
           <a:xfrm>
-            <a:off x="5349240" y="1005840"/>
-            <a:ext cx="6522415" cy="731520"/>
+            <a:off x="2697480" y="1005840"/>
+            <a:ext cx="9174175" cy="731520"/>
           </a:xfrm>
           <a:prstGeom prst="rect">
             <a:avLst/>
@@ -14358,7 +14240,7 @@
                 <a:ea typeface="Times New Roman" pitchFamily="34" charset="-122"/>
                 <a:cs typeface="Times New Roman" pitchFamily="34" charset="-120"/>
               </a:rPr>
-              <a:t>DEFINITIONS (continued)</a:t>
+              <a:t>1. The Formal Sector</a:t>
             </a:r>
             <a:endParaRPr lang="en-US" sz="3600" dirty="0"/>
           </a:p>
@@ -14372,8 +14254,8 @@
         </p:nvSpPr>
         <p:spPr>
           <a:xfrm>
-            <a:off x="5349240" y="1783080"/>
-            <a:ext cx="6522415" cy="4663440"/>
+            <a:off x="2697480" y="1783080"/>
+            <a:ext cx="9174175" cy="4663440"/>
           </a:xfrm>
           <a:prstGeom prst="rect">
             <a:avLst/>
@@ -14385,11 +14267,12 @@
           <a:bodyPr wrap="square" lIns="0" tIns="0" rIns="0" bIns="0" rtlCol="0" anchor="t"/>
           <a:lstStyle/>
           <a:p>
-            <a:pPr algn="l" indent="0" marL="0">
+            <a:pPr algn="l" marL="342900" indent="-342900">
               <a:spcAft>
                 <a:spcPts val="800"/>
               </a:spcAft>
-              <a:buNone/>
+              <a:buSzPct val="100000"/>
+              <a:buChar char="•"/>
             </a:pPr>
             <a:r>
               <a:rPr lang="en-US" sz="4000" b="1" dirty="0">
@@ -14400,13 +14283,14 @@
                 <a:ea typeface="Times New Roman" pitchFamily="34" charset="-122"/>
                 <a:cs typeface="Times New Roman" pitchFamily="34" charset="-120"/>
               </a:rPr>
-              <a:t>Pension: </a:t>
-            </a:r>
-            <a:pPr algn="l" indent="0" marL="0">
+              <a:t>Contracts and salaries: </a:t>
+            </a:r>
+            <a:pPr algn="l" marL="342900" indent="-342900">
               <a:spcAft>
                 <a:spcPts val="800"/>
               </a:spcAft>
-              <a:buNone/>
+              <a:buSzPct val="100000"/>
+              <a:buChar char="•"/>
             </a:pPr>
             <a:r>
               <a:rPr lang="en-US" sz="4000" dirty="0">
@@ -14417,7 +14301,85 @@
                 <a:ea typeface="Times New Roman" pitchFamily="34" charset="-122"/>
                 <a:cs typeface="Times New Roman" pitchFamily="34" charset="-120"/>
               </a:rPr>
-              <a:t>It is money paid to a worker after retirement.</a:t>
+              <a:t>Workers have contracts and monthly salaries.</a:t>
+            </a:r>
+            <a:endParaRPr lang="en-US" sz="4000" dirty="0"/>
+          </a:p>
+          <a:p>
+            <a:pPr algn="l" marL="342900" indent="-342900">
+              <a:spcAft>
+                <a:spcPts val="800"/>
+              </a:spcAft>
+              <a:buSzPct val="100000"/>
+              <a:buChar char="•"/>
+            </a:pPr>
+            <a:r>
+              <a:rPr lang="en-US" sz="4000" b="1" dirty="0">
+                <a:solidFill>
+                  <a:srgbClr val="111111"/>
+                </a:solidFill>
+                <a:latin typeface="Times New Roman" pitchFamily="34" charset="0"/>
+                <a:ea typeface="Times New Roman" pitchFamily="34" charset="-122"/>
+                <a:cs typeface="Times New Roman" pitchFamily="34" charset="-120"/>
+              </a:rPr>
+              <a:t>Social security: </a:t>
+            </a:r>
+            <a:pPr algn="l" marL="342900" indent="-342900">
+              <a:spcAft>
+                <a:spcPts val="800"/>
+              </a:spcAft>
+              <a:buSzPct val="100000"/>
+              <a:buChar char="•"/>
+            </a:pPr>
+            <a:r>
+              <a:rPr lang="en-US" sz="4000" dirty="0">
+                <a:solidFill>
+                  <a:srgbClr val="111111"/>
+                </a:solidFill>
+                <a:latin typeface="Times New Roman" pitchFamily="34" charset="0"/>
+                <a:ea typeface="Times New Roman" pitchFamily="34" charset="-122"/>
+                <a:cs typeface="Times New Roman" pitchFamily="34" charset="-120"/>
+              </a:rPr>
+              <a:t>Workers are insured by the CNPS and get a pension.</a:t>
+            </a:r>
+            <a:endParaRPr lang="en-US" sz="4000" dirty="0"/>
+          </a:p>
+          <a:p>
+            <a:pPr algn="l" marL="342900" indent="-342900">
+              <a:spcAft>
+                <a:spcPts val="800"/>
+              </a:spcAft>
+              <a:buSzPct val="100000"/>
+              <a:buChar char="•"/>
+            </a:pPr>
+            <a:r>
+              <a:rPr lang="en-US" sz="4000" b="1" dirty="0">
+                <a:solidFill>
+                  <a:srgbClr val="111111"/>
+                </a:solidFill>
+                <a:latin typeface="Times New Roman" pitchFamily="34" charset="0"/>
+                <a:ea typeface="Times New Roman" pitchFamily="34" charset="-122"/>
+                <a:cs typeface="Times New Roman" pitchFamily="34" charset="-120"/>
+              </a:rPr>
+              <a:t>Examples: </a:t>
+            </a:r>
+            <a:pPr algn="l" marL="342900" indent="-342900">
+              <a:spcAft>
+                <a:spcPts val="800"/>
+              </a:spcAft>
+              <a:buSzPct val="100000"/>
+              <a:buChar char="•"/>
+            </a:pPr>
+            <a:r>
+              <a:rPr lang="en-US" sz="4000" dirty="0">
+                <a:solidFill>
+                  <a:srgbClr val="111111"/>
+                </a:solidFill>
+                <a:latin typeface="Times New Roman" pitchFamily="34" charset="0"/>
+                <a:ea typeface="Times New Roman" pitchFamily="34" charset="-122"/>
+                <a:cs typeface="Times New Roman" pitchFamily="34" charset="-120"/>
+              </a:rPr>
+              <a:t>Banks, SODECOTON, CICAM, schools and hospitals.</a:t>
             </a:r>
             <a:endParaRPr lang="en-US" sz="4000" dirty="0"/>
           </a:p>
@@ -14535,9 +14497,131 @@
           </a:p>
         </p:txBody>
       </p:sp>
+      <p:sp>
+        <p:nvSpPr>
+          <p:cNvPr id="3" name="Text 1"/>
+          <p:cNvSpPr/>
+          <p:nvPr/>
+        </p:nvSpPr>
+        <p:spPr>
+          <a:xfrm>
+            <a:off x="365760" y="1005840"/>
+            <a:ext cx="11460175" cy="731520"/>
+          </a:xfrm>
+          <a:prstGeom prst="rect">
+            <a:avLst/>
+          </a:prstGeom>
+          <a:noFill/>
+          <a:ln/>
+        </p:spPr>
+        <p:txBody>
+          <a:bodyPr wrap="square" lIns="0" tIns="0" rIns="0" bIns="0" rtlCol="0" anchor="ctr">
+            <a:normAutofit/>
+          </a:bodyPr>
+          <a:lstStyle/>
+          <a:p>
+            <a:pPr algn="ctr" indent="0" marL="0">
+              <a:buNone/>
+            </a:pPr>
+            <a:r>
+              <a:rPr lang="en-US" sz="3600" b="1" dirty="0">
+                <a:solidFill>
+                  <a:srgbClr val="990011"/>
+                </a:solidFill>
+                <a:latin typeface="Times New Roman" pitchFamily="34" charset="0"/>
+                <a:ea typeface="Times New Roman" pitchFamily="34" charset="-122"/>
+                <a:cs typeface="Times New Roman" pitchFamily="34" charset="-120"/>
+              </a:rPr>
+              <a:t>2. The Informal Sector</a:t>
+            </a:r>
+            <a:endParaRPr lang="en-US" sz="3600" dirty="0"/>
+          </a:p>
+        </p:txBody>
+      </p:sp>
+      <p:sp>
+        <p:nvSpPr>
+          <p:cNvPr id="4" name="Text 2"/>
+          <p:cNvSpPr/>
+          <p:nvPr/>
+        </p:nvSpPr>
+        <p:spPr>
+          <a:xfrm>
+            <a:off x="365760" y="1783080"/>
+            <a:ext cx="4846320" cy="4617720"/>
+          </a:xfrm>
+          <a:prstGeom prst="rect">
+            <a:avLst/>
+          </a:prstGeom>
+          <a:noFill/>
+          <a:ln/>
+        </p:spPr>
+        <p:txBody>
+          <a:bodyPr wrap="square" lIns="0" tIns="0" rIns="0" bIns="0" rtlCol="0" anchor="t"/>
+          <a:lstStyle/>
+          <a:p>
+            <a:pPr algn="l" indent="0" marL="0">
+              <a:spcAft>
+                <a:spcPts val="800"/>
+              </a:spcAft>
+              <a:buNone/>
+            </a:pPr>
+            <a:r>
+              <a:rPr lang="en-US" sz="3600" i="1" dirty="0">
+                <a:solidFill>
+                  <a:srgbClr val="111111"/>
+                </a:solidFill>
+                <a:latin typeface="Times New Roman" pitchFamily="34" charset="0"/>
+                <a:ea typeface="Times New Roman" pitchFamily="34" charset="-122"/>
+                <a:cs typeface="Times New Roman" pitchFamily="34" charset="-120"/>
+              </a:rPr>
+              <a:t>The informal sector has the following characteristics:</a:t>
+            </a:r>
+            <a:endParaRPr lang="en-US" sz="3600" dirty="0"/>
+          </a:p>
+          <a:p>
+            <a:pPr algn="l" marL="342900" indent="-342900">
+              <a:spcAft>
+                <a:spcPts val="800"/>
+              </a:spcAft>
+              <a:buSzPct val="100000"/>
+              <a:buChar char="•"/>
+            </a:pPr>
+            <a:r>
+              <a:rPr lang="en-US" sz="3600" b="1" dirty="0">
+                <a:solidFill>
+                  <a:srgbClr val="111111"/>
+                </a:solidFill>
+                <a:latin typeface="Times New Roman" pitchFamily="34" charset="0"/>
+                <a:ea typeface="Times New Roman" pitchFamily="34" charset="-122"/>
+                <a:cs typeface="Times New Roman" pitchFamily="34" charset="-120"/>
+              </a:rPr>
+              <a:t>Not registered: </a:t>
+            </a:r>
+            <a:pPr algn="l" marL="342900" indent="-342900">
+              <a:spcAft>
+                <a:spcPts val="800"/>
+              </a:spcAft>
+              <a:buSzPct val="100000"/>
+              <a:buChar char="•"/>
+            </a:pPr>
+            <a:r>
+              <a:rPr lang="en-US" sz="3600" dirty="0">
+                <a:solidFill>
+                  <a:srgbClr val="111111"/>
+                </a:solidFill>
+                <a:latin typeface="Times New Roman" pitchFamily="34" charset="0"/>
+                <a:ea typeface="Times New Roman" pitchFamily="34" charset="-122"/>
+                <a:cs typeface="Times New Roman" pitchFamily="34" charset="-120"/>
+              </a:rPr>
+              <a:t>Workers pay few or no taxes.</a:t>
+            </a:r>
+            <a:endParaRPr lang="en-US" sz="3600" dirty="0"/>
+          </a:p>
+        </p:txBody>
+      </p:sp>
       <p:pic>
         <p:nvPicPr>
-          <p:cNvPr id="3" name="Image 0" descr="/home/claude/f4/img/minesec_sheet.png">    </p:cNvPr>
+          <p:cNvPr id="5" name="Image 0" descr="/home/claude/f4/img/v2/f2t_moto_taxi.jpg">    </p:cNvPr>
           <p:cNvPicPr>
             <a:picLocks noChangeAspect="1"/>
           </p:cNvPicPr>
@@ -14551,8 +14635,8 @@
         </p:blipFill>
         <p:spPr>
           <a:xfrm>
-            <a:off x="0" y="658368"/>
-            <a:ext cx="5120640" cy="5833872"/>
+            <a:off x="5349240" y="2071212"/>
+            <a:ext cx="6659575" cy="3693983"/>
           </a:xfrm>
           <a:prstGeom prst="rect">
             <a:avLst/>
@@ -14561,14 +14645,14 @@
       </p:pic>
       <p:sp>
         <p:nvSpPr>
-          <p:cNvPr id="4" name="Text 1"/>
+          <p:cNvPr id="6" name="Text 3"/>
           <p:cNvSpPr/>
           <p:nvPr/>
         </p:nvSpPr>
         <p:spPr>
           <a:xfrm>
-            <a:off x="5349240" y="1005840"/>
-            <a:ext cx="6522415" cy="731520"/>
+            <a:off x="5349240" y="6089904"/>
+            <a:ext cx="6659575" cy="347472"/>
           </a:xfrm>
           <a:prstGeom prst="rect">
             <a:avLst/>
@@ -14577,142 +14661,24 @@
           <a:ln/>
         </p:spPr>
         <p:txBody>
-          <a:bodyPr wrap="square" lIns="0" tIns="0" rIns="0" bIns="0" rtlCol="0" anchor="ctr">
-            <a:normAutofit/>
-          </a:bodyPr>
+          <a:bodyPr wrap="square" lIns="0" tIns="0" rIns="0" bIns="0" rtlCol="0" anchor="ctr"/>
           <a:lstStyle/>
           <a:p>
             <a:pPr algn="ctr" indent="0" marL="0">
               <a:buNone/>
             </a:pPr>
             <a:r>
-              <a:rPr lang="en-US" sz="3600" b="1" dirty="0">
-                <a:solidFill>
-                  <a:srgbClr val="990011"/>
+              <a:rPr lang="en-US" sz="1600" i="1" dirty="0">
+                <a:solidFill>
+                  <a:srgbClr val="555555"/>
                 </a:solidFill>
                 <a:latin typeface="Times New Roman" pitchFamily="34" charset="0"/>
                 <a:ea typeface="Times New Roman" pitchFamily="34" charset="-122"/>
                 <a:cs typeface="Times New Roman" pitchFamily="34" charset="-120"/>
               </a:rPr>
-              <a:t>1. The Formal Sector</a:t>
-            </a:r>
-            <a:endParaRPr lang="en-US" sz="3600" dirty="0"/>
-          </a:p>
-        </p:txBody>
-      </p:sp>
-      <p:sp>
-        <p:nvSpPr>
-          <p:cNvPr id="5" name="Text 2"/>
-          <p:cNvSpPr/>
-          <p:nvPr/>
-        </p:nvSpPr>
-        <p:spPr>
-          <a:xfrm>
-            <a:off x="5349240" y="1783080"/>
-            <a:ext cx="6522415" cy="4663440"/>
-          </a:xfrm>
-          <a:prstGeom prst="rect">
-            <a:avLst/>
-          </a:prstGeom>
-          <a:noFill/>
-          <a:ln/>
-        </p:spPr>
-        <p:txBody>
-          <a:bodyPr wrap="square" lIns="0" tIns="0" rIns="0" bIns="0" rtlCol="0" anchor="t"/>
-          <a:lstStyle/>
-          <a:p>
-            <a:pPr algn="l" indent="0" marL="0">
-              <a:spcAft>
-                <a:spcPts val="800"/>
-              </a:spcAft>
-              <a:buNone/>
-            </a:pPr>
-            <a:r>
-              <a:rPr lang="en-US" sz="4000" i="1" dirty="0">
-                <a:solidFill>
-                  <a:srgbClr val="111111"/>
-                </a:solidFill>
-                <a:latin typeface="Times New Roman" pitchFamily="34" charset="0"/>
-                <a:ea typeface="Times New Roman" pitchFamily="34" charset="-122"/>
-                <a:cs typeface="Times New Roman" pitchFamily="34" charset="-120"/>
-              </a:rPr>
-              <a:t>The formal sector has the following characteristics:</a:t>
-            </a:r>
-            <a:endParaRPr lang="en-US" sz="4000" dirty="0"/>
-          </a:p>
-          <a:p>
-            <a:pPr algn="l" indent="0" marL="0">
-              <a:spcAft>
-                <a:spcPts val="800"/>
-              </a:spcAft>
-              <a:buNone/>
-            </a:pPr>
-            <a:r>
-              <a:rPr lang="en-US" sz="4000" b="1" dirty="0">
-                <a:solidFill>
-                  <a:srgbClr val="111111"/>
-                </a:solidFill>
-                <a:latin typeface="Times New Roman" pitchFamily="34" charset="0"/>
-                <a:ea typeface="Times New Roman" pitchFamily="34" charset="-122"/>
-                <a:cs typeface="Times New Roman" pitchFamily="34" charset="-120"/>
-              </a:rPr>
-              <a:t>Registration: </a:t>
-            </a:r>
-            <a:pPr algn="l" indent="0" marL="0">
-              <a:spcAft>
-                <a:spcPts val="800"/>
-              </a:spcAft>
-              <a:buNone/>
-            </a:pPr>
-            <a:r>
-              <a:rPr lang="en-US" sz="4000" dirty="0">
-                <a:solidFill>
-                  <a:srgbClr val="111111"/>
-                </a:solidFill>
-                <a:latin typeface="Times New Roman" pitchFamily="34" charset="0"/>
-                <a:ea typeface="Times New Roman" pitchFamily="34" charset="-122"/>
-                <a:cs typeface="Times New Roman" pitchFamily="34" charset="-120"/>
-              </a:rPr>
-              <a:t>Companies are registered and pay taxes.</a:t>
-            </a:r>
-            <a:endParaRPr lang="en-US" sz="4000" dirty="0"/>
-          </a:p>
-          <a:p>
-            <a:pPr algn="l" indent="0" marL="0">
-              <a:spcAft>
-                <a:spcPts val="800"/>
-              </a:spcAft>
-              <a:buNone/>
-            </a:pPr>
-            <a:r>
-              <a:rPr lang="en-US" sz="4000" b="1" dirty="0">
-                <a:solidFill>
-                  <a:srgbClr val="111111"/>
-                </a:solidFill>
-                <a:latin typeface="Times New Roman" pitchFamily="34" charset="0"/>
-                <a:ea typeface="Times New Roman" pitchFamily="34" charset="-122"/>
-                <a:cs typeface="Times New Roman" pitchFamily="34" charset="-120"/>
-              </a:rPr>
-              <a:t>Contracts: </a:t>
-            </a:r>
-            <a:pPr algn="l" indent="0" marL="0">
-              <a:spcAft>
-                <a:spcPts val="800"/>
-              </a:spcAft>
-              <a:buNone/>
-            </a:pPr>
-            <a:r>
-              <a:rPr lang="en-US" sz="4000" dirty="0">
-                <a:solidFill>
-                  <a:srgbClr val="111111"/>
-                </a:solidFill>
-                <a:latin typeface="Times New Roman" pitchFamily="34" charset="0"/>
-                <a:ea typeface="Times New Roman" pitchFamily="34" charset="-122"/>
-                <a:cs typeface="Times New Roman" pitchFamily="34" charset="-120"/>
-              </a:rPr>
-              <a:t>Workers have contracts and receive a monthly salary.</a:t>
-            </a:r>
-            <a:endParaRPr lang="en-US" sz="4000" dirty="0"/>
+              <a:t>Illustration: moto-taxis</a:t>
+            </a:r>
+            <a:endParaRPr lang="en-US" sz="1600" dirty="0"/>
           </a:p>
         </p:txBody>
       </p:sp>
@@ -14887,7 +14853,7 @@
                 <a:ea typeface="Times New Roman" pitchFamily="34" charset="-122"/>
                 <a:cs typeface="Times New Roman" pitchFamily="34" charset="-120"/>
               </a:rPr>
-              <a:t>1. The Formal Sector (continued)</a:t>
+              <a:t>2. The Informal Sector</a:t>
             </a:r>
             <a:endParaRPr lang="en-US" sz="3600" dirty="0"/>
           </a:p>
@@ -14914,11 +14880,12 @@
           <a:bodyPr wrap="square" lIns="0" tIns="0" rIns="0" bIns="0" rtlCol="0" anchor="t"/>
           <a:lstStyle/>
           <a:p>
-            <a:pPr algn="l" indent="0" marL="0">
+            <a:pPr algn="l" marL="342900" indent="-342900">
               <a:spcAft>
                 <a:spcPts val="800"/>
               </a:spcAft>
-              <a:buNone/>
+              <a:buSzPct val="100000"/>
+              <a:buChar char="•"/>
             </a:pPr>
             <a:r>
               <a:rPr lang="en-US" sz="4000" b="1" dirty="0">
@@ -14929,13 +14896,14 @@
                 <a:ea typeface="Times New Roman" pitchFamily="34" charset="-122"/>
                 <a:cs typeface="Times New Roman" pitchFamily="34" charset="-120"/>
               </a:rPr>
-              <a:t>Protection: </a:t>
-            </a:r>
-            <a:pPr algn="l" indent="0" marL="0">
+              <a:t>No contract: </a:t>
+            </a:r>
+            <a:pPr algn="l" marL="342900" indent="-342900">
               <a:spcAft>
                 <a:spcPts val="800"/>
               </a:spcAft>
-              <a:buNone/>
+              <a:buSzPct val="100000"/>
+              <a:buChar char="•"/>
             </a:pPr>
             <a:r>
               <a:rPr lang="en-US" sz="4000" dirty="0">
@@ -14946,16 +14914,17 @@
                 <a:ea typeface="Times New Roman" pitchFamily="34" charset="-122"/>
                 <a:cs typeface="Times New Roman" pitchFamily="34" charset="-120"/>
               </a:rPr>
-              <a:t>Workers are insured by the CNPS and receive a pension.</a:t>
+              <a:t>Income changes every day.</a:t>
             </a:r>
             <a:endParaRPr lang="en-US" sz="4000" dirty="0"/>
           </a:p>
           <a:p>
-            <a:pPr algn="l" indent="0" marL="0">
+            <a:pPr algn="l" marL="342900" indent="-342900">
               <a:spcAft>
                 <a:spcPts val="800"/>
               </a:spcAft>
-              <a:buNone/>
+              <a:buSzPct val="100000"/>
+              <a:buChar char="•"/>
             </a:pPr>
             <a:r>
               <a:rPr lang="en-US" sz="4000" b="1" dirty="0">
@@ -14966,13 +14935,14 @@
                 <a:ea typeface="Times New Roman" pitchFamily="34" charset="-122"/>
                 <a:cs typeface="Times New Roman" pitchFamily="34" charset="-120"/>
               </a:rPr>
-              <a:t>Examples: </a:t>
-            </a:r>
-            <a:pPr algn="l" indent="0" marL="0">
+              <a:t>Small capital: </a:t>
+            </a:r>
+            <a:pPr algn="l" marL="342900" indent="-342900">
               <a:spcAft>
                 <a:spcPts val="800"/>
               </a:spcAft>
-              <a:buNone/>
+              <a:buSzPct val="100000"/>
+              <a:buChar char="•"/>
             </a:pPr>
             <a:r>
               <a:rPr lang="en-US" sz="4000" dirty="0">
@@ -14983,7 +14953,7 @@
                 <a:ea typeface="Times New Roman" pitchFamily="34" charset="-122"/>
                 <a:cs typeface="Times New Roman" pitchFamily="34" charset="-120"/>
               </a:rPr>
-              <a:t>SODECOTON, banks, schools and hospitals are in the formal sector.</a:t>
+              <a:t>It needs little money to start.</a:t>
             </a:r>
             <a:endParaRPr lang="en-US" sz="4000" dirty="0"/>
           </a:p>
@@ -15320,9 +15290,111 @@
           </a:p>
         </p:txBody>
       </p:sp>
+      <p:sp>
+        <p:nvSpPr>
+          <p:cNvPr id="3" name="Text 1"/>
+          <p:cNvSpPr/>
+          <p:nvPr/>
+        </p:nvSpPr>
+        <p:spPr>
+          <a:xfrm>
+            <a:off x="365760" y="1005840"/>
+            <a:ext cx="11460175" cy="731520"/>
+          </a:xfrm>
+          <a:prstGeom prst="rect">
+            <a:avLst/>
+          </a:prstGeom>
+          <a:noFill/>
+          <a:ln/>
+        </p:spPr>
+        <p:txBody>
+          <a:bodyPr wrap="square" lIns="0" tIns="0" rIns="0" bIns="0" rtlCol="0" anchor="ctr">
+            <a:normAutofit/>
+          </a:bodyPr>
+          <a:lstStyle/>
+          <a:p>
+            <a:pPr algn="ctr" indent="0" marL="0">
+              <a:buNone/>
+            </a:pPr>
+            <a:r>
+              <a:rPr lang="en-US" sz="3600" b="1" dirty="0">
+                <a:solidFill>
+                  <a:srgbClr val="990011"/>
+                </a:solidFill>
+                <a:latin typeface="Times New Roman" pitchFamily="34" charset="0"/>
+                <a:ea typeface="Times New Roman" pitchFamily="34" charset="-122"/>
+                <a:cs typeface="Times New Roman" pitchFamily="34" charset="-120"/>
+              </a:rPr>
+              <a:t>2. The Informal Sector</a:t>
+            </a:r>
+            <a:endParaRPr lang="en-US" sz="3600" dirty="0"/>
+          </a:p>
+        </p:txBody>
+      </p:sp>
+      <p:sp>
+        <p:nvSpPr>
+          <p:cNvPr id="4" name="Text 2"/>
+          <p:cNvSpPr/>
+          <p:nvPr/>
+        </p:nvSpPr>
+        <p:spPr>
+          <a:xfrm>
+            <a:off x="365760" y="1783080"/>
+            <a:ext cx="4846320" cy="4617720"/>
+          </a:xfrm>
+          <a:prstGeom prst="rect">
+            <a:avLst/>
+          </a:prstGeom>
+          <a:noFill/>
+          <a:ln/>
+        </p:spPr>
+        <p:txBody>
+          <a:bodyPr wrap="square" lIns="0" tIns="0" rIns="0" bIns="0" rtlCol="0" anchor="t"/>
+          <a:lstStyle/>
+          <a:p>
+            <a:pPr algn="l" marL="342900" indent="-342900">
+              <a:spcAft>
+                <a:spcPts val="800"/>
+              </a:spcAft>
+              <a:buSzPct val="100000"/>
+              <a:buChar char="•"/>
+            </a:pPr>
+            <a:r>
+              <a:rPr lang="en-US" sz="3600" b="1" dirty="0">
+                <a:solidFill>
+                  <a:srgbClr val="111111"/>
+                </a:solidFill>
+                <a:latin typeface="Times New Roman" pitchFamily="34" charset="0"/>
+                <a:ea typeface="Times New Roman" pitchFamily="34" charset="-122"/>
+                <a:cs typeface="Times New Roman" pitchFamily="34" charset="-120"/>
+              </a:rPr>
+              <a:t>Examples: </a:t>
+            </a:r>
+            <a:pPr algn="l" marL="342900" indent="-342900">
+              <a:spcAft>
+                <a:spcPts val="800"/>
+              </a:spcAft>
+              <a:buSzPct val="100000"/>
+              <a:buChar char="•"/>
+            </a:pPr>
+            <a:r>
+              <a:rPr lang="en-US" sz="3600" dirty="0">
+                <a:solidFill>
+                  <a:srgbClr val="111111"/>
+                </a:solidFill>
+                <a:latin typeface="Times New Roman" pitchFamily="34" charset="0"/>
+                <a:ea typeface="Times New Roman" pitchFamily="34" charset="-122"/>
+                <a:cs typeface="Times New Roman" pitchFamily="34" charset="-120"/>
+              </a:rPr>
+              <a:t>Moto-taxis, street sellers, tailors and mechanics.</a:t>
+            </a:r>
+            <a:endParaRPr lang="en-US" sz="3600" dirty="0"/>
+          </a:p>
+        </p:txBody>
+      </p:sp>
       <p:pic>
         <p:nvPicPr>
-          <p:cNvPr id="3" name="Image 0" descr="/home/claude/f4/img/minesec_sheet.png">    </p:cNvPr>
+          <p:cNvPr id="5" name="Image 0" descr="/home/claude/f4/img/v2/f2t_street_vendor.jpg">    </p:cNvPr>
           <p:cNvPicPr>
             <a:picLocks noChangeAspect="1"/>
           </p:cNvPicPr>
@@ -15336,8 +15408,8 @@
         </p:blipFill>
         <p:spPr>
           <a:xfrm>
-            <a:off x="0" y="658368"/>
-            <a:ext cx="2468880" cy="5833872"/>
+            <a:off x="5349240" y="2071212"/>
+            <a:ext cx="6659575" cy="3693983"/>
           </a:xfrm>
           <a:prstGeom prst="rect">
             <a:avLst/>
@@ -15346,14 +15418,14 @@
       </p:pic>
       <p:sp>
         <p:nvSpPr>
-          <p:cNvPr id="4" name="Text 1"/>
+          <p:cNvPr id="6" name="Text 3"/>
           <p:cNvSpPr/>
           <p:nvPr/>
         </p:nvSpPr>
         <p:spPr>
           <a:xfrm>
-            <a:off x="2697480" y="1005840"/>
-            <a:ext cx="9174175" cy="731520"/>
+            <a:off x="5349240" y="6089904"/>
+            <a:ext cx="6659575" cy="347472"/>
           </a:xfrm>
           <a:prstGeom prst="rect">
             <a:avLst/>
@@ -15362,142 +15434,24 @@
           <a:ln/>
         </p:spPr>
         <p:txBody>
-          <a:bodyPr wrap="square" lIns="0" tIns="0" rIns="0" bIns="0" rtlCol="0" anchor="ctr">
-            <a:normAutofit/>
-          </a:bodyPr>
+          <a:bodyPr wrap="square" lIns="0" tIns="0" rIns="0" bIns="0" rtlCol="0" anchor="ctr"/>
           <a:lstStyle/>
           <a:p>
             <a:pPr algn="ctr" indent="0" marL="0">
               <a:buNone/>
             </a:pPr>
             <a:r>
-              <a:rPr lang="en-US" sz="3600" b="1" dirty="0">
-                <a:solidFill>
-                  <a:srgbClr val="990011"/>
+              <a:rPr lang="en-US" sz="1600" i="1" dirty="0">
+                <a:solidFill>
+                  <a:srgbClr val="555555"/>
                 </a:solidFill>
                 <a:latin typeface="Times New Roman" pitchFamily="34" charset="0"/>
                 <a:ea typeface="Times New Roman" pitchFamily="34" charset="-122"/>
                 <a:cs typeface="Times New Roman" pitchFamily="34" charset="-120"/>
               </a:rPr>
-              <a:t>2. The Informal Sector</a:t>
-            </a:r>
-            <a:endParaRPr lang="en-US" sz="3600" dirty="0"/>
-          </a:p>
-        </p:txBody>
-      </p:sp>
-      <p:sp>
-        <p:nvSpPr>
-          <p:cNvPr id="5" name="Text 2"/>
-          <p:cNvSpPr/>
-          <p:nvPr/>
-        </p:nvSpPr>
-        <p:spPr>
-          <a:xfrm>
-            <a:off x="2697480" y="1783080"/>
-            <a:ext cx="9174175" cy="4663440"/>
-          </a:xfrm>
-          <a:prstGeom prst="rect">
-            <a:avLst/>
-          </a:prstGeom>
-          <a:noFill/>
-          <a:ln/>
-        </p:spPr>
-        <p:txBody>
-          <a:bodyPr wrap="square" lIns="0" tIns="0" rIns="0" bIns="0" rtlCol="0" anchor="t"/>
-          <a:lstStyle/>
-          <a:p>
-            <a:pPr algn="l" indent="0" marL="0">
-              <a:spcAft>
-                <a:spcPts val="800"/>
-              </a:spcAft>
-              <a:buNone/>
-            </a:pPr>
-            <a:r>
-              <a:rPr lang="en-US" sz="4000" i="1" dirty="0">
-                <a:solidFill>
-                  <a:srgbClr val="111111"/>
-                </a:solidFill>
-                <a:latin typeface="Times New Roman" pitchFamily="34" charset="0"/>
-                <a:ea typeface="Times New Roman" pitchFamily="34" charset="-122"/>
-                <a:cs typeface="Times New Roman" pitchFamily="34" charset="-120"/>
-              </a:rPr>
-              <a:t>The informal sector is described as follows:</a:t>
-            </a:r>
-            <a:endParaRPr lang="en-US" sz="4000" dirty="0"/>
-          </a:p>
-          <a:p>
-            <a:pPr algn="l" indent="0" marL="0">
-              <a:spcAft>
-                <a:spcPts val="800"/>
-              </a:spcAft>
-              <a:buNone/>
-            </a:pPr>
-            <a:r>
-              <a:rPr lang="en-US" sz="4000" b="1" dirty="0">
-                <a:solidFill>
-                  <a:srgbClr val="111111"/>
-                </a:solidFill>
-                <a:latin typeface="Times New Roman" pitchFamily="34" charset="0"/>
-                <a:ea typeface="Times New Roman" pitchFamily="34" charset="-122"/>
-                <a:cs typeface="Times New Roman" pitchFamily="34" charset="-120"/>
-              </a:rPr>
-              <a:t>Examples: </a:t>
-            </a:r>
-            <a:pPr algn="l" indent="0" marL="0">
-              <a:spcAft>
-                <a:spcPts val="800"/>
-              </a:spcAft>
-              <a:buNone/>
-            </a:pPr>
-            <a:r>
-              <a:rPr lang="en-US" sz="4000" dirty="0">
-                <a:solidFill>
-                  <a:srgbClr val="111111"/>
-                </a:solidFill>
-                <a:latin typeface="Times New Roman" pitchFamily="34" charset="0"/>
-                <a:ea typeface="Times New Roman" pitchFamily="34" charset="-122"/>
-                <a:cs typeface="Times New Roman" pitchFamily="34" charset="-120"/>
-              </a:rPr>
-              <a:t>Moto-taxi drivers, street sellers and roadside mechanics work in the informal sector.</a:t>
-            </a:r>
-            <a:endParaRPr lang="en-US" sz="4000" dirty="0"/>
-          </a:p>
-          <a:p>
-            <a:pPr algn="l" indent="0" marL="0">
-              <a:spcAft>
-                <a:spcPts val="800"/>
-              </a:spcAft>
-              <a:buNone/>
-            </a:pPr>
-            <a:r>
-              <a:rPr lang="en-US" sz="4000" b="1" dirty="0">
-                <a:solidFill>
-                  <a:srgbClr val="111111"/>
-                </a:solidFill>
-                <a:latin typeface="Times New Roman" pitchFamily="34" charset="0"/>
-                <a:ea typeface="Times New Roman" pitchFamily="34" charset="-122"/>
-                <a:cs typeface="Times New Roman" pitchFamily="34" charset="-120"/>
-              </a:rPr>
-              <a:t>Importance: </a:t>
-            </a:r>
-            <a:pPr algn="l" indent="0" marL="0">
-              <a:spcAft>
-                <a:spcPts val="800"/>
-              </a:spcAft>
-              <a:buNone/>
-            </a:pPr>
-            <a:r>
-              <a:rPr lang="en-US" sz="4000" dirty="0">
-                <a:solidFill>
-                  <a:srgbClr val="111111"/>
-                </a:solidFill>
-                <a:latin typeface="Times New Roman" pitchFamily="34" charset="0"/>
-                <a:ea typeface="Times New Roman" pitchFamily="34" charset="-122"/>
-                <a:cs typeface="Times New Roman" pitchFamily="34" charset="-120"/>
-              </a:rPr>
-              <a:t>It gives work and income to most people in Cameroon.</a:t>
-            </a:r>
-            <a:endParaRPr lang="en-US" sz="4000" dirty="0"/>
+              <a:t>Illustration: a street seller</a:t>
+            </a:r>
+            <a:endParaRPr lang="en-US" sz="1600" dirty="0"/>
           </a:p>
         </p:txBody>
       </p:sp>
@@ -15607,7 +15561,7 @@
                 <a:ea typeface="Calibri" pitchFamily="34" charset="-122"/>
                 <a:cs typeface="Calibri" pitchFamily="34" charset="-120"/>
               </a:rPr>
-              <a:t>BOARD SUMMARY</a:t>
+              <a:t>FORMATIVE EVALUATION</a:t>
             </a:r>
             <a:endParaRPr lang="en-US" sz="1400" dirty="0"/>
           </a:p>
@@ -15672,7 +15626,7 @@
                 <a:ea typeface="Times New Roman" pitchFamily="34" charset="-122"/>
                 <a:cs typeface="Times New Roman" pitchFamily="34" charset="-120"/>
               </a:rPr>
-              <a:t>2. The Informal Sector (continued)</a:t>
+              <a:t>Evaluation 1</a:t>
             </a:r>
             <a:endParaRPr lang="en-US" sz="3600" dirty="0"/>
           </a:p>
@@ -15706,7 +15660,7 @@
               <a:buNone/>
             </a:pPr>
             <a:r>
-              <a:rPr lang="en-US" sz="4000" b="1" dirty="0">
+              <a:rPr lang="en-US" sz="4000" dirty="0">
                 <a:solidFill>
                   <a:srgbClr val="111111"/>
                 </a:solidFill>
@@ -15714,61 +15668,7 @@
                 <a:ea typeface="Times New Roman" pitchFamily="34" charset="-122"/>
                 <a:cs typeface="Times New Roman" pitchFamily="34" charset="-120"/>
               </a:rPr>
-              <a:t>Problems: </a:t>
-            </a:r>
-            <a:pPr algn="l" indent="0" marL="0">
-              <a:spcAft>
-                <a:spcPts val="800"/>
-              </a:spcAft>
-              <a:buNone/>
-            </a:pPr>
-            <a:r>
-              <a:rPr lang="en-US" sz="4000" dirty="0">
-                <a:solidFill>
-                  <a:srgbClr val="111111"/>
-                </a:solidFill>
-                <a:latin typeface="Times New Roman" pitchFamily="34" charset="0"/>
-                <a:ea typeface="Times New Roman" pitchFamily="34" charset="-122"/>
-                <a:cs typeface="Times New Roman" pitchFamily="34" charset="-120"/>
-              </a:rPr>
-              <a:t>Workers have no contract, no insurance and no pension.</a:t>
-            </a:r>
-            <a:endParaRPr lang="en-US" sz="4000" dirty="0"/>
-          </a:p>
-          <a:p>
-            <a:pPr algn="l" indent="0" marL="0">
-              <a:spcAft>
-                <a:spcPts val="800"/>
-              </a:spcAft>
-              <a:buNone/>
-            </a:pPr>
-            <a:r>
-              <a:rPr lang="en-US" sz="4000" b="1" dirty="0">
-                <a:solidFill>
-                  <a:srgbClr val="111111"/>
-                </a:solidFill>
-                <a:latin typeface="Times New Roman" pitchFamily="34" charset="0"/>
-                <a:ea typeface="Times New Roman" pitchFamily="34" charset="-122"/>
-                <a:cs typeface="Times New Roman" pitchFamily="34" charset="-120"/>
-              </a:rPr>
-              <a:t>Solutions: </a:t>
-            </a:r>
-            <a:pPr algn="l" indent="0" marL="0">
-              <a:spcAft>
-                <a:spcPts val="800"/>
-              </a:spcAft>
-              <a:buNone/>
-            </a:pPr>
-            <a:r>
-              <a:rPr lang="en-US" sz="4000" dirty="0">
-                <a:solidFill>
-                  <a:srgbClr val="111111"/>
-                </a:solidFill>
-                <a:latin typeface="Times New Roman" pitchFamily="34" charset="0"/>
-                <a:ea typeface="Times New Roman" pitchFamily="34" charset="-122"/>
-                <a:cs typeface="Times New Roman" pitchFamily="34" charset="-120"/>
-              </a:rPr>
-              <a:t>Workers can register their activity and join the CNPS.</a:t>
+              <a:t>What is the informal sector?</a:t>
             </a:r>
             <a:endParaRPr lang="en-US" sz="4000" dirty="0"/>
           </a:p>
@@ -15880,54 +15780,15 @@
                 <a:ea typeface="Calibri" pitchFamily="34" charset="-122"/>
                 <a:cs typeface="Calibri" pitchFamily="34" charset="-120"/>
               </a:rPr>
-              <a:t>BOARD SUMMARY</a:t>
+              <a:t>FORMATIVE EVALUATION</a:t>
             </a:r>
             <a:endParaRPr lang="en-US" sz="1400" dirty="0"/>
-          </a:p>
-        </p:txBody>
-      </p:sp>
-      <p:sp>
-        <p:nvSpPr>
-          <p:cNvPr id="3" name="Text 1"/>
-          <p:cNvSpPr/>
-          <p:nvPr/>
-        </p:nvSpPr>
-        <p:spPr>
-          <a:xfrm>
-            <a:off x="457200" y="1005840"/>
-            <a:ext cx="11277295" cy="731520"/>
-          </a:xfrm>
-          <a:prstGeom prst="rect">
-            <a:avLst/>
-          </a:prstGeom>
-          <a:noFill/>
-          <a:ln/>
-        </p:spPr>
-        <p:txBody>
-          <a:bodyPr wrap="square" lIns="0" tIns="0" rIns="0" bIns="0" rtlCol="0" anchor="ctr"/>
-          <a:lstStyle/>
-          <a:p>
-            <a:pPr algn="ctr" indent="0" marL="0">
-              <a:buNone/>
-            </a:pPr>
-            <a:r>
-              <a:rPr lang="en-US" sz="3600" b="1" dirty="0">
-                <a:solidFill>
-                  <a:srgbClr val="990011"/>
-                </a:solidFill>
-                <a:latin typeface="Times New Roman" pitchFamily="34" charset="0"/>
-                <a:ea typeface="Times New Roman" pitchFamily="34" charset="-122"/>
-                <a:cs typeface="Times New Roman" pitchFamily="34" charset="-120"/>
-              </a:rPr>
-              <a:t>2. The Informal Sector</a:t>
-            </a:r>
-            <a:endParaRPr lang="en-US" sz="3600" dirty="0"/>
           </a:p>
         </p:txBody>
       </p:sp>
       <p:pic>
         <p:nvPicPr>
-          <p:cNvPr id="4" name="Image 0" descr="/home/claude/f4/img/v2/formal_informal_big.png">    </p:cNvPr>
+          <p:cNvPr id="3" name="Image 0" descr="/home/claude/f4/img/minesec_sheet.png">    </p:cNvPr>
           <p:cNvPicPr>
             <a:picLocks noChangeAspect="1"/>
           </p:cNvPicPr>
@@ -15941,8 +15802,8 @@
         </p:blipFill>
         <p:spPr>
           <a:xfrm>
-            <a:off x="629930" y="1783080"/>
-            <a:ext cx="10931835" cy="4270248"/>
+            <a:off x="0" y="658368"/>
+            <a:ext cx="5120640" cy="5833872"/>
           </a:xfrm>
           <a:prstGeom prst="rect">
             <a:avLst/>
@@ -15951,14 +15812,14 @@
       </p:pic>
       <p:sp>
         <p:nvSpPr>
-          <p:cNvPr id="5" name="Text 2"/>
+          <p:cNvPr id="4" name="Text 1"/>
           <p:cNvSpPr/>
           <p:nvPr/>
         </p:nvSpPr>
         <p:spPr>
           <a:xfrm>
-            <a:off x="457200" y="6089904"/>
-            <a:ext cx="11277295" cy="347472"/>
+            <a:off x="5349240" y="1005840"/>
+            <a:ext cx="6522415" cy="731520"/>
           </a:xfrm>
           <a:prstGeom prst="rect">
             <a:avLst/>
@@ -15967,24 +15828,68 @@
           <a:ln/>
         </p:spPr>
         <p:txBody>
-          <a:bodyPr wrap="square" lIns="0" tIns="0" rIns="0" bIns="0" rtlCol="0" anchor="ctr"/>
+          <a:bodyPr wrap="square" lIns="0" tIns="0" rIns="0" bIns="0" rtlCol="0" anchor="ctr">
+            <a:normAutofit/>
+          </a:bodyPr>
           <a:lstStyle/>
           <a:p>
             <a:pPr algn="ctr" indent="0" marL="0">
               <a:buNone/>
             </a:pPr>
             <a:r>
-              <a:rPr lang="en-US" sz="1800" i="1" dirty="0">
-                <a:solidFill>
-                  <a:srgbClr val="555555"/>
+              <a:rPr lang="en-US" sz="3600" b="1" dirty="0">
+                <a:solidFill>
+                  <a:srgbClr val="990011"/>
                 </a:solidFill>
                 <a:latin typeface="Times New Roman" pitchFamily="34" charset="0"/>
                 <a:ea typeface="Times New Roman" pitchFamily="34" charset="-122"/>
                 <a:cs typeface="Times New Roman" pitchFamily="34" charset="-120"/>
               </a:rPr>
-              <a:t>Illustration: formal and informal sectors compared</a:t>
-            </a:r>
-            <a:endParaRPr lang="en-US" sz="1800" dirty="0"/>
+              <a:t>Expected Answer</a:t>
+            </a:r>
+            <a:endParaRPr lang="en-US" sz="3600" dirty="0"/>
+          </a:p>
+        </p:txBody>
+      </p:sp>
+      <p:sp>
+        <p:nvSpPr>
+          <p:cNvPr id="5" name="Text 2"/>
+          <p:cNvSpPr/>
+          <p:nvPr/>
+        </p:nvSpPr>
+        <p:spPr>
+          <a:xfrm>
+            <a:off x="5349240" y="1783080"/>
+            <a:ext cx="6522415" cy="4663440"/>
+          </a:xfrm>
+          <a:prstGeom prst="rect">
+            <a:avLst/>
+          </a:prstGeom>
+          <a:noFill/>
+          <a:ln/>
+        </p:spPr>
+        <p:txBody>
+          <a:bodyPr wrap="square" lIns="0" tIns="0" rIns="0" bIns="0" rtlCol="0" anchor="t"/>
+          <a:lstStyle/>
+          <a:p>
+            <a:pPr algn="l" indent="0" marL="0">
+              <a:spcAft>
+                <a:spcPts val="800"/>
+              </a:spcAft>
+              <a:buNone/>
+            </a:pPr>
+            <a:r>
+              <a:rPr lang="en-US" sz="4000" dirty="0">
+                <a:solidFill>
+                  <a:srgbClr val="111111"/>
+                </a:solidFill>
+                <a:latin typeface="Times New Roman" pitchFamily="34" charset="0"/>
+                <a:ea typeface="Times New Roman" pitchFamily="34" charset="-122"/>
+                <a:cs typeface="Times New Roman" pitchFamily="34" charset="-120"/>
+              </a:rPr>
+              <a:t>Small activities that are not registered.</a:t>
+            </a:r>
+            <a:endParaRPr lang="en-US" sz="4000" dirty="0"/>
           </a:p>
         </p:txBody>
       </p:sp>
@@ -16159,7 +16064,7 @@
                 <a:ea typeface="Times New Roman" pitchFamily="34" charset="-122"/>
                 <a:cs typeface="Times New Roman" pitchFamily="34" charset="-120"/>
               </a:rPr>
-              <a:t>Evaluation 1</a:t>
+              <a:t>Evaluation 2</a:t>
             </a:r>
             <a:endParaRPr lang="en-US" sz="3600" dirty="0"/>
           </a:p>
@@ -16201,7 +16106,7 @@
                 <a:ea typeface="Times New Roman" pitchFamily="34" charset="-122"/>
                 <a:cs typeface="Times New Roman" pitchFamily="34" charset="-120"/>
               </a:rPr>
-              <a:t>What is the informal sector?</a:t>
+              <a:t>Give one characteristic of the formal sector.</a:t>
             </a:r>
             <a:endParaRPr lang="en-US" sz="4000" dirty="0"/>
           </a:p>
@@ -16420,7 +16325,7 @@
                 <a:ea typeface="Times New Roman" pitchFamily="34" charset="-122"/>
                 <a:cs typeface="Times New Roman" pitchFamily="34" charset="-120"/>
               </a:rPr>
-              <a:t>Small work that is not registered with the state.</a:t>
+              <a:t>Workers have contracts and monthly salaries (or it is registered and pays taxes).</a:t>
             </a:r>
             <a:endParaRPr lang="en-US" sz="4000" dirty="0"/>
           </a:p>
@@ -16532,7 +16437,7 @@
                 <a:ea typeface="Calibri" pitchFamily="34" charset="-122"/>
                 <a:cs typeface="Calibri" pitchFamily="34" charset="-120"/>
               </a:rPr>
-              <a:t>FORMATIVE EVALUATION</a:t>
+              <a:t>REMEDIATION</a:t>
             </a:r>
             <a:endParaRPr lang="en-US" sz="1400" dirty="0"/>
           </a:p>
@@ -16597,7 +16502,7 @@
                 <a:ea typeface="Times New Roman" pitchFamily="34" charset="-122"/>
                 <a:cs typeface="Times New Roman" pitchFamily="34" charset="-120"/>
               </a:rPr>
-              <a:t>Evaluation 2</a:t>
+              <a:t>Remediation</a:t>
             </a:r>
             <a:endParaRPr lang="en-US" sz="3600" dirty="0"/>
           </a:p>
@@ -16631,7 +16536,7 @@
               <a:buNone/>
             </a:pPr>
             <a:r>
-              <a:rPr lang="en-US" sz="4000" dirty="0">
+              <a:rPr lang="en-US" sz="4000" b="1" dirty="0">
                 <a:solidFill>
                   <a:srgbClr val="111111"/>
                 </a:solidFill>
@@ -16639,7 +16544,51 @@
                 <a:ea typeface="Times New Roman" pitchFamily="34" charset="-122"/>
                 <a:cs typeface="Times New Roman" pitchFamily="34" charset="-120"/>
               </a:rPr>
-              <a:t>Give one problem of informal workers.</a:t>
+              <a:t>Fill in the blanks:</a:t>
+            </a:r>
+            <a:endParaRPr lang="en-US" sz="4000" dirty="0"/>
+          </a:p>
+          <a:p>
+            <a:pPr algn="l" marL="342900" indent="-342900">
+              <a:spcAft>
+                <a:spcPts val="800"/>
+              </a:spcAft>
+              <a:buSzPct val="100000"/>
+              <a:buFont typeface="+mj-lt"/>
+              <a:buAutoNum type="arabicPeriod" startAt="1"/>
+            </a:pPr>
+            <a:r>
+              <a:rPr lang="en-US" sz="4000" dirty="0">
+                <a:solidFill>
+                  <a:srgbClr val="111111"/>
+                </a:solidFill>
+                <a:latin typeface="Times New Roman" pitchFamily="34" charset="0"/>
+                <a:ea typeface="Times New Roman" pitchFamily="34" charset="-122"/>
+                <a:cs typeface="Times New Roman" pitchFamily="34" charset="-120"/>
+              </a:rPr>
+              <a:t>Work that is registered and pays taxes is the ______ sector.</a:t>
+            </a:r>
+            <a:endParaRPr lang="en-US" sz="4000" dirty="0"/>
+          </a:p>
+          <a:p>
+            <a:pPr algn="l" marL="342900" indent="-342900">
+              <a:spcAft>
+                <a:spcPts val="800"/>
+              </a:spcAft>
+              <a:buSzPct val="100000"/>
+              <a:buFont typeface="+mj-lt"/>
+              <a:buAutoNum type="arabicPeriod" startAt="1"/>
+            </a:pPr>
+            <a:r>
+              <a:rPr lang="en-US" sz="4000" dirty="0">
+                <a:solidFill>
+                  <a:srgbClr val="111111"/>
+                </a:solidFill>
+                <a:latin typeface="Times New Roman" pitchFamily="34" charset="0"/>
+                <a:ea typeface="Times New Roman" pitchFamily="34" charset="-122"/>
+                <a:cs typeface="Times New Roman" pitchFamily="34" charset="-120"/>
+              </a:rPr>
+              <a:t>A moto-taxi driver usually works in the ______ sector.</a:t>
             </a:r>
             <a:endParaRPr lang="en-US" sz="4000" dirty="0"/>
           </a:p>
@@ -16751,7 +16700,7 @@
                 <a:ea typeface="Calibri" pitchFamily="34" charset="-122"/>
                 <a:cs typeface="Calibri" pitchFamily="34" charset="-120"/>
               </a:rPr>
-              <a:t>FORMATIVE EVALUATION</a:t>
+              <a:t>REMEDIATION</a:t>
             </a:r>
             <a:endParaRPr lang="en-US" sz="1400" dirty="0"/>
           </a:p>
@@ -16816,7 +16765,7 @@
                 <a:ea typeface="Times New Roman" pitchFamily="34" charset="-122"/>
                 <a:cs typeface="Times New Roman" pitchFamily="34" charset="-120"/>
               </a:rPr>
-              <a:t>Expected Answer</a:t>
+              <a:t>Remediation (continued)</a:t>
             </a:r>
             <a:endParaRPr lang="en-US" sz="3600" dirty="0"/>
           </a:p>
@@ -16843,11 +16792,13 @@
           <a:bodyPr wrap="square" lIns="0" tIns="0" rIns="0" bIns="0" rtlCol="0" anchor="t"/>
           <a:lstStyle/>
           <a:p>
-            <a:pPr algn="l" indent="0" marL="0">
+            <a:pPr algn="l" marL="342900" indent="-342900">
               <a:spcAft>
                 <a:spcPts val="800"/>
               </a:spcAft>
-              <a:buNone/>
+              <a:buSzPct val="100000"/>
+              <a:buFont typeface="+mj-lt"/>
+              <a:buAutoNum type="arabicPeriod" startAt="1"/>
             </a:pPr>
             <a:r>
               <a:rPr lang="en-US" sz="4000" dirty="0">
@@ -16858,7 +16809,7 @@
                 <a:ea typeface="Times New Roman" pitchFamily="34" charset="-122"/>
                 <a:cs typeface="Times New Roman" pitchFamily="34" charset="-120"/>
               </a:rPr>
-              <a:t>They have no pension (or no contract).</a:t>
+              <a:t>Money paid after a worker stops working is a ______.</a:t>
             </a:r>
             <a:endParaRPr lang="en-US" sz="4000" dirty="0"/>
           </a:p>
@@ -16970,7 +16921,7 @@
                 <a:ea typeface="Calibri" pitchFamily="34" charset="-122"/>
                 <a:cs typeface="Calibri" pitchFamily="34" charset="-120"/>
               </a:rPr>
-              <a:t>REMEDIATION</a:t>
+              <a:t>HOMEWORK</a:t>
             </a:r>
             <a:endParaRPr lang="en-US" sz="1400" dirty="0"/>
           </a:p>
@@ -17035,7 +16986,7 @@
                 <a:ea typeface="Times New Roman" pitchFamily="34" charset="-122"/>
                 <a:cs typeface="Times New Roman" pitchFamily="34" charset="-120"/>
               </a:rPr>
-              <a:t>Remediation</a:t>
+              <a:t>Homework</a:t>
             </a:r>
             <a:endParaRPr lang="en-US" sz="3600" dirty="0"/>
           </a:p>
@@ -17069,7 +17020,7 @@
               <a:buNone/>
             </a:pPr>
             <a:r>
-              <a:rPr lang="en-US" sz="4000" b="1" dirty="0">
+              <a:rPr lang="en-US" sz="4000" dirty="0">
                 <a:solidFill>
                   <a:srgbClr val="111111"/>
                 </a:solidFill>
@@ -17077,51 +17028,7 @@
                 <a:ea typeface="Times New Roman" pitchFamily="34" charset="-122"/>
                 <a:cs typeface="Times New Roman" pitchFamily="34" charset="-120"/>
               </a:rPr>
-              <a:t>Fill in the blanks:</a:t>
-            </a:r>
-            <a:endParaRPr lang="en-US" sz="4000" dirty="0"/>
-          </a:p>
-          <a:p>
-            <a:pPr algn="l" marL="342900" indent="-342900">
-              <a:spcAft>
-                <a:spcPts val="800"/>
-              </a:spcAft>
-              <a:buSzPct val="100000"/>
-              <a:buFont typeface="+mj-lt"/>
-              <a:buAutoNum type="arabicPeriod" startAt="1"/>
-            </a:pPr>
-            <a:r>
-              <a:rPr lang="en-US" sz="4000" dirty="0">
-                <a:solidFill>
-                  <a:srgbClr val="111111"/>
-                </a:solidFill>
-                <a:latin typeface="Times New Roman" pitchFamily="34" charset="0"/>
-                <a:ea typeface="Times New Roman" pitchFamily="34" charset="-122"/>
-                <a:cs typeface="Times New Roman" pitchFamily="34" charset="-120"/>
-              </a:rPr>
-              <a:t>Work that is registered and pays taxes is the ______ sector.</a:t>
-            </a:r>
-            <a:endParaRPr lang="en-US" sz="4000" dirty="0"/>
-          </a:p>
-          <a:p>
-            <a:pPr algn="l" marL="342900" indent="-342900">
-              <a:spcAft>
-                <a:spcPts val="800"/>
-              </a:spcAft>
-              <a:buSzPct val="100000"/>
-              <a:buFont typeface="+mj-lt"/>
-              <a:buAutoNum type="arabicPeriod" startAt="1"/>
-            </a:pPr>
-            <a:r>
-              <a:rPr lang="en-US" sz="4000" dirty="0">
-                <a:solidFill>
-                  <a:srgbClr val="111111"/>
-                </a:solidFill>
-                <a:latin typeface="Times New Roman" pitchFamily="34" charset="0"/>
-                <a:ea typeface="Times New Roman" pitchFamily="34" charset="-122"/>
-                <a:cs typeface="Times New Roman" pitchFamily="34" charset="-120"/>
-              </a:rPr>
-              <a:t>A moto-taxi driver usually works in the ______ sector.</a:t>
+              <a:t>List four products of farming, fishing, forestry or mining found in the Garoua market, and say where each comes from.</a:t>
             </a:r>
             <a:endParaRPr lang="en-US" sz="4000" dirty="0"/>
           </a:p>
@@ -17233,7 +17140,7 @@
                 <a:ea typeface="Calibri" pitchFamily="34" charset="-122"/>
                 <a:cs typeface="Calibri" pitchFamily="34" charset="-120"/>
               </a:rPr>
-              <a:t>REMEDIATION</a:t>
+              <a:t>NEXT LESSON</a:t>
             </a:r>
             <a:endParaRPr lang="en-US" sz="1400" dirty="0"/>
           </a:p>
@@ -17298,7 +17205,7 @@
                 <a:ea typeface="Times New Roman" pitchFamily="34" charset="-122"/>
                 <a:cs typeface="Times New Roman" pitchFamily="34" charset="-120"/>
               </a:rPr>
-              <a:t>Remediation (continued)</a:t>
+              <a:t>Next Lesson</a:t>
             </a:r>
             <a:endParaRPr lang="en-US" sz="3600" dirty="0"/>
           </a:p>
@@ -17322,19 +17229,17 @@
           <a:ln/>
         </p:spPr>
         <p:txBody>
-          <a:bodyPr wrap="square" lIns="0" tIns="0" rIns="0" bIns="0" rtlCol="0" anchor="t"/>
-          <a:lstStyle/>
-          <a:p>
-            <a:pPr algn="l" marL="342900" indent="-342900">
+          <a:bodyPr wrap="square" lIns="0" tIns="0" rIns="0" bIns="0" rtlCol="0" anchor="ctr"/>
+          <a:lstStyle/>
+          <a:p>
+            <a:pPr algn="ctr" indent="0" marL="0">
               <a:spcAft>
                 <a:spcPts val="800"/>
               </a:spcAft>
-              <a:buSzPct val="100000"/>
-              <a:buFont typeface="+mj-lt"/>
-              <a:buAutoNum type="arabicPeriod" startAt="1"/>
+              <a:buNone/>
             </a:pPr>
             <a:r>
-              <a:rPr lang="en-US" sz="4000" dirty="0">
+              <a:rPr lang="en-US" sz="4000" b="1" dirty="0">
                 <a:solidFill>
                   <a:srgbClr val="111111"/>
                 </a:solidFill>
@@ -17342,7 +17247,27 @@
                 <a:ea typeface="Times New Roman" pitchFamily="34" charset="-122"/>
                 <a:cs typeface="Times New Roman" pitchFamily="34" charset="-120"/>
               </a:rPr>
-              <a:t>Money paid after a worker stops working is a ______.</a:t>
+              <a:t>Our next lesson will be on:</a:t>
+            </a:r>
+            <a:endParaRPr lang="en-US" sz="4000" dirty="0"/>
+          </a:p>
+          <a:p>
+            <a:pPr algn="ctr" indent="0" marL="0">
+              <a:spcAft>
+                <a:spcPts val="800"/>
+              </a:spcAft>
+              <a:buNone/>
+            </a:pPr>
+            <a:r>
+              <a:rPr lang="en-US" sz="4000" b="1" dirty="0">
+                <a:solidFill>
+                  <a:srgbClr val="990011"/>
+                </a:solidFill>
+                <a:latin typeface="Times New Roman" pitchFamily="34" charset="0"/>
+                <a:ea typeface="Times New Roman" pitchFamily="34" charset="-122"/>
+                <a:cs typeface="Times New Roman" pitchFamily="34" charset="-120"/>
+              </a:rPr>
+              <a:t>Lesson 5 (Part 3): The Sectors of the Economy: The Primary Sector (Definition and Examples)</a:t>
             </a:r>
             <a:endParaRPr lang="en-US" sz="4000" dirty="0"/>
           </a:p>
@@ -17454,683 +17379,6 @@
                 <a:ea typeface="Calibri" pitchFamily="34" charset="-122"/>
                 <a:cs typeface="Calibri" pitchFamily="34" charset="-120"/>
               </a:rPr>
-              <a:t>HOMEWORK</a:t>
-            </a:r>
-            <a:endParaRPr lang="en-US" sz="1400" dirty="0"/>
-          </a:p>
-        </p:txBody>
-      </p:sp>
-      <p:pic>
-        <p:nvPicPr>
-          <p:cNvPr id="3" name="Image 0" descr="/home/claude/f4/img/minesec_sheet.png">    </p:cNvPr>
-          <p:cNvPicPr>
-            <a:picLocks noChangeAspect="1"/>
-          </p:cNvPicPr>
-          <p:nvPr/>
-        </p:nvPicPr>
-        <p:blipFill>
-          <a:blip r:embed="rId1"/>
-          <a:stretch>
-            <a:fillRect/>
-          </a:stretch>
-        </p:blipFill>
-        <p:spPr>
-          <a:xfrm>
-            <a:off x="0" y="658368"/>
-            <a:ext cx="5120640" cy="5833872"/>
-          </a:xfrm>
-          <a:prstGeom prst="rect">
-            <a:avLst/>
-          </a:prstGeom>
-        </p:spPr>
-      </p:pic>
-      <p:sp>
-        <p:nvSpPr>
-          <p:cNvPr id="4" name="Text 1"/>
-          <p:cNvSpPr/>
-          <p:nvPr/>
-        </p:nvSpPr>
-        <p:spPr>
-          <a:xfrm>
-            <a:off x="5349240" y="1005840"/>
-            <a:ext cx="6522415" cy="731520"/>
-          </a:xfrm>
-          <a:prstGeom prst="rect">
-            <a:avLst/>
-          </a:prstGeom>
-          <a:noFill/>
-          <a:ln/>
-        </p:spPr>
-        <p:txBody>
-          <a:bodyPr wrap="square" lIns="0" tIns="0" rIns="0" bIns="0" rtlCol="0" anchor="ctr">
-            <a:normAutofit/>
-          </a:bodyPr>
-          <a:lstStyle/>
-          <a:p>
-            <a:pPr algn="ctr" indent="0" marL="0">
-              <a:buNone/>
-            </a:pPr>
-            <a:r>
-              <a:rPr lang="en-US" sz="3600" b="1" dirty="0">
-                <a:solidFill>
-                  <a:srgbClr val="990011"/>
-                </a:solidFill>
-                <a:latin typeface="Times New Roman" pitchFamily="34" charset="0"/>
-                <a:ea typeface="Times New Roman" pitchFamily="34" charset="-122"/>
-                <a:cs typeface="Times New Roman" pitchFamily="34" charset="-120"/>
-              </a:rPr>
-              <a:t>Homework</a:t>
-            </a:r>
-            <a:endParaRPr lang="en-US" sz="3600" dirty="0"/>
-          </a:p>
-        </p:txBody>
-      </p:sp>
-      <p:sp>
-        <p:nvSpPr>
-          <p:cNvPr id="5" name="Text 2"/>
-          <p:cNvSpPr/>
-          <p:nvPr/>
-        </p:nvSpPr>
-        <p:spPr>
-          <a:xfrm>
-            <a:off x="5349240" y="1783080"/>
-            <a:ext cx="6522415" cy="4663440"/>
-          </a:xfrm>
-          <a:prstGeom prst="rect">
-            <a:avLst/>
-          </a:prstGeom>
-          <a:noFill/>
-          <a:ln/>
-        </p:spPr>
-        <p:txBody>
-          <a:bodyPr wrap="square" lIns="0" tIns="0" rIns="0" bIns="0" rtlCol="0" anchor="t"/>
-          <a:lstStyle/>
-          <a:p>
-            <a:pPr algn="l" indent="0" marL="0">
-              <a:spcAft>
-                <a:spcPts val="800"/>
-              </a:spcAft>
-              <a:buNone/>
-            </a:pPr>
-            <a:r>
-              <a:rPr lang="en-US" sz="4000" dirty="0">
-                <a:solidFill>
-                  <a:srgbClr val="111111"/>
-                </a:solidFill>
-                <a:latin typeface="Times New Roman" pitchFamily="34" charset="0"/>
-                <a:ea typeface="Times New Roman" pitchFamily="34" charset="-122"/>
-                <a:cs typeface="Times New Roman" pitchFamily="34" charset="-120"/>
-              </a:rPr>
-              <a:t>List four products of farming, fishing, forestry or mining found in the Garoua market, and say where each comes from.</a:t>
-            </a:r>
-            <a:endParaRPr lang="en-US" sz="4000" dirty="0"/>
-          </a:p>
-        </p:txBody>
-      </p:sp>
-      <p:sp>
-        <p:nvSpPr>
-          <p:cNvPr id="25" name="Slide Number Placeholder 0"/>
-          <p:cNvSpPr>
-            <a:spLocks noGrp="1"/>
-          </p:cNvSpPr>
-          <p:nvPr>
-            <p:ph type="sldNum" sz="quarter" idx="4294967295"/>
-          </p:nvPr>
-        </p:nvSpPr>
-        <p:spPr>
-          <a:xfrm>
-            <a:off x="27432" y="91440"/>
-            <a:ext cx="585216" cy="475488"/>
-          </a:xfrm>
-          <a:prstGeom prst="rect">
-            <a:avLst/>
-          </a:prstGeom>
-          <a:extLst>
-            <a:ext uri="{C572A759-6A51-4108-AA02-DFA0A04FC94B}">
-              <ma14:wrappingTextBoxFlag xmlns:ma14="http://schemas.microsoft.com/office/mac/drawingml/2011/main" val="0"/>
-            </a:ext>
-          </a:extLst>
-        </p:spPr>
-        <p:txBody>
-          <a:bodyPr/>
-          <a:lstStyle>
-            <a:lvl1pPr>
-              <a:defRPr sz="2000">
-                <a:solidFill>
-                  <a:srgbClr val="FFFFFF"/>
-                </a:solidFill>
-                <a:latin typeface="Calibri"/>
-                <a:ea typeface="Calibri"/>
-                <a:cs typeface="Calibri"/>
-              </a:defRPr>
-            </a:lvl1pPr>
-          </a:lstStyle>
-          <a:p>
-            <a:pPr algn="ctr"/>
-            <a:fld id="{F7021451-1387-4CA6-816F-3879F97B5CBC}" type="slidenum">
-              <a:rPr b="1" lang="en-US"/>
-              <a:t>49</a:t>
-            </a:fld>
-            <a:endParaRPr lang="en-US"/>
-          </a:p>
-        </p:txBody>
-      </p:sp>
-    </p:spTree>
-  </p:cSld>
-  <p:clrMapOvr>
-    <a:masterClrMapping/>
-  </p:clrMapOvr>
-</p:sld>
-</file>
-
-<file path=ppt/slides/slide5.xml><?xml version="1.0" encoding="utf-8"?>
-<p:sld xmlns:a="http://schemas.openxmlformats.org/drawingml/2006/main" xmlns:r="http://schemas.openxmlformats.org/officeDocument/2006/relationships" xmlns:p="http://schemas.openxmlformats.org/presentationml/2006/main">
-  <p:cSld name="Slide 5">
-    <p:spTree>
-      <p:nvGrpSpPr>
-        <p:cNvPr id="1" name=""/>
-        <p:cNvGrpSpPr/>
-        <p:nvPr/>
-      </p:nvGrpSpPr>
-      <p:grpSpPr>
-        <a:xfrm>
-          <a:off x="0" y="0"/>
-          <a:ext cx="0" cy="0"/>
-          <a:chOff x="0" y="0"/>
-          <a:chExt cx="0" cy="0"/>
-        </a:xfrm>
-      </p:grpSpPr>
-      <p:sp>
-        <p:nvSpPr>
-          <p:cNvPr id="2" name="Text 0"/>
-          <p:cNvSpPr/>
-          <p:nvPr/>
-        </p:nvSpPr>
-        <p:spPr>
-          <a:xfrm>
-            <a:off x="457200" y="713232"/>
-            <a:ext cx="11368735" cy="274320"/>
-          </a:xfrm>
-          <a:prstGeom prst="rect">
-            <a:avLst/>
-          </a:prstGeom>
-          <a:noFill/>
-          <a:ln/>
-        </p:spPr>
-        <p:txBody>
-          <a:bodyPr wrap="square" lIns="0" tIns="0" rIns="0" bIns="0" rtlCol="0" anchor="ctr"/>
-          <a:lstStyle/>
-          <a:p>
-            <a:pPr algn="r" indent="0" marL="0">
-              <a:buNone/>
-            </a:pPr>
-            <a:r>
-              <a:rPr lang="en-US" sz="1400" b="1" dirty="0">
-                <a:solidFill>
-                  <a:srgbClr val="1C3F6E"/>
-                </a:solidFill>
-                <a:latin typeface="Calibri" pitchFamily="34" charset="0"/>
-                <a:ea typeface="Calibri" pitchFamily="34" charset="-122"/>
-                <a:cs typeface="Calibri" pitchFamily="34" charset="-120"/>
-              </a:rPr>
-              <a:t>HOMEWORK CORRECTION</a:t>
-            </a:r>
-            <a:endParaRPr lang="en-US" sz="1400" dirty="0"/>
-          </a:p>
-        </p:txBody>
-      </p:sp>
-      <p:pic>
-        <p:nvPicPr>
-          <p:cNvPr id="3" name="Image 0" descr="/home/claude/f4/img/minesec_sheet.png">    </p:cNvPr>
-          <p:cNvPicPr>
-            <a:picLocks noChangeAspect="1"/>
-          </p:cNvPicPr>
-          <p:nvPr/>
-        </p:nvPicPr>
-        <p:blipFill>
-          <a:blip r:embed="rId1"/>
-          <a:stretch>
-            <a:fillRect/>
-          </a:stretch>
-        </p:blipFill>
-        <p:spPr>
-          <a:xfrm>
-            <a:off x="0" y="658368"/>
-            <a:ext cx="5120640" cy="5833872"/>
-          </a:xfrm>
-          <a:prstGeom prst="rect">
-            <a:avLst/>
-          </a:prstGeom>
-        </p:spPr>
-      </p:pic>
-      <p:sp>
-        <p:nvSpPr>
-          <p:cNvPr id="4" name="Text 1"/>
-          <p:cNvSpPr/>
-          <p:nvPr/>
-        </p:nvSpPr>
-        <p:spPr>
-          <a:xfrm>
-            <a:off x="5349240" y="1005840"/>
-            <a:ext cx="6522415" cy="731520"/>
-          </a:xfrm>
-          <a:prstGeom prst="rect">
-            <a:avLst/>
-          </a:prstGeom>
-          <a:noFill/>
-          <a:ln/>
-        </p:spPr>
-        <p:txBody>
-          <a:bodyPr wrap="square" lIns="0" tIns="0" rIns="0" bIns="0" rtlCol="0" anchor="ctr">
-            <a:normAutofit/>
-          </a:bodyPr>
-          <a:lstStyle/>
-          <a:p>
-            <a:pPr algn="ctr" indent="0" marL="0">
-              <a:buNone/>
-            </a:pPr>
-            <a:r>
-              <a:rPr lang="en-US" sz="3600" b="1" dirty="0">
-                <a:solidFill>
-                  <a:srgbClr val="990011"/>
-                </a:solidFill>
-                <a:latin typeface="Times New Roman" pitchFamily="34" charset="0"/>
-                <a:ea typeface="Times New Roman" pitchFamily="34" charset="-122"/>
-                <a:cs typeface="Times New Roman" pitchFamily="34" charset="-120"/>
-              </a:rPr>
-              <a:t>Correction of the Homework (continued)</a:t>
-            </a:r>
-            <a:endParaRPr lang="en-US" sz="3600" dirty="0"/>
-          </a:p>
-        </p:txBody>
-      </p:sp>
-      <p:sp>
-        <p:nvSpPr>
-          <p:cNvPr id="5" name="Text 2"/>
-          <p:cNvSpPr/>
-          <p:nvPr/>
-        </p:nvSpPr>
-        <p:spPr>
-          <a:xfrm>
-            <a:off x="5349240" y="1783080"/>
-            <a:ext cx="6522415" cy="4663440"/>
-          </a:xfrm>
-          <a:prstGeom prst="rect">
-            <a:avLst/>
-          </a:prstGeom>
-          <a:noFill/>
-          <a:ln/>
-        </p:spPr>
-        <p:txBody>
-          <a:bodyPr wrap="square" lIns="0" tIns="0" rIns="0" bIns="0" rtlCol="0" anchor="t"/>
-          <a:lstStyle/>
-          <a:p>
-            <a:pPr algn="l" indent="0" marL="0">
-              <a:spcAft>
-                <a:spcPts val="800"/>
-              </a:spcAft>
-              <a:buNone/>
-            </a:pPr>
-            <a:r>
-              <a:rPr lang="en-US" sz="4000" dirty="0">
-                <a:solidFill>
-                  <a:srgbClr val="111111"/>
-                </a:solidFill>
-                <a:latin typeface="Times New Roman" pitchFamily="34" charset="0"/>
-                <a:ea typeface="Times New Roman" pitchFamily="34" charset="-122"/>
-                <a:cs typeface="Times New Roman" pitchFamily="34" charset="-120"/>
-              </a:rPr>
-              <a:t>Observe two workers in your area: one who works for a registered company and one who works alone in the street (for example a moto-taxi driver). Write one difference between them.</a:t>
-            </a:r>
-            <a:endParaRPr lang="en-US" sz="4000" dirty="0"/>
-          </a:p>
-        </p:txBody>
-      </p:sp>
-      <p:sp>
-        <p:nvSpPr>
-          <p:cNvPr id="25" name="Slide Number Placeholder 0"/>
-          <p:cNvSpPr>
-            <a:spLocks noGrp="1"/>
-          </p:cNvSpPr>
-          <p:nvPr>
-            <p:ph type="sldNum" sz="quarter" idx="4294967295"/>
-          </p:nvPr>
-        </p:nvSpPr>
-        <p:spPr>
-          <a:xfrm>
-            <a:off x="27432" y="91440"/>
-            <a:ext cx="585216" cy="475488"/>
-          </a:xfrm>
-          <a:prstGeom prst="rect">
-            <a:avLst/>
-          </a:prstGeom>
-          <a:extLst>
-            <a:ext uri="{C572A759-6A51-4108-AA02-DFA0A04FC94B}">
-              <ma14:wrappingTextBoxFlag xmlns:ma14="http://schemas.microsoft.com/office/mac/drawingml/2011/main" val="0"/>
-            </a:ext>
-          </a:extLst>
-        </p:spPr>
-        <p:txBody>
-          <a:bodyPr/>
-          <a:lstStyle>
-            <a:lvl1pPr>
-              <a:defRPr sz="2000">
-                <a:solidFill>
-                  <a:srgbClr val="FFFFFF"/>
-                </a:solidFill>
-                <a:latin typeface="Calibri"/>
-                <a:ea typeface="Calibri"/>
-                <a:cs typeface="Calibri"/>
-              </a:defRPr>
-            </a:lvl1pPr>
-          </a:lstStyle>
-          <a:p>
-            <a:pPr algn="ctr"/>
-            <a:fld id="{F7021451-1387-4CA6-816F-3879F97B5CBC}" type="slidenum">
-              <a:rPr b="1" lang="en-US"/>
-              <a:t>5</a:t>
-            </a:fld>
-            <a:endParaRPr lang="en-US"/>
-          </a:p>
-        </p:txBody>
-      </p:sp>
-    </p:spTree>
-  </p:cSld>
-  <p:clrMapOvr>
-    <a:masterClrMapping/>
-  </p:clrMapOvr>
-</p:sld>
-</file>
-
-<file path=ppt/slides/slide50.xml><?xml version="1.0" encoding="utf-8"?>
-<p:sld xmlns:a="http://schemas.openxmlformats.org/drawingml/2006/main" xmlns:r="http://schemas.openxmlformats.org/officeDocument/2006/relationships" xmlns:p="http://schemas.openxmlformats.org/presentationml/2006/main">
-  <p:cSld name="Slide 50">
-    <p:spTree>
-      <p:nvGrpSpPr>
-        <p:cNvPr id="1" name=""/>
-        <p:cNvGrpSpPr/>
-        <p:nvPr/>
-      </p:nvGrpSpPr>
-      <p:grpSpPr>
-        <a:xfrm>
-          <a:off x="0" y="0"/>
-          <a:ext cx="0" cy="0"/>
-          <a:chOff x="0" y="0"/>
-          <a:chExt cx="0" cy="0"/>
-        </a:xfrm>
-      </p:grpSpPr>
-      <p:sp>
-        <p:nvSpPr>
-          <p:cNvPr id="2" name="Text 0"/>
-          <p:cNvSpPr/>
-          <p:nvPr/>
-        </p:nvSpPr>
-        <p:spPr>
-          <a:xfrm>
-            <a:off x="457200" y="713232"/>
-            <a:ext cx="11368735" cy="274320"/>
-          </a:xfrm>
-          <a:prstGeom prst="rect">
-            <a:avLst/>
-          </a:prstGeom>
-          <a:noFill/>
-          <a:ln/>
-        </p:spPr>
-        <p:txBody>
-          <a:bodyPr wrap="square" lIns="0" tIns="0" rIns="0" bIns="0" rtlCol="0" anchor="ctr"/>
-          <a:lstStyle/>
-          <a:p>
-            <a:pPr algn="r" indent="0" marL="0">
-              <a:buNone/>
-            </a:pPr>
-            <a:r>
-              <a:rPr lang="en-US" sz="1400" b="1" dirty="0">
-                <a:solidFill>
-                  <a:srgbClr val="1C3F6E"/>
-                </a:solidFill>
-                <a:latin typeface="Calibri" pitchFamily="34" charset="0"/>
-                <a:ea typeface="Calibri" pitchFamily="34" charset="-122"/>
-                <a:cs typeface="Calibri" pitchFamily="34" charset="-120"/>
-              </a:rPr>
-              <a:t>NEXT LESSON</a:t>
-            </a:r>
-            <a:endParaRPr lang="en-US" sz="1400" dirty="0"/>
-          </a:p>
-        </p:txBody>
-      </p:sp>
-      <p:pic>
-        <p:nvPicPr>
-          <p:cNvPr id="3" name="Image 0" descr="/home/claude/f4/img/minesec_sheet.png">    </p:cNvPr>
-          <p:cNvPicPr>
-            <a:picLocks noChangeAspect="1"/>
-          </p:cNvPicPr>
-          <p:nvPr/>
-        </p:nvPicPr>
-        <p:blipFill>
-          <a:blip r:embed="rId1"/>
-          <a:stretch>
-            <a:fillRect/>
-          </a:stretch>
-        </p:blipFill>
-        <p:spPr>
-          <a:xfrm>
-            <a:off x="0" y="658368"/>
-            <a:ext cx="5120640" cy="5833872"/>
-          </a:xfrm>
-          <a:prstGeom prst="rect">
-            <a:avLst/>
-          </a:prstGeom>
-        </p:spPr>
-      </p:pic>
-      <p:sp>
-        <p:nvSpPr>
-          <p:cNvPr id="4" name="Text 1"/>
-          <p:cNvSpPr/>
-          <p:nvPr/>
-        </p:nvSpPr>
-        <p:spPr>
-          <a:xfrm>
-            <a:off x="5349240" y="1005840"/>
-            <a:ext cx="6522415" cy="731520"/>
-          </a:xfrm>
-          <a:prstGeom prst="rect">
-            <a:avLst/>
-          </a:prstGeom>
-          <a:noFill/>
-          <a:ln/>
-        </p:spPr>
-        <p:txBody>
-          <a:bodyPr wrap="square" lIns="0" tIns="0" rIns="0" bIns="0" rtlCol="0" anchor="ctr">
-            <a:normAutofit/>
-          </a:bodyPr>
-          <a:lstStyle/>
-          <a:p>
-            <a:pPr algn="ctr" indent="0" marL="0">
-              <a:buNone/>
-            </a:pPr>
-            <a:r>
-              <a:rPr lang="en-US" sz="3600" b="1" dirty="0">
-                <a:solidFill>
-                  <a:srgbClr val="990011"/>
-                </a:solidFill>
-                <a:latin typeface="Times New Roman" pitchFamily="34" charset="0"/>
-                <a:ea typeface="Times New Roman" pitchFamily="34" charset="-122"/>
-                <a:cs typeface="Times New Roman" pitchFamily="34" charset="-120"/>
-              </a:rPr>
-              <a:t>Next Lesson</a:t>
-            </a:r>
-            <a:endParaRPr lang="en-US" sz="3600" dirty="0"/>
-          </a:p>
-        </p:txBody>
-      </p:sp>
-      <p:sp>
-        <p:nvSpPr>
-          <p:cNvPr id="5" name="Text 2"/>
-          <p:cNvSpPr/>
-          <p:nvPr/>
-        </p:nvSpPr>
-        <p:spPr>
-          <a:xfrm>
-            <a:off x="5349240" y="1783080"/>
-            <a:ext cx="6522415" cy="4663440"/>
-          </a:xfrm>
-          <a:prstGeom prst="rect">
-            <a:avLst/>
-          </a:prstGeom>
-          <a:noFill/>
-          <a:ln/>
-        </p:spPr>
-        <p:txBody>
-          <a:bodyPr wrap="square" lIns="0" tIns="0" rIns="0" bIns="0" rtlCol="0" anchor="ctr"/>
-          <a:lstStyle/>
-          <a:p>
-            <a:pPr algn="ctr" indent="0" marL="0">
-              <a:spcAft>
-                <a:spcPts val="800"/>
-              </a:spcAft>
-              <a:buNone/>
-            </a:pPr>
-            <a:r>
-              <a:rPr lang="en-US" sz="4000" b="1" dirty="0">
-                <a:solidFill>
-                  <a:srgbClr val="111111"/>
-                </a:solidFill>
-                <a:latin typeface="Times New Roman" pitchFamily="34" charset="0"/>
-                <a:ea typeface="Times New Roman" pitchFamily="34" charset="-122"/>
-                <a:cs typeface="Times New Roman" pitchFamily="34" charset="-120"/>
-              </a:rPr>
-              <a:t>Our next lesson will be on:</a:t>
-            </a:r>
-            <a:endParaRPr lang="en-US" sz="4000" dirty="0"/>
-          </a:p>
-          <a:p>
-            <a:pPr algn="ctr" indent="0" marL="0">
-              <a:spcAft>
-                <a:spcPts val="800"/>
-              </a:spcAft>
-              <a:buNone/>
-            </a:pPr>
-            <a:r>
-              <a:rPr lang="en-US" sz="4000" b="1" dirty="0">
-                <a:solidFill>
-                  <a:srgbClr val="990011"/>
-                </a:solidFill>
-                <a:latin typeface="Times New Roman" pitchFamily="34" charset="0"/>
-                <a:ea typeface="Times New Roman" pitchFamily="34" charset="-122"/>
-                <a:cs typeface="Times New Roman" pitchFamily="34" charset="-120"/>
-              </a:rPr>
-              <a:t>Lesson 5 (Part 3): The Sectors of the Economy: The Primary Sector (Definition and Examples)</a:t>
-            </a:r>
-            <a:endParaRPr lang="en-US" sz="4000" dirty="0"/>
-          </a:p>
-        </p:txBody>
-      </p:sp>
-      <p:sp>
-        <p:nvSpPr>
-          <p:cNvPr id="25" name="Slide Number Placeholder 0"/>
-          <p:cNvSpPr>
-            <a:spLocks noGrp="1"/>
-          </p:cNvSpPr>
-          <p:nvPr>
-            <p:ph type="sldNum" sz="quarter" idx="4294967295"/>
-          </p:nvPr>
-        </p:nvSpPr>
-        <p:spPr>
-          <a:xfrm>
-            <a:off x="27432" y="91440"/>
-            <a:ext cx="585216" cy="475488"/>
-          </a:xfrm>
-          <a:prstGeom prst="rect">
-            <a:avLst/>
-          </a:prstGeom>
-          <a:extLst>
-            <a:ext uri="{C572A759-6A51-4108-AA02-DFA0A04FC94B}">
-              <ma14:wrappingTextBoxFlag xmlns:ma14="http://schemas.microsoft.com/office/mac/drawingml/2011/main" val="0"/>
-            </a:ext>
-          </a:extLst>
-        </p:spPr>
-        <p:txBody>
-          <a:bodyPr/>
-          <a:lstStyle>
-            <a:lvl1pPr>
-              <a:defRPr sz="2000">
-                <a:solidFill>
-                  <a:srgbClr val="FFFFFF"/>
-                </a:solidFill>
-                <a:latin typeface="Calibri"/>
-                <a:ea typeface="Calibri"/>
-                <a:cs typeface="Calibri"/>
-              </a:defRPr>
-            </a:lvl1pPr>
-          </a:lstStyle>
-          <a:p>
-            <a:pPr algn="ctr"/>
-            <a:fld id="{F7021451-1387-4CA6-816F-3879F97B5CBC}" type="slidenum">
-              <a:rPr b="1" lang="en-US"/>
-              <a:t>50</a:t>
-            </a:fld>
-            <a:endParaRPr lang="en-US"/>
-          </a:p>
-        </p:txBody>
-      </p:sp>
-    </p:spTree>
-  </p:cSld>
-  <p:clrMapOvr>
-    <a:masterClrMapping/>
-  </p:clrMapOvr>
-</p:sld>
-</file>
-
-<file path=ppt/slides/slide51.xml><?xml version="1.0" encoding="utf-8"?>
-<p:sld xmlns:a="http://schemas.openxmlformats.org/drawingml/2006/main" xmlns:r="http://schemas.openxmlformats.org/officeDocument/2006/relationships" xmlns:p="http://schemas.openxmlformats.org/presentationml/2006/main">
-  <p:cSld name="Slide 51">
-    <p:spTree>
-      <p:nvGrpSpPr>
-        <p:cNvPr id="1" name=""/>
-        <p:cNvGrpSpPr/>
-        <p:nvPr/>
-      </p:nvGrpSpPr>
-      <p:grpSpPr>
-        <a:xfrm>
-          <a:off x="0" y="0"/>
-          <a:ext cx="0" cy="0"/>
-          <a:chOff x="0" y="0"/>
-          <a:chExt cx="0" cy="0"/>
-        </a:xfrm>
-      </p:grpSpPr>
-      <p:sp>
-        <p:nvSpPr>
-          <p:cNvPr id="2" name="Text 0"/>
-          <p:cNvSpPr/>
-          <p:nvPr/>
-        </p:nvSpPr>
-        <p:spPr>
-          <a:xfrm>
-            <a:off x="457200" y="713232"/>
-            <a:ext cx="11368735" cy="274320"/>
-          </a:xfrm>
-          <a:prstGeom prst="rect">
-            <a:avLst/>
-          </a:prstGeom>
-          <a:noFill/>
-          <a:ln/>
-        </p:spPr>
-        <p:txBody>
-          <a:bodyPr wrap="square" lIns="0" tIns="0" rIns="0" bIns="0" rtlCol="0" anchor="ctr"/>
-          <a:lstStyle/>
-          <a:p>
-            <a:pPr algn="r" indent="0" marL="0">
-              <a:buNone/>
-            </a:pPr>
-            <a:r>
-              <a:rPr lang="en-US" sz="1400" b="1" dirty="0">
-                <a:solidFill>
-                  <a:srgbClr val="1C3F6E"/>
-                </a:solidFill>
-                <a:latin typeface="Calibri" pitchFamily="34" charset="0"/>
-                <a:ea typeface="Calibri" pitchFamily="34" charset="-122"/>
-                <a:cs typeface="Calibri" pitchFamily="34" charset="-120"/>
-              </a:rPr>
               <a:t>BILINGUAL GAME</a:t>
             </a:r>
             <a:endParaRPr lang="en-US" sz="1400" dirty="0"/>
@@ -18178,7 +17426,7 @@
       </p:sp>
       <p:graphicFrame>
         <p:nvGraphicFramePr>
-          <p:cNvPr id="52" name="Table 0"/>
+          <p:cNvPr id="50" name="Table 0"/>
           <p:cNvGraphicFramePr>
             <a:graphicFrameLocks noGrp="1"/>
           </p:cNvGraphicFramePr>
@@ -19490,7 +18738,7 @@
             <a:pPr algn="ctr"/>
             <a:fld id="{F7021451-1387-4CA6-816F-3879F97B5CBC}" type="slidenum">
               <a:rPr b="1" lang="en-US"/>
-              <a:t>51</a:t>
+              <a:t>49</a:t>
             </a:fld>
             <a:endParaRPr lang="en-US"/>
           </a:p>
@@ -19504,9 +18752,9 @@
 </p:sld>
 </file>
 
-<file path=ppt/slides/slide52.xml><?xml version="1.0" encoding="utf-8"?>
+<file path=ppt/slides/slide5.xml><?xml version="1.0" encoding="utf-8"?>
 <p:sld xmlns:a="http://schemas.openxmlformats.org/drawingml/2006/main" xmlns:r="http://schemas.openxmlformats.org/officeDocument/2006/relationships" xmlns:p="http://schemas.openxmlformats.org/presentationml/2006/main">
-  <p:cSld name="Slide 52">
+  <p:cSld name="Slide 5">
     <p:spTree>
       <p:nvGrpSpPr>
         <p:cNvPr id="1" name=""/>
@@ -19554,6 +18802,225 @@
                 <a:ea typeface="Calibri" pitchFamily="34" charset="-122"/>
                 <a:cs typeface="Calibri" pitchFamily="34" charset="-120"/>
               </a:rPr>
+              <a:t>HOMEWORK CORRECTION</a:t>
+            </a:r>
+            <a:endParaRPr lang="en-US" sz="1400" dirty="0"/>
+          </a:p>
+        </p:txBody>
+      </p:sp>
+      <p:pic>
+        <p:nvPicPr>
+          <p:cNvPr id="3" name="Image 0" descr="/home/claude/f4/img/minesec_sheet.png">    </p:cNvPr>
+          <p:cNvPicPr>
+            <a:picLocks noChangeAspect="1"/>
+          </p:cNvPicPr>
+          <p:nvPr/>
+        </p:nvPicPr>
+        <p:blipFill>
+          <a:blip r:embed="rId1"/>
+          <a:stretch>
+            <a:fillRect/>
+          </a:stretch>
+        </p:blipFill>
+        <p:spPr>
+          <a:xfrm>
+            <a:off x="0" y="658368"/>
+            <a:ext cx="5120640" cy="5833872"/>
+          </a:xfrm>
+          <a:prstGeom prst="rect">
+            <a:avLst/>
+          </a:prstGeom>
+        </p:spPr>
+      </p:pic>
+      <p:sp>
+        <p:nvSpPr>
+          <p:cNvPr id="4" name="Text 1"/>
+          <p:cNvSpPr/>
+          <p:nvPr/>
+        </p:nvSpPr>
+        <p:spPr>
+          <a:xfrm>
+            <a:off x="5349240" y="1005840"/>
+            <a:ext cx="6522415" cy="731520"/>
+          </a:xfrm>
+          <a:prstGeom prst="rect">
+            <a:avLst/>
+          </a:prstGeom>
+          <a:noFill/>
+          <a:ln/>
+        </p:spPr>
+        <p:txBody>
+          <a:bodyPr wrap="square" lIns="0" tIns="0" rIns="0" bIns="0" rtlCol="0" anchor="ctr">
+            <a:normAutofit/>
+          </a:bodyPr>
+          <a:lstStyle/>
+          <a:p>
+            <a:pPr algn="ctr" indent="0" marL="0">
+              <a:buNone/>
+            </a:pPr>
+            <a:r>
+              <a:rPr lang="en-US" sz="3600" b="1" dirty="0">
+                <a:solidFill>
+                  <a:srgbClr val="990011"/>
+                </a:solidFill>
+                <a:latin typeface="Times New Roman" pitchFamily="34" charset="0"/>
+                <a:ea typeface="Times New Roman" pitchFamily="34" charset="-122"/>
+                <a:cs typeface="Times New Roman" pitchFamily="34" charset="-120"/>
+              </a:rPr>
+              <a:t>Correction of the Homework (continued)</a:t>
+            </a:r>
+            <a:endParaRPr lang="en-US" sz="3600" dirty="0"/>
+          </a:p>
+        </p:txBody>
+      </p:sp>
+      <p:sp>
+        <p:nvSpPr>
+          <p:cNvPr id="5" name="Text 2"/>
+          <p:cNvSpPr/>
+          <p:nvPr/>
+        </p:nvSpPr>
+        <p:spPr>
+          <a:xfrm>
+            <a:off x="5349240" y="1783080"/>
+            <a:ext cx="6522415" cy="4663440"/>
+          </a:xfrm>
+          <a:prstGeom prst="rect">
+            <a:avLst/>
+          </a:prstGeom>
+          <a:noFill/>
+          <a:ln/>
+        </p:spPr>
+        <p:txBody>
+          <a:bodyPr wrap="square" lIns="0" tIns="0" rIns="0" bIns="0" rtlCol="0" anchor="t"/>
+          <a:lstStyle/>
+          <a:p>
+            <a:pPr algn="l" indent="0" marL="0">
+              <a:spcAft>
+                <a:spcPts val="800"/>
+              </a:spcAft>
+              <a:buNone/>
+            </a:pPr>
+            <a:r>
+              <a:rPr lang="en-US" sz="4000" dirty="0">
+                <a:solidFill>
+                  <a:srgbClr val="111111"/>
+                </a:solidFill>
+                <a:latin typeface="Times New Roman" pitchFamily="34" charset="0"/>
+                <a:ea typeface="Times New Roman" pitchFamily="34" charset="-122"/>
+                <a:cs typeface="Times New Roman" pitchFamily="34" charset="-120"/>
+              </a:rPr>
+              <a:t>Observe two workers in your area: one who works for a registered company and one who works alone in the street (for example a moto-taxi driver). Write one difference between them.</a:t>
+            </a:r>
+            <a:endParaRPr lang="en-US" sz="4000" dirty="0"/>
+          </a:p>
+        </p:txBody>
+      </p:sp>
+      <p:sp>
+        <p:nvSpPr>
+          <p:cNvPr id="25" name="Slide Number Placeholder 0"/>
+          <p:cNvSpPr>
+            <a:spLocks noGrp="1"/>
+          </p:cNvSpPr>
+          <p:nvPr>
+            <p:ph type="sldNum" sz="quarter" idx="4294967295"/>
+          </p:nvPr>
+        </p:nvSpPr>
+        <p:spPr>
+          <a:xfrm>
+            <a:off x="27432" y="91440"/>
+            <a:ext cx="585216" cy="475488"/>
+          </a:xfrm>
+          <a:prstGeom prst="rect">
+            <a:avLst/>
+          </a:prstGeom>
+          <a:extLst>
+            <a:ext uri="{C572A759-6A51-4108-AA02-DFA0A04FC94B}">
+              <ma14:wrappingTextBoxFlag xmlns:ma14="http://schemas.microsoft.com/office/mac/drawingml/2011/main" val="0"/>
+            </a:ext>
+          </a:extLst>
+        </p:spPr>
+        <p:txBody>
+          <a:bodyPr/>
+          <a:lstStyle>
+            <a:lvl1pPr>
+              <a:defRPr sz="2000">
+                <a:solidFill>
+                  <a:srgbClr val="FFFFFF"/>
+                </a:solidFill>
+                <a:latin typeface="Calibri"/>
+                <a:ea typeface="Calibri"/>
+                <a:cs typeface="Calibri"/>
+              </a:defRPr>
+            </a:lvl1pPr>
+          </a:lstStyle>
+          <a:p>
+            <a:pPr algn="ctr"/>
+            <a:fld id="{F7021451-1387-4CA6-816F-3879F97B5CBC}" type="slidenum">
+              <a:rPr b="1" lang="en-US"/>
+              <a:t>5</a:t>
+            </a:fld>
+            <a:endParaRPr lang="en-US"/>
+          </a:p>
+        </p:txBody>
+      </p:sp>
+    </p:spTree>
+  </p:cSld>
+  <p:clrMapOvr>
+    <a:masterClrMapping/>
+  </p:clrMapOvr>
+</p:sld>
+</file>
+
+<file path=ppt/slides/slide50.xml><?xml version="1.0" encoding="utf-8"?>
+<p:sld xmlns:a="http://schemas.openxmlformats.org/drawingml/2006/main" xmlns:r="http://schemas.openxmlformats.org/officeDocument/2006/relationships" xmlns:p="http://schemas.openxmlformats.org/presentationml/2006/main">
+  <p:cSld name="Slide 50">
+    <p:spTree>
+      <p:nvGrpSpPr>
+        <p:cNvPr id="1" name=""/>
+        <p:cNvGrpSpPr/>
+        <p:nvPr/>
+      </p:nvGrpSpPr>
+      <p:grpSpPr>
+        <a:xfrm>
+          <a:off x="0" y="0"/>
+          <a:ext cx="0" cy="0"/>
+          <a:chOff x="0" y="0"/>
+          <a:chExt cx="0" cy="0"/>
+        </a:xfrm>
+      </p:grpSpPr>
+      <p:sp>
+        <p:nvSpPr>
+          <p:cNvPr id="2" name="Text 0"/>
+          <p:cNvSpPr/>
+          <p:nvPr/>
+        </p:nvSpPr>
+        <p:spPr>
+          <a:xfrm>
+            <a:off x="457200" y="713232"/>
+            <a:ext cx="11368735" cy="274320"/>
+          </a:xfrm>
+          <a:prstGeom prst="rect">
+            <a:avLst/>
+          </a:prstGeom>
+          <a:noFill/>
+          <a:ln/>
+        </p:spPr>
+        <p:txBody>
+          <a:bodyPr wrap="square" lIns="0" tIns="0" rIns="0" bIns="0" rtlCol="0" anchor="ctr"/>
+          <a:lstStyle/>
+          <a:p>
+            <a:pPr algn="r" indent="0" marL="0">
+              <a:buNone/>
+            </a:pPr>
+            <a:r>
+              <a:rPr lang="en-US" sz="1400" b="1" dirty="0">
+                <a:solidFill>
+                  <a:srgbClr val="1C3F6E"/>
+                </a:solidFill>
+                <a:latin typeface="Calibri" pitchFamily="34" charset="0"/>
+                <a:ea typeface="Calibri" pitchFamily="34" charset="-122"/>
+                <a:cs typeface="Calibri" pitchFamily="34" charset="-120"/>
+              </a:rPr>
               <a:t>LOGBOOK</a:t>
             </a:r>
             <a:endParaRPr lang="en-US" sz="1400" dirty="0"/>
@@ -19601,7 +19068,7 @@
       </p:sp>
       <p:graphicFrame>
         <p:nvGraphicFramePr>
-          <p:cNvPr id="53" name="Table 0"/>
+          <p:cNvPr id="51" name="Table 0"/>
           <p:cNvGraphicFramePr>
             <a:graphicFrameLocks noGrp="1"/>
           </p:cNvGraphicFramePr>
@@ -19987,7 +19454,7 @@
                           <a:ea typeface="Calibri" pitchFamily="34" charset="-122"/>
                           <a:cs typeface="Calibri" pitchFamily="34" charset="-120"/>
                         </a:rPr>
-                        <a:t>Define the formal and informal sectors. Give the characteristics of each sector with examples from Cameroon. Give the advantages and problems of the informal sector.</a:t>
+                        <a:t>Define the formal and the informal sectors. Give the characteristics of each sector. Give examples of each sector in Cameroon.</a:t>
                       </a:r>
                       <a:endParaRPr lang="en-US" sz="1600" dirty="0">
                         <a:latin typeface="Calibri" charset="0"/>
@@ -20223,7 +19690,7 @@
             <a:pPr algn="ctr"/>
             <a:fld id="{F7021451-1387-4CA6-816F-3879F97B5CBC}" type="slidenum">
               <a:rPr b="1" lang="en-US"/>
-              <a:t>52</a:t>
+              <a:t>50</a:t>
             </a:fld>
             <a:endParaRPr lang="en-US"/>
           </a:p>
@@ -20237,9 +19704,9 @@
 </p:sld>
 </file>
 
-<file path=ppt/slides/slide53.xml><?xml version="1.0" encoding="utf-8"?>
+<file path=ppt/slides/slide51.xml><?xml version="1.0" encoding="utf-8"?>
 <p:sld xmlns:a="http://schemas.openxmlformats.org/drawingml/2006/main" xmlns:r="http://schemas.openxmlformats.org/officeDocument/2006/relationships" xmlns:p="http://schemas.openxmlformats.org/presentationml/2006/main">
-  <p:cSld name="Slide 53">
+  <p:cSld name="Slide 51">
     <p:spTree>
       <p:nvGrpSpPr>
         <p:cNvPr id="1" name=""/>
@@ -20334,7 +19801,7 @@
       </p:sp>
       <p:graphicFrame>
         <p:nvGraphicFramePr>
-          <p:cNvPr id="54" name="Table 0"/>
+          <p:cNvPr id="52" name="Table 0"/>
           <p:cNvGraphicFramePr>
             <a:graphicFrameLocks noGrp="1"/>
           </p:cNvGraphicFramePr>
@@ -21094,7 +20561,7 @@
             <a:pPr algn="ctr"/>
             <a:fld id="{F7021451-1387-4CA6-816F-3879F97B5CBC}" type="slidenum">
               <a:rPr b="1" lang="en-US"/>
-              <a:t>53</a:t>
+              <a:t>51</a:t>
             </a:fld>
             <a:endParaRPr lang="en-US"/>
           </a:p>
@@ -21108,9 +20575,9 @@
 </p:sld>
 </file>
 
-<file path=ppt/slides/slide54.xml><?xml version="1.0" encoding="utf-8"?>
+<file path=ppt/slides/slide52.xml><?xml version="1.0" encoding="utf-8"?>
 <p:sld xmlns:a="http://schemas.openxmlformats.org/drawingml/2006/main" xmlns:r="http://schemas.openxmlformats.org/officeDocument/2006/relationships" xmlns:p="http://schemas.openxmlformats.org/presentationml/2006/main">
-  <p:cSld name="Slide 54">
+  <p:cSld name="Slide 52">
     <p:spTree>
       <p:nvGrpSpPr>
         <p:cNvPr id="1" name=""/>
@@ -21181,7 +20648,7 @@
         <p:spPr>
           <a:xfrm>
             <a:off x="0" y="658368"/>
-            <a:ext cx="1463040" cy="5833872"/>
+            <a:ext cx="2468880" cy="5833872"/>
           </a:xfrm>
           <a:prstGeom prst="rect">
             <a:avLst/>
@@ -21196,8 +20663,8 @@
         </p:nvSpPr>
         <p:spPr>
           <a:xfrm>
-            <a:off x="1691640" y="1005840"/>
-            <a:ext cx="10180015" cy="731520"/>
+            <a:off x="2697480" y="1005840"/>
+            <a:ext cx="9174175" cy="731520"/>
           </a:xfrm>
           <a:prstGeom prst="rect">
             <a:avLst/>
@@ -21237,8 +20704,8 @@
         </p:nvSpPr>
         <p:spPr>
           <a:xfrm>
-            <a:off x="1691640" y="1783080"/>
-            <a:ext cx="10180015" cy="4663440"/>
+            <a:off x="2697480" y="1783080"/>
+            <a:ext cx="9174175" cy="4663440"/>
           </a:xfrm>
           <a:prstGeom prst="rect">
             <a:avLst/>
@@ -21308,7 +20775,7 @@
                 <a:ea typeface="Calibri" pitchFamily="34" charset="-122"/>
                 <a:cs typeface="Calibri" pitchFamily="34" charset="-120"/>
               </a:rPr>
-              <a:t>Without the projector (Activity 1): ask learners to name a bank or company in Garoua.</a:t>
+              <a:t>Without the projector (Activity 1): name registered companies in Garoua.</a:t>
             </a:r>
             <a:endParaRPr lang="en-US" sz="2000" dirty="0"/>
           </a:p>
@@ -21329,7 +20796,7 @@
                 <a:ea typeface="Calibri" pitchFamily="34" charset="-122"/>
                 <a:cs typeface="Calibri" pitchFamily="34" charset="-120"/>
               </a:rPr>
-              <a:t>Without the projector (Activity 2): ask learners who works for SODECOTON, a school or a hospital.</a:t>
+              <a:t>Without the projector (Activity 2): ask about a salary.</a:t>
             </a:r>
             <a:endParaRPr lang="en-US" sz="2000" dirty="0"/>
           </a:p>
@@ -21350,7 +20817,7 @@
                 <a:ea typeface="Calibri" pitchFamily="34" charset="-122"/>
                 <a:cs typeface="Calibri" pitchFamily="34" charset="-120"/>
               </a:rPr>
-              <a:t>Without the projector (Activity 3): use the situation of Moussa.</a:t>
+              <a:t>Without the projector (Activity 3): count moto-taxis.</a:t>
             </a:r>
             <a:endParaRPr lang="en-US" sz="2000" dirty="0"/>
           </a:p>
@@ -21371,7 +20838,7 @@
                 <a:ea typeface="Calibri" pitchFamily="34" charset="-122"/>
                 <a:cs typeface="Calibri" pitchFamily="34" charset="-120"/>
               </a:rPr>
-              <a:t>Without the projector (Activity 4): ask learners about small traders in their area.</a:t>
+              <a:t>Without the projector (Activity 4): list small trades.</a:t>
             </a:r>
             <a:endParaRPr lang="en-US" sz="2000" dirty="0"/>
           </a:p>
@@ -21392,7 +20859,7 @@
                 <a:ea typeface="Calibri" pitchFamily="34" charset="-122"/>
                 <a:cs typeface="Calibri" pitchFamily="34" charset="-120"/>
               </a:rPr>
-              <a:t>Without the projector (Activity 5): draw the two columns on the board.</a:t>
+              <a:t>Without the projector (Activity 5): draw two columns.</a:t>
             </a:r>
             <a:endParaRPr lang="en-US" sz="2000" dirty="0"/>
           </a:p>
@@ -21440,7 +20907,7 @@
             <a:pPr algn="ctr"/>
             <a:fld id="{F7021451-1387-4CA6-816F-3879F97B5CBC}" type="slidenum">
               <a:rPr b="1" lang="en-US"/>
-              <a:t>54</a:t>
+              <a:t>52</a:t>
             </a:fld>
             <a:endParaRPr lang="en-US"/>
           </a:p>
@@ -21454,9 +20921,9 @@
 </p:sld>
 </file>
 
-<file path=ppt/slides/slide55.xml><?xml version="1.0" encoding="utf-8"?>
+<file path=ppt/slides/slide53.xml><?xml version="1.0" encoding="utf-8"?>
 <p:sld xmlns:a="http://schemas.openxmlformats.org/drawingml/2006/main" xmlns:r="http://schemas.openxmlformats.org/officeDocument/2006/relationships" xmlns:p="http://schemas.openxmlformats.org/presentationml/2006/main">
-  <p:cSld name="Slide 55">
+  <p:cSld name="Slide 53">
     <p:spTree>
       <p:nvGrpSpPr>
         <p:cNvPr id="1" name=""/>
@@ -21786,7 +21253,7 @@
             <a:pPr algn="ctr"/>
             <a:fld id="{F7021451-1387-4CA6-816F-3879F97B5CBC}" type="slidenum">
               <a:rPr b="1" lang="en-US"/>
-              <a:t>55</a:t>
+              <a:t>53</a:t>
             </a:fld>
             <a:endParaRPr lang="en-US"/>
           </a:p>
@@ -22423,7 +21890,7 @@
         <p:spPr>
           <a:xfrm>
             <a:off x="0" y="658368"/>
-            <a:ext cx="5120640" cy="5833872"/>
+            <a:ext cx="1463040" cy="5833872"/>
           </a:xfrm>
           <a:prstGeom prst="rect">
             <a:avLst/>
@@ -22438,8 +21905,8 @@
         </p:nvSpPr>
         <p:spPr>
           <a:xfrm>
-            <a:off x="5349240" y="1005840"/>
-            <a:ext cx="6522415" cy="731520"/>
+            <a:off x="1691640" y="1005840"/>
+            <a:ext cx="10180015" cy="731520"/>
           </a:xfrm>
           <a:prstGeom prst="rect">
             <a:avLst/>
@@ -22479,8 +21946,8 @@
         </p:nvSpPr>
         <p:spPr>
           <a:xfrm>
-            <a:off x="5349240" y="1783080"/>
-            <a:ext cx="6522415" cy="4663440"/>
+            <a:off x="1691640" y="1783080"/>
+            <a:ext cx="10180015" cy="4663440"/>
           </a:xfrm>
           <a:prstGeom prst="rect">
             <a:avLst/>
@@ -22529,7 +21996,7 @@
                 <a:ea typeface="Times New Roman" pitchFamily="34" charset="-122"/>
                 <a:cs typeface="Times New Roman" pitchFamily="34" charset="-120"/>
               </a:rPr>
-              <a:t>Define the formal and informal sectors.</a:t>
+              <a:t>Define the formal and the informal sectors.</a:t>
             </a:r>
             <a:endParaRPr lang="en-US" sz="4000" dirty="0"/>
           </a:p>
@@ -22551,7 +22018,29 @@
                 <a:ea typeface="Times New Roman" pitchFamily="34" charset="-122"/>
                 <a:cs typeface="Times New Roman" pitchFamily="34" charset="-120"/>
               </a:rPr>
-              <a:t>Give the characteristics of each sector with examples from Cameroon.</a:t>
+              <a:t>Give the characteristics of each sector.</a:t>
+            </a:r>
+            <a:endParaRPr lang="en-US" sz="4000" dirty="0"/>
+          </a:p>
+          <a:p>
+            <a:pPr algn="l" marL="342900" indent="-342900">
+              <a:spcAft>
+                <a:spcPts val="800"/>
+              </a:spcAft>
+              <a:buSzPct val="100000"/>
+              <a:buFont typeface="+mj-lt"/>
+              <a:buAutoNum type="arabicPeriod" startAt="1"/>
+            </a:pPr>
+            <a:r>
+              <a:rPr lang="en-US" sz="4000" dirty="0">
+                <a:solidFill>
+                  <a:srgbClr val="111111"/>
+                </a:solidFill>
+                <a:latin typeface="Times New Roman" pitchFamily="34" charset="0"/>
+                <a:ea typeface="Times New Roman" pitchFamily="34" charset="-122"/>
+                <a:cs typeface="Times New Roman" pitchFamily="34" charset="-120"/>
+              </a:rPr>
+              <a:t>Give examples of each sector in Cameroon.</a:t>
             </a:r>
             <a:endParaRPr lang="en-US" sz="4000" dirty="0"/>
           </a:p>
@@ -22663,7 +22152,7 @@
                 <a:ea typeface="Calibri" pitchFamily="34" charset="-122"/>
                 <a:cs typeface="Calibri" pitchFamily="34" charset="-120"/>
               </a:rPr>
-              <a:t>OBJECTIVES</a:t>
+              <a:t>PREVIOUS KNOWLEDGE</a:t>
             </a:r>
             <a:endParaRPr lang="en-US" sz="1400" dirty="0"/>
           </a:p>
@@ -22686,7 +22175,7 @@
         <p:spPr>
           <a:xfrm>
             <a:off x="0" y="658368"/>
-            <a:ext cx="5120640" cy="5833872"/>
+            <a:ext cx="3840480" cy="5833872"/>
           </a:xfrm>
           <a:prstGeom prst="rect">
             <a:avLst/>
@@ -22701,8 +22190,8 @@
         </p:nvSpPr>
         <p:spPr>
           <a:xfrm>
-            <a:off x="5349240" y="1005840"/>
-            <a:ext cx="6522415" cy="731520"/>
+            <a:off x="4069080" y="1005840"/>
+            <a:ext cx="7802575" cy="731520"/>
           </a:xfrm>
           <a:prstGeom prst="rect">
             <a:avLst/>
@@ -22728,7 +22217,7 @@
                 <a:ea typeface="Times New Roman" pitchFamily="34" charset="-122"/>
                 <a:cs typeface="Times New Roman" pitchFamily="34" charset="-120"/>
               </a:rPr>
-              <a:t>Objectives (continued)</a:t>
+              <a:t>Previous Knowledge</a:t>
             </a:r>
             <a:endParaRPr lang="en-US" sz="3600" dirty="0"/>
           </a:p>
@@ -22742,8 +22231,8 @@
         </p:nvSpPr>
         <p:spPr>
           <a:xfrm>
-            <a:off x="5349240" y="1783080"/>
-            <a:ext cx="6522415" cy="4663440"/>
+            <a:off x="4069080" y="1783080"/>
+            <a:ext cx="7802575" cy="4663440"/>
           </a:xfrm>
           <a:prstGeom prst="rect">
             <a:avLst/>
@@ -22760,8 +22249,7 @@
                 <a:spcPts val="800"/>
               </a:spcAft>
               <a:buSzPct val="100000"/>
-              <a:buFont typeface="+mj-lt"/>
-              <a:buAutoNum type="arabicPeriod" startAt="1"/>
+              <a:buChar char="•"/>
             </a:pPr>
             <a:r>
               <a:rPr lang="en-US" sz="4000" dirty="0">
@@ -22772,7 +22260,28 @@
                 <a:ea typeface="Times New Roman" pitchFamily="34" charset="-122"/>
                 <a:cs typeface="Times New Roman" pitchFamily="34" charset="-120"/>
               </a:rPr>
-              <a:t>Give the advantages and problems of the informal sector.</a:t>
+              <a:t>The economy has four sectors: primary, secondary, tertiary and quaternary.</a:t>
+            </a:r>
+            <a:endParaRPr lang="en-US" sz="4000" dirty="0"/>
+          </a:p>
+          <a:p>
+            <a:pPr algn="l" marL="342900" indent="-342900">
+              <a:spcAft>
+                <a:spcPts val="800"/>
+              </a:spcAft>
+              <a:buSzPct val="100000"/>
+              <a:buChar char="•"/>
+            </a:pPr>
+            <a:r>
+              <a:rPr lang="en-US" sz="4000" dirty="0">
+                <a:solidFill>
+                  <a:srgbClr val="111111"/>
+                </a:solidFill>
+                <a:latin typeface="Times New Roman" pitchFamily="34" charset="0"/>
+                <a:ea typeface="Times New Roman" pitchFamily="34" charset="-122"/>
+                <a:cs typeface="Times New Roman" pitchFamily="34" charset="-120"/>
+              </a:rPr>
+              <a:t>The primary sector extracts, the secondary transforms, the tertiary serves and the quaternary researches.</a:t>
             </a:r>
             <a:endParaRPr lang="en-US" sz="4000" dirty="0"/>
           </a:p>

--- a/lecons/F2T/21_S15_L5_P2_Formal_Informal_Sectors.pptx
+++ b/lecons/F2T/21_S15_L5_P2_Formal_Informal_Sectors.pptx
@@ -3106,7 +3106,7 @@
           <a:p>
             <a:r>
               <a:rPr lang="en-US" dirty="0"/>
-              <a:t>Let us copy The Formal Sector. The formal sector has the following characteristics. Copy the point on Registered on the left, then draw the diagram on the right: a bank. Give it a title and label it clearly.</a:t>
+              <a:t>Let us copy The Formal Sector. The characteristics and examples of the formal sector are the following. Copy the point on Registered on the left, then draw the diagram on the right: a bank. Give it a title and label it clearly.</a:t>
             </a:r>
             <a:endParaRPr lang="en-US" dirty="0"/>
           </a:p>
@@ -3282,7 +3282,7 @@
           <a:p>
             <a:r>
               <a:rPr lang="en-US" dirty="0"/>
-              <a:t>Let us copy The Informal Sector. The informal sector has the following characteristics. Copy the point on Not registered on the left, then draw the diagram on the right: moto-taxis. Give it a title and label it clearly.</a:t>
+              <a:t>Let us copy The Informal Sector. The characteristics and examples of the informal sector are the following. Copy the point on Not registered on the left, then draw the diagram on the right: moto-taxis. Give it a title and label it clearly.</a:t>
             </a:r>
             <a:endParaRPr lang="en-US" dirty="0"/>
           </a:p>
@@ -13961,7 +13961,7 @@
                 <a:ea typeface="Times New Roman" pitchFamily="34" charset="-122"/>
                 <a:cs typeface="Times New Roman" pitchFamily="34" charset="-120"/>
               </a:rPr>
-              <a:t>The formal sector has the following characteristics:</a:t>
+              <a:t>The characteristics and examples of the formal sector are the following:</a:t>
             </a:r>
             <a:endParaRPr lang="en-US" sz="3600" dirty="0"/>
           </a:p>
@@ -14574,7 +14574,7 @@
                 <a:ea typeface="Times New Roman" pitchFamily="34" charset="-122"/>
                 <a:cs typeface="Times New Roman" pitchFamily="34" charset="-120"/>
               </a:rPr>
-              <a:t>The informal sector has the following characteristics:</a:t>
+              <a:t>The characteristics and examples of the informal sector are the following:</a:t>
             </a:r>
             <a:endParaRPr lang="en-US" sz="3600" dirty="0"/>
           </a:p>

--- a/lecons/F2T/21_S15_L5_P2_Formal_Informal_Sectors.pptx
+++ b/lecons/F2T/21_S15_L5_P2_Formal_Informal_Sectors.pptx
@@ -57,10 +57,9 @@
     <p:sldId id="305" r:id="rId51"/>
     <p:sldId id="306" r:id="rId52"/>
     <p:sldId id="307" r:id="rId53"/>
-    <p:sldId id="308" r:id="rId54"/>
   </p:sldIdLst>
   <p:notesMasterIdLst>
-    <p:notesMasterId r:id="rId55"/>
+    <p:notesMasterId r:id="rId54"/>
   </p:notesMasterIdLst>
   <p:sldSz cx="12192000" cy="6858000"/>
   <p:notesSz cx="6858000" cy="12192000"/>
@@ -642,7 +641,7 @@
           <a:p>
             <a:r>
               <a:rPr lang="en-US" dirty="0"/>
-              <a:t>Listen carefully to this situation from real life. Mr Bello works in a bank in Garoua: he has a contract and a salary every month. His neighbour Moussa is a moto-taxi driver: he has no contract, and his money changes every day. Moussa's son asks: "Why are the two jobs so different?" Think about it, because I am going to ask you some questions.</a:t>
+              <a:t>Question 1: What is the problem in the situation? Think for a moment, then raise your hand to answer.</a:t>
             </a:r>
             <a:endParaRPr lang="en-US" dirty="0"/>
           </a:p>
@@ -730,7 +729,7 @@
           <a:p>
             <a:r>
               <a:rPr lang="en-US" dirty="0"/>
-              <a:t>Question 1: What is the problem in the situation? Think for a moment, then raise your hand to answer.</a:t>
+              <a:t>Good. The son does not know the difference between the formal and the informal sectors.</a:t>
             </a:r>
             <a:endParaRPr lang="en-US" dirty="0"/>
           </a:p>
@@ -818,7 +817,7 @@
           <a:p>
             <a:r>
               <a:rPr lang="en-US" dirty="0"/>
-              <a:t>Good. The son does not know the difference between the formal and the informal sectors.</a:t>
+              <a:t>Question 2: Where does Mr Bello work? Think for a moment, then raise your hand to answer.</a:t>
             </a:r>
             <a:endParaRPr lang="en-US" dirty="0"/>
           </a:p>
@@ -906,7 +905,7 @@
           <a:p>
             <a:r>
               <a:rPr lang="en-US" dirty="0"/>
-              <a:t>Question 2: Where does Mr Bello work? Think for a moment, then raise your hand to answer.</a:t>
+              <a:t>Good. In a bank.</a:t>
             </a:r>
             <a:endParaRPr lang="en-US" dirty="0"/>
           </a:p>
@@ -994,7 +993,7 @@
           <a:p>
             <a:r>
               <a:rPr lang="en-US" dirty="0"/>
-              <a:t>Good. In a bank.</a:t>
+              <a:t>Question 3: What is Moussa's job? Think for a moment, then raise your hand to answer.</a:t>
             </a:r>
             <a:endParaRPr lang="en-US" dirty="0"/>
           </a:p>
@@ -1082,7 +1081,7 @@
           <a:p>
             <a:r>
               <a:rPr lang="en-US" dirty="0"/>
-              <a:t>Question 3: What is Moussa's job? Think for a moment, then raise your hand to answer.</a:t>
+              <a:t>Good. Moto-taxi driver.</a:t>
             </a:r>
             <a:endParaRPr lang="en-US" dirty="0"/>
           </a:p>
@@ -1170,7 +1169,7 @@
           <a:p>
             <a:r>
               <a:rPr lang="en-US" dirty="0"/>
-              <a:t>Good. Moto-taxi driver.</a:t>
+              <a:t>From this situation, the action we are working towards in this lesson is the following: encourage small workers to register their work and join the CNPS.</a:t>
             </a:r>
             <a:endParaRPr lang="en-US" dirty="0"/>
           </a:p>
@@ -1258,7 +1257,7 @@
           <a:p>
             <a:r>
               <a:rPr lang="en-US" dirty="0"/>
-              <a:t>From this situation, the action we are working towards in this lesson is the following: encourage small workers to register their work and join the CNPS.</a:t>
+              <a:t>Why is this lesson important for you? This lesson helps us to know the difference between the formal and the informal sector.</a:t>
             </a:r>
             <a:endParaRPr lang="en-US" dirty="0"/>
           </a:p>
@@ -1346,7 +1345,7 @@
           <a:p>
             <a:r>
               <a:rPr lang="en-US" dirty="0"/>
-              <a:t>Why is this lesson important for you? This lesson helps us to know the difference between the formal and the informal sector.</a:t>
+              <a:t>Activity 1. Look carefully at this picture: a bank. Observe every detail before I ask the question.</a:t>
             </a:r>
             <a:endParaRPr lang="en-US" dirty="0"/>
           </a:p>
@@ -1434,7 +1433,7 @@
           <a:p>
             <a:r>
               <a:rPr lang="en-US" dirty="0"/>
-              <a:t>Activity 1. Look carefully at this picture: a bank. Observe every detail before I ask the question.</a:t>
+              <a:t>Here is the question for Activity 1: The bank is registered and pays taxes. Which sector is it? Take one minute to think and write your answer in your rough notebook.</a:t>
             </a:r>
             <a:endParaRPr lang="en-US" dirty="0"/>
           </a:p>
@@ -1610,7 +1609,7 @@
           <a:p>
             <a:r>
               <a:rPr lang="en-US" dirty="0"/>
-              <a:t>Here is the question for Activity 1: The bank is registered and pays taxes. Which sector is it? Take one minute to think and write your answer in your rough notebook.</a:t>
+              <a:t>Let us check the answer together. The formal sector.</a:t>
             </a:r>
             <a:endParaRPr lang="en-US" dirty="0"/>
           </a:p>
@@ -1698,7 +1697,7 @@
           <a:p>
             <a:r>
               <a:rPr lang="en-US" dirty="0"/>
-              <a:t>Let us check the answer together. The formal sector.</a:t>
+              <a:t>Activity 2. Look carefully at this picture: factory workers. Observe every detail before I ask the question.</a:t>
             </a:r>
             <a:endParaRPr lang="en-US" dirty="0"/>
           </a:p>
@@ -1786,7 +1785,7 @@
           <a:p>
             <a:r>
               <a:rPr lang="en-US" dirty="0"/>
-              <a:t>Activity 2. Look carefully at this picture: factory workers. Observe every detail before I ask the question.</a:t>
+              <a:t>Here is the question for Activity 2: How are these workers paid? Take one minute to think and write your answer in your rough notebook.</a:t>
             </a:r>
             <a:endParaRPr lang="en-US" dirty="0"/>
           </a:p>
@@ -1874,7 +1873,7 @@
           <a:p>
             <a:r>
               <a:rPr lang="en-US" dirty="0"/>
-              <a:t>Here is the question for Activity 2: How are these workers paid? Take one minute to think and write your answer in your rough notebook.</a:t>
+              <a:t>Let us check the answer together. They receive a salary every month.</a:t>
             </a:r>
             <a:endParaRPr lang="en-US" dirty="0"/>
           </a:p>
@@ -1962,7 +1961,7 @@
           <a:p>
             <a:r>
               <a:rPr lang="en-US" dirty="0"/>
-              <a:t>Let us check the answer together. They receive a salary every month.</a:t>
+              <a:t>Activity 3. Look carefully at this picture: moto-taxis. Observe every detail before I ask the question.</a:t>
             </a:r>
             <a:endParaRPr lang="en-US" dirty="0"/>
           </a:p>
@@ -2050,7 +2049,7 @@
           <a:p>
             <a:r>
               <a:rPr lang="en-US" dirty="0"/>
-              <a:t>Activity 3. Look carefully at this picture: moto-taxis. Observe every detail before I ask the question.</a:t>
+              <a:t>Here is the question for Activity 3: Is the moto-taxi driver usually registered? Take one minute to think and write your answer in your rough notebook.</a:t>
             </a:r>
             <a:endParaRPr lang="en-US" dirty="0"/>
           </a:p>
@@ -2138,7 +2137,7 @@
           <a:p>
             <a:r>
               <a:rPr lang="en-US" dirty="0"/>
-              <a:t>Here is the question for Activity 3: Is the moto-taxi driver usually registered? Take one minute to think and write your answer in your rough notebook.</a:t>
+              <a:t>Let us check the answer together. No: it is the informal sector.</a:t>
             </a:r>
             <a:endParaRPr lang="en-US" dirty="0"/>
           </a:p>
@@ -2226,7 +2225,7 @@
           <a:p>
             <a:r>
               <a:rPr lang="en-US" dirty="0"/>
-              <a:t>Let us check the answer together. No: it is the informal sector.</a:t>
+              <a:t>Activity 4. Look carefully at this picture: a street seller. Observe every detail before I ask the question.</a:t>
             </a:r>
             <a:endParaRPr lang="en-US" dirty="0"/>
           </a:p>
@@ -2314,7 +2313,7 @@
           <a:p>
             <a:r>
               <a:rPr lang="en-US" dirty="0"/>
-              <a:t>Activity 4. Look carefully at this picture: a street seller. Observe every detail before I ask the question.</a:t>
+              <a:t>Here is the question for Activity 4: Why is it easy to start work in the informal sector? Take one minute to think and write your answer in your rough notebook.</a:t>
             </a:r>
             <a:endParaRPr lang="en-US" dirty="0"/>
           </a:p>
@@ -2402,7 +2401,7 @@
           <a:p>
             <a:r>
               <a:rPr lang="en-US" dirty="0"/>
-              <a:t>Here is the question for Activity 4: Why is it easy to start work in the informal sector? Take one minute to think and write your answer in your rough notebook.</a:t>
+              <a:t>Let us check the answer together. It needs little money and no papers.</a:t>
             </a:r>
             <a:endParaRPr lang="en-US" dirty="0"/>
           </a:p>
@@ -2578,7 +2577,7 @@
           <a:p>
             <a:r>
               <a:rPr lang="en-US" dirty="0"/>
-              <a:t>Let us check the answer together. It needs little money and no papers.</a:t>
+              <a:t>Activity 5. Look carefully at this diagram: formal and informal sectors. Observe every detail before I ask the question.</a:t>
             </a:r>
             <a:endParaRPr lang="en-US" dirty="0"/>
           </a:p>
@@ -2666,7 +2665,7 @@
           <a:p>
             <a:r>
               <a:rPr lang="en-US" dirty="0"/>
-              <a:t>Activity 5. Look carefully at this diagram: formal and informal sectors. Observe every detail before I ask the question.</a:t>
+              <a:t>Here is the question for Activity 5: Which sector gives workers a pension? Take one minute to think and write your answer in your rough notebook.</a:t>
             </a:r>
             <a:endParaRPr lang="en-US" dirty="0"/>
           </a:p>
@@ -2754,7 +2753,7 @@
           <a:p>
             <a:r>
               <a:rPr lang="en-US" dirty="0"/>
-              <a:t>Here is the question for Activity 5: Which sector gives workers a pension? Take one minute to think and write your answer in your rough notebook.</a:t>
+              <a:t>Let us check the answer together. The formal sector.</a:t>
             </a:r>
             <a:endParaRPr lang="en-US" dirty="0"/>
           </a:p>
@@ -2842,7 +2841,7 @@
           <a:p>
             <a:r>
               <a:rPr lang="en-US" dirty="0"/>
-              <a:t>Let us check the answer together. The formal sector.</a:t>
+              <a:t>Now we are going to copy the board summary. Write the title and the headings neatly in your notebooks. I will give you enough time for each slide, so do not rush.</a:t>
             </a:r>
             <a:endParaRPr lang="en-US" dirty="0"/>
           </a:p>
@@ -2930,7 +2929,7 @@
           <a:p>
             <a:r>
               <a:rPr lang="en-US" dirty="0"/>
-              <a:t>Now we are going to copy the board summary. Write the title and the headings neatly in your notebooks. I will give you enough time for each slide, so do not rush.</a:t>
+              <a:t>Let us copy the definitions. The key terms of this lesson are defined as follows. On this slide we have Formal sector and Informal sector. Write each point on a new line, with the key term first, and explain it in your own words when we revise.</a:t>
             </a:r>
             <a:endParaRPr lang="en-US" dirty="0"/>
           </a:p>
@@ -3018,7 +3017,7 @@
           <a:p>
             <a:r>
               <a:rPr lang="en-US" dirty="0"/>
-              <a:t>Let us copy the definitions. The key terms of this lesson are defined as follows. On this slide we have Formal sector and Informal sector. Write each point on a new line, with the key term first, and explain it in your own words when we revise.</a:t>
+              <a:t>Let us copy The Formal Sector. The characteristics and examples of the formal sector are the following. Copy the point on Registered on the left, then draw the diagram on the right: a bank. Give it a title and label it clearly.</a:t>
             </a:r>
             <a:endParaRPr lang="en-US" dirty="0"/>
           </a:p>
@@ -3106,7 +3105,7 @@
           <a:p>
             <a:r>
               <a:rPr lang="en-US" dirty="0"/>
-              <a:t>Let us copy The Formal Sector. The characteristics and examples of the formal sector are the following. Copy the point on Registered on the left, then draw the diagram on the right: a bank. Give it a title and label it clearly.</a:t>
+              <a:t>We continue with The Formal Sector. On this slide we have Contracts and salaries, Social security and Examples. Write each point on a new line, with the key term first, and explain it in your own words when we revise.</a:t>
             </a:r>
             <a:endParaRPr lang="en-US" dirty="0"/>
           </a:p>
@@ -3194,7 +3193,7 @@
           <a:p>
             <a:r>
               <a:rPr lang="en-US" dirty="0"/>
-              <a:t>We continue with The Formal Sector. On this slide we have Contracts and salaries, Social security and Examples. Write each point on a new line, with the key term first, and explain it in your own words when we revise.</a:t>
+              <a:t>Let us copy The Informal Sector. The characteristics and examples of the informal sector are the following. Copy the point on Not registered on the left, then draw the diagram on the right: moto-taxis. Give it a title and label it clearly.</a:t>
             </a:r>
             <a:endParaRPr lang="en-US" dirty="0"/>
           </a:p>
@@ -3282,7 +3281,7 @@
           <a:p>
             <a:r>
               <a:rPr lang="en-US" dirty="0"/>
-              <a:t>Let us copy The Informal Sector. The characteristics and examples of the informal sector are the following. Copy the point on Not registered on the left, then draw the diagram on the right: moto-taxis. Give it a title and label it clearly.</a:t>
+              <a:t>We continue with The Informal Sector. On this slide we have No contract and Small capital. Write each point on a new line, with the key term first, and explain it in your own words when we revise.</a:t>
             </a:r>
             <a:endParaRPr lang="en-US" dirty="0"/>
           </a:p>
@@ -3370,7 +3369,7 @@
           <a:p>
             <a:r>
               <a:rPr lang="en-US" dirty="0"/>
-              <a:t>We continue with The Informal Sector. On this slide we have No contract and Small capital. Write each point on a new line, with the key term first, and explain it in your own words when we revise.</a:t>
+              <a:t>Copy the point on Examples on the left, then draw the diagram on the right: a street seller. Give it a title and label it clearly.</a:t>
             </a:r>
             <a:endParaRPr lang="en-US" dirty="0"/>
           </a:p>
@@ -3458,7 +3457,7 @@
           <a:p>
             <a:r>
               <a:rPr lang="en-US" dirty="0"/>
-              <a:t>Take your time to copy this part; we will continue together.</a:t>
+              <a:t>Before we start the new lesson, let us correct the homework I gave you at the end of Lesson 5 (Part 1): The Sectors of the Economy: Introduction, Definitions and Key Concepts. The question was: Name the two sectors of work: registered and not registered. Take out your exercise books.</a:t>
             </a:r>
             <a:endParaRPr lang="en-US" dirty="0"/>
           </a:p>
@@ -3546,7 +3545,7 @@
           <a:p>
             <a:r>
               <a:rPr lang="en-US" dirty="0"/>
-              <a:t>Copy the point on Examples on the left, then draw the diagram on the right: a street seller. Give it a title and label it clearly.</a:t>
+              <a:t>Now let us check what you have understood. Question 1: What is the informal sector? Answer in your exercise book.</a:t>
             </a:r>
             <a:endParaRPr lang="en-US" dirty="0"/>
           </a:p>
@@ -3634,7 +3633,7 @@
           <a:p>
             <a:r>
               <a:rPr lang="en-US" dirty="0"/>
-              <a:t>Now let us check what you have understood. Question 1: What is the informal sector? Answer in your exercise book.</a:t>
+              <a:t>The expected answer is: small activities that are not registered. If you got it right, well done.</a:t>
             </a:r>
             <a:endParaRPr lang="en-US" dirty="0"/>
           </a:p>
@@ -3722,7 +3721,7 @@
           <a:p>
             <a:r>
               <a:rPr lang="en-US" dirty="0"/>
-              <a:t>The expected answer is: small activities that are not registered. If you got it right, well done.</a:t>
+              <a:t>Now let us check what you have understood. Question 2: Give one characteristic of the formal sector. Answer in your exercise book.</a:t>
             </a:r>
             <a:endParaRPr lang="en-US" dirty="0"/>
           </a:p>
@@ -3810,7 +3809,7 @@
           <a:p>
             <a:r>
               <a:rPr lang="en-US" dirty="0"/>
-              <a:t>Now let us check what you have understood. Question 2: Give one characteristic of the formal sector. Answer in your exercise book.</a:t>
+              <a:t>The expected answer is: workers have contracts and monthly salaries (or it is registered and pays taxes). If you got it right, well done.</a:t>
             </a:r>
             <a:endParaRPr lang="en-US" dirty="0"/>
           </a:p>
@@ -3898,7 +3897,7 @@
           <a:p>
             <a:r>
               <a:rPr lang="en-US" dirty="0"/>
-              <a:t>The expected answer is: workers have contracts and monthly salaries (or it is registered and pays taxes). If you got it right, well done.</a:t>
+              <a:t>Take your time to copy this part; we will continue together.</a:t>
             </a:r>
             <a:endParaRPr lang="en-US" dirty="0"/>
           </a:p>
@@ -3986,7 +3985,7 @@
           <a:p>
             <a:r>
               <a:rPr lang="en-US" dirty="0"/>
-              <a:t>Take your time to copy this part; we will continue together.</a:t>
+              <a:t>For those who need more practice, fill in the blanks in your exercise book. The answers are: number 1, formal; number 2, informal; number 3, pension.</a:t>
             </a:r>
             <a:endParaRPr lang="en-US" dirty="0"/>
           </a:p>
@@ -4074,7 +4073,7 @@
           <a:p>
             <a:r>
               <a:rPr lang="en-US" dirty="0"/>
-              <a:t>For those who need more practice, fill in the blanks in your exercise book. The answers are: number 1, formal; number 2, informal; number 3, pension.</a:t>
+              <a:t>For your homework: Give three primary activities. We shall correct it at the beginning of our next lesson.</a:t>
             </a:r>
             <a:endParaRPr lang="en-US" dirty="0"/>
           </a:p>
@@ -4162,7 +4161,7 @@
           <a:p>
             <a:r>
               <a:rPr lang="en-US" dirty="0"/>
-              <a:t>For your homework: List four products of farming, fishing, forestry or mining found in the Garoua market, and say where each comes from. We shall correct it at the beginning of our next lesson.</a:t>
+              <a:t>Our next lesson will be on Lesson 5 (Part 3): The Sectors of the Economy: The Primary Sector (Definition and Examples). Thank you for your attention, and see you next time.</a:t>
             </a:r>
             <a:endParaRPr lang="en-US" dirty="0"/>
           </a:p>
@@ -4250,7 +4249,7 @@
           <a:p>
             <a:r>
               <a:rPr lang="en-US" dirty="0"/>
-              <a:t>Our next lesson will be on Lesson 5 (Part 3): The Sectors of the Economy: The Primary Sector (Definition and Examples). Thank you for your attention, and see you next time.</a:t>
+              <a:t>Let us play the bilingual game. I say a word in English, and you give me the French word. Then we do the reverse.</a:t>
             </a:r>
             <a:endParaRPr lang="en-US" dirty="0"/>
           </a:p>
@@ -4338,7 +4337,7 @@
           <a:p>
             <a:r>
               <a:rPr lang="en-US" dirty="0"/>
-              <a:t>Let us play the bilingual game. I say a word in English, and you give me the French word. Then we do the reverse.</a:t>
+              <a:t>I record this information in the official logbook of the class after the lesson.</a:t>
             </a:r>
             <a:endParaRPr lang="en-US" dirty="0"/>
           </a:p>
@@ -4426,7 +4425,7 @@
           <a:p>
             <a:r>
               <a:rPr lang="en-US" dirty="0"/>
-              <a:t>Before we start the new lesson, let us correct the homework I gave you at the end of Lesson 5 (Part 1): The Sectors of the Economy: Introduction, Definitions and Key Concepts. The question was: Observe two workers in your area: one who works for a registered company and one who works alone in the street (for example a moto-taxi driver). Write one difference between them. Take out your exercise books.</a:t>
+              <a:t>Here is a good answer. The formal sector and the informal sector. Compare it with your own answer and correct your work in red.</a:t>
             </a:r>
             <a:endParaRPr lang="en-US" dirty="0"/>
           </a:p>
@@ -4514,7 +4513,7 @@
           <a:p>
             <a:r>
               <a:rPr lang="en-US" dirty="0"/>
-              <a:t>I record this information in the official logbook of the class after the lesson.</a:t>
+              <a:t>I complete the second page of the logbook: the matter taught, the evaluation, the homework and the attendance.</a:t>
             </a:r>
             <a:endParaRPr lang="en-US" dirty="0"/>
           </a:p>
@@ -4602,7 +4601,7 @@
           <a:p>
             <a:r>
               <a:rPr lang="en-US" dirty="0"/>
-              <a:t>I complete the second page of the logbook: the matter taught, the evaluation, the homework and the attendance.</a:t>
+              <a:t>This slide is for me, the teacher: it gives the timing of the lesson and what to do if the projector is not available.</a:t>
             </a:r>
             <a:endParaRPr lang="en-US" dirty="0"/>
           </a:p>
@@ -4690,7 +4689,7 @@
           <a:p>
             <a:r>
               <a:rPr lang="en-US" dirty="0"/>
-              <a:t>This slide is for me, the teacher: it gives the timing of the lesson and what to do if the projector is not available.</a:t>
+              <a:t>These are the references and picture credits used to prepare this lesson.</a:t>
             </a:r>
             <a:endParaRPr lang="en-US" dirty="0"/>
           </a:p>
@@ -4714,94 +4713,6 @@
             <a:fld id="{F7021451-1387-4CA6-816F-3879F97B5CBC}" type="slidenum">
               <a:rPr lang="en-US"/>
               <a:t>52</a:t>
-            </a:fld>
-            <a:endParaRPr lang="en-US"/>
-          </a:p>
-        </p:txBody>
-      </p:sp>
-    </p:spTree>
-    <p:extLst>
-      <p:ext uri="{BB962C8B-B14F-4D97-AF65-F5344CB8AC3E}">
-        <p14:creationId xmlns:p14="http://schemas.microsoft.com/office/powerpoint/2010/main" val="1024086991"/>
-      </p:ext>
-    </p:extLst>
-  </p:cSld>
-  <p:clrMapOvr>
-    <a:masterClrMapping/>
-  </p:clrMapOvr>
-</p:notes>
-</file>
-
-<file path=ppt/notesSlides/notesSlide53.xml><?xml version="1.0" encoding="utf-8"?>
-<p:notes xmlns:a="http://schemas.openxmlformats.org/drawingml/2006/main" xmlns:r="http://schemas.openxmlformats.org/officeDocument/2006/relationships" xmlns:p="http://schemas.openxmlformats.org/presentationml/2006/main">
-  <p:cSld>
-    <p:spTree>
-      <p:nvGrpSpPr>
-        <p:cNvPr id="1" name=""/>
-        <p:cNvGrpSpPr/>
-        <p:nvPr/>
-      </p:nvGrpSpPr>
-      <p:grpSpPr>
-        <a:xfrm>
-          <a:off x="0" y="0"/>
-          <a:ext cx="0" cy="0"/>
-          <a:chOff x="0" y="0"/>
-          <a:chExt cx="0" cy="0"/>
-        </a:xfrm>
-      </p:grpSpPr>
-      <p:sp>
-        <p:nvSpPr>
-          <p:cNvPr id="2" name="Slide Image Placeholder 1"/>
-          <p:cNvSpPr>
-            <a:spLocks noGrp="1" noRot="1" noChangeAspect="1"/>
-          </p:cNvSpPr>
-          <p:nvPr>
-            <p:ph type="sldImg"/>
-          </p:nvPr>
-        </p:nvSpPr>
-        <p:spPr/>
-      </p:sp>
-      <p:sp>
-        <p:nvSpPr>
-          <p:cNvPr id="3" name="Notes Placeholder 2"/>
-          <p:cNvSpPr>
-            <a:spLocks noGrp="1"/>
-          </p:cNvSpPr>
-          <p:nvPr>
-            <p:ph type="body" idx="1"/>
-          </p:nvPr>
-        </p:nvSpPr>
-        <p:spPr/>
-        <p:txBody>
-          <a:bodyPr/>
-          <a:lstStyle/>
-          <a:p>
-            <a:r>
-              <a:rPr lang="en-US" dirty="0"/>
-              <a:t>These are the references and picture credits used to prepare this lesson.</a:t>
-            </a:r>
-            <a:endParaRPr lang="en-US" dirty="0"/>
-          </a:p>
-        </p:txBody>
-      </p:sp>
-      <p:sp>
-        <p:nvSpPr>
-          <p:cNvPr id="4" name="Slide Number Placeholder 3"/>
-          <p:cNvSpPr>
-            <a:spLocks noGrp="1"/>
-          </p:cNvSpPr>
-          <p:nvPr>
-            <p:ph type="sldNum" sz="quarter" idx="10"/>
-          </p:nvPr>
-        </p:nvSpPr>
-        <p:spPr/>
-        <p:txBody>
-          <a:bodyPr/>
-          <a:lstStyle/>
-          <a:p>
-            <a:fld id="{F7021451-1387-4CA6-816F-3879F97B5CBC}" type="slidenum">
-              <a:rPr lang="en-US"/>
-              <a:t>53</a:t>
             </a:fld>
             <a:endParaRPr lang="en-US"/>
           </a:p>
@@ -4866,7 +4777,7 @@
           <a:p>
             <a:r>
               <a:rPr lang="en-US" dirty="0"/>
-              <a:t>Here is a good answer. Example: a SODECOTON worker has a contract, a monthly salary and CNPS insurance, while a moto-taxi driver works alone, earns money daily and has no contract or pension. Compare it with your own answer and correct your work in red.</a:t>
+              <a:t>Here is the plan of our lesson today. First, we shall correct the homework. Then we shall look at the objectives and recall what you already know. After that, we shall study a situation from real life and the action to take, and do the learning activities. Finally, we shall copy the board summary, do the evaluation and the remediation, and I will give you the homework.</a:t>
             </a:r>
             <a:endParaRPr lang="en-US" dirty="0"/>
           </a:p>
@@ -4954,7 +4865,7 @@
           <a:p>
             <a:r>
               <a:rPr lang="en-US" dirty="0"/>
-              <a:t>Here is the plan of our lesson today. First, we shall correct the homework. Then we shall look at the objectives and recall what you already know. After that, we shall study a situation from real life and the action to take, and do the learning activities. Finally, we shall copy the board summary, do the evaluation and the remediation, and I will give you the homework.</a:t>
+              <a:t>By the end of this lesson, you should be able to do three things. Number 1: define the formal and the informal sectors. Number 2: give the characteristics of each sector. Number 3: give examples of each sector in Cameroon.</a:t>
             </a:r>
             <a:endParaRPr lang="en-US" dirty="0"/>
           </a:p>
@@ -5042,7 +4953,7 @@
           <a:p>
             <a:r>
               <a:rPr lang="en-US" dirty="0"/>
-              <a:t>By the end of this lesson, you should be able to do three things. Number 1: define the formal and the informal sectors. Number 2: give the characteristics of each sector. Number 3: give examples of each sector in Cameroon.</a:t>
+              <a:t>Let us first remember what you already know. The economy has four sectors: primary, secondary, tertiary and quaternary. The primary sector extracts, the secondary transforms, the tertiary serves and the quaternary researches. Keep this in mind, because we shall build on it today.</a:t>
             </a:r>
             <a:endParaRPr lang="en-US" dirty="0"/>
           </a:p>
@@ -5130,7 +5041,7 @@
           <a:p>
             <a:r>
               <a:rPr lang="en-US" dirty="0"/>
-              <a:t>Let us first remember what you already know. The economy has four sectors: primary, secondary, tertiary and quaternary. The primary sector extracts, the secondary transforms, the tertiary serves and the quaternary researches. Keep this in mind, because we shall build on it today.</a:t>
+              <a:t>Listen carefully to this situation from real life. Mr Bello works in a bank in Garoua: he has a contract and a salary every month. His neighbour Moussa is a moto-taxi driver: he has no contract, and his money changes every day. Moussa's son asks: "Why are the two jobs so different?" Think about it, because I am going to ask you some questions.</a:t>
             </a:r>
             <a:endParaRPr lang="en-US" dirty="0"/>
           </a:p>
@@ -6510,7 +6421,7 @@
         <p:spPr>
           <a:xfrm>
             <a:off x="0" y="658368"/>
-            <a:ext cx="2468880" cy="5833872"/>
+            <a:ext cx="5120640" cy="5833872"/>
           </a:xfrm>
           <a:prstGeom prst="rect">
             <a:avLst/>
@@ -6525,8 +6436,8 @@
         </p:nvSpPr>
         <p:spPr>
           <a:xfrm>
-            <a:off x="2697480" y="1005840"/>
-            <a:ext cx="9174175" cy="731520"/>
+            <a:off x="5349240" y="1005840"/>
+            <a:ext cx="6522415" cy="731520"/>
           </a:xfrm>
           <a:prstGeom prst="rect">
             <a:avLst/>
@@ -6552,7 +6463,7 @@
                 <a:ea typeface="Times New Roman" pitchFamily="34" charset="-122"/>
                 <a:cs typeface="Times New Roman" pitchFamily="34" charset="-120"/>
               </a:rPr>
-              <a:t>Situation in Real Life</a:t>
+              <a:t>Situation: Question 1</a:t>
             </a:r>
             <a:endParaRPr lang="en-US" sz="3600" dirty="0"/>
           </a:p>
@@ -6566,8 +6477,8 @@
         </p:nvSpPr>
         <p:spPr>
           <a:xfrm>
-            <a:off x="2697480" y="1783080"/>
-            <a:ext cx="9174175" cy="4663440"/>
+            <a:off x="5349240" y="1783080"/>
+            <a:ext cx="6522415" cy="4663440"/>
           </a:xfrm>
           <a:prstGeom prst="rect">
             <a:avLst/>
@@ -6594,7 +6505,7 @@
                 <a:ea typeface="Times New Roman" pitchFamily="34" charset="-122"/>
                 <a:cs typeface="Times New Roman" pitchFamily="34" charset="-120"/>
               </a:rPr>
-              <a:t>Mr Bello works in a bank in Garoua: he has a contract and a salary every month. His neighbour Moussa is a moto-taxi driver: he has no contract, and his money changes every day. Moussa's son asks: "Why are the two jobs so different?"</a:t>
+              <a:t>What is the problem in the situation?</a:t>
             </a:r>
             <a:endParaRPr lang="en-US" sz="4000" dirty="0"/>
           </a:p>
@@ -6771,7 +6682,7 @@
                 <a:ea typeface="Times New Roman" pitchFamily="34" charset="-122"/>
                 <a:cs typeface="Times New Roman" pitchFamily="34" charset="-120"/>
               </a:rPr>
-              <a:t>Situation: Question 1</a:t>
+              <a:t>Answer</a:t>
             </a:r>
             <a:endParaRPr lang="en-US" sz="3600" dirty="0"/>
           </a:p>
@@ -6813,7 +6724,7 @@
                 <a:ea typeface="Times New Roman" pitchFamily="34" charset="-122"/>
                 <a:cs typeface="Times New Roman" pitchFamily="34" charset="-120"/>
               </a:rPr>
-              <a:t>What is the problem in the situation?</a:t>
+              <a:t>The son does not know the difference between the formal and the informal sectors.</a:t>
             </a:r>
             <a:endParaRPr lang="en-US" sz="4000" dirty="0"/>
           </a:p>
@@ -6990,7 +6901,7 @@
                 <a:ea typeface="Times New Roman" pitchFamily="34" charset="-122"/>
                 <a:cs typeface="Times New Roman" pitchFamily="34" charset="-120"/>
               </a:rPr>
-              <a:t>Answer</a:t>
+              <a:t>Situation: Question 2</a:t>
             </a:r>
             <a:endParaRPr lang="en-US" sz="3600" dirty="0"/>
           </a:p>
@@ -7032,7 +6943,7 @@
                 <a:ea typeface="Times New Roman" pitchFamily="34" charset="-122"/>
                 <a:cs typeface="Times New Roman" pitchFamily="34" charset="-120"/>
               </a:rPr>
-              <a:t>The son does not know the difference between the formal and the informal sectors.</a:t>
+              <a:t>Where does Mr Bello work?</a:t>
             </a:r>
             <a:endParaRPr lang="en-US" sz="4000" dirty="0"/>
           </a:p>
@@ -7209,7 +7120,7 @@
                 <a:ea typeface="Times New Roman" pitchFamily="34" charset="-122"/>
                 <a:cs typeface="Times New Roman" pitchFamily="34" charset="-120"/>
               </a:rPr>
-              <a:t>Situation: Question 2</a:t>
+              <a:t>Answer</a:t>
             </a:r>
             <a:endParaRPr lang="en-US" sz="3600" dirty="0"/>
           </a:p>
@@ -7251,7 +7162,7 @@
                 <a:ea typeface="Times New Roman" pitchFamily="34" charset="-122"/>
                 <a:cs typeface="Times New Roman" pitchFamily="34" charset="-120"/>
               </a:rPr>
-              <a:t>Where does Mr Bello work?</a:t>
+              <a:t>In a bank.</a:t>
             </a:r>
             <a:endParaRPr lang="en-US" sz="4000" dirty="0"/>
           </a:p>
@@ -7428,7 +7339,7 @@
                 <a:ea typeface="Times New Roman" pitchFamily="34" charset="-122"/>
                 <a:cs typeface="Times New Roman" pitchFamily="34" charset="-120"/>
               </a:rPr>
-              <a:t>Answer</a:t>
+              <a:t>Situation: Question 3</a:t>
             </a:r>
             <a:endParaRPr lang="en-US" sz="3600" dirty="0"/>
           </a:p>
@@ -7470,7 +7381,7 @@
                 <a:ea typeface="Times New Roman" pitchFamily="34" charset="-122"/>
                 <a:cs typeface="Times New Roman" pitchFamily="34" charset="-120"/>
               </a:rPr>
-              <a:t>In a bank.</a:t>
+              <a:t>What is Moussa's job?</a:t>
             </a:r>
             <a:endParaRPr lang="en-US" sz="4000" dirty="0"/>
           </a:p>
@@ -7647,7 +7558,7 @@
                 <a:ea typeface="Times New Roman" pitchFamily="34" charset="-122"/>
                 <a:cs typeface="Times New Roman" pitchFamily="34" charset="-120"/>
               </a:rPr>
-              <a:t>Situation: Question 3</a:t>
+              <a:t>Possible Answer</a:t>
             </a:r>
             <a:endParaRPr lang="en-US" sz="3600" dirty="0"/>
           </a:p>
@@ -7689,7 +7600,7 @@
                 <a:ea typeface="Times New Roman" pitchFamily="34" charset="-122"/>
                 <a:cs typeface="Times New Roman" pitchFamily="34" charset="-120"/>
               </a:rPr>
-              <a:t>What is Moussa's job?</a:t>
+              <a:t>Moto-taxi driver.</a:t>
             </a:r>
             <a:endParaRPr lang="en-US" sz="4000" dirty="0"/>
           </a:p>
@@ -7801,7 +7712,7 @@
                 <a:ea typeface="Calibri" pitchFamily="34" charset="-122"/>
                 <a:cs typeface="Calibri" pitchFamily="34" charset="-120"/>
               </a:rPr>
-              <a:t>REAL-LIFE SITUATION</a:t>
+              <a:t>ACTION TO TAKE</a:t>
             </a:r>
             <a:endParaRPr lang="en-US" sz="1400" dirty="0"/>
           </a:p>
@@ -7866,7 +7777,7 @@
                 <a:ea typeface="Times New Roman" pitchFamily="34" charset="-122"/>
                 <a:cs typeface="Times New Roman" pitchFamily="34" charset="-120"/>
               </a:rPr>
-              <a:t>Possible Answer</a:t>
+              <a:t>Action to Take</a:t>
             </a:r>
             <a:endParaRPr lang="en-US" sz="3600" dirty="0"/>
           </a:p>
@@ -7908,7 +7819,7 @@
                 <a:ea typeface="Times New Roman" pitchFamily="34" charset="-122"/>
                 <a:cs typeface="Times New Roman" pitchFamily="34" charset="-120"/>
               </a:rPr>
-              <a:t>Moto-taxi driver.</a:t>
+              <a:t>Encourage small workers to register their work and join the CNPS.</a:t>
             </a:r>
             <a:endParaRPr lang="en-US" sz="4000" dirty="0"/>
           </a:p>
@@ -8020,7 +7931,7 @@
                 <a:ea typeface="Calibri" pitchFamily="34" charset="-122"/>
                 <a:cs typeface="Calibri" pitchFamily="34" charset="-120"/>
               </a:rPr>
-              <a:t>ACTION TO TAKE</a:t>
+              <a:t>JUSTIFICATION</a:t>
             </a:r>
             <a:endParaRPr lang="en-US" sz="1400" dirty="0"/>
           </a:p>
@@ -8085,7 +7996,7 @@
                 <a:ea typeface="Times New Roman" pitchFamily="34" charset="-122"/>
                 <a:cs typeface="Times New Roman" pitchFamily="34" charset="-120"/>
               </a:rPr>
-              <a:t>Action to Take</a:t>
+              <a:t>Justification of the Lesson</a:t>
             </a:r>
             <a:endParaRPr lang="en-US" sz="3600" dirty="0"/>
           </a:p>
@@ -8127,7 +8038,7 @@
                 <a:ea typeface="Times New Roman" pitchFamily="34" charset="-122"/>
                 <a:cs typeface="Times New Roman" pitchFamily="34" charset="-120"/>
               </a:rPr>
-              <a:t>Encourage small workers to register their work and join the CNPS.</a:t>
+              <a:t>This lesson helps us to know the difference between the formal and the informal sector.</a:t>
             </a:r>
             <a:endParaRPr lang="en-US" sz="4000" dirty="0"/>
           </a:p>
@@ -8239,15 +8150,54 @@
                 <a:ea typeface="Calibri" pitchFamily="34" charset="-122"/>
                 <a:cs typeface="Calibri" pitchFamily="34" charset="-120"/>
               </a:rPr>
-              <a:t>JUSTIFICATION</a:t>
+              <a:t>1. FORMAL SECTOR</a:t>
             </a:r>
             <a:endParaRPr lang="en-US" sz="1400" dirty="0"/>
+          </a:p>
+        </p:txBody>
+      </p:sp>
+      <p:sp>
+        <p:nvSpPr>
+          <p:cNvPr id="3" name="Text 1"/>
+          <p:cNvSpPr/>
+          <p:nvPr/>
+        </p:nvSpPr>
+        <p:spPr>
+          <a:xfrm>
+            <a:off x="457200" y="1005840"/>
+            <a:ext cx="11277295" cy="731520"/>
+          </a:xfrm>
+          <a:prstGeom prst="rect">
+            <a:avLst/>
+          </a:prstGeom>
+          <a:noFill/>
+          <a:ln/>
+        </p:spPr>
+        <p:txBody>
+          <a:bodyPr wrap="square" lIns="0" tIns="0" rIns="0" bIns="0" rtlCol="0" anchor="ctr"/>
+          <a:lstStyle/>
+          <a:p>
+            <a:pPr algn="ctr" indent="0" marL="0">
+              <a:buNone/>
+            </a:pPr>
+            <a:r>
+              <a:rPr lang="en-US" sz="3600" b="1" dirty="0">
+                <a:solidFill>
+                  <a:srgbClr val="990011"/>
+                </a:solidFill>
+                <a:latin typeface="Times New Roman" pitchFamily="34" charset="0"/>
+                <a:ea typeface="Times New Roman" pitchFamily="34" charset="-122"/>
+                <a:cs typeface="Times New Roman" pitchFamily="34" charset="-120"/>
+              </a:rPr>
+              <a:t>Activity 1</a:t>
+            </a:r>
+            <a:endParaRPr lang="en-US" sz="3600" dirty="0"/>
           </a:p>
         </p:txBody>
       </p:sp>
       <p:pic>
         <p:nvPicPr>
-          <p:cNvPr id="3" name="Image 0" descr="/home/claude/f4/img/minesec_sheet.png">    </p:cNvPr>
+          <p:cNvPr id="4" name="Image 0" descr="/home/claude/f4/img/v2/f2t_bank.jpg">    </p:cNvPr>
           <p:cNvPicPr>
             <a:picLocks noChangeAspect="1"/>
           </p:cNvPicPr>
@@ -8261,8 +8211,8 @@
         </p:blipFill>
         <p:spPr>
           <a:xfrm>
-            <a:off x="0" y="658368"/>
-            <a:ext cx="5120640" cy="5833872"/>
+            <a:off x="2246610" y="1783080"/>
+            <a:ext cx="7698475" cy="4270248"/>
           </a:xfrm>
           <a:prstGeom prst="rect">
             <a:avLst/>
@@ -8271,14 +8221,14 @@
       </p:pic>
       <p:sp>
         <p:nvSpPr>
-          <p:cNvPr id="4" name="Text 1"/>
+          <p:cNvPr id="5" name="Text 2"/>
           <p:cNvSpPr/>
           <p:nvPr/>
         </p:nvSpPr>
         <p:spPr>
           <a:xfrm>
-            <a:off x="5349240" y="1005840"/>
-            <a:ext cx="6522415" cy="731520"/>
+            <a:off x="457200" y="6089904"/>
+            <a:ext cx="11277295" cy="347472"/>
           </a:xfrm>
           <a:prstGeom prst="rect">
             <a:avLst/>
@@ -8287,68 +8237,24 @@
           <a:ln/>
         </p:spPr>
         <p:txBody>
-          <a:bodyPr wrap="square" lIns="0" tIns="0" rIns="0" bIns="0" rtlCol="0" anchor="ctr">
-            <a:normAutofit/>
-          </a:bodyPr>
+          <a:bodyPr wrap="square" lIns="0" tIns="0" rIns="0" bIns="0" rtlCol="0" anchor="ctr"/>
           <a:lstStyle/>
           <a:p>
             <a:pPr algn="ctr" indent="0" marL="0">
               <a:buNone/>
             </a:pPr>
             <a:r>
-              <a:rPr lang="en-US" sz="3600" b="1" dirty="0">
-                <a:solidFill>
-                  <a:srgbClr val="990011"/>
+              <a:rPr lang="en-US" sz="1800" i="1" dirty="0">
+                <a:solidFill>
+                  <a:srgbClr val="555555"/>
                 </a:solidFill>
                 <a:latin typeface="Times New Roman" pitchFamily="34" charset="0"/>
                 <a:ea typeface="Times New Roman" pitchFamily="34" charset="-122"/>
                 <a:cs typeface="Times New Roman" pitchFamily="34" charset="-120"/>
               </a:rPr>
-              <a:t>Justification of the Lesson</a:t>
-            </a:r>
-            <a:endParaRPr lang="en-US" sz="3600" dirty="0"/>
-          </a:p>
-        </p:txBody>
-      </p:sp>
-      <p:sp>
-        <p:nvSpPr>
-          <p:cNvPr id="5" name="Text 2"/>
-          <p:cNvSpPr/>
-          <p:nvPr/>
-        </p:nvSpPr>
-        <p:spPr>
-          <a:xfrm>
-            <a:off x="5349240" y="1783080"/>
-            <a:ext cx="6522415" cy="4663440"/>
-          </a:xfrm>
-          <a:prstGeom prst="rect">
-            <a:avLst/>
-          </a:prstGeom>
-          <a:noFill/>
-          <a:ln/>
-        </p:spPr>
-        <p:txBody>
-          <a:bodyPr wrap="square" lIns="0" tIns="0" rIns="0" bIns="0" rtlCol="0" anchor="t"/>
-          <a:lstStyle/>
-          <a:p>
-            <a:pPr algn="l" indent="0" marL="0">
-              <a:spcAft>
-                <a:spcPts val="800"/>
-              </a:spcAft>
-              <a:buNone/>
-            </a:pPr>
-            <a:r>
-              <a:rPr lang="en-US" sz="4000" dirty="0">
-                <a:solidFill>
-                  <a:srgbClr val="111111"/>
-                </a:solidFill>
-                <a:latin typeface="Times New Roman" pitchFamily="34" charset="0"/>
-                <a:ea typeface="Times New Roman" pitchFamily="34" charset="-122"/>
-                <a:cs typeface="Times New Roman" pitchFamily="34" charset="-120"/>
-              </a:rPr>
-              <a:t>This lesson helps us to know the difference between the formal and the informal sector.</a:t>
-            </a:r>
-            <a:endParaRPr lang="en-US" sz="4000" dirty="0"/>
+              <a:t>A bank.</a:t>
+            </a:r>
+            <a:endParaRPr lang="en-US" sz="1800" dirty="0"/>
           </a:p>
         </p:txBody>
       </p:sp>
@@ -8464,48 +8370,9 @@
           </a:p>
         </p:txBody>
       </p:sp>
-      <p:sp>
-        <p:nvSpPr>
-          <p:cNvPr id="3" name="Text 1"/>
-          <p:cNvSpPr/>
-          <p:nvPr/>
-        </p:nvSpPr>
-        <p:spPr>
-          <a:xfrm>
-            <a:off x="457200" y="1005840"/>
-            <a:ext cx="11277295" cy="731520"/>
-          </a:xfrm>
-          <a:prstGeom prst="rect">
-            <a:avLst/>
-          </a:prstGeom>
-          <a:noFill/>
-          <a:ln/>
-        </p:spPr>
-        <p:txBody>
-          <a:bodyPr wrap="square" lIns="0" tIns="0" rIns="0" bIns="0" rtlCol="0" anchor="ctr"/>
-          <a:lstStyle/>
-          <a:p>
-            <a:pPr algn="ctr" indent="0" marL="0">
-              <a:buNone/>
-            </a:pPr>
-            <a:r>
-              <a:rPr lang="en-US" sz="3600" b="1" dirty="0">
-                <a:solidFill>
-                  <a:srgbClr val="990011"/>
-                </a:solidFill>
-                <a:latin typeface="Times New Roman" pitchFamily="34" charset="0"/>
-                <a:ea typeface="Times New Roman" pitchFamily="34" charset="-122"/>
-                <a:cs typeface="Times New Roman" pitchFamily="34" charset="-120"/>
-              </a:rPr>
-              <a:t>Activity 1</a:t>
-            </a:r>
-            <a:endParaRPr lang="en-US" sz="3600" dirty="0"/>
-          </a:p>
-        </p:txBody>
-      </p:sp>
       <p:pic>
         <p:nvPicPr>
-          <p:cNvPr id="4" name="Image 0" descr="/home/claude/f4/img/v2/f2t_bank.jpg">    </p:cNvPr>
+          <p:cNvPr id="3" name="Image 0" descr="/home/claude/f4/img/minesec_sheet.png">    </p:cNvPr>
           <p:cNvPicPr>
             <a:picLocks noChangeAspect="1"/>
           </p:cNvPicPr>
@@ -8519,8 +8386,8 @@
         </p:blipFill>
         <p:spPr>
           <a:xfrm>
-            <a:off x="2246610" y="1783080"/>
-            <a:ext cx="7698475" cy="4270248"/>
+            <a:off x="0" y="658368"/>
+            <a:ext cx="5120640" cy="5833872"/>
           </a:xfrm>
           <a:prstGeom prst="rect">
             <a:avLst/>
@@ -8529,14 +8396,14 @@
       </p:pic>
       <p:sp>
         <p:nvSpPr>
-          <p:cNvPr id="5" name="Text 2"/>
+          <p:cNvPr id="4" name="Text 1"/>
           <p:cNvSpPr/>
           <p:nvPr/>
         </p:nvSpPr>
         <p:spPr>
           <a:xfrm>
-            <a:off x="457200" y="6089904"/>
-            <a:ext cx="11277295" cy="347472"/>
+            <a:off x="5349240" y="1005840"/>
+            <a:ext cx="6522415" cy="731520"/>
           </a:xfrm>
           <a:prstGeom prst="rect">
             <a:avLst/>
@@ -8545,24 +8412,68 @@
           <a:ln/>
         </p:spPr>
         <p:txBody>
-          <a:bodyPr wrap="square" lIns="0" tIns="0" rIns="0" bIns="0" rtlCol="0" anchor="ctr"/>
+          <a:bodyPr wrap="square" lIns="0" tIns="0" rIns="0" bIns="0" rtlCol="0" anchor="ctr">
+            <a:normAutofit/>
+          </a:bodyPr>
           <a:lstStyle/>
           <a:p>
             <a:pPr algn="ctr" indent="0" marL="0">
               <a:buNone/>
             </a:pPr>
             <a:r>
-              <a:rPr lang="en-US" sz="1800" i="1" dirty="0">
-                <a:solidFill>
-                  <a:srgbClr val="555555"/>
+              <a:rPr lang="en-US" sz="3600" b="1" dirty="0">
+                <a:solidFill>
+                  <a:srgbClr val="990011"/>
                 </a:solidFill>
                 <a:latin typeface="Times New Roman" pitchFamily="34" charset="0"/>
                 <a:ea typeface="Times New Roman" pitchFamily="34" charset="-122"/>
                 <a:cs typeface="Times New Roman" pitchFamily="34" charset="-120"/>
               </a:rPr>
-              <a:t>A bank.</a:t>
-            </a:r>
-            <a:endParaRPr lang="en-US" sz="1800" dirty="0"/>
+              <a:t>Activity 1: Question</a:t>
+            </a:r>
+            <a:endParaRPr lang="en-US" sz="3600" dirty="0"/>
+          </a:p>
+        </p:txBody>
+      </p:sp>
+      <p:sp>
+        <p:nvSpPr>
+          <p:cNvPr id="5" name="Text 2"/>
+          <p:cNvSpPr/>
+          <p:nvPr/>
+        </p:nvSpPr>
+        <p:spPr>
+          <a:xfrm>
+            <a:off x="5349240" y="1783080"/>
+            <a:ext cx="6522415" cy="4663440"/>
+          </a:xfrm>
+          <a:prstGeom prst="rect">
+            <a:avLst/>
+          </a:prstGeom>
+          <a:noFill/>
+          <a:ln/>
+        </p:spPr>
+        <p:txBody>
+          <a:bodyPr wrap="square" lIns="0" tIns="0" rIns="0" bIns="0" rtlCol="0" anchor="t"/>
+          <a:lstStyle/>
+          <a:p>
+            <a:pPr algn="l" indent="0" marL="0">
+              <a:spcAft>
+                <a:spcPts val="800"/>
+              </a:spcAft>
+              <a:buNone/>
+            </a:pPr>
+            <a:r>
+              <a:rPr lang="en-US" sz="4000" dirty="0">
+                <a:solidFill>
+                  <a:srgbClr val="111111"/>
+                </a:solidFill>
+                <a:latin typeface="Times New Roman" pitchFamily="34" charset="0"/>
+                <a:ea typeface="Times New Roman" pitchFamily="34" charset="-122"/>
+                <a:cs typeface="Times New Roman" pitchFamily="34" charset="-120"/>
+              </a:rPr>
+              <a:t>The bank is registered and pays taxes. Which sector is it?</a:t>
+            </a:r>
+            <a:endParaRPr lang="en-US" sz="4000" dirty="0"/>
           </a:p>
         </p:txBody>
       </p:sp>
@@ -9332,7 +9243,7 @@
                 <a:ea typeface="Times New Roman" pitchFamily="34" charset="-122"/>
                 <a:cs typeface="Times New Roman" pitchFamily="34" charset="-120"/>
               </a:rPr>
-              <a:t>Activity 1: Question</a:t>
+              <a:t>Activity 1: Answer</a:t>
             </a:r>
             <a:endParaRPr lang="en-US" sz="3600" dirty="0"/>
           </a:p>
@@ -9374,7 +9285,7 @@
                 <a:ea typeface="Times New Roman" pitchFamily="34" charset="-122"/>
                 <a:cs typeface="Times New Roman" pitchFamily="34" charset="-120"/>
               </a:rPr>
-              <a:t>The bank is registered and pays taxes. Which sector is it?</a:t>
+              <a:t>The formal sector.</a:t>
             </a:r>
             <a:endParaRPr lang="en-US" sz="4000" dirty="0"/>
           </a:p>
@@ -9492,9 +9403,48 @@
           </a:p>
         </p:txBody>
       </p:sp>
+      <p:sp>
+        <p:nvSpPr>
+          <p:cNvPr id="3" name="Text 1"/>
+          <p:cNvSpPr/>
+          <p:nvPr/>
+        </p:nvSpPr>
+        <p:spPr>
+          <a:xfrm>
+            <a:off x="457200" y="1005840"/>
+            <a:ext cx="11277295" cy="731520"/>
+          </a:xfrm>
+          <a:prstGeom prst="rect">
+            <a:avLst/>
+          </a:prstGeom>
+          <a:noFill/>
+          <a:ln/>
+        </p:spPr>
+        <p:txBody>
+          <a:bodyPr wrap="square" lIns="0" tIns="0" rIns="0" bIns="0" rtlCol="0" anchor="ctr"/>
+          <a:lstStyle/>
+          <a:p>
+            <a:pPr algn="ctr" indent="0" marL="0">
+              <a:buNone/>
+            </a:pPr>
+            <a:r>
+              <a:rPr lang="en-US" sz="3600" b="1" dirty="0">
+                <a:solidFill>
+                  <a:srgbClr val="990011"/>
+                </a:solidFill>
+                <a:latin typeface="Times New Roman" pitchFamily="34" charset="0"/>
+                <a:ea typeface="Times New Roman" pitchFamily="34" charset="-122"/>
+                <a:cs typeface="Times New Roman" pitchFamily="34" charset="-120"/>
+              </a:rPr>
+              <a:t>Activity 2</a:t>
+            </a:r>
+            <a:endParaRPr lang="en-US" sz="3600" dirty="0"/>
+          </a:p>
+        </p:txBody>
+      </p:sp>
       <p:pic>
         <p:nvPicPr>
-          <p:cNvPr id="3" name="Image 0" descr="/home/claude/f4/img/minesec_sheet.png">    </p:cNvPr>
+          <p:cNvPr id="4" name="Image 0" descr="/home/claude/f4/img/v2/f2t_factory_workers.jpg">    </p:cNvPr>
           <p:cNvPicPr>
             <a:picLocks noChangeAspect="1"/>
           </p:cNvPicPr>
@@ -9508,8 +9458,8 @@
         </p:blipFill>
         <p:spPr>
           <a:xfrm>
-            <a:off x="0" y="658368"/>
-            <a:ext cx="5120640" cy="5833872"/>
+            <a:off x="2251442" y="1783080"/>
+            <a:ext cx="7688812" cy="4270248"/>
           </a:xfrm>
           <a:prstGeom prst="rect">
             <a:avLst/>
@@ -9518,14 +9468,14 @@
       </p:pic>
       <p:sp>
         <p:nvSpPr>
-          <p:cNvPr id="4" name="Text 1"/>
+          <p:cNvPr id="5" name="Text 2"/>
           <p:cNvSpPr/>
           <p:nvPr/>
         </p:nvSpPr>
         <p:spPr>
           <a:xfrm>
-            <a:off x="5349240" y="1005840"/>
-            <a:ext cx="6522415" cy="731520"/>
+            <a:off x="457200" y="6089904"/>
+            <a:ext cx="11277295" cy="347472"/>
           </a:xfrm>
           <a:prstGeom prst="rect">
             <a:avLst/>
@@ -9534,68 +9484,24 @@
           <a:ln/>
         </p:spPr>
         <p:txBody>
-          <a:bodyPr wrap="square" lIns="0" tIns="0" rIns="0" bIns="0" rtlCol="0" anchor="ctr">
-            <a:normAutofit/>
-          </a:bodyPr>
+          <a:bodyPr wrap="square" lIns="0" tIns="0" rIns="0" bIns="0" rtlCol="0" anchor="ctr"/>
           <a:lstStyle/>
           <a:p>
             <a:pPr algn="ctr" indent="0" marL="0">
               <a:buNone/>
             </a:pPr>
             <a:r>
-              <a:rPr lang="en-US" sz="3600" b="1" dirty="0">
-                <a:solidFill>
-                  <a:srgbClr val="990011"/>
+              <a:rPr lang="en-US" sz="1800" i="1" dirty="0">
+                <a:solidFill>
+                  <a:srgbClr val="555555"/>
                 </a:solidFill>
                 <a:latin typeface="Times New Roman" pitchFamily="34" charset="0"/>
                 <a:ea typeface="Times New Roman" pitchFamily="34" charset="-122"/>
                 <a:cs typeface="Times New Roman" pitchFamily="34" charset="-120"/>
               </a:rPr>
-              <a:t>Activity 1: Answer</a:t>
-            </a:r>
-            <a:endParaRPr lang="en-US" sz="3600" dirty="0"/>
-          </a:p>
-        </p:txBody>
-      </p:sp>
-      <p:sp>
-        <p:nvSpPr>
-          <p:cNvPr id="5" name="Text 2"/>
-          <p:cNvSpPr/>
-          <p:nvPr/>
-        </p:nvSpPr>
-        <p:spPr>
-          <a:xfrm>
-            <a:off x="5349240" y="1783080"/>
-            <a:ext cx="6522415" cy="4663440"/>
-          </a:xfrm>
-          <a:prstGeom prst="rect">
-            <a:avLst/>
-          </a:prstGeom>
-          <a:noFill/>
-          <a:ln/>
-        </p:spPr>
-        <p:txBody>
-          <a:bodyPr wrap="square" lIns="0" tIns="0" rIns="0" bIns="0" rtlCol="0" anchor="t"/>
-          <a:lstStyle/>
-          <a:p>
-            <a:pPr algn="l" indent="0" marL="0">
-              <a:spcAft>
-                <a:spcPts val="800"/>
-              </a:spcAft>
-              <a:buNone/>
-            </a:pPr>
-            <a:r>
-              <a:rPr lang="en-US" sz="4000" dirty="0">
-                <a:solidFill>
-                  <a:srgbClr val="111111"/>
-                </a:solidFill>
-                <a:latin typeface="Times New Roman" pitchFamily="34" charset="0"/>
-                <a:ea typeface="Times New Roman" pitchFamily="34" charset="-122"/>
-                <a:cs typeface="Times New Roman" pitchFamily="34" charset="-120"/>
-              </a:rPr>
-              <a:t>The formal sector.</a:t>
-            </a:r>
-            <a:endParaRPr lang="en-US" sz="4000" dirty="0"/>
+              <a:t>Factory workers.</a:t>
+            </a:r>
+            <a:endParaRPr lang="en-US" sz="1800" dirty="0"/>
           </a:p>
         </p:txBody>
       </p:sp>
@@ -9711,48 +9617,9 @@
           </a:p>
         </p:txBody>
       </p:sp>
-      <p:sp>
-        <p:nvSpPr>
-          <p:cNvPr id="3" name="Text 1"/>
-          <p:cNvSpPr/>
-          <p:nvPr/>
-        </p:nvSpPr>
-        <p:spPr>
-          <a:xfrm>
-            <a:off x="457200" y="1005840"/>
-            <a:ext cx="11277295" cy="731520"/>
-          </a:xfrm>
-          <a:prstGeom prst="rect">
-            <a:avLst/>
-          </a:prstGeom>
-          <a:noFill/>
-          <a:ln/>
-        </p:spPr>
-        <p:txBody>
-          <a:bodyPr wrap="square" lIns="0" tIns="0" rIns="0" bIns="0" rtlCol="0" anchor="ctr"/>
-          <a:lstStyle/>
-          <a:p>
-            <a:pPr algn="ctr" indent="0" marL="0">
-              <a:buNone/>
-            </a:pPr>
-            <a:r>
-              <a:rPr lang="en-US" sz="3600" b="1" dirty="0">
-                <a:solidFill>
-                  <a:srgbClr val="990011"/>
-                </a:solidFill>
-                <a:latin typeface="Times New Roman" pitchFamily="34" charset="0"/>
-                <a:ea typeface="Times New Roman" pitchFamily="34" charset="-122"/>
-                <a:cs typeface="Times New Roman" pitchFamily="34" charset="-120"/>
-              </a:rPr>
-              <a:t>Activity 2</a:t>
-            </a:r>
-            <a:endParaRPr lang="en-US" sz="3600" dirty="0"/>
-          </a:p>
-        </p:txBody>
-      </p:sp>
       <p:pic>
         <p:nvPicPr>
-          <p:cNvPr id="4" name="Image 0" descr="/home/claude/f4/img/v2/f2t_factory_workers.jpg">    </p:cNvPr>
+          <p:cNvPr id="3" name="Image 0" descr="/home/claude/f4/img/minesec_sheet.png">    </p:cNvPr>
           <p:cNvPicPr>
             <a:picLocks noChangeAspect="1"/>
           </p:cNvPicPr>
@@ -9766,8 +9633,8 @@
         </p:blipFill>
         <p:spPr>
           <a:xfrm>
-            <a:off x="2251442" y="1783080"/>
-            <a:ext cx="7688812" cy="4270248"/>
+            <a:off x="0" y="658368"/>
+            <a:ext cx="5120640" cy="5833872"/>
           </a:xfrm>
           <a:prstGeom prst="rect">
             <a:avLst/>
@@ -9776,14 +9643,14 @@
       </p:pic>
       <p:sp>
         <p:nvSpPr>
-          <p:cNvPr id="5" name="Text 2"/>
+          <p:cNvPr id="4" name="Text 1"/>
           <p:cNvSpPr/>
           <p:nvPr/>
         </p:nvSpPr>
         <p:spPr>
           <a:xfrm>
-            <a:off x="457200" y="6089904"/>
-            <a:ext cx="11277295" cy="347472"/>
+            <a:off x="5349240" y="1005840"/>
+            <a:ext cx="6522415" cy="731520"/>
           </a:xfrm>
           <a:prstGeom prst="rect">
             <a:avLst/>
@@ -9792,24 +9659,68 @@
           <a:ln/>
         </p:spPr>
         <p:txBody>
-          <a:bodyPr wrap="square" lIns="0" tIns="0" rIns="0" bIns="0" rtlCol="0" anchor="ctr"/>
+          <a:bodyPr wrap="square" lIns="0" tIns="0" rIns="0" bIns="0" rtlCol="0" anchor="ctr">
+            <a:normAutofit/>
+          </a:bodyPr>
           <a:lstStyle/>
           <a:p>
             <a:pPr algn="ctr" indent="0" marL="0">
               <a:buNone/>
             </a:pPr>
             <a:r>
-              <a:rPr lang="en-US" sz="1800" i="1" dirty="0">
-                <a:solidFill>
-                  <a:srgbClr val="555555"/>
+              <a:rPr lang="en-US" sz="3600" b="1" dirty="0">
+                <a:solidFill>
+                  <a:srgbClr val="990011"/>
                 </a:solidFill>
                 <a:latin typeface="Times New Roman" pitchFamily="34" charset="0"/>
                 <a:ea typeface="Times New Roman" pitchFamily="34" charset="-122"/>
                 <a:cs typeface="Times New Roman" pitchFamily="34" charset="-120"/>
               </a:rPr>
-              <a:t>Factory workers.</a:t>
-            </a:r>
-            <a:endParaRPr lang="en-US" sz="1800" dirty="0"/>
+              <a:t>Activity 2: Question</a:t>
+            </a:r>
+            <a:endParaRPr lang="en-US" sz="3600" dirty="0"/>
+          </a:p>
+        </p:txBody>
+      </p:sp>
+      <p:sp>
+        <p:nvSpPr>
+          <p:cNvPr id="5" name="Text 2"/>
+          <p:cNvSpPr/>
+          <p:nvPr/>
+        </p:nvSpPr>
+        <p:spPr>
+          <a:xfrm>
+            <a:off x="5349240" y="1783080"/>
+            <a:ext cx="6522415" cy="4663440"/>
+          </a:xfrm>
+          <a:prstGeom prst="rect">
+            <a:avLst/>
+          </a:prstGeom>
+          <a:noFill/>
+          <a:ln/>
+        </p:spPr>
+        <p:txBody>
+          <a:bodyPr wrap="square" lIns="0" tIns="0" rIns="0" bIns="0" rtlCol="0" anchor="t"/>
+          <a:lstStyle/>
+          <a:p>
+            <a:pPr algn="l" indent="0" marL="0">
+              <a:spcAft>
+                <a:spcPts val="800"/>
+              </a:spcAft>
+              <a:buNone/>
+            </a:pPr>
+            <a:r>
+              <a:rPr lang="en-US" sz="4000" dirty="0">
+                <a:solidFill>
+                  <a:srgbClr val="111111"/>
+                </a:solidFill>
+                <a:latin typeface="Times New Roman" pitchFamily="34" charset="0"/>
+                <a:ea typeface="Times New Roman" pitchFamily="34" charset="-122"/>
+                <a:cs typeface="Times New Roman" pitchFamily="34" charset="-120"/>
+              </a:rPr>
+              <a:t>How are these workers paid?</a:t>
+            </a:r>
+            <a:endParaRPr lang="en-US" sz="4000" dirty="0"/>
           </a:p>
         </p:txBody>
       </p:sp>
@@ -9984,7 +9895,7 @@
                 <a:ea typeface="Times New Roman" pitchFamily="34" charset="-122"/>
                 <a:cs typeface="Times New Roman" pitchFamily="34" charset="-120"/>
               </a:rPr>
-              <a:t>Activity 2: Question</a:t>
+              <a:t>Activity 2: Answer</a:t>
             </a:r>
             <a:endParaRPr lang="en-US" sz="3600" dirty="0"/>
           </a:p>
@@ -10026,7 +9937,7 @@
                 <a:ea typeface="Times New Roman" pitchFamily="34" charset="-122"/>
                 <a:cs typeface="Times New Roman" pitchFamily="34" charset="-120"/>
               </a:rPr>
-              <a:t>How are these workers paid?</a:t>
+              <a:t>They receive a salary every month.</a:t>
             </a:r>
             <a:endParaRPr lang="en-US" sz="4000" dirty="0"/>
           </a:p>
@@ -10138,15 +10049,54 @@
                 <a:ea typeface="Calibri" pitchFamily="34" charset="-122"/>
                 <a:cs typeface="Calibri" pitchFamily="34" charset="-120"/>
               </a:rPr>
-              <a:t>1. FORMAL SECTOR</a:t>
+              <a:t>2. INFORMAL SECTOR</a:t>
             </a:r>
             <a:endParaRPr lang="en-US" sz="1400" dirty="0"/>
+          </a:p>
+        </p:txBody>
+      </p:sp>
+      <p:sp>
+        <p:nvSpPr>
+          <p:cNvPr id="3" name="Text 1"/>
+          <p:cNvSpPr/>
+          <p:nvPr/>
+        </p:nvSpPr>
+        <p:spPr>
+          <a:xfrm>
+            <a:off x="457200" y="1005840"/>
+            <a:ext cx="11277295" cy="731520"/>
+          </a:xfrm>
+          <a:prstGeom prst="rect">
+            <a:avLst/>
+          </a:prstGeom>
+          <a:noFill/>
+          <a:ln/>
+        </p:spPr>
+        <p:txBody>
+          <a:bodyPr wrap="square" lIns="0" tIns="0" rIns="0" bIns="0" rtlCol="0" anchor="ctr"/>
+          <a:lstStyle/>
+          <a:p>
+            <a:pPr algn="ctr" indent="0" marL="0">
+              <a:buNone/>
+            </a:pPr>
+            <a:r>
+              <a:rPr lang="en-US" sz="3600" b="1" dirty="0">
+                <a:solidFill>
+                  <a:srgbClr val="990011"/>
+                </a:solidFill>
+                <a:latin typeface="Times New Roman" pitchFamily="34" charset="0"/>
+                <a:ea typeface="Times New Roman" pitchFamily="34" charset="-122"/>
+                <a:cs typeface="Times New Roman" pitchFamily="34" charset="-120"/>
+              </a:rPr>
+              <a:t>Activity 3</a:t>
+            </a:r>
+            <a:endParaRPr lang="en-US" sz="3600" dirty="0"/>
           </a:p>
         </p:txBody>
       </p:sp>
       <p:pic>
         <p:nvPicPr>
-          <p:cNvPr id="3" name="Image 0" descr="/home/claude/f4/img/minesec_sheet.png">    </p:cNvPr>
+          <p:cNvPr id="4" name="Image 0" descr="/home/claude/f4/img/v2/f2t_moto_taxi.jpg">    </p:cNvPr>
           <p:cNvPicPr>
             <a:picLocks noChangeAspect="1"/>
           </p:cNvPicPr>
@@ -10160,8 +10110,8 @@
         </p:blipFill>
         <p:spPr>
           <a:xfrm>
-            <a:off x="0" y="658368"/>
-            <a:ext cx="5120640" cy="5833872"/>
+            <a:off x="2246610" y="1783080"/>
+            <a:ext cx="7698475" cy="4270248"/>
           </a:xfrm>
           <a:prstGeom prst="rect">
             <a:avLst/>
@@ -10170,14 +10120,14 @@
       </p:pic>
       <p:sp>
         <p:nvSpPr>
-          <p:cNvPr id="4" name="Text 1"/>
+          <p:cNvPr id="5" name="Text 2"/>
           <p:cNvSpPr/>
           <p:nvPr/>
         </p:nvSpPr>
         <p:spPr>
           <a:xfrm>
-            <a:off x="5349240" y="1005840"/>
-            <a:ext cx="6522415" cy="731520"/>
+            <a:off x="457200" y="6089904"/>
+            <a:ext cx="11277295" cy="347472"/>
           </a:xfrm>
           <a:prstGeom prst="rect">
             <a:avLst/>
@@ -10186,68 +10136,24 @@
           <a:ln/>
         </p:spPr>
         <p:txBody>
-          <a:bodyPr wrap="square" lIns="0" tIns="0" rIns="0" bIns="0" rtlCol="0" anchor="ctr">
-            <a:normAutofit/>
-          </a:bodyPr>
+          <a:bodyPr wrap="square" lIns="0" tIns="0" rIns="0" bIns="0" rtlCol="0" anchor="ctr"/>
           <a:lstStyle/>
           <a:p>
             <a:pPr algn="ctr" indent="0" marL="0">
               <a:buNone/>
             </a:pPr>
             <a:r>
-              <a:rPr lang="en-US" sz="3600" b="1" dirty="0">
-                <a:solidFill>
-                  <a:srgbClr val="990011"/>
+              <a:rPr lang="en-US" sz="1800" i="1" dirty="0">
+                <a:solidFill>
+                  <a:srgbClr val="555555"/>
                 </a:solidFill>
                 <a:latin typeface="Times New Roman" pitchFamily="34" charset="0"/>
                 <a:ea typeface="Times New Roman" pitchFamily="34" charset="-122"/>
                 <a:cs typeface="Times New Roman" pitchFamily="34" charset="-120"/>
               </a:rPr>
-              <a:t>Activity 2: Answer</a:t>
-            </a:r>
-            <a:endParaRPr lang="en-US" sz="3600" dirty="0"/>
-          </a:p>
-        </p:txBody>
-      </p:sp>
-      <p:sp>
-        <p:nvSpPr>
-          <p:cNvPr id="5" name="Text 2"/>
-          <p:cNvSpPr/>
-          <p:nvPr/>
-        </p:nvSpPr>
-        <p:spPr>
-          <a:xfrm>
-            <a:off x="5349240" y="1783080"/>
-            <a:ext cx="6522415" cy="4663440"/>
-          </a:xfrm>
-          <a:prstGeom prst="rect">
-            <a:avLst/>
-          </a:prstGeom>
-          <a:noFill/>
-          <a:ln/>
-        </p:spPr>
-        <p:txBody>
-          <a:bodyPr wrap="square" lIns="0" tIns="0" rIns="0" bIns="0" rtlCol="0" anchor="t"/>
-          <a:lstStyle/>
-          <a:p>
-            <a:pPr algn="l" indent="0" marL="0">
-              <a:spcAft>
-                <a:spcPts val="800"/>
-              </a:spcAft>
-              <a:buNone/>
-            </a:pPr>
-            <a:r>
-              <a:rPr lang="en-US" sz="4000" dirty="0">
-                <a:solidFill>
-                  <a:srgbClr val="111111"/>
-                </a:solidFill>
-                <a:latin typeface="Times New Roman" pitchFamily="34" charset="0"/>
-                <a:ea typeface="Times New Roman" pitchFamily="34" charset="-122"/>
-                <a:cs typeface="Times New Roman" pitchFamily="34" charset="-120"/>
-              </a:rPr>
-              <a:t>They receive a salary every month.</a:t>
-            </a:r>
-            <a:endParaRPr lang="en-US" sz="4000" dirty="0"/>
+              <a:t>Moto-taxis.</a:t>
+            </a:r>
+            <a:endParaRPr lang="en-US" sz="1800" dirty="0"/>
           </a:p>
         </p:txBody>
       </p:sp>
@@ -10363,48 +10269,9 @@
           </a:p>
         </p:txBody>
       </p:sp>
-      <p:sp>
-        <p:nvSpPr>
-          <p:cNvPr id="3" name="Text 1"/>
-          <p:cNvSpPr/>
-          <p:nvPr/>
-        </p:nvSpPr>
-        <p:spPr>
-          <a:xfrm>
-            <a:off x="457200" y="1005840"/>
-            <a:ext cx="11277295" cy="731520"/>
-          </a:xfrm>
-          <a:prstGeom prst="rect">
-            <a:avLst/>
-          </a:prstGeom>
-          <a:noFill/>
-          <a:ln/>
-        </p:spPr>
-        <p:txBody>
-          <a:bodyPr wrap="square" lIns="0" tIns="0" rIns="0" bIns="0" rtlCol="0" anchor="ctr"/>
-          <a:lstStyle/>
-          <a:p>
-            <a:pPr algn="ctr" indent="0" marL="0">
-              <a:buNone/>
-            </a:pPr>
-            <a:r>
-              <a:rPr lang="en-US" sz="3600" b="1" dirty="0">
-                <a:solidFill>
-                  <a:srgbClr val="990011"/>
-                </a:solidFill>
-                <a:latin typeface="Times New Roman" pitchFamily="34" charset="0"/>
-                <a:ea typeface="Times New Roman" pitchFamily="34" charset="-122"/>
-                <a:cs typeface="Times New Roman" pitchFamily="34" charset="-120"/>
-              </a:rPr>
-              <a:t>Activity 3</a:t>
-            </a:r>
-            <a:endParaRPr lang="en-US" sz="3600" dirty="0"/>
-          </a:p>
-        </p:txBody>
-      </p:sp>
       <p:pic>
         <p:nvPicPr>
-          <p:cNvPr id="4" name="Image 0" descr="/home/claude/f4/img/v2/f2t_moto_taxi.jpg">    </p:cNvPr>
+          <p:cNvPr id="3" name="Image 0" descr="/home/claude/f4/img/minesec_sheet.png">    </p:cNvPr>
           <p:cNvPicPr>
             <a:picLocks noChangeAspect="1"/>
           </p:cNvPicPr>
@@ -10418,8 +10285,8 @@
         </p:blipFill>
         <p:spPr>
           <a:xfrm>
-            <a:off x="2246610" y="1783080"/>
-            <a:ext cx="7698475" cy="4270248"/>
+            <a:off x="0" y="658368"/>
+            <a:ext cx="5120640" cy="5833872"/>
           </a:xfrm>
           <a:prstGeom prst="rect">
             <a:avLst/>
@@ -10428,14 +10295,14 @@
       </p:pic>
       <p:sp>
         <p:nvSpPr>
-          <p:cNvPr id="5" name="Text 2"/>
+          <p:cNvPr id="4" name="Text 1"/>
           <p:cNvSpPr/>
           <p:nvPr/>
         </p:nvSpPr>
         <p:spPr>
           <a:xfrm>
-            <a:off x="457200" y="6089904"/>
-            <a:ext cx="11277295" cy="347472"/>
+            <a:off x="5349240" y="1005840"/>
+            <a:ext cx="6522415" cy="731520"/>
           </a:xfrm>
           <a:prstGeom prst="rect">
             <a:avLst/>
@@ -10444,24 +10311,68 @@
           <a:ln/>
         </p:spPr>
         <p:txBody>
-          <a:bodyPr wrap="square" lIns="0" tIns="0" rIns="0" bIns="0" rtlCol="0" anchor="ctr"/>
+          <a:bodyPr wrap="square" lIns="0" tIns="0" rIns="0" bIns="0" rtlCol="0" anchor="ctr">
+            <a:normAutofit/>
+          </a:bodyPr>
           <a:lstStyle/>
           <a:p>
             <a:pPr algn="ctr" indent="0" marL="0">
               <a:buNone/>
             </a:pPr>
             <a:r>
-              <a:rPr lang="en-US" sz="1800" i="1" dirty="0">
-                <a:solidFill>
-                  <a:srgbClr val="555555"/>
+              <a:rPr lang="en-US" sz="3600" b="1" dirty="0">
+                <a:solidFill>
+                  <a:srgbClr val="990011"/>
                 </a:solidFill>
                 <a:latin typeface="Times New Roman" pitchFamily="34" charset="0"/>
                 <a:ea typeface="Times New Roman" pitchFamily="34" charset="-122"/>
                 <a:cs typeface="Times New Roman" pitchFamily="34" charset="-120"/>
               </a:rPr>
-              <a:t>Moto-taxis.</a:t>
-            </a:r>
-            <a:endParaRPr lang="en-US" sz="1800" dirty="0"/>
+              <a:t>Activity 3: Question</a:t>
+            </a:r>
+            <a:endParaRPr lang="en-US" sz="3600" dirty="0"/>
+          </a:p>
+        </p:txBody>
+      </p:sp>
+      <p:sp>
+        <p:nvSpPr>
+          <p:cNvPr id="5" name="Text 2"/>
+          <p:cNvSpPr/>
+          <p:nvPr/>
+        </p:nvSpPr>
+        <p:spPr>
+          <a:xfrm>
+            <a:off x="5349240" y="1783080"/>
+            <a:ext cx="6522415" cy="4663440"/>
+          </a:xfrm>
+          <a:prstGeom prst="rect">
+            <a:avLst/>
+          </a:prstGeom>
+          <a:noFill/>
+          <a:ln/>
+        </p:spPr>
+        <p:txBody>
+          <a:bodyPr wrap="square" lIns="0" tIns="0" rIns="0" bIns="0" rtlCol="0" anchor="t"/>
+          <a:lstStyle/>
+          <a:p>
+            <a:pPr algn="l" indent="0" marL="0">
+              <a:spcAft>
+                <a:spcPts val="800"/>
+              </a:spcAft>
+              <a:buNone/>
+            </a:pPr>
+            <a:r>
+              <a:rPr lang="en-US" sz="4000" dirty="0">
+                <a:solidFill>
+                  <a:srgbClr val="111111"/>
+                </a:solidFill>
+                <a:latin typeface="Times New Roman" pitchFamily="34" charset="0"/>
+                <a:ea typeface="Times New Roman" pitchFamily="34" charset="-122"/>
+                <a:cs typeface="Times New Roman" pitchFamily="34" charset="-120"/>
+              </a:rPr>
+              <a:t>Is the moto-taxi driver usually registered?</a:t>
+            </a:r>
+            <a:endParaRPr lang="en-US" sz="4000" dirty="0"/>
           </a:p>
         </p:txBody>
       </p:sp>
@@ -10636,7 +10547,7 @@
                 <a:ea typeface="Times New Roman" pitchFamily="34" charset="-122"/>
                 <a:cs typeface="Times New Roman" pitchFamily="34" charset="-120"/>
               </a:rPr>
-              <a:t>Activity 3: Question</a:t>
+              <a:t>Activity 3: Answer</a:t>
             </a:r>
             <a:endParaRPr lang="en-US" sz="3600" dirty="0"/>
           </a:p>
@@ -10678,7 +10589,7 @@
                 <a:ea typeface="Times New Roman" pitchFamily="34" charset="-122"/>
                 <a:cs typeface="Times New Roman" pitchFamily="34" charset="-120"/>
               </a:rPr>
-              <a:t>Is the moto-taxi driver usually registered?</a:t>
+              <a:t>No: it is the informal sector.</a:t>
             </a:r>
             <a:endParaRPr lang="en-US" sz="4000" dirty="0"/>
           </a:p>
@@ -10796,9 +10707,48 @@
           </a:p>
         </p:txBody>
       </p:sp>
+      <p:sp>
+        <p:nvSpPr>
+          <p:cNvPr id="3" name="Text 1"/>
+          <p:cNvSpPr/>
+          <p:nvPr/>
+        </p:nvSpPr>
+        <p:spPr>
+          <a:xfrm>
+            <a:off x="457200" y="1005840"/>
+            <a:ext cx="11277295" cy="731520"/>
+          </a:xfrm>
+          <a:prstGeom prst="rect">
+            <a:avLst/>
+          </a:prstGeom>
+          <a:noFill/>
+          <a:ln/>
+        </p:spPr>
+        <p:txBody>
+          <a:bodyPr wrap="square" lIns="0" tIns="0" rIns="0" bIns="0" rtlCol="0" anchor="ctr"/>
+          <a:lstStyle/>
+          <a:p>
+            <a:pPr algn="ctr" indent="0" marL="0">
+              <a:buNone/>
+            </a:pPr>
+            <a:r>
+              <a:rPr lang="en-US" sz="3600" b="1" dirty="0">
+                <a:solidFill>
+                  <a:srgbClr val="990011"/>
+                </a:solidFill>
+                <a:latin typeface="Times New Roman" pitchFamily="34" charset="0"/>
+                <a:ea typeface="Times New Roman" pitchFamily="34" charset="-122"/>
+                <a:cs typeface="Times New Roman" pitchFamily="34" charset="-120"/>
+              </a:rPr>
+              <a:t>Activity 4</a:t>
+            </a:r>
+            <a:endParaRPr lang="en-US" sz="3600" dirty="0"/>
+          </a:p>
+        </p:txBody>
+      </p:sp>
       <p:pic>
         <p:nvPicPr>
-          <p:cNvPr id="3" name="Image 0" descr="/home/claude/f4/img/minesec_sheet.png">    </p:cNvPr>
+          <p:cNvPr id="4" name="Image 0" descr="/home/claude/f4/img/v2/f2t_street_vendor.jpg">    </p:cNvPr>
           <p:cNvPicPr>
             <a:picLocks noChangeAspect="1"/>
           </p:cNvPicPr>
@@ -10812,8 +10762,8 @@
         </p:blipFill>
         <p:spPr>
           <a:xfrm>
-            <a:off x="0" y="658368"/>
-            <a:ext cx="5120640" cy="5833872"/>
+            <a:off x="2246610" y="1783080"/>
+            <a:ext cx="7698475" cy="4270248"/>
           </a:xfrm>
           <a:prstGeom prst="rect">
             <a:avLst/>
@@ -10822,14 +10772,14 @@
       </p:pic>
       <p:sp>
         <p:nvSpPr>
-          <p:cNvPr id="4" name="Text 1"/>
+          <p:cNvPr id="5" name="Text 2"/>
           <p:cNvSpPr/>
           <p:nvPr/>
         </p:nvSpPr>
         <p:spPr>
           <a:xfrm>
-            <a:off x="5349240" y="1005840"/>
-            <a:ext cx="6522415" cy="731520"/>
+            <a:off x="457200" y="6089904"/>
+            <a:ext cx="11277295" cy="347472"/>
           </a:xfrm>
           <a:prstGeom prst="rect">
             <a:avLst/>
@@ -10838,68 +10788,24 @@
           <a:ln/>
         </p:spPr>
         <p:txBody>
-          <a:bodyPr wrap="square" lIns="0" tIns="0" rIns="0" bIns="0" rtlCol="0" anchor="ctr">
-            <a:normAutofit/>
-          </a:bodyPr>
+          <a:bodyPr wrap="square" lIns="0" tIns="0" rIns="0" bIns="0" rtlCol="0" anchor="ctr"/>
           <a:lstStyle/>
           <a:p>
             <a:pPr algn="ctr" indent="0" marL="0">
               <a:buNone/>
             </a:pPr>
             <a:r>
-              <a:rPr lang="en-US" sz="3600" b="1" dirty="0">
-                <a:solidFill>
-                  <a:srgbClr val="990011"/>
+              <a:rPr lang="en-US" sz="1800" i="1" dirty="0">
+                <a:solidFill>
+                  <a:srgbClr val="555555"/>
                 </a:solidFill>
                 <a:latin typeface="Times New Roman" pitchFamily="34" charset="0"/>
                 <a:ea typeface="Times New Roman" pitchFamily="34" charset="-122"/>
                 <a:cs typeface="Times New Roman" pitchFamily="34" charset="-120"/>
               </a:rPr>
-              <a:t>Activity 3: Answer</a:t>
-            </a:r>
-            <a:endParaRPr lang="en-US" sz="3600" dirty="0"/>
-          </a:p>
-        </p:txBody>
-      </p:sp>
-      <p:sp>
-        <p:nvSpPr>
-          <p:cNvPr id="5" name="Text 2"/>
-          <p:cNvSpPr/>
-          <p:nvPr/>
-        </p:nvSpPr>
-        <p:spPr>
-          <a:xfrm>
-            <a:off x="5349240" y="1783080"/>
-            <a:ext cx="6522415" cy="4663440"/>
-          </a:xfrm>
-          <a:prstGeom prst="rect">
-            <a:avLst/>
-          </a:prstGeom>
-          <a:noFill/>
-          <a:ln/>
-        </p:spPr>
-        <p:txBody>
-          <a:bodyPr wrap="square" lIns="0" tIns="0" rIns="0" bIns="0" rtlCol="0" anchor="t"/>
-          <a:lstStyle/>
-          <a:p>
-            <a:pPr algn="l" indent="0" marL="0">
-              <a:spcAft>
-                <a:spcPts val="800"/>
-              </a:spcAft>
-              <a:buNone/>
-            </a:pPr>
-            <a:r>
-              <a:rPr lang="en-US" sz="4000" dirty="0">
-                <a:solidFill>
-                  <a:srgbClr val="111111"/>
-                </a:solidFill>
-                <a:latin typeface="Times New Roman" pitchFamily="34" charset="0"/>
-                <a:ea typeface="Times New Roman" pitchFamily="34" charset="-122"/>
-                <a:cs typeface="Times New Roman" pitchFamily="34" charset="-120"/>
-              </a:rPr>
-              <a:t>No: it is the informal sector.</a:t>
-            </a:r>
-            <a:endParaRPr lang="en-US" sz="4000" dirty="0"/>
+              <a:t>A street seller.</a:t>
+            </a:r>
+            <a:endParaRPr lang="en-US" sz="1800" dirty="0"/>
           </a:p>
         </p:txBody>
       </p:sp>
@@ -11015,48 +10921,9 @@
           </a:p>
         </p:txBody>
       </p:sp>
-      <p:sp>
-        <p:nvSpPr>
-          <p:cNvPr id="3" name="Text 1"/>
-          <p:cNvSpPr/>
-          <p:nvPr/>
-        </p:nvSpPr>
-        <p:spPr>
-          <a:xfrm>
-            <a:off x="457200" y="1005840"/>
-            <a:ext cx="11277295" cy="731520"/>
-          </a:xfrm>
-          <a:prstGeom prst="rect">
-            <a:avLst/>
-          </a:prstGeom>
-          <a:noFill/>
-          <a:ln/>
-        </p:spPr>
-        <p:txBody>
-          <a:bodyPr wrap="square" lIns="0" tIns="0" rIns="0" bIns="0" rtlCol="0" anchor="ctr"/>
-          <a:lstStyle/>
-          <a:p>
-            <a:pPr algn="ctr" indent="0" marL="0">
-              <a:buNone/>
-            </a:pPr>
-            <a:r>
-              <a:rPr lang="en-US" sz="3600" b="1" dirty="0">
-                <a:solidFill>
-                  <a:srgbClr val="990011"/>
-                </a:solidFill>
-                <a:latin typeface="Times New Roman" pitchFamily="34" charset="0"/>
-                <a:ea typeface="Times New Roman" pitchFamily="34" charset="-122"/>
-                <a:cs typeface="Times New Roman" pitchFamily="34" charset="-120"/>
-              </a:rPr>
-              <a:t>Activity 4</a:t>
-            </a:r>
-            <a:endParaRPr lang="en-US" sz="3600" dirty="0"/>
-          </a:p>
-        </p:txBody>
-      </p:sp>
       <p:pic>
         <p:nvPicPr>
-          <p:cNvPr id="4" name="Image 0" descr="/home/claude/f4/img/v2/f2t_street_vendor.jpg">    </p:cNvPr>
+          <p:cNvPr id="3" name="Image 0" descr="/home/claude/f4/img/minesec_sheet.png">    </p:cNvPr>
           <p:cNvPicPr>
             <a:picLocks noChangeAspect="1"/>
           </p:cNvPicPr>
@@ -11070,8 +10937,8 @@
         </p:blipFill>
         <p:spPr>
           <a:xfrm>
-            <a:off x="2246610" y="1783080"/>
-            <a:ext cx="7698475" cy="4270248"/>
+            <a:off x="0" y="658368"/>
+            <a:ext cx="5120640" cy="5833872"/>
           </a:xfrm>
           <a:prstGeom prst="rect">
             <a:avLst/>
@@ -11080,14 +10947,14 @@
       </p:pic>
       <p:sp>
         <p:nvSpPr>
-          <p:cNvPr id="5" name="Text 2"/>
+          <p:cNvPr id="4" name="Text 1"/>
           <p:cNvSpPr/>
           <p:nvPr/>
         </p:nvSpPr>
         <p:spPr>
           <a:xfrm>
-            <a:off x="457200" y="6089904"/>
-            <a:ext cx="11277295" cy="347472"/>
+            <a:off x="5349240" y="1005840"/>
+            <a:ext cx="6522415" cy="731520"/>
           </a:xfrm>
           <a:prstGeom prst="rect">
             <a:avLst/>
@@ -11096,24 +10963,68 @@
           <a:ln/>
         </p:spPr>
         <p:txBody>
-          <a:bodyPr wrap="square" lIns="0" tIns="0" rIns="0" bIns="0" rtlCol="0" anchor="ctr"/>
+          <a:bodyPr wrap="square" lIns="0" tIns="0" rIns="0" bIns="0" rtlCol="0" anchor="ctr">
+            <a:normAutofit/>
+          </a:bodyPr>
           <a:lstStyle/>
           <a:p>
             <a:pPr algn="ctr" indent="0" marL="0">
               <a:buNone/>
             </a:pPr>
             <a:r>
-              <a:rPr lang="en-US" sz="1800" i="1" dirty="0">
-                <a:solidFill>
-                  <a:srgbClr val="555555"/>
+              <a:rPr lang="en-US" sz="3600" b="1" dirty="0">
+                <a:solidFill>
+                  <a:srgbClr val="990011"/>
                 </a:solidFill>
                 <a:latin typeface="Times New Roman" pitchFamily="34" charset="0"/>
                 <a:ea typeface="Times New Roman" pitchFamily="34" charset="-122"/>
                 <a:cs typeface="Times New Roman" pitchFamily="34" charset="-120"/>
               </a:rPr>
-              <a:t>A street seller.</a:t>
-            </a:r>
-            <a:endParaRPr lang="en-US" sz="1800" dirty="0"/>
+              <a:t>Activity 4: Question</a:t>
+            </a:r>
+            <a:endParaRPr lang="en-US" sz="3600" dirty="0"/>
+          </a:p>
+        </p:txBody>
+      </p:sp>
+      <p:sp>
+        <p:nvSpPr>
+          <p:cNvPr id="5" name="Text 2"/>
+          <p:cNvSpPr/>
+          <p:nvPr/>
+        </p:nvSpPr>
+        <p:spPr>
+          <a:xfrm>
+            <a:off x="5349240" y="1783080"/>
+            <a:ext cx="6522415" cy="4663440"/>
+          </a:xfrm>
+          <a:prstGeom prst="rect">
+            <a:avLst/>
+          </a:prstGeom>
+          <a:noFill/>
+          <a:ln/>
+        </p:spPr>
+        <p:txBody>
+          <a:bodyPr wrap="square" lIns="0" tIns="0" rIns="0" bIns="0" rtlCol="0" anchor="t"/>
+          <a:lstStyle/>
+          <a:p>
+            <a:pPr algn="l" indent="0" marL="0">
+              <a:spcAft>
+                <a:spcPts val="800"/>
+              </a:spcAft>
+              <a:buNone/>
+            </a:pPr>
+            <a:r>
+              <a:rPr lang="en-US" sz="4000" dirty="0">
+                <a:solidFill>
+                  <a:srgbClr val="111111"/>
+                </a:solidFill>
+                <a:latin typeface="Times New Roman" pitchFamily="34" charset="0"/>
+                <a:ea typeface="Times New Roman" pitchFamily="34" charset="-122"/>
+                <a:cs typeface="Times New Roman" pitchFamily="34" charset="-120"/>
+              </a:rPr>
+              <a:t>Why is it easy to start work in the informal sector?</a:t>
+            </a:r>
+            <a:endParaRPr lang="en-US" sz="4000" dirty="0"/>
           </a:p>
         </p:txBody>
       </p:sp>
@@ -11288,7 +11199,7 @@
                 <a:ea typeface="Times New Roman" pitchFamily="34" charset="-122"/>
                 <a:cs typeface="Times New Roman" pitchFamily="34" charset="-120"/>
               </a:rPr>
-              <a:t>Activity 4: Question</a:t>
+              <a:t>Activity 4: Answer</a:t>
             </a:r>
             <a:endParaRPr lang="en-US" sz="3600" dirty="0"/>
           </a:p>
@@ -11330,7 +11241,7 @@
                 <a:ea typeface="Times New Roman" pitchFamily="34" charset="-122"/>
                 <a:cs typeface="Times New Roman" pitchFamily="34" charset="-120"/>
               </a:rPr>
-              <a:t>Why is it easy to start work in the informal sector?</a:t>
+              <a:t>It needs little money and no papers.</a:t>
             </a:r>
             <a:endParaRPr lang="en-US" sz="4000" dirty="0"/>
           </a:p>
@@ -12457,9 +12368,48 @@
           </a:p>
         </p:txBody>
       </p:sp>
+      <p:sp>
+        <p:nvSpPr>
+          <p:cNvPr id="3" name="Text 1"/>
+          <p:cNvSpPr/>
+          <p:nvPr/>
+        </p:nvSpPr>
+        <p:spPr>
+          <a:xfrm>
+            <a:off x="457200" y="1005840"/>
+            <a:ext cx="11277295" cy="731520"/>
+          </a:xfrm>
+          <a:prstGeom prst="rect">
+            <a:avLst/>
+          </a:prstGeom>
+          <a:noFill/>
+          <a:ln/>
+        </p:spPr>
+        <p:txBody>
+          <a:bodyPr wrap="square" lIns="0" tIns="0" rIns="0" bIns="0" rtlCol="0" anchor="ctr"/>
+          <a:lstStyle/>
+          <a:p>
+            <a:pPr algn="ctr" indent="0" marL="0">
+              <a:buNone/>
+            </a:pPr>
+            <a:r>
+              <a:rPr lang="en-US" sz="3600" b="1" dirty="0">
+                <a:solidFill>
+                  <a:srgbClr val="990011"/>
+                </a:solidFill>
+                <a:latin typeface="Times New Roman" pitchFamily="34" charset="0"/>
+                <a:ea typeface="Times New Roman" pitchFamily="34" charset="-122"/>
+                <a:cs typeface="Times New Roman" pitchFamily="34" charset="-120"/>
+              </a:rPr>
+              <a:t>Activity 5</a:t>
+            </a:r>
+            <a:endParaRPr lang="en-US" sz="3600" dirty="0"/>
+          </a:p>
+        </p:txBody>
+      </p:sp>
       <p:pic>
         <p:nvPicPr>
-          <p:cNvPr id="3" name="Image 0" descr="/home/claude/f4/img/minesec_sheet.png">    </p:cNvPr>
+          <p:cNvPr id="4" name="Image 0" descr="/home/claude/f4/img/v2/formal_informal_big.png">    </p:cNvPr>
           <p:cNvPicPr>
             <a:picLocks noChangeAspect="1"/>
           </p:cNvPicPr>
@@ -12473,8 +12423,8 @@
         </p:blipFill>
         <p:spPr>
           <a:xfrm>
-            <a:off x="0" y="658368"/>
-            <a:ext cx="5120640" cy="5833872"/>
+            <a:off x="629930" y="1783080"/>
+            <a:ext cx="10931835" cy="4270248"/>
           </a:xfrm>
           <a:prstGeom prst="rect">
             <a:avLst/>
@@ -12483,14 +12433,14 @@
       </p:pic>
       <p:sp>
         <p:nvSpPr>
-          <p:cNvPr id="4" name="Text 1"/>
+          <p:cNvPr id="5" name="Text 2"/>
           <p:cNvSpPr/>
           <p:nvPr/>
         </p:nvSpPr>
         <p:spPr>
           <a:xfrm>
-            <a:off x="5349240" y="1005840"/>
-            <a:ext cx="6522415" cy="731520"/>
+            <a:off x="457200" y="6089904"/>
+            <a:ext cx="11277295" cy="347472"/>
           </a:xfrm>
           <a:prstGeom prst="rect">
             <a:avLst/>
@@ -12499,68 +12449,24 @@
           <a:ln/>
         </p:spPr>
         <p:txBody>
-          <a:bodyPr wrap="square" lIns="0" tIns="0" rIns="0" bIns="0" rtlCol="0" anchor="ctr">
-            <a:normAutofit/>
-          </a:bodyPr>
+          <a:bodyPr wrap="square" lIns="0" tIns="0" rIns="0" bIns="0" rtlCol="0" anchor="ctr"/>
           <a:lstStyle/>
           <a:p>
             <a:pPr algn="ctr" indent="0" marL="0">
               <a:buNone/>
             </a:pPr>
             <a:r>
-              <a:rPr lang="en-US" sz="3600" b="1" dirty="0">
-                <a:solidFill>
-                  <a:srgbClr val="990011"/>
+              <a:rPr lang="en-US" sz="1800" i="1" dirty="0">
+                <a:solidFill>
+                  <a:srgbClr val="555555"/>
                 </a:solidFill>
                 <a:latin typeface="Times New Roman" pitchFamily="34" charset="0"/>
                 <a:ea typeface="Times New Roman" pitchFamily="34" charset="-122"/>
                 <a:cs typeface="Times New Roman" pitchFamily="34" charset="-120"/>
               </a:rPr>
-              <a:t>Activity 4: Answer</a:t>
-            </a:r>
-            <a:endParaRPr lang="en-US" sz="3600" dirty="0"/>
-          </a:p>
-        </p:txBody>
-      </p:sp>
-      <p:sp>
-        <p:nvSpPr>
-          <p:cNvPr id="5" name="Text 2"/>
-          <p:cNvSpPr/>
-          <p:nvPr/>
-        </p:nvSpPr>
-        <p:spPr>
-          <a:xfrm>
-            <a:off x="5349240" y="1783080"/>
-            <a:ext cx="6522415" cy="4663440"/>
-          </a:xfrm>
-          <a:prstGeom prst="rect">
-            <a:avLst/>
-          </a:prstGeom>
-          <a:noFill/>
-          <a:ln/>
-        </p:spPr>
-        <p:txBody>
-          <a:bodyPr wrap="square" lIns="0" tIns="0" rIns="0" bIns="0" rtlCol="0" anchor="t"/>
-          <a:lstStyle/>
-          <a:p>
-            <a:pPr algn="l" indent="0" marL="0">
-              <a:spcAft>
-                <a:spcPts val="800"/>
-              </a:spcAft>
-              <a:buNone/>
-            </a:pPr>
-            <a:r>
-              <a:rPr lang="en-US" sz="4000" dirty="0">
-                <a:solidFill>
-                  <a:srgbClr val="111111"/>
-                </a:solidFill>
-                <a:latin typeface="Times New Roman" pitchFamily="34" charset="0"/>
-                <a:ea typeface="Times New Roman" pitchFamily="34" charset="-122"/>
-                <a:cs typeface="Times New Roman" pitchFamily="34" charset="-120"/>
-              </a:rPr>
-              <a:t>It needs little money and no papers.</a:t>
-            </a:r>
-            <a:endParaRPr lang="en-US" sz="4000" dirty="0"/>
+              <a:t>Formal and informal sectors.</a:t>
+            </a:r>
+            <a:endParaRPr lang="en-US" sz="1800" dirty="0"/>
           </a:p>
         </p:txBody>
       </p:sp>
@@ -12676,48 +12582,9 @@
           </a:p>
         </p:txBody>
       </p:sp>
-      <p:sp>
-        <p:nvSpPr>
-          <p:cNvPr id="3" name="Text 1"/>
-          <p:cNvSpPr/>
-          <p:nvPr/>
-        </p:nvSpPr>
-        <p:spPr>
-          <a:xfrm>
-            <a:off x="457200" y="1005840"/>
-            <a:ext cx="11277295" cy="731520"/>
-          </a:xfrm>
-          <a:prstGeom prst="rect">
-            <a:avLst/>
-          </a:prstGeom>
-          <a:noFill/>
-          <a:ln/>
-        </p:spPr>
-        <p:txBody>
-          <a:bodyPr wrap="square" lIns="0" tIns="0" rIns="0" bIns="0" rtlCol="0" anchor="ctr"/>
-          <a:lstStyle/>
-          <a:p>
-            <a:pPr algn="ctr" indent="0" marL="0">
-              <a:buNone/>
-            </a:pPr>
-            <a:r>
-              <a:rPr lang="en-US" sz="3600" b="1" dirty="0">
-                <a:solidFill>
-                  <a:srgbClr val="990011"/>
-                </a:solidFill>
-                <a:latin typeface="Times New Roman" pitchFamily="34" charset="0"/>
-                <a:ea typeface="Times New Roman" pitchFamily="34" charset="-122"/>
-                <a:cs typeface="Times New Roman" pitchFamily="34" charset="-120"/>
-              </a:rPr>
-              <a:t>Activity 5</a:t>
-            </a:r>
-            <a:endParaRPr lang="en-US" sz="3600" dirty="0"/>
-          </a:p>
-        </p:txBody>
-      </p:sp>
       <p:pic>
         <p:nvPicPr>
-          <p:cNvPr id="4" name="Image 0" descr="/home/claude/f4/img/v2/formal_informal_big.png">    </p:cNvPr>
+          <p:cNvPr id="3" name="Image 0" descr="/home/claude/f4/img/minesec_sheet.png">    </p:cNvPr>
           <p:cNvPicPr>
             <a:picLocks noChangeAspect="1"/>
           </p:cNvPicPr>
@@ -12731,8 +12598,8 @@
         </p:blipFill>
         <p:spPr>
           <a:xfrm>
-            <a:off x="629930" y="1783080"/>
-            <a:ext cx="10931835" cy="4270248"/>
+            <a:off x="0" y="658368"/>
+            <a:ext cx="5120640" cy="5833872"/>
           </a:xfrm>
           <a:prstGeom prst="rect">
             <a:avLst/>
@@ -12741,14 +12608,14 @@
       </p:pic>
       <p:sp>
         <p:nvSpPr>
-          <p:cNvPr id="5" name="Text 2"/>
+          <p:cNvPr id="4" name="Text 1"/>
           <p:cNvSpPr/>
           <p:nvPr/>
         </p:nvSpPr>
         <p:spPr>
           <a:xfrm>
-            <a:off x="457200" y="6089904"/>
-            <a:ext cx="11277295" cy="347472"/>
+            <a:off x="5349240" y="1005840"/>
+            <a:ext cx="6522415" cy="731520"/>
           </a:xfrm>
           <a:prstGeom prst="rect">
             <a:avLst/>
@@ -12757,24 +12624,68 @@
           <a:ln/>
         </p:spPr>
         <p:txBody>
-          <a:bodyPr wrap="square" lIns="0" tIns="0" rIns="0" bIns="0" rtlCol="0" anchor="ctr"/>
+          <a:bodyPr wrap="square" lIns="0" tIns="0" rIns="0" bIns="0" rtlCol="0" anchor="ctr">
+            <a:normAutofit/>
+          </a:bodyPr>
           <a:lstStyle/>
           <a:p>
             <a:pPr algn="ctr" indent="0" marL="0">
               <a:buNone/>
             </a:pPr>
             <a:r>
-              <a:rPr lang="en-US" sz="1800" i="1" dirty="0">
-                <a:solidFill>
-                  <a:srgbClr val="555555"/>
+              <a:rPr lang="en-US" sz="3600" b="1" dirty="0">
+                <a:solidFill>
+                  <a:srgbClr val="990011"/>
                 </a:solidFill>
                 <a:latin typeface="Times New Roman" pitchFamily="34" charset="0"/>
                 <a:ea typeface="Times New Roman" pitchFamily="34" charset="-122"/>
                 <a:cs typeface="Times New Roman" pitchFamily="34" charset="-120"/>
               </a:rPr>
-              <a:t>Formal and informal sectors.</a:t>
-            </a:r>
-            <a:endParaRPr lang="en-US" sz="1800" dirty="0"/>
+              <a:t>Activity 5: Question</a:t>
+            </a:r>
+            <a:endParaRPr lang="en-US" sz="3600" dirty="0"/>
+          </a:p>
+        </p:txBody>
+      </p:sp>
+      <p:sp>
+        <p:nvSpPr>
+          <p:cNvPr id="5" name="Text 2"/>
+          <p:cNvSpPr/>
+          <p:nvPr/>
+        </p:nvSpPr>
+        <p:spPr>
+          <a:xfrm>
+            <a:off x="5349240" y="1783080"/>
+            <a:ext cx="6522415" cy="4663440"/>
+          </a:xfrm>
+          <a:prstGeom prst="rect">
+            <a:avLst/>
+          </a:prstGeom>
+          <a:noFill/>
+          <a:ln/>
+        </p:spPr>
+        <p:txBody>
+          <a:bodyPr wrap="square" lIns="0" tIns="0" rIns="0" bIns="0" rtlCol="0" anchor="t"/>
+          <a:lstStyle/>
+          <a:p>
+            <a:pPr algn="l" indent="0" marL="0">
+              <a:spcAft>
+                <a:spcPts val="800"/>
+              </a:spcAft>
+              <a:buNone/>
+            </a:pPr>
+            <a:r>
+              <a:rPr lang="en-US" sz="4000" dirty="0">
+                <a:solidFill>
+                  <a:srgbClr val="111111"/>
+                </a:solidFill>
+                <a:latin typeface="Times New Roman" pitchFamily="34" charset="0"/>
+                <a:ea typeface="Times New Roman" pitchFamily="34" charset="-122"/>
+                <a:cs typeface="Times New Roman" pitchFamily="34" charset="-120"/>
+              </a:rPr>
+              <a:t>Which sector gives workers a pension?</a:t>
+            </a:r>
+            <a:endParaRPr lang="en-US" sz="4000" dirty="0"/>
           </a:p>
         </p:txBody>
       </p:sp>
@@ -12949,7 +12860,7 @@
                 <a:ea typeface="Times New Roman" pitchFamily="34" charset="-122"/>
                 <a:cs typeface="Times New Roman" pitchFamily="34" charset="-120"/>
               </a:rPr>
-              <a:t>Activity 5: Question</a:t>
+              <a:t>Activity 5: Answer</a:t>
             </a:r>
             <a:endParaRPr lang="en-US" sz="3600" dirty="0"/>
           </a:p>
@@ -12991,7 +12902,7 @@
                 <a:ea typeface="Times New Roman" pitchFamily="34" charset="-122"/>
                 <a:cs typeface="Times New Roman" pitchFamily="34" charset="-120"/>
               </a:rPr>
-              <a:t>Which sector gives workers a pension?</a:t>
+              <a:t>The formal sector.</a:t>
             </a:r>
             <a:endParaRPr lang="en-US" sz="4000" dirty="0"/>
           </a:p>
@@ -13103,7 +13014,7 @@
                 <a:ea typeface="Calibri" pitchFamily="34" charset="-122"/>
                 <a:cs typeface="Calibri" pitchFamily="34" charset="-120"/>
               </a:rPr>
-              <a:t>2. INFORMAL SECTOR</a:t>
+              <a:t>BOARD SUMMARY</a:t>
             </a:r>
             <a:endParaRPr lang="en-US" sz="1400" dirty="0"/>
           </a:p>
@@ -13168,7 +13079,7 @@
                 <a:ea typeface="Times New Roman" pitchFamily="34" charset="-122"/>
                 <a:cs typeface="Times New Roman" pitchFamily="34" charset="-120"/>
               </a:rPr>
-              <a:t>Activity 5: Answer</a:t>
+              <a:t>Board Summary</a:t>
             </a:r>
             <a:endParaRPr lang="en-US" sz="3600" dirty="0"/>
           </a:p>
@@ -13202,7 +13113,7 @@
               <a:buNone/>
             </a:pPr>
             <a:r>
-              <a:rPr lang="en-US" sz="4000" dirty="0">
+              <a:rPr lang="en-US" sz="3200" b="1" dirty="0">
                 <a:solidFill>
                   <a:srgbClr val="111111"/>
                 </a:solidFill>
@@ -13210,9 +13121,49 @@
                 <a:ea typeface="Times New Roman" pitchFamily="34" charset="-122"/>
                 <a:cs typeface="Times New Roman" pitchFamily="34" charset="-120"/>
               </a:rPr>
-              <a:t>The formal sector.</a:t>
-            </a:r>
-            <a:endParaRPr lang="en-US" sz="4000" dirty="0"/>
+              <a:t>Topic: Economic Activities</a:t>
+            </a:r>
+            <a:endParaRPr lang="en-US" sz="3200" dirty="0"/>
+          </a:p>
+          <a:p>
+            <a:pPr algn="l" indent="0" marL="0">
+              <a:spcAft>
+                <a:spcPts val="800"/>
+              </a:spcAft>
+              <a:buNone/>
+            </a:pPr>
+            <a:r>
+              <a:rPr lang="en-US" sz="3200" b="1" dirty="0">
+                <a:solidFill>
+                  <a:srgbClr val="111111"/>
+                </a:solidFill>
+                <a:latin typeface="Times New Roman" pitchFamily="34" charset="0"/>
+                <a:ea typeface="Times New Roman" pitchFamily="34" charset="-122"/>
+                <a:cs typeface="Times New Roman" pitchFamily="34" charset="-120"/>
+              </a:rPr>
+              <a:t>Sub-topic: Sectors of the Economy</a:t>
+            </a:r>
+            <a:endParaRPr lang="en-US" sz="3200" dirty="0"/>
+          </a:p>
+          <a:p>
+            <a:pPr algn="l" indent="0" marL="0">
+              <a:spcAft>
+                <a:spcPts val="800"/>
+              </a:spcAft>
+              <a:buNone/>
+            </a:pPr>
+            <a:r>
+              <a:rPr lang="en-US" sz="3200" b="1" dirty="0">
+                <a:solidFill>
+                  <a:srgbClr val="990011"/>
+                </a:solidFill>
+                <a:latin typeface="Times New Roman" pitchFamily="34" charset="0"/>
+                <a:ea typeface="Times New Roman" pitchFamily="34" charset="-122"/>
+                <a:cs typeface="Times New Roman" pitchFamily="34" charset="-120"/>
+              </a:rPr>
+              <a:t>Lesson 5 (Part 2): The Sectors of the Economy: Formal and Informal Sectors of the Economy</a:t>
+            </a:r>
+            <a:endParaRPr lang="en-US" sz="3200" dirty="0"/>
           </a:p>
         </p:txBody>
       </p:sp>
@@ -13345,7 +13296,7 @@
         <p:spPr>
           <a:xfrm>
             <a:off x="0" y="658368"/>
-            <a:ext cx="5120640" cy="5833872"/>
+            <a:ext cx="2468880" cy="5833872"/>
           </a:xfrm>
           <a:prstGeom prst="rect">
             <a:avLst/>
@@ -13360,8 +13311,8 @@
         </p:nvSpPr>
         <p:spPr>
           <a:xfrm>
-            <a:off x="5349240" y="1005840"/>
-            <a:ext cx="6522415" cy="731520"/>
+            <a:off x="2697480" y="1005840"/>
+            <a:ext cx="9174175" cy="731520"/>
           </a:xfrm>
           <a:prstGeom prst="rect">
             <a:avLst/>
@@ -13387,7 +13338,7 @@
                 <a:ea typeface="Times New Roman" pitchFamily="34" charset="-122"/>
                 <a:cs typeface="Times New Roman" pitchFamily="34" charset="-120"/>
               </a:rPr>
-              <a:t>Board Summary</a:t>
+              <a:t>DEFINITIONS</a:t>
             </a:r>
             <a:endParaRPr lang="en-US" sz="3600" dirty="0"/>
           </a:p>
@@ -13401,8 +13352,8 @@
         </p:nvSpPr>
         <p:spPr>
           <a:xfrm>
-            <a:off x="5349240" y="1783080"/>
-            <a:ext cx="6522415" cy="4663440"/>
+            <a:off x="2697480" y="1783080"/>
+            <a:ext cx="9174175" cy="4663440"/>
           </a:xfrm>
           <a:prstGeom prst="rect">
             <a:avLst/>
@@ -13421,7 +13372,7 @@
               <a:buNone/>
             </a:pPr>
             <a:r>
-              <a:rPr lang="en-US" sz="3200" b="1" dirty="0">
+              <a:rPr lang="en-US" sz="4000" i="1" dirty="0">
                 <a:solidFill>
                   <a:srgbClr val="111111"/>
                 </a:solidFill>
@@ -13429,19 +13380,20 @@
                 <a:ea typeface="Times New Roman" pitchFamily="34" charset="-122"/>
                 <a:cs typeface="Times New Roman" pitchFamily="34" charset="-120"/>
               </a:rPr>
-              <a:t>Topic: Economic Activities</a:t>
-            </a:r>
-            <a:endParaRPr lang="en-US" sz="3200" dirty="0"/>
-          </a:p>
-          <a:p>
-            <a:pPr algn="l" indent="0" marL="0">
+              <a:t>The key terms of this lesson are defined as follows:</a:t>
+            </a:r>
+            <a:endParaRPr lang="en-US" sz="4000" dirty="0"/>
+          </a:p>
+          <a:p>
+            <a:pPr algn="l" marL="342900" indent="-342900">
               <a:spcAft>
                 <a:spcPts val="800"/>
               </a:spcAft>
-              <a:buNone/>
+              <a:buSzPct val="100000"/>
+              <a:buChar char="•"/>
             </a:pPr>
             <a:r>
-              <a:rPr lang="en-US" sz="3200" b="1" dirty="0">
+              <a:rPr lang="en-US" sz="4000" b="1" dirty="0">
                 <a:solidFill>
                   <a:srgbClr val="111111"/>
                 </a:solidFill>
@@ -13449,29 +13401,66 @@
                 <a:ea typeface="Times New Roman" pitchFamily="34" charset="-122"/>
                 <a:cs typeface="Times New Roman" pitchFamily="34" charset="-120"/>
               </a:rPr>
-              <a:t>Sub-topic: Sectors of the Economy</a:t>
-            </a:r>
-            <a:endParaRPr lang="en-US" sz="3200" dirty="0"/>
-          </a:p>
-          <a:p>
-            <a:pPr algn="l" indent="0" marL="0">
+              <a:t>Formal sector: </a:t>
+            </a:r>
+            <a:pPr algn="l" marL="342900" indent="-342900">
               <a:spcAft>
                 <a:spcPts val="800"/>
               </a:spcAft>
-              <a:buNone/>
+              <a:buSzPct val="100000"/>
+              <a:buChar char="•"/>
             </a:pPr>
             <a:r>
-              <a:rPr lang="en-US" sz="3200" b="1" dirty="0">
-                <a:solidFill>
-                  <a:srgbClr val="990011"/>
+              <a:rPr lang="en-US" sz="4000" dirty="0">
+                <a:solidFill>
+                  <a:srgbClr val="111111"/>
                 </a:solidFill>
                 <a:latin typeface="Times New Roman" pitchFamily="34" charset="0"/>
                 <a:ea typeface="Times New Roman" pitchFamily="34" charset="-122"/>
                 <a:cs typeface="Times New Roman" pitchFamily="34" charset="-120"/>
               </a:rPr>
-              <a:t>Lesson 5 (Part 2): The Sectors of the Economy: Formal and Informal Sectors of the Economy</a:t>
-            </a:r>
-            <a:endParaRPr lang="en-US" sz="3200" dirty="0"/>
+              <a:t>It is made of registered activities that pay taxes.</a:t>
+            </a:r>
+            <a:endParaRPr lang="en-US" sz="4000" dirty="0"/>
+          </a:p>
+          <a:p>
+            <a:pPr algn="l" marL="342900" indent="-342900">
+              <a:spcAft>
+                <a:spcPts val="800"/>
+              </a:spcAft>
+              <a:buSzPct val="100000"/>
+              <a:buChar char="•"/>
+            </a:pPr>
+            <a:r>
+              <a:rPr lang="en-US" sz="4000" b="1" dirty="0">
+                <a:solidFill>
+                  <a:srgbClr val="111111"/>
+                </a:solidFill>
+                <a:latin typeface="Times New Roman" pitchFamily="34" charset="0"/>
+                <a:ea typeface="Times New Roman" pitchFamily="34" charset="-122"/>
+                <a:cs typeface="Times New Roman" pitchFamily="34" charset="-120"/>
+              </a:rPr>
+              <a:t>Informal sector: </a:t>
+            </a:r>
+            <a:pPr algn="l" marL="342900" indent="-342900">
+              <a:spcAft>
+                <a:spcPts val="800"/>
+              </a:spcAft>
+              <a:buSzPct val="100000"/>
+              <a:buChar char="•"/>
+            </a:pPr>
+            <a:r>
+              <a:rPr lang="en-US" sz="4000" dirty="0">
+                <a:solidFill>
+                  <a:srgbClr val="111111"/>
+                </a:solidFill>
+                <a:latin typeface="Times New Roman" pitchFamily="34" charset="0"/>
+                <a:ea typeface="Times New Roman" pitchFamily="34" charset="-122"/>
+                <a:cs typeface="Times New Roman" pitchFamily="34" charset="-120"/>
+              </a:rPr>
+              <a:t>It is made of small activities that are not registered.</a:t>
+            </a:r>
+            <a:endParaRPr lang="en-US" sz="4000" dirty="0"/>
           </a:p>
         </p:txBody>
       </p:sp>
@@ -13587,9 +13576,131 @@
           </a:p>
         </p:txBody>
       </p:sp>
+      <p:sp>
+        <p:nvSpPr>
+          <p:cNvPr id="3" name="Text 1"/>
+          <p:cNvSpPr/>
+          <p:nvPr/>
+        </p:nvSpPr>
+        <p:spPr>
+          <a:xfrm>
+            <a:off x="365760" y="1005840"/>
+            <a:ext cx="11460175" cy="731520"/>
+          </a:xfrm>
+          <a:prstGeom prst="rect">
+            <a:avLst/>
+          </a:prstGeom>
+          <a:noFill/>
+          <a:ln/>
+        </p:spPr>
+        <p:txBody>
+          <a:bodyPr wrap="square" lIns="0" tIns="0" rIns="0" bIns="0" rtlCol="0" anchor="ctr">
+            <a:normAutofit/>
+          </a:bodyPr>
+          <a:lstStyle/>
+          <a:p>
+            <a:pPr algn="ctr" indent="0" marL="0">
+              <a:buNone/>
+            </a:pPr>
+            <a:r>
+              <a:rPr lang="en-US" sz="3600" b="1" dirty="0">
+                <a:solidFill>
+                  <a:srgbClr val="990011"/>
+                </a:solidFill>
+                <a:latin typeface="Times New Roman" pitchFamily="34" charset="0"/>
+                <a:ea typeface="Times New Roman" pitchFamily="34" charset="-122"/>
+                <a:cs typeface="Times New Roman" pitchFamily="34" charset="-120"/>
+              </a:rPr>
+              <a:t>1. The Formal Sector</a:t>
+            </a:r>
+            <a:endParaRPr lang="en-US" sz="3600" dirty="0"/>
+          </a:p>
+        </p:txBody>
+      </p:sp>
+      <p:sp>
+        <p:nvSpPr>
+          <p:cNvPr id="4" name="Text 2"/>
+          <p:cNvSpPr/>
+          <p:nvPr/>
+        </p:nvSpPr>
+        <p:spPr>
+          <a:xfrm>
+            <a:off x="365760" y="1783080"/>
+            <a:ext cx="4846320" cy="4617720"/>
+          </a:xfrm>
+          <a:prstGeom prst="rect">
+            <a:avLst/>
+          </a:prstGeom>
+          <a:noFill/>
+          <a:ln/>
+        </p:spPr>
+        <p:txBody>
+          <a:bodyPr wrap="square" lIns="0" tIns="0" rIns="0" bIns="0" rtlCol="0" anchor="t"/>
+          <a:lstStyle/>
+          <a:p>
+            <a:pPr algn="l" indent="0" marL="0">
+              <a:spcAft>
+                <a:spcPts val="800"/>
+              </a:spcAft>
+              <a:buNone/>
+            </a:pPr>
+            <a:r>
+              <a:rPr lang="en-US" sz="3600" i="1" dirty="0">
+                <a:solidFill>
+                  <a:srgbClr val="111111"/>
+                </a:solidFill>
+                <a:latin typeface="Times New Roman" pitchFamily="34" charset="0"/>
+                <a:ea typeface="Times New Roman" pitchFamily="34" charset="-122"/>
+                <a:cs typeface="Times New Roman" pitchFamily="34" charset="-120"/>
+              </a:rPr>
+              <a:t>The characteristics and examples of the formal sector are the following:</a:t>
+            </a:r>
+            <a:endParaRPr lang="en-US" sz="3600" dirty="0"/>
+          </a:p>
+          <a:p>
+            <a:pPr algn="l" marL="342900" indent="-342900">
+              <a:spcAft>
+                <a:spcPts val="800"/>
+              </a:spcAft>
+              <a:buSzPct val="100000"/>
+              <a:buChar char="•"/>
+            </a:pPr>
+            <a:r>
+              <a:rPr lang="en-US" sz="3600" b="1" dirty="0">
+                <a:solidFill>
+                  <a:srgbClr val="111111"/>
+                </a:solidFill>
+                <a:latin typeface="Times New Roman" pitchFamily="34" charset="0"/>
+                <a:ea typeface="Times New Roman" pitchFamily="34" charset="-122"/>
+                <a:cs typeface="Times New Roman" pitchFamily="34" charset="-120"/>
+              </a:rPr>
+              <a:t>Registered: </a:t>
+            </a:r>
+            <a:pPr algn="l" marL="342900" indent="-342900">
+              <a:spcAft>
+                <a:spcPts val="800"/>
+              </a:spcAft>
+              <a:buSzPct val="100000"/>
+              <a:buChar char="•"/>
+            </a:pPr>
+            <a:r>
+              <a:rPr lang="en-US" sz="3600" dirty="0">
+                <a:solidFill>
+                  <a:srgbClr val="111111"/>
+                </a:solidFill>
+                <a:latin typeface="Times New Roman" pitchFamily="34" charset="0"/>
+                <a:ea typeface="Times New Roman" pitchFamily="34" charset="-122"/>
+                <a:cs typeface="Times New Roman" pitchFamily="34" charset="-120"/>
+              </a:rPr>
+              <a:t>Businesses are registered and pay taxes.</a:t>
+            </a:r>
+            <a:endParaRPr lang="en-US" sz="3600" dirty="0"/>
+          </a:p>
+        </p:txBody>
+      </p:sp>
       <p:pic>
         <p:nvPicPr>
-          <p:cNvPr id="3" name="Image 0" descr="/home/claude/f4/img/minesec_sheet.png">    </p:cNvPr>
+          <p:cNvPr id="5" name="Image 0" descr="/home/claude/f4/img/v2/f2t_bank.jpg">    </p:cNvPr>
           <p:cNvPicPr>
             <a:picLocks noChangeAspect="1"/>
           </p:cNvPicPr>
@@ -13603,8 +13714,8 @@
         </p:blipFill>
         <p:spPr>
           <a:xfrm>
-            <a:off x="0" y="658368"/>
-            <a:ext cx="2468880" cy="5833872"/>
+            <a:off x="5349240" y="2071212"/>
+            <a:ext cx="6659575" cy="3693983"/>
           </a:xfrm>
           <a:prstGeom prst="rect">
             <a:avLst/>
@@ -13613,14 +13724,14 @@
       </p:pic>
       <p:sp>
         <p:nvSpPr>
-          <p:cNvPr id="4" name="Text 1"/>
+          <p:cNvPr id="6" name="Text 3"/>
           <p:cNvSpPr/>
           <p:nvPr/>
         </p:nvSpPr>
         <p:spPr>
           <a:xfrm>
-            <a:off x="2697480" y="1005840"/>
-            <a:ext cx="9174175" cy="731520"/>
+            <a:off x="5349240" y="6089904"/>
+            <a:ext cx="6659575" cy="347472"/>
           </a:xfrm>
           <a:prstGeom prst="rect">
             <a:avLst/>
@@ -13629,146 +13740,24 @@
           <a:ln/>
         </p:spPr>
         <p:txBody>
-          <a:bodyPr wrap="square" lIns="0" tIns="0" rIns="0" bIns="0" rtlCol="0" anchor="ctr">
-            <a:normAutofit/>
-          </a:bodyPr>
+          <a:bodyPr wrap="square" lIns="0" tIns="0" rIns="0" bIns="0" rtlCol="0" anchor="ctr"/>
           <a:lstStyle/>
           <a:p>
             <a:pPr algn="ctr" indent="0" marL="0">
               <a:buNone/>
             </a:pPr>
             <a:r>
-              <a:rPr lang="en-US" sz="3600" b="1" dirty="0">
-                <a:solidFill>
-                  <a:srgbClr val="990011"/>
+              <a:rPr lang="en-US" sz="1600" i="1" dirty="0">
+                <a:solidFill>
+                  <a:srgbClr val="555555"/>
                 </a:solidFill>
                 <a:latin typeface="Times New Roman" pitchFamily="34" charset="0"/>
                 <a:ea typeface="Times New Roman" pitchFamily="34" charset="-122"/>
                 <a:cs typeface="Times New Roman" pitchFamily="34" charset="-120"/>
               </a:rPr>
-              <a:t>DEFINITIONS</a:t>
-            </a:r>
-            <a:endParaRPr lang="en-US" sz="3600" dirty="0"/>
-          </a:p>
-        </p:txBody>
-      </p:sp>
-      <p:sp>
-        <p:nvSpPr>
-          <p:cNvPr id="5" name="Text 2"/>
-          <p:cNvSpPr/>
-          <p:nvPr/>
-        </p:nvSpPr>
-        <p:spPr>
-          <a:xfrm>
-            <a:off x="2697480" y="1783080"/>
-            <a:ext cx="9174175" cy="4663440"/>
-          </a:xfrm>
-          <a:prstGeom prst="rect">
-            <a:avLst/>
-          </a:prstGeom>
-          <a:noFill/>
-          <a:ln/>
-        </p:spPr>
-        <p:txBody>
-          <a:bodyPr wrap="square" lIns="0" tIns="0" rIns="0" bIns="0" rtlCol="0" anchor="t"/>
-          <a:lstStyle/>
-          <a:p>
-            <a:pPr algn="l" indent="0" marL="0">
-              <a:spcAft>
-                <a:spcPts val="800"/>
-              </a:spcAft>
-              <a:buNone/>
-            </a:pPr>
-            <a:r>
-              <a:rPr lang="en-US" sz="4000" i="1" dirty="0">
-                <a:solidFill>
-                  <a:srgbClr val="111111"/>
-                </a:solidFill>
-                <a:latin typeface="Times New Roman" pitchFamily="34" charset="0"/>
-                <a:ea typeface="Times New Roman" pitchFamily="34" charset="-122"/>
-                <a:cs typeface="Times New Roman" pitchFamily="34" charset="-120"/>
-              </a:rPr>
-              <a:t>The key terms of this lesson are defined as follows:</a:t>
-            </a:r>
-            <a:endParaRPr lang="en-US" sz="4000" dirty="0"/>
-          </a:p>
-          <a:p>
-            <a:pPr algn="l" marL="342900" indent="-342900">
-              <a:spcAft>
-                <a:spcPts val="800"/>
-              </a:spcAft>
-              <a:buSzPct val="100000"/>
-              <a:buChar char="•"/>
-            </a:pPr>
-            <a:r>
-              <a:rPr lang="en-US" sz="4000" b="1" dirty="0">
-                <a:solidFill>
-                  <a:srgbClr val="111111"/>
-                </a:solidFill>
-                <a:latin typeface="Times New Roman" pitchFamily="34" charset="0"/>
-                <a:ea typeface="Times New Roman" pitchFamily="34" charset="-122"/>
-                <a:cs typeface="Times New Roman" pitchFamily="34" charset="-120"/>
-              </a:rPr>
-              <a:t>Formal sector: </a:t>
-            </a:r>
-            <a:pPr algn="l" marL="342900" indent="-342900">
-              <a:spcAft>
-                <a:spcPts val="800"/>
-              </a:spcAft>
-              <a:buSzPct val="100000"/>
-              <a:buChar char="•"/>
-            </a:pPr>
-            <a:r>
-              <a:rPr lang="en-US" sz="4000" dirty="0">
-                <a:solidFill>
-                  <a:srgbClr val="111111"/>
-                </a:solidFill>
-                <a:latin typeface="Times New Roman" pitchFamily="34" charset="0"/>
-                <a:ea typeface="Times New Roman" pitchFamily="34" charset="-122"/>
-                <a:cs typeface="Times New Roman" pitchFamily="34" charset="-120"/>
-              </a:rPr>
-              <a:t>It is made of registered activities that pay taxes.</a:t>
-            </a:r>
-            <a:endParaRPr lang="en-US" sz="4000" dirty="0"/>
-          </a:p>
-          <a:p>
-            <a:pPr algn="l" marL="342900" indent="-342900">
-              <a:spcAft>
-                <a:spcPts val="800"/>
-              </a:spcAft>
-              <a:buSzPct val="100000"/>
-              <a:buChar char="•"/>
-            </a:pPr>
-            <a:r>
-              <a:rPr lang="en-US" sz="4000" b="1" dirty="0">
-                <a:solidFill>
-                  <a:srgbClr val="111111"/>
-                </a:solidFill>
-                <a:latin typeface="Times New Roman" pitchFamily="34" charset="0"/>
-                <a:ea typeface="Times New Roman" pitchFamily="34" charset="-122"/>
-                <a:cs typeface="Times New Roman" pitchFamily="34" charset="-120"/>
-              </a:rPr>
-              <a:t>Informal sector: </a:t>
-            </a:r>
-            <a:pPr algn="l" marL="342900" indent="-342900">
-              <a:spcAft>
-                <a:spcPts val="800"/>
-              </a:spcAft>
-              <a:buSzPct val="100000"/>
-              <a:buChar char="•"/>
-            </a:pPr>
-            <a:r>
-              <a:rPr lang="en-US" sz="4000" dirty="0">
-                <a:solidFill>
-                  <a:srgbClr val="111111"/>
-                </a:solidFill>
-                <a:latin typeface="Times New Roman" pitchFamily="34" charset="0"/>
-                <a:ea typeface="Times New Roman" pitchFamily="34" charset="-122"/>
-                <a:cs typeface="Times New Roman" pitchFamily="34" charset="-120"/>
-              </a:rPr>
-              <a:t>It is made of small activities that are not registered.</a:t>
-            </a:r>
-            <a:endParaRPr lang="en-US" sz="4000" dirty="0"/>
+              <a:t>Illustration: a bank</a:t>
+            </a:r>
+            <a:endParaRPr lang="en-US" sz="1600" dirty="0"/>
           </a:p>
         </p:txBody>
       </p:sp>
@@ -13884,131 +13873,9 @@
           </a:p>
         </p:txBody>
       </p:sp>
-      <p:sp>
-        <p:nvSpPr>
-          <p:cNvPr id="3" name="Text 1"/>
-          <p:cNvSpPr/>
-          <p:nvPr/>
-        </p:nvSpPr>
-        <p:spPr>
-          <a:xfrm>
-            <a:off x="365760" y="1005840"/>
-            <a:ext cx="11460175" cy="731520"/>
-          </a:xfrm>
-          <a:prstGeom prst="rect">
-            <a:avLst/>
-          </a:prstGeom>
-          <a:noFill/>
-          <a:ln/>
-        </p:spPr>
-        <p:txBody>
-          <a:bodyPr wrap="square" lIns="0" tIns="0" rIns="0" bIns="0" rtlCol="0" anchor="ctr">
-            <a:normAutofit/>
-          </a:bodyPr>
-          <a:lstStyle/>
-          <a:p>
-            <a:pPr algn="ctr" indent="0" marL="0">
-              <a:buNone/>
-            </a:pPr>
-            <a:r>
-              <a:rPr lang="en-US" sz="3600" b="1" dirty="0">
-                <a:solidFill>
-                  <a:srgbClr val="990011"/>
-                </a:solidFill>
-                <a:latin typeface="Times New Roman" pitchFamily="34" charset="0"/>
-                <a:ea typeface="Times New Roman" pitchFamily="34" charset="-122"/>
-                <a:cs typeface="Times New Roman" pitchFamily="34" charset="-120"/>
-              </a:rPr>
-              <a:t>1. The Formal Sector</a:t>
-            </a:r>
-            <a:endParaRPr lang="en-US" sz="3600" dirty="0"/>
-          </a:p>
-        </p:txBody>
-      </p:sp>
-      <p:sp>
-        <p:nvSpPr>
-          <p:cNvPr id="4" name="Text 2"/>
-          <p:cNvSpPr/>
-          <p:nvPr/>
-        </p:nvSpPr>
-        <p:spPr>
-          <a:xfrm>
-            <a:off x="365760" y="1783080"/>
-            <a:ext cx="4846320" cy="4617720"/>
-          </a:xfrm>
-          <a:prstGeom prst="rect">
-            <a:avLst/>
-          </a:prstGeom>
-          <a:noFill/>
-          <a:ln/>
-        </p:spPr>
-        <p:txBody>
-          <a:bodyPr wrap="square" lIns="0" tIns="0" rIns="0" bIns="0" rtlCol="0" anchor="t"/>
-          <a:lstStyle/>
-          <a:p>
-            <a:pPr algn="l" indent="0" marL="0">
-              <a:spcAft>
-                <a:spcPts val="800"/>
-              </a:spcAft>
-              <a:buNone/>
-            </a:pPr>
-            <a:r>
-              <a:rPr lang="en-US" sz="3600" i="1" dirty="0">
-                <a:solidFill>
-                  <a:srgbClr val="111111"/>
-                </a:solidFill>
-                <a:latin typeface="Times New Roman" pitchFamily="34" charset="0"/>
-                <a:ea typeface="Times New Roman" pitchFamily="34" charset="-122"/>
-                <a:cs typeface="Times New Roman" pitchFamily="34" charset="-120"/>
-              </a:rPr>
-              <a:t>The characteristics and examples of the formal sector are the following:</a:t>
-            </a:r>
-            <a:endParaRPr lang="en-US" sz="3600" dirty="0"/>
-          </a:p>
-          <a:p>
-            <a:pPr algn="l" marL="342900" indent="-342900">
-              <a:spcAft>
-                <a:spcPts val="800"/>
-              </a:spcAft>
-              <a:buSzPct val="100000"/>
-              <a:buChar char="•"/>
-            </a:pPr>
-            <a:r>
-              <a:rPr lang="en-US" sz="3600" b="1" dirty="0">
-                <a:solidFill>
-                  <a:srgbClr val="111111"/>
-                </a:solidFill>
-                <a:latin typeface="Times New Roman" pitchFamily="34" charset="0"/>
-                <a:ea typeface="Times New Roman" pitchFamily="34" charset="-122"/>
-                <a:cs typeface="Times New Roman" pitchFamily="34" charset="-120"/>
-              </a:rPr>
-              <a:t>Registered: </a:t>
-            </a:r>
-            <a:pPr algn="l" marL="342900" indent="-342900">
-              <a:spcAft>
-                <a:spcPts val="800"/>
-              </a:spcAft>
-              <a:buSzPct val="100000"/>
-              <a:buChar char="•"/>
-            </a:pPr>
-            <a:r>
-              <a:rPr lang="en-US" sz="3600" dirty="0">
-                <a:solidFill>
-                  <a:srgbClr val="111111"/>
-                </a:solidFill>
-                <a:latin typeface="Times New Roman" pitchFamily="34" charset="0"/>
-                <a:ea typeface="Times New Roman" pitchFamily="34" charset="-122"/>
-                <a:cs typeface="Times New Roman" pitchFamily="34" charset="-120"/>
-              </a:rPr>
-              <a:t>Businesses are registered and pay taxes.</a:t>
-            </a:r>
-            <a:endParaRPr lang="en-US" sz="3600" dirty="0"/>
-          </a:p>
-        </p:txBody>
-      </p:sp>
       <p:pic>
         <p:nvPicPr>
-          <p:cNvPr id="5" name="Image 0" descr="/home/claude/f4/img/v2/f2t_bank.jpg">    </p:cNvPr>
+          <p:cNvPr id="3" name="Image 0" descr="/home/claude/f4/img/minesec_sheet.png">    </p:cNvPr>
           <p:cNvPicPr>
             <a:picLocks noChangeAspect="1"/>
           </p:cNvPicPr>
@@ -14022,8 +13889,8 @@
         </p:blipFill>
         <p:spPr>
           <a:xfrm>
-            <a:off x="5349240" y="2071212"/>
-            <a:ext cx="6659575" cy="3693983"/>
+            <a:off x="0" y="658368"/>
+            <a:ext cx="2468880" cy="5833872"/>
           </a:xfrm>
           <a:prstGeom prst="rect">
             <a:avLst/>
@@ -14032,14 +13899,14 @@
       </p:pic>
       <p:sp>
         <p:nvSpPr>
-          <p:cNvPr id="6" name="Text 3"/>
+          <p:cNvPr id="4" name="Text 1"/>
           <p:cNvSpPr/>
           <p:nvPr/>
         </p:nvSpPr>
         <p:spPr>
           <a:xfrm>
-            <a:off x="5349240" y="6089904"/>
-            <a:ext cx="6659575" cy="347472"/>
+            <a:off x="2697480" y="1005840"/>
+            <a:ext cx="9174175" cy="731520"/>
           </a:xfrm>
           <a:prstGeom prst="rect">
             <a:avLst/>
@@ -14048,24 +13915,165 @@
           <a:ln/>
         </p:spPr>
         <p:txBody>
-          <a:bodyPr wrap="square" lIns="0" tIns="0" rIns="0" bIns="0" rtlCol="0" anchor="ctr"/>
+          <a:bodyPr wrap="square" lIns="0" tIns="0" rIns="0" bIns="0" rtlCol="0" anchor="ctr">
+            <a:normAutofit/>
+          </a:bodyPr>
           <a:lstStyle/>
           <a:p>
             <a:pPr algn="ctr" indent="0" marL="0">
               <a:buNone/>
             </a:pPr>
             <a:r>
-              <a:rPr lang="en-US" sz="1600" i="1" dirty="0">
-                <a:solidFill>
-                  <a:srgbClr val="555555"/>
+              <a:rPr lang="en-US" sz="3600" b="1" dirty="0">
+                <a:solidFill>
+                  <a:srgbClr val="990011"/>
                 </a:solidFill>
                 <a:latin typeface="Times New Roman" pitchFamily="34" charset="0"/>
                 <a:ea typeface="Times New Roman" pitchFamily="34" charset="-122"/>
                 <a:cs typeface="Times New Roman" pitchFamily="34" charset="-120"/>
               </a:rPr>
-              <a:t>Illustration: a bank</a:t>
-            </a:r>
-            <a:endParaRPr lang="en-US" sz="1600" dirty="0"/>
+              <a:t>1. The Formal Sector</a:t>
+            </a:r>
+            <a:endParaRPr lang="en-US" sz="3600" dirty="0"/>
+          </a:p>
+        </p:txBody>
+      </p:sp>
+      <p:sp>
+        <p:nvSpPr>
+          <p:cNvPr id="5" name="Text 2"/>
+          <p:cNvSpPr/>
+          <p:nvPr/>
+        </p:nvSpPr>
+        <p:spPr>
+          <a:xfrm>
+            <a:off x="2697480" y="1783080"/>
+            <a:ext cx="9174175" cy="4663440"/>
+          </a:xfrm>
+          <a:prstGeom prst="rect">
+            <a:avLst/>
+          </a:prstGeom>
+          <a:noFill/>
+          <a:ln/>
+        </p:spPr>
+        <p:txBody>
+          <a:bodyPr wrap="square" lIns="0" tIns="0" rIns="0" bIns="0" rtlCol="0" anchor="t"/>
+          <a:lstStyle/>
+          <a:p>
+            <a:pPr algn="l" marL="342900" indent="-342900">
+              <a:spcAft>
+                <a:spcPts val="800"/>
+              </a:spcAft>
+              <a:buSzPct val="100000"/>
+              <a:buChar char="•"/>
+            </a:pPr>
+            <a:r>
+              <a:rPr lang="en-US" sz="4000" b="1" dirty="0">
+                <a:solidFill>
+                  <a:srgbClr val="111111"/>
+                </a:solidFill>
+                <a:latin typeface="Times New Roman" pitchFamily="34" charset="0"/>
+                <a:ea typeface="Times New Roman" pitchFamily="34" charset="-122"/>
+                <a:cs typeface="Times New Roman" pitchFamily="34" charset="-120"/>
+              </a:rPr>
+              <a:t>Contracts and salaries: </a:t>
+            </a:r>
+            <a:pPr algn="l" marL="342900" indent="-342900">
+              <a:spcAft>
+                <a:spcPts val="800"/>
+              </a:spcAft>
+              <a:buSzPct val="100000"/>
+              <a:buChar char="•"/>
+            </a:pPr>
+            <a:r>
+              <a:rPr lang="en-US" sz="4000" dirty="0">
+                <a:solidFill>
+                  <a:srgbClr val="111111"/>
+                </a:solidFill>
+                <a:latin typeface="Times New Roman" pitchFamily="34" charset="0"/>
+                <a:ea typeface="Times New Roman" pitchFamily="34" charset="-122"/>
+                <a:cs typeface="Times New Roman" pitchFamily="34" charset="-120"/>
+              </a:rPr>
+              <a:t>Workers have contracts and monthly salaries.</a:t>
+            </a:r>
+            <a:endParaRPr lang="en-US" sz="4000" dirty="0"/>
+          </a:p>
+          <a:p>
+            <a:pPr algn="l" marL="342900" indent="-342900">
+              <a:spcAft>
+                <a:spcPts val="800"/>
+              </a:spcAft>
+              <a:buSzPct val="100000"/>
+              <a:buChar char="•"/>
+            </a:pPr>
+            <a:r>
+              <a:rPr lang="en-US" sz="4000" b="1" dirty="0">
+                <a:solidFill>
+                  <a:srgbClr val="111111"/>
+                </a:solidFill>
+                <a:latin typeface="Times New Roman" pitchFamily="34" charset="0"/>
+                <a:ea typeface="Times New Roman" pitchFamily="34" charset="-122"/>
+                <a:cs typeface="Times New Roman" pitchFamily="34" charset="-120"/>
+              </a:rPr>
+              <a:t>Social security: </a:t>
+            </a:r>
+            <a:pPr algn="l" marL="342900" indent="-342900">
+              <a:spcAft>
+                <a:spcPts val="800"/>
+              </a:spcAft>
+              <a:buSzPct val="100000"/>
+              <a:buChar char="•"/>
+            </a:pPr>
+            <a:r>
+              <a:rPr lang="en-US" sz="4000" dirty="0">
+                <a:solidFill>
+                  <a:srgbClr val="111111"/>
+                </a:solidFill>
+                <a:latin typeface="Times New Roman" pitchFamily="34" charset="0"/>
+                <a:ea typeface="Times New Roman" pitchFamily="34" charset="-122"/>
+                <a:cs typeface="Times New Roman" pitchFamily="34" charset="-120"/>
+              </a:rPr>
+              <a:t>Workers are insured by the CNPS and get a pension.</a:t>
+            </a:r>
+            <a:endParaRPr lang="en-US" sz="4000" dirty="0"/>
+          </a:p>
+          <a:p>
+            <a:pPr algn="l" marL="342900" indent="-342900">
+              <a:spcAft>
+                <a:spcPts val="800"/>
+              </a:spcAft>
+              <a:buSzPct val="100000"/>
+              <a:buChar char="•"/>
+            </a:pPr>
+            <a:r>
+              <a:rPr lang="en-US" sz="4000" b="1" dirty="0">
+                <a:solidFill>
+                  <a:srgbClr val="111111"/>
+                </a:solidFill>
+                <a:latin typeface="Times New Roman" pitchFamily="34" charset="0"/>
+                <a:ea typeface="Times New Roman" pitchFamily="34" charset="-122"/>
+                <a:cs typeface="Times New Roman" pitchFamily="34" charset="-120"/>
+              </a:rPr>
+              <a:t>Examples: </a:t>
+            </a:r>
+            <a:pPr algn="l" marL="342900" indent="-342900">
+              <a:spcAft>
+                <a:spcPts val="800"/>
+              </a:spcAft>
+              <a:buSzPct val="100000"/>
+              <a:buChar char="•"/>
+            </a:pPr>
+            <a:r>
+              <a:rPr lang="en-US" sz="4000" dirty="0">
+                <a:solidFill>
+                  <a:srgbClr val="111111"/>
+                </a:solidFill>
+                <a:latin typeface="Times New Roman" pitchFamily="34" charset="0"/>
+                <a:ea typeface="Times New Roman" pitchFamily="34" charset="-122"/>
+                <a:cs typeface="Times New Roman" pitchFamily="34" charset="-120"/>
+              </a:rPr>
+              <a:t>Banks, SODECOTON, CICAM, schools and hospitals.</a:t>
+            </a:r>
+            <a:endParaRPr lang="en-US" sz="4000" dirty="0"/>
           </a:p>
         </p:txBody>
       </p:sp>
@@ -14181,9 +14189,131 @@
           </a:p>
         </p:txBody>
       </p:sp>
+      <p:sp>
+        <p:nvSpPr>
+          <p:cNvPr id="3" name="Text 1"/>
+          <p:cNvSpPr/>
+          <p:nvPr/>
+        </p:nvSpPr>
+        <p:spPr>
+          <a:xfrm>
+            <a:off x="365760" y="1005840"/>
+            <a:ext cx="11460175" cy="731520"/>
+          </a:xfrm>
+          <a:prstGeom prst="rect">
+            <a:avLst/>
+          </a:prstGeom>
+          <a:noFill/>
+          <a:ln/>
+        </p:spPr>
+        <p:txBody>
+          <a:bodyPr wrap="square" lIns="0" tIns="0" rIns="0" bIns="0" rtlCol="0" anchor="ctr">
+            <a:normAutofit/>
+          </a:bodyPr>
+          <a:lstStyle/>
+          <a:p>
+            <a:pPr algn="ctr" indent="0" marL="0">
+              <a:buNone/>
+            </a:pPr>
+            <a:r>
+              <a:rPr lang="en-US" sz="3600" b="1" dirty="0">
+                <a:solidFill>
+                  <a:srgbClr val="990011"/>
+                </a:solidFill>
+                <a:latin typeface="Times New Roman" pitchFamily="34" charset="0"/>
+                <a:ea typeface="Times New Roman" pitchFamily="34" charset="-122"/>
+                <a:cs typeface="Times New Roman" pitchFamily="34" charset="-120"/>
+              </a:rPr>
+              <a:t>2. The Informal Sector</a:t>
+            </a:r>
+            <a:endParaRPr lang="en-US" sz="3600" dirty="0"/>
+          </a:p>
+        </p:txBody>
+      </p:sp>
+      <p:sp>
+        <p:nvSpPr>
+          <p:cNvPr id="4" name="Text 2"/>
+          <p:cNvSpPr/>
+          <p:nvPr/>
+        </p:nvSpPr>
+        <p:spPr>
+          <a:xfrm>
+            <a:off x="365760" y="1783080"/>
+            <a:ext cx="4846320" cy="4617720"/>
+          </a:xfrm>
+          <a:prstGeom prst="rect">
+            <a:avLst/>
+          </a:prstGeom>
+          <a:noFill/>
+          <a:ln/>
+        </p:spPr>
+        <p:txBody>
+          <a:bodyPr wrap="square" lIns="0" tIns="0" rIns="0" bIns="0" rtlCol="0" anchor="t"/>
+          <a:lstStyle/>
+          <a:p>
+            <a:pPr algn="l" indent="0" marL="0">
+              <a:spcAft>
+                <a:spcPts val="800"/>
+              </a:spcAft>
+              <a:buNone/>
+            </a:pPr>
+            <a:r>
+              <a:rPr lang="en-US" sz="3600" i="1" dirty="0">
+                <a:solidFill>
+                  <a:srgbClr val="111111"/>
+                </a:solidFill>
+                <a:latin typeface="Times New Roman" pitchFamily="34" charset="0"/>
+                <a:ea typeface="Times New Roman" pitchFamily="34" charset="-122"/>
+                <a:cs typeface="Times New Roman" pitchFamily="34" charset="-120"/>
+              </a:rPr>
+              <a:t>The characteristics and examples of the informal sector are the following:</a:t>
+            </a:r>
+            <a:endParaRPr lang="en-US" sz="3600" dirty="0"/>
+          </a:p>
+          <a:p>
+            <a:pPr algn="l" marL="342900" indent="-342900">
+              <a:spcAft>
+                <a:spcPts val="800"/>
+              </a:spcAft>
+              <a:buSzPct val="100000"/>
+              <a:buChar char="•"/>
+            </a:pPr>
+            <a:r>
+              <a:rPr lang="en-US" sz="3600" b="1" dirty="0">
+                <a:solidFill>
+                  <a:srgbClr val="111111"/>
+                </a:solidFill>
+                <a:latin typeface="Times New Roman" pitchFamily="34" charset="0"/>
+                <a:ea typeface="Times New Roman" pitchFamily="34" charset="-122"/>
+                <a:cs typeface="Times New Roman" pitchFamily="34" charset="-120"/>
+              </a:rPr>
+              <a:t>Not registered: </a:t>
+            </a:r>
+            <a:pPr algn="l" marL="342900" indent="-342900">
+              <a:spcAft>
+                <a:spcPts val="800"/>
+              </a:spcAft>
+              <a:buSzPct val="100000"/>
+              <a:buChar char="•"/>
+            </a:pPr>
+            <a:r>
+              <a:rPr lang="en-US" sz="3600" dirty="0">
+                <a:solidFill>
+                  <a:srgbClr val="111111"/>
+                </a:solidFill>
+                <a:latin typeface="Times New Roman" pitchFamily="34" charset="0"/>
+                <a:ea typeface="Times New Roman" pitchFamily="34" charset="-122"/>
+                <a:cs typeface="Times New Roman" pitchFamily="34" charset="-120"/>
+              </a:rPr>
+              <a:t>Workers pay few or no taxes.</a:t>
+            </a:r>
+            <a:endParaRPr lang="en-US" sz="3600" dirty="0"/>
+          </a:p>
+        </p:txBody>
+      </p:sp>
       <p:pic>
         <p:nvPicPr>
-          <p:cNvPr id="3" name="Image 0" descr="/home/claude/f4/img/minesec_sheet.png">    </p:cNvPr>
+          <p:cNvPr id="5" name="Image 0" descr="/home/claude/f4/img/v2/f2t_moto_taxi.jpg">    </p:cNvPr>
           <p:cNvPicPr>
             <a:picLocks noChangeAspect="1"/>
           </p:cNvPicPr>
@@ -14197,8 +14327,8 @@
         </p:blipFill>
         <p:spPr>
           <a:xfrm>
-            <a:off x="0" y="658368"/>
-            <a:ext cx="2468880" cy="5833872"/>
+            <a:off x="5349240" y="2071212"/>
+            <a:ext cx="6659575" cy="3693983"/>
           </a:xfrm>
           <a:prstGeom prst="rect">
             <a:avLst/>
@@ -14207,14 +14337,14 @@
       </p:pic>
       <p:sp>
         <p:nvSpPr>
-          <p:cNvPr id="4" name="Text 1"/>
+          <p:cNvPr id="6" name="Text 3"/>
           <p:cNvSpPr/>
           <p:nvPr/>
         </p:nvSpPr>
         <p:spPr>
           <a:xfrm>
-            <a:off x="2697480" y="1005840"/>
-            <a:ext cx="9174175" cy="731520"/>
+            <a:off x="5349240" y="6089904"/>
+            <a:ext cx="6659575" cy="347472"/>
           </a:xfrm>
           <a:prstGeom prst="rect">
             <a:avLst/>
@@ -14223,165 +14353,24 @@
           <a:ln/>
         </p:spPr>
         <p:txBody>
-          <a:bodyPr wrap="square" lIns="0" tIns="0" rIns="0" bIns="0" rtlCol="0" anchor="ctr">
-            <a:normAutofit/>
-          </a:bodyPr>
+          <a:bodyPr wrap="square" lIns="0" tIns="0" rIns="0" bIns="0" rtlCol="0" anchor="ctr"/>
           <a:lstStyle/>
           <a:p>
             <a:pPr algn="ctr" indent="0" marL="0">
               <a:buNone/>
             </a:pPr>
             <a:r>
-              <a:rPr lang="en-US" sz="3600" b="1" dirty="0">
-                <a:solidFill>
-                  <a:srgbClr val="990011"/>
+              <a:rPr lang="en-US" sz="1600" i="1" dirty="0">
+                <a:solidFill>
+                  <a:srgbClr val="555555"/>
                 </a:solidFill>
                 <a:latin typeface="Times New Roman" pitchFamily="34" charset="0"/>
                 <a:ea typeface="Times New Roman" pitchFamily="34" charset="-122"/>
                 <a:cs typeface="Times New Roman" pitchFamily="34" charset="-120"/>
               </a:rPr>
-              <a:t>1. The Formal Sector</a:t>
-            </a:r>
-            <a:endParaRPr lang="en-US" sz="3600" dirty="0"/>
-          </a:p>
-        </p:txBody>
-      </p:sp>
-      <p:sp>
-        <p:nvSpPr>
-          <p:cNvPr id="5" name="Text 2"/>
-          <p:cNvSpPr/>
-          <p:nvPr/>
-        </p:nvSpPr>
-        <p:spPr>
-          <a:xfrm>
-            <a:off x="2697480" y="1783080"/>
-            <a:ext cx="9174175" cy="4663440"/>
-          </a:xfrm>
-          <a:prstGeom prst="rect">
-            <a:avLst/>
-          </a:prstGeom>
-          <a:noFill/>
-          <a:ln/>
-        </p:spPr>
-        <p:txBody>
-          <a:bodyPr wrap="square" lIns="0" tIns="0" rIns="0" bIns="0" rtlCol="0" anchor="t"/>
-          <a:lstStyle/>
-          <a:p>
-            <a:pPr algn="l" marL="342900" indent="-342900">
-              <a:spcAft>
-                <a:spcPts val="800"/>
-              </a:spcAft>
-              <a:buSzPct val="100000"/>
-              <a:buChar char="•"/>
-            </a:pPr>
-            <a:r>
-              <a:rPr lang="en-US" sz="4000" b="1" dirty="0">
-                <a:solidFill>
-                  <a:srgbClr val="111111"/>
-                </a:solidFill>
-                <a:latin typeface="Times New Roman" pitchFamily="34" charset="0"/>
-                <a:ea typeface="Times New Roman" pitchFamily="34" charset="-122"/>
-                <a:cs typeface="Times New Roman" pitchFamily="34" charset="-120"/>
-              </a:rPr>
-              <a:t>Contracts and salaries: </a:t>
-            </a:r>
-            <a:pPr algn="l" marL="342900" indent="-342900">
-              <a:spcAft>
-                <a:spcPts val="800"/>
-              </a:spcAft>
-              <a:buSzPct val="100000"/>
-              <a:buChar char="•"/>
-            </a:pPr>
-            <a:r>
-              <a:rPr lang="en-US" sz="4000" dirty="0">
-                <a:solidFill>
-                  <a:srgbClr val="111111"/>
-                </a:solidFill>
-                <a:latin typeface="Times New Roman" pitchFamily="34" charset="0"/>
-                <a:ea typeface="Times New Roman" pitchFamily="34" charset="-122"/>
-                <a:cs typeface="Times New Roman" pitchFamily="34" charset="-120"/>
-              </a:rPr>
-              <a:t>Workers have contracts and monthly salaries.</a:t>
-            </a:r>
-            <a:endParaRPr lang="en-US" sz="4000" dirty="0"/>
-          </a:p>
-          <a:p>
-            <a:pPr algn="l" marL="342900" indent="-342900">
-              <a:spcAft>
-                <a:spcPts val="800"/>
-              </a:spcAft>
-              <a:buSzPct val="100000"/>
-              <a:buChar char="•"/>
-            </a:pPr>
-            <a:r>
-              <a:rPr lang="en-US" sz="4000" b="1" dirty="0">
-                <a:solidFill>
-                  <a:srgbClr val="111111"/>
-                </a:solidFill>
-                <a:latin typeface="Times New Roman" pitchFamily="34" charset="0"/>
-                <a:ea typeface="Times New Roman" pitchFamily="34" charset="-122"/>
-                <a:cs typeface="Times New Roman" pitchFamily="34" charset="-120"/>
-              </a:rPr>
-              <a:t>Social security: </a:t>
-            </a:r>
-            <a:pPr algn="l" marL="342900" indent="-342900">
-              <a:spcAft>
-                <a:spcPts val="800"/>
-              </a:spcAft>
-              <a:buSzPct val="100000"/>
-              <a:buChar char="•"/>
-            </a:pPr>
-            <a:r>
-              <a:rPr lang="en-US" sz="4000" dirty="0">
-                <a:solidFill>
-                  <a:srgbClr val="111111"/>
-                </a:solidFill>
-                <a:latin typeface="Times New Roman" pitchFamily="34" charset="0"/>
-                <a:ea typeface="Times New Roman" pitchFamily="34" charset="-122"/>
-                <a:cs typeface="Times New Roman" pitchFamily="34" charset="-120"/>
-              </a:rPr>
-              <a:t>Workers are insured by the CNPS and get a pension.</a:t>
-            </a:r>
-            <a:endParaRPr lang="en-US" sz="4000" dirty="0"/>
-          </a:p>
-          <a:p>
-            <a:pPr algn="l" marL="342900" indent="-342900">
-              <a:spcAft>
-                <a:spcPts val="800"/>
-              </a:spcAft>
-              <a:buSzPct val="100000"/>
-              <a:buChar char="•"/>
-            </a:pPr>
-            <a:r>
-              <a:rPr lang="en-US" sz="4000" b="1" dirty="0">
-                <a:solidFill>
-                  <a:srgbClr val="111111"/>
-                </a:solidFill>
-                <a:latin typeface="Times New Roman" pitchFamily="34" charset="0"/>
-                <a:ea typeface="Times New Roman" pitchFamily="34" charset="-122"/>
-                <a:cs typeface="Times New Roman" pitchFamily="34" charset="-120"/>
-              </a:rPr>
-              <a:t>Examples: </a:t>
-            </a:r>
-            <a:pPr algn="l" marL="342900" indent="-342900">
-              <a:spcAft>
-                <a:spcPts val="800"/>
-              </a:spcAft>
-              <a:buSzPct val="100000"/>
-              <a:buChar char="•"/>
-            </a:pPr>
-            <a:r>
-              <a:rPr lang="en-US" sz="4000" dirty="0">
-                <a:solidFill>
-                  <a:srgbClr val="111111"/>
-                </a:solidFill>
-                <a:latin typeface="Times New Roman" pitchFamily="34" charset="0"/>
-                <a:ea typeface="Times New Roman" pitchFamily="34" charset="-122"/>
-                <a:cs typeface="Times New Roman" pitchFamily="34" charset="-120"/>
-              </a:rPr>
-              <a:t>Banks, SODECOTON, CICAM, schools and hospitals.</a:t>
-            </a:r>
-            <a:endParaRPr lang="en-US" sz="4000" dirty="0"/>
+              <a:t>Illustration: moto-taxis</a:t>
+            </a:r>
+            <a:endParaRPr lang="en-US" sz="1600" dirty="0"/>
           </a:p>
         </p:txBody>
       </p:sp>
@@ -14497,131 +14486,9 @@
           </a:p>
         </p:txBody>
       </p:sp>
-      <p:sp>
-        <p:nvSpPr>
-          <p:cNvPr id="3" name="Text 1"/>
-          <p:cNvSpPr/>
-          <p:nvPr/>
-        </p:nvSpPr>
-        <p:spPr>
-          <a:xfrm>
-            <a:off x="365760" y="1005840"/>
-            <a:ext cx="11460175" cy="731520"/>
-          </a:xfrm>
-          <a:prstGeom prst="rect">
-            <a:avLst/>
-          </a:prstGeom>
-          <a:noFill/>
-          <a:ln/>
-        </p:spPr>
-        <p:txBody>
-          <a:bodyPr wrap="square" lIns="0" tIns="0" rIns="0" bIns="0" rtlCol="0" anchor="ctr">
-            <a:normAutofit/>
-          </a:bodyPr>
-          <a:lstStyle/>
-          <a:p>
-            <a:pPr algn="ctr" indent="0" marL="0">
-              <a:buNone/>
-            </a:pPr>
-            <a:r>
-              <a:rPr lang="en-US" sz="3600" b="1" dirty="0">
-                <a:solidFill>
-                  <a:srgbClr val="990011"/>
-                </a:solidFill>
-                <a:latin typeface="Times New Roman" pitchFamily="34" charset="0"/>
-                <a:ea typeface="Times New Roman" pitchFamily="34" charset="-122"/>
-                <a:cs typeface="Times New Roman" pitchFamily="34" charset="-120"/>
-              </a:rPr>
-              <a:t>2. The Informal Sector</a:t>
-            </a:r>
-            <a:endParaRPr lang="en-US" sz="3600" dirty="0"/>
-          </a:p>
-        </p:txBody>
-      </p:sp>
-      <p:sp>
-        <p:nvSpPr>
-          <p:cNvPr id="4" name="Text 2"/>
-          <p:cNvSpPr/>
-          <p:nvPr/>
-        </p:nvSpPr>
-        <p:spPr>
-          <a:xfrm>
-            <a:off x="365760" y="1783080"/>
-            <a:ext cx="4846320" cy="4617720"/>
-          </a:xfrm>
-          <a:prstGeom prst="rect">
-            <a:avLst/>
-          </a:prstGeom>
-          <a:noFill/>
-          <a:ln/>
-        </p:spPr>
-        <p:txBody>
-          <a:bodyPr wrap="square" lIns="0" tIns="0" rIns="0" bIns="0" rtlCol="0" anchor="t"/>
-          <a:lstStyle/>
-          <a:p>
-            <a:pPr algn="l" indent="0" marL="0">
-              <a:spcAft>
-                <a:spcPts val="800"/>
-              </a:spcAft>
-              <a:buNone/>
-            </a:pPr>
-            <a:r>
-              <a:rPr lang="en-US" sz="3600" i="1" dirty="0">
-                <a:solidFill>
-                  <a:srgbClr val="111111"/>
-                </a:solidFill>
-                <a:latin typeface="Times New Roman" pitchFamily="34" charset="0"/>
-                <a:ea typeface="Times New Roman" pitchFamily="34" charset="-122"/>
-                <a:cs typeface="Times New Roman" pitchFamily="34" charset="-120"/>
-              </a:rPr>
-              <a:t>The characteristics and examples of the informal sector are the following:</a:t>
-            </a:r>
-            <a:endParaRPr lang="en-US" sz="3600" dirty="0"/>
-          </a:p>
-          <a:p>
-            <a:pPr algn="l" marL="342900" indent="-342900">
-              <a:spcAft>
-                <a:spcPts val="800"/>
-              </a:spcAft>
-              <a:buSzPct val="100000"/>
-              <a:buChar char="•"/>
-            </a:pPr>
-            <a:r>
-              <a:rPr lang="en-US" sz="3600" b="1" dirty="0">
-                <a:solidFill>
-                  <a:srgbClr val="111111"/>
-                </a:solidFill>
-                <a:latin typeface="Times New Roman" pitchFamily="34" charset="0"/>
-                <a:ea typeface="Times New Roman" pitchFamily="34" charset="-122"/>
-                <a:cs typeface="Times New Roman" pitchFamily="34" charset="-120"/>
-              </a:rPr>
-              <a:t>Not registered: </a:t>
-            </a:r>
-            <a:pPr algn="l" marL="342900" indent="-342900">
-              <a:spcAft>
-                <a:spcPts val="800"/>
-              </a:spcAft>
-              <a:buSzPct val="100000"/>
-              <a:buChar char="•"/>
-            </a:pPr>
-            <a:r>
-              <a:rPr lang="en-US" sz="3600" dirty="0">
-                <a:solidFill>
-                  <a:srgbClr val="111111"/>
-                </a:solidFill>
-                <a:latin typeface="Times New Roman" pitchFamily="34" charset="0"/>
-                <a:ea typeface="Times New Roman" pitchFamily="34" charset="-122"/>
-                <a:cs typeface="Times New Roman" pitchFamily="34" charset="-120"/>
-              </a:rPr>
-              <a:t>Workers pay few or no taxes.</a:t>
-            </a:r>
-            <a:endParaRPr lang="en-US" sz="3600" dirty="0"/>
-          </a:p>
-        </p:txBody>
-      </p:sp>
       <p:pic>
         <p:nvPicPr>
-          <p:cNvPr id="5" name="Image 0" descr="/home/claude/f4/img/v2/f2t_moto_taxi.jpg">    </p:cNvPr>
+          <p:cNvPr id="3" name="Image 0" descr="/home/claude/f4/img/minesec_sheet.png">    </p:cNvPr>
           <p:cNvPicPr>
             <a:picLocks noChangeAspect="1"/>
           </p:cNvPicPr>
@@ -14635,8 +14502,8 @@
         </p:blipFill>
         <p:spPr>
           <a:xfrm>
-            <a:off x="5349240" y="2071212"/>
-            <a:ext cx="6659575" cy="3693983"/>
+            <a:off x="0" y="658368"/>
+            <a:ext cx="5120640" cy="5833872"/>
           </a:xfrm>
           <a:prstGeom prst="rect">
             <a:avLst/>
@@ -14645,14 +14512,14 @@
       </p:pic>
       <p:sp>
         <p:nvSpPr>
-          <p:cNvPr id="6" name="Text 3"/>
+          <p:cNvPr id="4" name="Text 1"/>
           <p:cNvSpPr/>
           <p:nvPr/>
         </p:nvSpPr>
         <p:spPr>
           <a:xfrm>
-            <a:off x="5349240" y="6089904"/>
-            <a:ext cx="6659575" cy="347472"/>
+            <a:off x="5349240" y="1005840"/>
+            <a:ext cx="6522415" cy="731520"/>
           </a:xfrm>
           <a:prstGeom prst="rect">
             <a:avLst/>
@@ -14661,24 +14528,126 @@
           <a:ln/>
         </p:spPr>
         <p:txBody>
-          <a:bodyPr wrap="square" lIns="0" tIns="0" rIns="0" bIns="0" rtlCol="0" anchor="ctr"/>
+          <a:bodyPr wrap="square" lIns="0" tIns="0" rIns="0" bIns="0" rtlCol="0" anchor="ctr">
+            <a:normAutofit/>
+          </a:bodyPr>
           <a:lstStyle/>
           <a:p>
             <a:pPr algn="ctr" indent="0" marL="0">
               <a:buNone/>
             </a:pPr>
             <a:r>
-              <a:rPr lang="en-US" sz="1600" i="1" dirty="0">
-                <a:solidFill>
-                  <a:srgbClr val="555555"/>
+              <a:rPr lang="en-US" sz="3600" b="1" dirty="0">
+                <a:solidFill>
+                  <a:srgbClr val="990011"/>
                 </a:solidFill>
                 <a:latin typeface="Times New Roman" pitchFamily="34" charset="0"/>
                 <a:ea typeface="Times New Roman" pitchFamily="34" charset="-122"/>
                 <a:cs typeface="Times New Roman" pitchFamily="34" charset="-120"/>
               </a:rPr>
-              <a:t>Illustration: moto-taxis</a:t>
-            </a:r>
-            <a:endParaRPr lang="en-US" sz="1600" dirty="0"/>
+              <a:t>2. The Informal Sector</a:t>
+            </a:r>
+            <a:endParaRPr lang="en-US" sz="3600" dirty="0"/>
+          </a:p>
+        </p:txBody>
+      </p:sp>
+      <p:sp>
+        <p:nvSpPr>
+          <p:cNvPr id="5" name="Text 2"/>
+          <p:cNvSpPr/>
+          <p:nvPr/>
+        </p:nvSpPr>
+        <p:spPr>
+          <a:xfrm>
+            <a:off x="5349240" y="1783080"/>
+            <a:ext cx="6522415" cy="4663440"/>
+          </a:xfrm>
+          <a:prstGeom prst="rect">
+            <a:avLst/>
+          </a:prstGeom>
+          <a:noFill/>
+          <a:ln/>
+        </p:spPr>
+        <p:txBody>
+          <a:bodyPr wrap="square" lIns="0" tIns="0" rIns="0" bIns="0" rtlCol="0" anchor="t"/>
+          <a:lstStyle/>
+          <a:p>
+            <a:pPr algn="l" marL="342900" indent="-342900">
+              <a:spcAft>
+                <a:spcPts val="800"/>
+              </a:spcAft>
+              <a:buSzPct val="100000"/>
+              <a:buChar char="•"/>
+            </a:pPr>
+            <a:r>
+              <a:rPr lang="en-US" sz="4000" b="1" dirty="0">
+                <a:solidFill>
+                  <a:srgbClr val="111111"/>
+                </a:solidFill>
+                <a:latin typeface="Times New Roman" pitchFamily="34" charset="0"/>
+                <a:ea typeface="Times New Roman" pitchFamily="34" charset="-122"/>
+                <a:cs typeface="Times New Roman" pitchFamily="34" charset="-120"/>
+              </a:rPr>
+              <a:t>No contract: </a:t>
+            </a:r>
+            <a:pPr algn="l" marL="342900" indent="-342900">
+              <a:spcAft>
+                <a:spcPts val="800"/>
+              </a:spcAft>
+              <a:buSzPct val="100000"/>
+              <a:buChar char="•"/>
+            </a:pPr>
+            <a:r>
+              <a:rPr lang="en-US" sz="4000" dirty="0">
+                <a:solidFill>
+                  <a:srgbClr val="111111"/>
+                </a:solidFill>
+                <a:latin typeface="Times New Roman" pitchFamily="34" charset="0"/>
+                <a:ea typeface="Times New Roman" pitchFamily="34" charset="-122"/>
+                <a:cs typeface="Times New Roman" pitchFamily="34" charset="-120"/>
+              </a:rPr>
+              <a:t>Income changes every day.</a:t>
+            </a:r>
+            <a:endParaRPr lang="en-US" sz="4000" dirty="0"/>
+          </a:p>
+          <a:p>
+            <a:pPr algn="l" marL="342900" indent="-342900">
+              <a:spcAft>
+                <a:spcPts val="800"/>
+              </a:spcAft>
+              <a:buSzPct val="100000"/>
+              <a:buChar char="•"/>
+            </a:pPr>
+            <a:r>
+              <a:rPr lang="en-US" sz="4000" b="1" dirty="0">
+                <a:solidFill>
+                  <a:srgbClr val="111111"/>
+                </a:solidFill>
+                <a:latin typeface="Times New Roman" pitchFamily="34" charset="0"/>
+                <a:ea typeface="Times New Roman" pitchFamily="34" charset="-122"/>
+                <a:cs typeface="Times New Roman" pitchFamily="34" charset="-120"/>
+              </a:rPr>
+              <a:t>Small capital: </a:t>
+            </a:r>
+            <a:pPr algn="l" marL="342900" indent="-342900">
+              <a:spcAft>
+                <a:spcPts val="800"/>
+              </a:spcAft>
+              <a:buSzPct val="100000"/>
+              <a:buChar char="•"/>
+            </a:pPr>
+            <a:r>
+              <a:rPr lang="en-US" sz="4000" dirty="0">
+                <a:solidFill>
+                  <a:srgbClr val="111111"/>
+                </a:solidFill>
+                <a:latin typeface="Times New Roman" pitchFamily="34" charset="0"/>
+                <a:ea typeface="Times New Roman" pitchFamily="34" charset="-122"/>
+                <a:cs typeface="Times New Roman" pitchFamily="34" charset="-120"/>
+              </a:rPr>
+              <a:t>It needs little money to start.</a:t>
+            </a:r>
+            <a:endParaRPr lang="en-US" sz="4000" dirty="0"/>
           </a:p>
         </p:txBody>
       </p:sp>
@@ -14794,9 +14763,111 @@
           </a:p>
         </p:txBody>
       </p:sp>
+      <p:sp>
+        <p:nvSpPr>
+          <p:cNvPr id="3" name="Text 1"/>
+          <p:cNvSpPr/>
+          <p:nvPr/>
+        </p:nvSpPr>
+        <p:spPr>
+          <a:xfrm>
+            <a:off x="365760" y="1005840"/>
+            <a:ext cx="11460175" cy="731520"/>
+          </a:xfrm>
+          <a:prstGeom prst="rect">
+            <a:avLst/>
+          </a:prstGeom>
+          <a:noFill/>
+          <a:ln/>
+        </p:spPr>
+        <p:txBody>
+          <a:bodyPr wrap="square" lIns="0" tIns="0" rIns="0" bIns="0" rtlCol="0" anchor="ctr">
+            <a:normAutofit/>
+          </a:bodyPr>
+          <a:lstStyle/>
+          <a:p>
+            <a:pPr algn="ctr" indent="0" marL="0">
+              <a:buNone/>
+            </a:pPr>
+            <a:r>
+              <a:rPr lang="en-US" sz="3600" b="1" dirty="0">
+                <a:solidFill>
+                  <a:srgbClr val="990011"/>
+                </a:solidFill>
+                <a:latin typeface="Times New Roman" pitchFamily="34" charset="0"/>
+                <a:ea typeface="Times New Roman" pitchFamily="34" charset="-122"/>
+                <a:cs typeface="Times New Roman" pitchFamily="34" charset="-120"/>
+              </a:rPr>
+              <a:t>2. The Informal Sector</a:t>
+            </a:r>
+            <a:endParaRPr lang="en-US" sz="3600" dirty="0"/>
+          </a:p>
+        </p:txBody>
+      </p:sp>
+      <p:sp>
+        <p:nvSpPr>
+          <p:cNvPr id="4" name="Text 2"/>
+          <p:cNvSpPr/>
+          <p:nvPr/>
+        </p:nvSpPr>
+        <p:spPr>
+          <a:xfrm>
+            <a:off x="365760" y="1783080"/>
+            <a:ext cx="4846320" cy="4617720"/>
+          </a:xfrm>
+          <a:prstGeom prst="rect">
+            <a:avLst/>
+          </a:prstGeom>
+          <a:noFill/>
+          <a:ln/>
+        </p:spPr>
+        <p:txBody>
+          <a:bodyPr wrap="square" lIns="0" tIns="0" rIns="0" bIns="0" rtlCol="0" anchor="t"/>
+          <a:lstStyle/>
+          <a:p>
+            <a:pPr algn="l" marL="342900" indent="-342900">
+              <a:spcAft>
+                <a:spcPts val="800"/>
+              </a:spcAft>
+              <a:buSzPct val="100000"/>
+              <a:buChar char="•"/>
+            </a:pPr>
+            <a:r>
+              <a:rPr lang="en-US" sz="3600" b="1" dirty="0">
+                <a:solidFill>
+                  <a:srgbClr val="111111"/>
+                </a:solidFill>
+                <a:latin typeface="Times New Roman" pitchFamily="34" charset="0"/>
+                <a:ea typeface="Times New Roman" pitchFamily="34" charset="-122"/>
+                <a:cs typeface="Times New Roman" pitchFamily="34" charset="-120"/>
+              </a:rPr>
+              <a:t>Examples: </a:t>
+            </a:r>
+            <a:pPr algn="l" marL="342900" indent="-342900">
+              <a:spcAft>
+                <a:spcPts val="800"/>
+              </a:spcAft>
+              <a:buSzPct val="100000"/>
+              <a:buChar char="•"/>
+            </a:pPr>
+            <a:r>
+              <a:rPr lang="en-US" sz="3600" dirty="0">
+                <a:solidFill>
+                  <a:srgbClr val="111111"/>
+                </a:solidFill>
+                <a:latin typeface="Times New Roman" pitchFamily="34" charset="0"/>
+                <a:ea typeface="Times New Roman" pitchFamily="34" charset="-122"/>
+                <a:cs typeface="Times New Roman" pitchFamily="34" charset="-120"/>
+              </a:rPr>
+              <a:t>Moto-taxis, street sellers, tailors and mechanics.</a:t>
+            </a:r>
+            <a:endParaRPr lang="en-US" sz="3600" dirty="0"/>
+          </a:p>
+        </p:txBody>
+      </p:sp>
       <p:pic>
         <p:nvPicPr>
-          <p:cNvPr id="3" name="Image 0" descr="/home/claude/f4/img/minesec_sheet.png">    </p:cNvPr>
+          <p:cNvPr id="5" name="Image 0" descr="/home/claude/f4/img/v2/f2t_street_vendor.jpg">    </p:cNvPr>
           <p:cNvPicPr>
             <a:picLocks noChangeAspect="1"/>
           </p:cNvPicPr>
@@ -14810,8 +14881,8 @@
         </p:blipFill>
         <p:spPr>
           <a:xfrm>
-            <a:off x="0" y="658368"/>
-            <a:ext cx="5120640" cy="5833872"/>
+            <a:off x="5349240" y="2071212"/>
+            <a:ext cx="6659575" cy="3693983"/>
           </a:xfrm>
           <a:prstGeom prst="rect">
             <a:avLst/>
@@ -14820,14 +14891,14 @@
       </p:pic>
       <p:sp>
         <p:nvSpPr>
-          <p:cNvPr id="4" name="Text 1"/>
+          <p:cNvPr id="6" name="Text 3"/>
           <p:cNvSpPr/>
           <p:nvPr/>
         </p:nvSpPr>
         <p:spPr>
           <a:xfrm>
-            <a:off x="5349240" y="1005840"/>
-            <a:ext cx="6522415" cy="731520"/>
+            <a:off x="5349240" y="6089904"/>
+            <a:ext cx="6659575" cy="347472"/>
           </a:xfrm>
           <a:prstGeom prst="rect">
             <a:avLst/>
@@ -14836,126 +14907,24 @@
           <a:ln/>
         </p:spPr>
         <p:txBody>
-          <a:bodyPr wrap="square" lIns="0" tIns="0" rIns="0" bIns="0" rtlCol="0" anchor="ctr">
-            <a:normAutofit/>
-          </a:bodyPr>
+          <a:bodyPr wrap="square" lIns="0" tIns="0" rIns="0" bIns="0" rtlCol="0" anchor="ctr"/>
           <a:lstStyle/>
           <a:p>
             <a:pPr algn="ctr" indent="0" marL="0">
               <a:buNone/>
             </a:pPr>
             <a:r>
-              <a:rPr lang="en-US" sz="3600" b="1" dirty="0">
-                <a:solidFill>
-                  <a:srgbClr val="990011"/>
+              <a:rPr lang="en-US" sz="1600" i="1" dirty="0">
+                <a:solidFill>
+                  <a:srgbClr val="555555"/>
                 </a:solidFill>
                 <a:latin typeface="Times New Roman" pitchFamily="34" charset="0"/>
                 <a:ea typeface="Times New Roman" pitchFamily="34" charset="-122"/>
                 <a:cs typeface="Times New Roman" pitchFamily="34" charset="-120"/>
               </a:rPr>
-              <a:t>2. The Informal Sector</a:t>
-            </a:r>
-            <a:endParaRPr lang="en-US" sz="3600" dirty="0"/>
-          </a:p>
-        </p:txBody>
-      </p:sp>
-      <p:sp>
-        <p:nvSpPr>
-          <p:cNvPr id="5" name="Text 2"/>
-          <p:cNvSpPr/>
-          <p:nvPr/>
-        </p:nvSpPr>
-        <p:spPr>
-          <a:xfrm>
-            <a:off x="5349240" y="1783080"/>
-            <a:ext cx="6522415" cy="4663440"/>
-          </a:xfrm>
-          <a:prstGeom prst="rect">
-            <a:avLst/>
-          </a:prstGeom>
-          <a:noFill/>
-          <a:ln/>
-        </p:spPr>
-        <p:txBody>
-          <a:bodyPr wrap="square" lIns="0" tIns="0" rIns="0" bIns="0" rtlCol="0" anchor="t"/>
-          <a:lstStyle/>
-          <a:p>
-            <a:pPr algn="l" marL="342900" indent="-342900">
-              <a:spcAft>
-                <a:spcPts val="800"/>
-              </a:spcAft>
-              <a:buSzPct val="100000"/>
-              <a:buChar char="•"/>
-            </a:pPr>
-            <a:r>
-              <a:rPr lang="en-US" sz="4000" b="1" dirty="0">
-                <a:solidFill>
-                  <a:srgbClr val="111111"/>
-                </a:solidFill>
-                <a:latin typeface="Times New Roman" pitchFamily="34" charset="0"/>
-                <a:ea typeface="Times New Roman" pitchFamily="34" charset="-122"/>
-                <a:cs typeface="Times New Roman" pitchFamily="34" charset="-120"/>
-              </a:rPr>
-              <a:t>No contract: </a:t>
-            </a:r>
-            <a:pPr algn="l" marL="342900" indent="-342900">
-              <a:spcAft>
-                <a:spcPts val="800"/>
-              </a:spcAft>
-              <a:buSzPct val="100000"/>
-              <a:buChar char="•"/>
-            </a:pPr>
-            <a:r>
-              <a:rPr lang="en-US" sz="4000" dirty="0">
-                <a:solidFill>
-                  <a:srgbClr val="111111"/>
-                </a:solidFill>
-                <a:latin typeface="Times New Roman" pitchFamily="34" charset="0"/>
-                <a:ea typeface="Times New Roman" pitchFamily="34" charset="-122"/>
-                <a:cs typeface="Times New Roman" pitchFamily="34" charset="-120"/>
-              </a:rPr>
-              <a:t>Income changes every day.</a:t>
-            </a:r>
-            <a:endParaRPr lang="en-US" sz="4000" dirty="0"/>
-          </a:p>
-          <a:p>
-            <a:pPr algn="l" marL="342900" indent="-342900">
-              <a:spcAft>
-                <a:spcPts val="800"/>
-              </a:spcAft>
-              <a:buSzPct val="100000"/>
-              <a:buChar char="•"/>
-            </a:pPr>
-            <a:r>
-              <a:rPr lang="en-US" sz="4000" b="1" dirty="0">
-                <a:solidFill>
-                  <a:srgbClr val="111111"/>
-                </a:solidFill>
-                <a:latin typeface="Times New Roman" pitchFamily="34" charset="0"/>
-                <a:ea typeface="Times New Roman" pitchFamily="34" charset="-122"/>
-                <a:cs typeface="Times New Roman" pitchFamily="34" charset="-120"/>
-              </a:rPr>
-              <a:t>Small capital: </a:t>
-            </a:r>
-            <a:pPr algn="l" marL="342900" indent="-342900">
-              <a:spcAft>
-                <a:spcPts val="800"/>
-              </a:spcAft>
-              <a:buSzPct val="100000"/>
-              <a:buChar char="•"/>
-            </a:pPr>
-            <a:r>
-              <a:rPr lang="en-US" sz="4000" dirty="0">
-                <a:solidFill>
-                  <a:srgbClr val="111111"/>
-                </a:solidFill>
-                <a:latin typeface="Times New Roman" pitchFamily="34" charset="0"/>
-                <a:ea typeface="Times New Roman" pitchFamily="34" charset="-122"/>
-                <a:cs typeface="Times New Roman" pitchFamily="34" charset="-120"/>
-              </a:rPr>
-              <a:t>It needs little money to start.</a:t>
-            </a:r>
-            <a:endParaRPr lang="en-US" sz="4000" dirty="0"/>
+              <a:t>Illustration: a street seller</a:t>
+            </a:r>
+            <a:endParaRPr lang="en-US" sz="1600" dirty="0"/>
           </a:p>
         </p:txBody>
       </p:sp>
@@ -15176,6 +15145,26 @@
             </a:r>
             <a:endParaRPr lang="en-US" sz="4000" dirty="0"/>
           </a:p>
+          <a:p>
+            <a:pPr algn="l" indent="0" marL="0">
+              <a:spcAft>
+                <a:spcPts val="800"/>
+              </a:spcAft>
+              <a:buNone/>
+            </a:pPr>
+            <a:r>
+              <a:rPr lang="en-US" sz="4000" dirty="0">
+                <a:solidFill>
+                  <a:srgbClr val="111111"/>
+                </a:solidFill>
+                <a:latin typeface="Times New Roman" pitchFamily="34" charset="0"/>
+                <a:ea typeface="Times New Roman" pitchFamily="34" charset="-122"/>
+                <a:cs typeface="Times New Roman" pitchFamily="34" charset="-120"/>
+              </a:rPr>
+              <a:t>Name the two sectors of work: registered and not registered.</a:t>
+            </a:r>
+            <a:endParaRPr lang="en-US" sz="4000" dirty="0"/>
+          </a:p>
         </p:txBody>
       </p:sp>
       <p:sp>
@@ -15284,117 +15273,15 @@
                 <a:ea typeface="Calibri" pitchFamily="34" charset="-122"/>
                 <a:cs typeface="Calibri" pitchFamily="34" charset="-120"/>
               </a:rPr>
-              <a:t>BOARD SUMMARY</a:t>
+              <a:t>FORMATIVE EVALUATION</a:t>
             </a:r>
             <a:endParaRPr lang="en-US" sz="1400" dirty="0"/>
-          </a:p>
-        </p:txBody>
-      </p:sp>
-      <p:sp>
-        <p:nvSpPr>
-          <p:cNvPr id="3" name="Text 1"/>
-          <p:cNvSpPr/>
-          <p:nvPr/>
-        </p:nvSpPr>
-        <p:spPr>
-          <a:xfrm>
-            <a:off x="365760" y="1005840"/>
-            <a:ext cx="11460175" cy="731520"/>
-          </a:xfrm>
-          <a:prstGeom prst="rect">
-            <a:avLst/>
-          </a:prstGeom>
-          <a:noFill/>
-          <a:ln/>
-        </p:spPr>
-        <p:txBody>
-          <a:bodyPr wrap="square" lIns="0" tIns="0" rIns="0" bIns="0" rtlCol="0" anchor="ctr">
-            <a:normAutofit/>
-          </a:bodyPr>
-          <a:lstStyle/>
-          <a:p>
-            <a:pPr algn="ctr" indent="0" marL="0">
-              <a:buNone/>
-            </a:pPr>
-            <a:r>
-              <a:rPr lang="en-US" sz="3600" b="1" dirty="0">
-                <a:solidFill>
-                  <a:srgbClr val="990011"/>
-                </a:solidFill>
-                <a:latin typeface="Times New Roman" pitchFamily="34" charset="0"/>
-                <a:ea typeface="Times New Roman" pitchFamily="34" charset="-122"/>
-                <a:cs typeface="Times New Roman" pitchFamily="34" charset="-120"/>
-              </a:rPr>
-              <a:t>2. The Informal Sector</a:t>
-            </a:r>
-            <a:endParaRPr lang="en-US" sz="3600" dirty="0"/>
-          </a:p>
-        </p:txBody>
-      </p:sp>
-      <p:sp>
-        <p:nvSpPr>
-          <p:cNvPr id="4" name="Text 2"/>
-          <p:cNvSpPr/>
-          <p:nvPr/>
-        </p:nvSpPr>
-        <p:spPr>
-          <a:xfrm>
-            <a:off x="365760" y="1783080"/>
-            <a:ext cx="4846320" cy="4617720"/>
-          </a:xfrm>
-          <a:prstGeom prst="rect">
-            <a:avLst/>
-          </a:prstGeom>
-          <a:noFill/>
-          <a:ln/>
-        </p:spPr>
-        <p:txBody>
-          <a:bodyPr wrap="square" lIns="0" tIns="0" rIns="0" bIns="0" rtlCol="0" anchor="t"/>
-          <a:lstStyle/>
-          <a:p>
-            <a:pPr algn="l" marL="342900" indent="-342900">
-              <a:spcAft>
-                <a:spcPts val="800"/>
-              </a:spcAft>
-              <a:buSzPct val="100000"/>
-              <a:buChar char="•"/>
-            </a:pPr>
-            <a:r>
-              <a:rPr lang="en-US" sz="3600" b="1" dirty="0">
-                <a:solidFill>
-                  <a:srgbClr val="111111"/>
-                </a:solidFill>
-                <a:latin typeface="Times New Roman" pitchFamily="34" charset="0"/>
-                <a:ea typeface="Times New Roman" pitchFamily="34" charset="-122"/>
-                <a:cs typeface="Times New Roman" pitchFamily="34" charset="-120"/>
-              </a:rPr>
-              <a:t>Examples: </a:t>
-            </a:r>
-            <a:pPr algn="l" marL="342900" indent="-342900">
-              <a:spcAft>
-                <a:spcPts val="800"/>
-              </a:spcAft>
-              <a:buSzPct val="100000"/>
-              <a:buChar char="•"/>
-            </a:pPr>
-            <a:r>
-              <a:rPr lang="en-US" sz="3600" dirty="0">
-                <a:solidFill>
-                  <a:srgbClr val="111111"/>
-                </a:solidFill>
-                <a:latin typeface="Times New Roman" pitchFamily="34" charset="0"/>
-                <a:ea typeface="Times New Roman" pitchFamily="34" charset="-122"/>
-                <a:cs typeface="Times New Roman" pitchFamily="34" charset="-120"/>
-              </a:rPr>
-              <a:t>Moto-taxis, street sellers, tailors and mechanics.</a:t>
-            </a:r>
-            <a:endParaRPr lang="en-US" sz="3600" dirty="0"/>
           </a:p>
         </p:txBody>
       </p:sp>
       <p:pic>
         <p:nvPicPr>
-          <p:cNvPr id="5" name="Image 0" descr="/home/claude/f4/img/v2/f2t_street_vendor.jpg">    </p:cNvPr>
+          <p:cNvPr id="3" name="Image 0" descr="/home/claude/f4/img/minesec_sheet.png">    </p:cNvPr>
           <p:cNvPicPr>
             <a:picLocks noChangeAspect="1"/>
           </p:cNvPicPr>
@@ -15408,8 +15295,8 @@
         </p:blipFill>
         <p:spPr>
           <a:xfrm>
-            <a:off x="5349240" y="2071212"/>
-            <a:ext cx="6659575" cy="3693983"/>
+            <a:off x="0" y="658368"/>
+            <a:ext cx="5120640" cy="5833872"/>
           </a:xfrm>
           <a:prstGeom prst="rect">
             <a:avLst/>
@@ -15418,14 +15305,14 @@
       </p:pic>
       <p:sp>
         <p:nvSpPr>
-          <p:cNvPr id="6" name="Text 3"/>
+          <p:cNvPr id="4" name="Text 1"/>
           <p:cNvSpPr/>
           <p:nvPr/>
         </p:nvSpPr>
         <p:spPr>
           <a:xfrm>
-            <a:off x="5349240" y="6089904"/>
-            <a:ext cx="6659575" cy="347472"/>
+            <a:off x="5349240" y="1005840"/>
+            <a:ext cx="6522415" cy="731520"/>
           </a:xfrm>
           <a:prstGeom prst="rect">
             <a:avLst/>
@@ -15434,24 +15321,68 @@
           <a:ln/>
         </p:spPr>
         <p:txBody>
-          <a:bodyPr wrap="square" lIns="0" tIns="0" rIns="0" bIns="0" rtlCol="0" anchor="ctr"/>
+          <a:bodyPr wrap="square" lIns="0" tIns="0" rIns="0" bIns="0" rtlCol="0" anchor="ctr">
+            <a:normAutofit/>
+          </a:bodyPr>
           <a:lstStyle/>
           <a:p>
             <a:pPr algn="ctr" indent="0" marL="0">
               <a:buNone/>
             </a:pPr>
             <a:r>
-              <a:rPr lang="en-US" sz="1600" i="1" dirty="0">
-                <a:solidFill>
-                  <a:srgbClr val="555555"/>
+              <a:rPr lang="en-US" sz="3600" b="1" dirty="0">
+                <a:solidFill>
+                  <a:srgbClr val="990011"/>
                 </a:solidFill>
                 <a:latin typeface="Times New Roman" pitchFamily="34" charset="0"/>
                 <a:ea typeface="Times New Roman" pitchFamily="34" charset="-122"/>
                 <a:cs typeface="Times New Roman" pitchFamily="34" charset="-120"/>
               </a:rPr>
-              <a:t>Illustration: a street seller</a:t>
-            </a:r>
-            <a:endParaRPr lang="en-US" sz="1600" dirty="0"/>
+              <a:t>Evaluation 1</a:t>
+            </a:r>
+            <a:endParaRPr lang="en-US" sz="3600" dirty="0"/>
+          </a:p>
+        </p:txBody>
+      </p:sp>
+      <p:sp>
+        <p:nvSpPr>
+          <p:cNvPr id="5" name="Text 2"/>
+          <p:cNvSpPr/>
+          <p:nvPr/>
+        </p:nvSpPr>
+        <p:spPr>
+          <a:xfrm>
+            <a:off x="5349240" y="1783080"/>
+            <a:ext cx="6522415" cy="4663440"/>
+          </a:xfrm>
+          <a:prstGeom prst="rect">
+            <a:avLst/>
+          </a:prstGeom>
+          <a:noFill/>
+          <a:ln/>
+        </p:spPr>
+        <p:txBody>
+          <a:bodyPr wrap="square" lIns="0" tIns="0" rIns="0" bIns="0" rtlCol="0" anchor="t"/>
+          <a:lstStyle/>
+          <a:p>
+            <a:pPr algn="l" indent="0" marL="0">
+              <a:spcAft>
+                <a:spcPts val="800"/>
+              </a:spcAft>
+              <a:buNone/>
+            </a:pPr>
+            <a:r>
+              <a:rPr lang="en-US" sz="4000" dirty="0">
+                <a:solidFill>
+                  <a:srgbClr val="111111"/>
+                </a:solidFill>
+                <a:latin typeface="Times New Roman" pitchFamily="34" charset="0"/>
+                <a:ea typeface="Times New Roman" pitchFamily="34" charset="-122"/>
+                <a:cs typeface="Times New Roman" pitchFamily="34" charset="-120"/>
+              </a:rPr>
+              <a:t>What is the informal sector?</a:t>
+            </a:r>
+            <a:endParaRPr lang="en-US" sz="4000" dirty="0"/>
           </a:p>
         </p:txBody>
       </p:sp>
@@ -15626,7 +15557,7 @@
                 <a:ea typeface="Times New Roman" pitchFamily="34" charset="-122"/>
                 <a:cs typeface="Times New Roman" pitchFamily="34" charset="-120"/>
               </a:rPr>
-              <a:t>Evaluation 1</a:t>
+              <a:t>Expected Answer</a:t>
             </a:r>
             <a:endParaRPr lang="en-US" sz="3600" dirty="0"/>
           </a:p>
@@ -15668,7 +15599,7 @@
                 <a:ea typeface="Times New Roman" pitchFamily="34" charset="-122"/>
                 <a:cs typeface="Times New Roman" pitchFamily="34" charset="-120"/>
               </a:rPr>
-              <a:t>What is the informal sector?</a:t>
+              <a:t>Small activities that are not registered.</a:t>
             </a:r>
             <a:endParaRPr lang="en-US" sz="4000" dirty="0"/>
           </a:p>
@@ -15845,7 +15776,7 @@
                 <a:ea typeface="Times New Roman" pitchFamily="34" charset="-122"/>
                 <a:cs typeface="Times New Roman" pitchFamily="34" charset="-120"/>
               </a:rPr>
-              <a:t>Expected Answer</a:t>
+              <a:t>Evaluation 2</a:t>
             </a:r>
             <a:endParaRPr lang="en-US" sz="3600" dirty="0"/>
           </a:p>
@@ -15887,7 +15818,7 @@
                 <a:ea typeface="Times New Roman" pitchFamily="34" charset="-122"/>
                 <a:cs typeface="Times New Roman" pitchFamily="34" charset="-120"/>
               </a:rPr>
-              <a:t>Small activities that are not registered.</a:t>
+              <a:t>Give one characteristic of the formal sector.</a:t>
             </a:r>
             <a:endParaRPr lang="en-US" sz="4000" dirty="0"/>
           </a:p>
@@ -16064,7 +15995,7 @@
                 <a:ea typeface="Times New Roman" pitchFamily="34" charset="-122"/>
                 <a:cs typeface="Times New Roman" pitchFamily="34" charset="-120"/>
               </a:rPr>
-              <a:t>Evaluation 2</a:t>
+              <a:t>Expected Answer</a:t>
             </a:r>
             <a:endParaRPr lang="en-US" sz="3600" dirty="0"/>
           </a:p>
@@ -16106,7 +16037,7 @@
                 <a:ea typeface="Times New Roman" pitchFamily="34" charset="-122"/>
                 <a:cs typeface="Times New Roman" pitchFamily="34" charset="-120"/>
               </a:rPr>
-              <a:t>Give one characteristic of the formal sector.</a:t>
+              <a:t>Workers have contracts and monthly salaries (or it is registered and pays taxes).</a:t>
             </a:r>
             <a:endParaRPr lang="en-US" sz="4000" dirty="0"/>
           </a:p>
@@ -16218,7 +16149,7 @@
                 <a:ea typeface="Calibri" pitchFamily="34" charset="-122"/>
                 <a:cs typeface="Calibri" pitchFamily="34" charset="-120"/>
               </a:rPr>
-              <a:t>FORMATIVE EVALUATION</a:t>
+              <a:t>REMEDIATION</a:t>
             </a:r>
             <a:endParaRPr lang="en-US" sz="1400" dirty="0"/>
           </a:p>
@@ -16283,7 +16214,7 @@
                 <a:ea typeface="Times New Roman" pitchFamily="34" charset="-122"/>
                 <a:cs typeface="Times New Roman" pitchFamily="34" charset="-120"/>
               </a:rPr>
-              <a:t>Expected Answer</a:t>
+              <a:t>Remediation</a:t>
             </a:r>
             <a:endParaRPr lang="en-US" sz="3600" dirty="0"/>
           </a:p>
@@ -16317,7 +16248,7 @@
               <a:buNone/>
             </a:pPr>
             <a:r>
-              <a:rPr lang="en-US" sz="4000" dirty="0">
+              <a:rPr lang="en-US" sz="4000" b="1" dirty="0">
                 <a:solidFill>
                   <a:srgbClr val="111111"/>
                 </a:solidFill>
@@ -16325,7 +16256,51 @@
                 <a:ea typeface="Times New Roman" pitchFamily="34" charset="-122"/>
                 <a:cs typeface="Times New Roman" pitchFamily="34" charset="-120"/>
               </a:rPr>
-              <a:t>Workers have contracts and monthly salaries (or it is registered and pays taxes).</a:t>
+              <a:t>Fill in the blanks:</a:t>
+            </a:r>
+            <a:endParaRPr lang="en-US" sz="4000" dirty="0"/>
+          </a:p>
+          <a:p>
+            <a:pPr algn="l" marL="342900" indent="-342900">
+              <a:spcAft>
+                <a:spcPts val="800"/>
+              </a:spcAft>
+              <a:buSzPct val="100000"/>
+              <a:buFont typeface="+mj-lt"/>
+              <a:buAutoNum type="arabicPeriod" startAt="1"/>
+            </a:pPr>
+            <a:r>
+              <a:rPr lang="en-US" sz="4000" dirty="0">
+                <a:solidFill>
+                  <a:srgbClr val="111111"/>
+                </a:solidFill>
+                <a:latin typeface="Times New Roman" pitchFamily="34" charset="0"/>
+                <a:ea typeface="Times New Roman" pitchFamily="34" charset="-122"/>
+                <a:cs typeface="Times New Roman" pitchFamily="34" charset="-120"/>
+              </a:rPr>
+              <a:t>Work that is registered and pays taxes is the ______ sector.</a:t>
+            </a:r>
+            <a:endParaRPr lang="en-US" sz="4000" dirty="0"/>
+          </a:p>
+          <a:p>
+            <a:pPr algn="l" marL="342900" indent="-342900">
+              <a:spcAft>
+                <a:spcPts val="800"/>
+              </a:spcAft>
+              <a:buSzPct val="100000"/>
+              <a:buFont typeface="+mj-lt"/>
+              <a:buAutoNum type="arabicPeriod" startAt="1"/>
+            </a:pPr>
+            <a:r>
+              <a:rPr lang="en-US" sz="4000" dirty="0">
+                <a:solidFill>
+                  <a:srgbClr val="111111"/>
+                </a:solidFill>
+                <a:latin typeface="Times New Roman" pitchFamily="34" charset="0"/>
+                <a:ea typeface="Times New Roman" pitchFamily="34" charset="-122"/>
+                <a:cs typeface="Times New Roman" pitchFamily="34" charset="-120"/>
+              </a:rPr>
+              <a:t>A moto-taxi driver usually works in the ______ sector.</a:t>
             </a:r>
             <a:endParaRPr lang="en-US" sz="4000" dirty="0"/>
           </a:p>
@@ -16502,7 +16477,7 @@
                 <a:ea typeface="Times New Roman" pitchFamily="34" charset="-122"/>
                 <a:cs typeface="Times New Roman" pitchFamily="34" charset="-120"/>
               </a:rPr>
-              <a:t>Remediation</a:t>
+              <a:t>Remediation (continued)</a:t>
             </a:r>
             <a:endParaRPr lang="en-US" sz="3600" dirty="0"/>
           </a:p>
@@ -16528,26 +16503,6 @@
         <p:txBody>
           <a:bodyPr wrap="square" lIns="0" tIns="0" rIns="0" bIns="0" rtlCol="0" anchor="t"/>
           <a:lstStyle/>
-          <a:p>
-            <a:pPr algn="l" indent="0" marL="0">
-              <a:spcAft>
-                <a:spcPts val="800"/>
-              </a:spcAft>
-              <a:buNone/>
-            </a:pPr>
-            <a:r>
-              <a:rPr lang="en-US" sz="4000" b="1" dirty="0">
-                <a:solidFill>
-                  <a:srgbClr val="111111"/>
-                </a:solidFill>
-                <a:latin typeface="Times New Roman" pitchFamily="34" charset="0"/>
-                <a:ea typeface="Times New Roman" pitchFamily="34" charset="-122"/>
-                <a:cs typeface="Times New Roman" pitchFamily="34" charset="-120"/>
-              </a:rPr>
-              <a:t>Fill in the blanks:</a:t>
-            </a:r>
-            <a:endParaRPr lang="en-US" sz="4000" dirty="0"/>
-          </a:p>
           <a:p>
             <a:pPr algn="l" marL="342900" indent="-342900">
               <a:spcAft>
@@ -16566,29 +16521,7 @@
                 <a:ea typeface="Times New Roman" pitchFamily="34" charset="-122"/>
                 <a:cs typeface="Times New Roman" pitchFamily="34" charset="-120"/>
               </a:rPr>
-              <a:t>Work that is registered and pays taxes is the ______ sector.</a:t>
-            </a:r>
-            <a:endParaRPr lang="en-US" sz="4000" dirty="0"/>
-          </a:p>
-          <a:p>
-            <a:pPr algn="l" marL="342900" indent="-342900">
-              <a:spcAft>
-                <a:spcPts val="800"/>
-              </a:spcAft>
-              <a:buSzPct val="100000"/>
-              <a:buFont typeface="+mj-lt"/>
-              <a:buAutoNum type="arabicPeriod" startAt="1"/>
-            </a:pPr>
-            <a:r>
-              <a:rPr lang="en-US" sz="4000" dirty="0">
-                <a:solidFill>
-                  <a:srgbClr val="111111"/>
-                </a:solidFill>
-                <a:latin typeface="Times New Roman" pitchFamily="34" charset="0"/>
-                <a:ea typeface="Times New Roman" pitchFamily="34" charset="-122"/>
-                <a:cs typeface="Times New Roman" pitchFamily="34" charset="-120"/>
-              </a:rPr>
-              <a:t>A moto-taxi driver usually works in the ______ sector.</a:t>
+              <a:t>Money paid after a worker stops working is a ______.</a:t>
             </a:r>
             <a:endParaRPr lang="en-US" sz="4000" dirty="0"/>
           </a:p>
@@ -16700,7 +16633,7 @@
                 <a:ea typeface="Calibri" pitchFamily="34" charset="-122"/>
                 <a:cs typeface="Calibri" pitchFamily="34" charset="-120"/>
               </a:rPr>
-              <a:t>REMEDIATION</a:t>
+              <a:t>HOMEWORK</a:t>
             </a:r>
             <a:endParaRPr lang="en-US" sz="1400" dirty="0"/>
           </a:p>
@@ -16765,7 +16698,7 @@
                 <a:ea typeface="Times New Roman" pitchFamily="34" charset="-122"/>
                 <a:cs typeface="Times New Roman" pitchFamily="34" charset="-120"/>
               </a:rPr>
-              <a:t>Remediation (continued)</a:t>
+              <a:t>Homework</a:t>
             </a:r>
             <a:endParaRPr lang="en-US" sz="3600" dirty="0"/>
           </a:p>
@@ -16792,13 +16725,11 @@
           <a:bodyPr wrap="square" lIns="0" tIns="0" rIns="0" bIns="0" rtlCol="0" anchor="t"/>
           <a:lstStyle/>
           <a:p>
-            <a:pPr algn="l" marL="342900" indent="-342900">
+            <a:pPr algn="l" indent="0" marL="0">
               <a:spcAft>
                 <a:spcPts val="800"/>
               </a:spcAft>
-              <a:buSzPct val="100000"/>
-              <a:buFont typeface="+mj-lt"/>
-              <a:buAutoNum type="arabicPeriod" startAt="1"/>
+              <a:buNone/>
             </a:pPr>
             <a:r>
               <a:rPr lang="en-US" sz="4000" dirty="0">
@@ -16809,7 +16740,7 @@
                 <a:ea typeface="Times New Roman" pitchFamily="34" charset="-122"/>
                 <a:cs typeface="Times New Roman" pitchFamily="34" charset="-120"/>
               </a:rPr>
-              <a:t>Money paid after a worker stops working is a ______.</a:t>
+              <a:t>Give three primary activities.</a:t>
             </a:r>
             <a:endParaRPr lang="en-US" sz="4000" dirty="0"/>
           </a:p>
@@ -16921,7 +16852,7 @@
                 <a:ea typeface="Calibri" pitchFamily="34" charset="-122"/>
                 <a:cs typeface="Calibri" pitchFamily="34" charset="-120"/>
               </a:rPr>
-              <a:t>HOMEWORK</a:t>
+              <a:t>NEXT LESSON</a:t>
             </a:r>
             <a:endParaRPr lang="en-US" sz="1400" dirty="0"/>
           </a:p>
@@ -16986,7 +16917,7 @@
                 <a:ea typeface="Times New Roman" pitchFamily="34" charset="-122"/>
                 <a:cs typeface="Times New Roman" pitchFamily="34" charset="-120"/>
               </a:rPr>
-              <a:t>Homework</a:t>
+              <a:t>Next Lesson</a:t>
             </a:r>
             <a:endParaRPr lang="en-US" sz="3600" dirty="0"/>
           </a:p>
@@ -17010,17 +16941,17 @@
           <a:ln/>
         </p:spPr>
         <p:txBody>
-          <a:bodyPr wrap="square" lIns="0" tIns="0" rIns="0" bIns="0" rtlCol="0" anchor="t"/>
-          <a:lstStyle/>
-          <a:p>
-            <a:pPr algn="l" indent="0" marL="0">
+          <a:bodyPr wrap="square" lIns="0" tIns="0" rIns="0" bIns="0" rtlCol="0" anchor="ctr"/>
+          <a:lstStyle/>
+          <a:p>
+            <a:pPr algn="ctr" indent="0" marL="0">
               <a:spcAft>
                 <a:spcPts val="800"/>
               </a:spcAft>
               <a:buNone/>
             </a:pPr>
             <a:r>
-              <a:rPr lang="en-US" sz="4000" dirty="0">
+              <a:rPr lang="en-US" sz="4000" b="1" dirty="0">
                 <a:solidFill>
                   <a:srgbClr val="111111"/>
                 </a:solidFill>
@@ -17028,7 +16959,27 @@
                 <a:ea typeface="Times New Roman" pitchFamily="34" charset="-122"/>
                 <a:cs typeface="Times New Roman" pitchFamily="34" charset="-120"/>
               </a:rPr>
-              <a:t>List four products of farming, fishing, forestry or mining found in the Garoua market, and say where each comes from.</a:t>
+              <a:t>Our next lesson will be on:</a:t>
+            </a:r>
+            <a:endParaRPr lang="en-US" sz="4000" dirty="0"/>
+          </a:p>
+          <a:p>
+            <a:pPr algn="ctr" indent="0" marL="0">
+              <a:spcAft>
+                <a:spcPts val="800"/>
+              </a:spcAft>
+              <a:buNone/>
+            </a:pPr>
+            <a:r>
+              <a:rPr lang="en-US" sz="4000" b="1" dirty="0">
+                <a:solidFill>
+                  <a:srgbClr val="990011"/>
+                </a:solidFill>
+                <a:latin typeface="Times New Roman" pitchFamily="34" charset="0"/>
+                <a:ea typeface="Times New Roman" pitchFamily="34" charset="-122"/>
+                <a:cs typeface="Times New Roman" pitchFamily="34" charset="-120"/>
+              </a:rPr>
+              <a:t>Lesson 5 (Part 3): The Sectors of the Economy: The Primary Sector (Definition and Examples)</a:t>
             </a:r>
             <a:endParaRPr lang="en-US" sz="4000" dirty="0"/>
           </a:p>
@@ -17140,245 +17091,6 @@
                 <a:ea typeface="Calibri" pitchFamily="34" charset="-122"/>
                 <a:cs typeface="Calibri" pitchFamily="34" charset="-120"/>
               </a:rPr>
-              <a:t>NEXT LESSON</a:t>
-            </a:r>
-            <a:endParaRPr lang="en-US" sz="1400" dirty="0"/>
-          </a:p>
-        </p:txBody>
-      </p:sp>
-      <p:pic>
-        <p:nvPicPr>
-          <p:cNvPr id="3" name="Image 0" descr="/home/claude/f4/img/minesec_sheet.png">    </p:cNvPr>
-          <p:cNvPicPr>
-            <a:picLocks noChangeAspect="1"/>
-          </p:cNvPicPr>
-          <p:nvPr/>
-        </p:nvPicPr>
-        <p:blipFill>
-          <a:blip r:embed="rId1"/>
-          <a:stretch>
-            <a:fillRect/>
-          </a:stretch>
-        </p:blipFill>
-        <p:spPr>
-          <a:xfrm>
-            <a:off x="0" y="658368"/>
-            <a:ext cx="5120640" cy="5833872"/>
-          </a:xfrm>
-          <a:prstGeom prst="rect">
-            <a:avLst/>
-          </a:prstGeom>
-        </p:spPr>
-      </p:pic>
-      <p:sp>
-        <p:nvSpPr>
-          <p:cNvPr id="4" name="Text 1"/>
-          <p:cNvSpPr/>
-          <p:nvPr/>
-        </p:nvSpPr>
-        <p:spPr>
-          <a:xfrm>
-            <a:off x="5349240" y="1005840"/>
-            <a:ext cx="6522415" cy="731520"/>
-          </a:xfrm>
-          <a:prstGeom prst="rect">
-            <a:avLst/>
-          </a:prstGeom>
-          <a:noFill/>
-          <a:ln/>
-        </p:spPr>
-        <p:txBody>
-          <a:bodyPr wrap="square" lIns="0" tIns="0" rIns="0" bIns="0" rtlCol="0" anchor="ctr">
-            <a:normAutofit/>
-          </a:bodyPr>
-          <a:lstStyle/>
-          <a:p>
-            <a:pPr algn="ctr" indent="0" marL="0">
-              <a:buNone/>
-            </a:pPr>
-            <a:r>
-              <a:rPr lang="en-US" sz="3600" b="1" dirty="0">
-                <a:solidFill>
-                  <a:srgbClr val="990011"/>
-                </a:solidFill>
-                <a:latin typeface="Times New Roman" pitchFamily="34" charset="0"/>
-                <a:ea typeface="Times New Roman" pitchFamily="34" charset="-122"/>
-                <a:cs typeface="Times New Roman" pitchFamily="34" charset="-120"/>
-              </a:rPr>
-              <a:t>Next Lesson</a:t>
-            </a:r>
-            <a:endParaRPr lang="en-US" sz="3600" dirty="0"/>
-          </a:p>
-        </p:txBody>
-      </p:sp>
-      <p:sp>
-        <p:nvSpPr>
-          <p:cNvPr id="5" name="Text 2"/>
-          <p:cNvSpPr/>
-          <p:nvPr/>
-        </p:nvSpPr>
-        <p:spPr>
-          <a:xfrm>
-            <a:off x="5349240" y="1783080"/>
-            <a:ext cx="6522415" cy="4663440"/>
-          </a:xfrm>
-          <a:prstGeom prst="rect">
-            <a:avLst/>
-          </a:prstGeom>
-          <a:noFill/>
-          <a:ln/>
-        </p:spPr>
-        <p:txBody>
-          <a:bodyPr wrap="square" lIns="0" tIns="0" rIns="0" bIns="0" rtlCol="0" anchor="ctr"/>
-          <a:lstStyle/>
-          <a:p>
-            <a:pPr algn="ctr" indent="0" marL="0">
-              <a:spcAft>
-                <a:spcPts val="800"/>
-              </a:spcAft>
-              <a:buNone/>
-            </a:pPr>
-            <a:r>
-              <a:rPr lang="en-US" sz="4000" b="1" dirty="0">
-                <a:solidFill>
-                  <a:srgbClr val="111111"/>
-                </a:solidFill>
-                <a:latin typeface="Times New Roman" pitchFamily="34" charset="0"/>
-                <a:ea typeface="Times New Roman" pitchFamily="34" charset="-122"/>
-                <a:cs typeface="Times New Roman" pitchFamily="34" charset="-120"/>
-              </a:rPr>
-              <a:t>Our next lesson will be on:</a:t>
-            </a:r>
-            <a:endParaRPr lang="en-US" sz="4000" dirty="0"/>
-          </a:p>
-          <a:p>
-            <a:pPr algn="ctr" indent="0" marL="0">
-              <a:spcAft>
-                <a:spcPts val="800"/>
-              </a:spcAft>
-              <a:buNone/>
-            </a:pPr>
-            <a:r>
-              <a:rPr lang="en-US" sz="4000" b="1" dirty="0">
-                <a:solidFill>
-                  <a:srgbClr val="990011"/>
-                </a:solidFill>
-                <a:latin typeface="Times New Roman" pitchFamily="34" charset="0"/>
-                <a:ea typeface="Times New Roman" pitchFamily="34" charset="-122"/>
-                <a:cs typeface="Times New Roman" pitchFamily="34" charset="-120"/>
-              </a:rPr>
-              <a:t>Lesson 5 (Part 3): The Sectors of the Economy: The Primary Sector (Definition and Examples)</a:t>
-            </a:r>
-            <a:endParaRPr lang="en-US" sz="4000" dirty="0"/>
-          </a:p>
-        </p:txBody>
-      </p:sp>
-      <p:sp>
-        <p:nvSpPr>
-          <p:cNvPr id="25" name="Slide Number Placeholder 0"/>
-          <p:cNvSpPr>
-            <a:spLocks noGrp="1"/>
-          </p:cNvSpPr>
-          <p:nvPr>
-            <p:ph type="sldNum" sz="quarter" idx="4294967295"/>
-          </p:nvPr>
-        </p:nvSpPr>
-        <p:spPr>
-          <a:xfrm>
-            <a:off x="27432" y="91440"/>
-            <a:ext cx="585216" cy="475488"/>
-          </a:xfrm>
-          <a:prstGeom prst="rect">
-            <a:avLst/>
-          </a:prstGeom>
-          <a:extLst>
-            <a:ext uri="{C572A759-6A51-4108-AA02-DFA0A04FC94B}">
-              <ma14:wrappingTextBoxFlag xmlns:ma14="http://schemas.microsoft.com/office/mac/drawingml/2011/main" val="0"/>
-            </a:ext>
-          </a:extLst>
-        </p:spPr>
-        <p:txBody>
-          <a:bodyPr/>
-          <a:lstStyle>
-            <a:lvl1pPr>
-              <a:defRPr sz="2000">
-                <a:solidFill>
-                  <a:srgbClr val="FFFFFF"/>
-                </a:solidFill>
-                <a:latin typeface="Calibri"/>
-                <a:ea typeface="Calibri"/>
-                <a:cs typeface="Calibri"/>
-              </a:defRPr>
-            </a:lvl1pPr>
-          </a:lstStyle>
-          <a:p>
-            <a:pPr algn="ctr"/>
-            <a:fld id="{F7021451-1387-4CA6-816F-3879F97B5CBC}" type="slidenum">
-              <a:rPr b="1" lang="en-US"/>
-              <a:t>48</a:t>
-            </a:fld>
-            <a:endParaRPr lang="en-US"/>
-          </a:p>
-        </p:txBody>
-      </p:sp>
-    </p:spTree>
-  </p:cSld>
-  <p:clrMapOvr>
-    <a:masterClrMapping/>
-  </p:clrMapOvr>
-</p:sld>
-</file>
-
-<file path=ppt/slides/slide49.xml><?xml version="1.0" encoding="utf-8"?>
-<p:sld xmlns:a="http://schemas.openxmlformats.org/drawingml/2006/main" xmlns:r="http://schemas.openxmlformats.org/officeDocument/2006/relationships" xmlns:p="http://schemas.openxmlformats.org/presentationml/2006/main">
-  <p:cSld name="Slide 49">
-    <p:spTree>
-      <p:nvGrpSpPr>
-        <p:cNvPr id="1" name=""/>
-        <p:cNvGrpSpPr/>
-        <p:nvPr/>
-      </p:nvGrpSpPr>
-      <p:grpSpPr>
-        <a:xfrm>
-          <a:off x="0" y="0"/>
-          <a:ext cx="0" cy="0"/>
-          <a:chOff x="0" y="0"/>
-          <a:chExt cx="0" cy="0"/>
-        </a:xfrm>
-      </p:grpSpPr>
-      <p:sp>
-        <p:nvSpPr>
-          <p:cNvPr id="2" name="Text 0"/>
-          <p:cNvSpPr/>
-          <p:nvPr/>
-        </p:nvSpPr>
-        <p:spPr>
-          <a:xfrm>
-            <a:off x="457200" y="713232"/>
-            <a:ext cx="11368735" cy="274320"/>
-          </a:xfrm>
-          <a:prstGeom prst="rect">
-            <a:avLst/>
-          </a:prstGeom>
-          <a:noFill/>
-          <a:ln/>
-        </p:spPr>
-        <p:txBody>
-          <a:bodyPr wrap="square" lIns="0" tIns="0" rIns="0" bIns="0" rtlCol="0" anchor="ctr"/>
-          <a:lstStyle/>
-          <a:p>
-            <a:pPr algn="r" indent="0" marL="0">
-              <a:buNone/>
-            </a:pPr>
-            <a:r>
-              <a:rPr lang="en-US" sz="1400" b="1" dirty="0">
-                <a:solidFill>
-                  <a:srgbClr val="1C3F6E"/>
-                </a:solidFill>
-                <a:latin typeface="Calibri" pitchFamily="34" charset="0"/>
-                <a:ea typeface="Calibri" pitchFamily="34" charset="-122"/>
-                <a:cs typeface="Calibri" pitchFamily="34" charset="-120"/>
-              </a:rPr>
               <a:t>BILINGUAL GAME</a:t>
             </a:r>
             <a:endParaRPr lang="en-US" sz="1400" dirty="0"/>
@@ -17426,7 +17138,7 @@
       </p:sp>
       <p:graphicFrame>
         <p:nvGraphicFramePr>
-          <p:cNvPr id="50" name="Table 0"/>
+          <p:cNvPr id="49" name="Table 0"/>
           <p:cNvGraphicFramePr>
             <a:graphicFrameLocks noGrp="1"/>
           </p:cNvGraphicFramePr>
@@ -18738,7 +18450,7 @@
             <a:pPr algn="ctr"/>
             <a:fld id="{F7021451-1387-4CA6-816F-3879F97B5CBC}" type="slidenum">
               <a:rPr b="1" lang="en-US"/>
-              <a:t>49</a:t>
+              <a:t>48</a:t>
             </a:fld>
             <a:endParaRPr lang="en-US"/>
           </a:p>
@@ -18752,9 +18464,9 @@
 </p:sld>
 </file>
 
-<file path=ppt/slides/slide5.xml><?xml version="1.0" encoding="utf-8"?>
+<file path=ppt/slides/slide49.xml><?xml version="1.0" encoding="utf-8"?>
 <p:sld xmlns:a="http://schemas.openxmlformats.org/drawingml/2006/main" xmlns:r="http://schemas.openxmlformats.org/officeDocument/2006/relationships" xmlns:p="http://schemas.openxmlformats.org/presentationml/2006/main">
-  <p:cSld name="Slide 5">
+  <p:cSld name="Slide 49">
     <p:spTree>
       <p:nvGrpSpPr>
         <p:cNvPr id="1" name=""/>
@@ -18802,225 +18514,6 @@
                 <a:ea typeface="Calibri" pitchFamily="34" charset="-122"/>
                 <a:cs typeface="Calibri" pitchFamily="34" charset="-120"/>
               </a:rPr>
-              <a:t>HOMEWORK CORRECTION</a:t>
-            </a:r>
-            <a:endParaRPr lang="en-US" sz="1400" dirty="0"/>
-          </a:p>
-        </p:txBody>
-      </p:sp>
-      <p:pic>
-        <p:nvPicPr>
-          <p:cNvPr id="3" name="Image 0" descr="/home/claude/f4/img/minesec_sheet.png">    </p:cNvPr>
-          <p:cNvPicPr>
-            <a:picLocks noChangeAspect="1"/>
-          </p:cNvPicPr>
-          <p:nvPr/>
-        </p:nvPicPr>
-        <p:blipFill>
-          <a:blip r:embed="rId1"/>
-          <a:stretch>
-            <a:fillRect/>
-          </a:stretch>
-        </p:blipFill>
-        <p:spPr>
-          <a:xfrm>
-            <a:off x="0" y="658368"/>
-            <a:ext cx="5120640" cy="5833872"/>
-          </a:xfrm>
-          <a:prstGeom prst="rect">
-            <a:avLst/>
-          </a:prstGeom>
-        </p:spPr>
-      </p:pic>
-      <p:sp>
-        <p:nvSpPr>
-          <p:cNvPr id="4" name="Text 1"/>
-          <p:cNvSpPr/>
-          <p:nvPr/>
-        </p:nvSpPr>
-        <p:spPr>
-          <a:xfrm>
-            <a:off x="5349240" y="1005840"/>
-            <a:ext cx="6522415" cy="731520"/>
-          </a:xfrm>
-          <a:prstGeom prst="rect">
-            <a:avLst/>
-          </a:prstGeom>
-          <a:noFill/>
-          <a:ln/>
-        </p:spPr>
-        <p:txBody>
-          <a:bodyPr wrap="square" lIns="0" tIns="0" rIns="0" bIns="0" rtlCol="0" anchor="ctr">
-            <a:normAutofit/>
-          </a:bodyPr>
-          <a:lstStyle/>
-          <a:p>
-            <a:pPr algn="ctr" indent="0" marL="0">
-              <a:buNone/>
-            </a:pPr>
-            <a:r>
-              <a:rPr lang="en-US" sz="3600" b="1" dirty="0">
-                <a:solidFill>
-                  <a:srgbClr val="990011"/>
-                </a:solidFill>
-                <a:latin typeface="Times New Roman" pitchFamily="34" charset="0"/>
-                <a:ea typeface="Times New Roman" pitchFamily="34" charset="-122"/>
-                <a:cs typeface="Times New Roman" pitchFamily="34" charset="-120"/>
-              </a:rPr>
-              <a:t>Correction of the Homework (continued)</a:t>
-            </a:r>
-            <a:endParaRPr lang="en-US" sz="3600" dirty="0"/>
-          </a:p>
-        </p:txBody>
-      </p:sp>
-      <p:sp>
-        <p:nvSpPr>
-          <p:cNvPr id="5" name="Text 2"/>
-          <p:cNvSpPr/>
-          <p:nvPr/>
-        </p:nvSpPr>
-        <p:spPr>
-          <a:xfrm>
-            <a:off x="5349240" y="1783080"/>
-            <a:ext cx="6522415" cy="4663440"/>
-          </a:xfrm>
-          <a:prstGeom prst="rect">
-            <a:avLst/>
-          </a:prstGeom>
-          <a:noFill/>
-          <a:ln/>
-        </p:spPr>
-        <p:txBody>
-          <a:bodyPr wrap="square" lIns="0" tIns="0" rIns="0" bIns="0" rtlCol="0" anchor="t"/>
-          <a:lstStyle/>
-          <a:p>
-            <a:pPr algn="l" indent="0" marL="0">
-              <a:spcAft>
-                <a:spcPts val="800"/>
-              </a:spcAft>
-              <a:buNone/>
-            </a:pPr>
-            <a:r>
-              <a:rPr lang="en-US" sz="4000" dirty="0">
-                <a:solidFill>
-                  <a:srgbClr val="111111"/>
-                </a:solidFill>
-                <a:latin typeface="Times New Roman" pitchFamily="34" charset="0"/>
-                <a:ea typeface="Times New Roman" pitchFamily="34" charset="-122"/>
-                <a:cs typeface="Times New Roman" pitchFamily="34" charset="-120"/>
-              </a:rPr>
-              <a:t>Observe two workers in your area: one who works for a registered company and one who works alone in the street (for example a moto-taxi driver). Write one difference between them.</a:t>
-            </a:r>
-            <a:endParaRPr lang="en-US" sz="4000" dirty="0"/>
-          </a:p>
-        </p:txBody>
-      </p:sp>
-      <p:sp>
-        <p:nvSpPr>
-          <p:cNvPr id="25" name="Slide Number Placeholder 0"/>
-          <p:cNvSpPr>
-            <a:spLocks noGrp="1"/>
-          </p:cNvSpPr>
-          <p:nvPr>
-            <p:ph type="sldNum" sz="quarter" idx="4294967295"/>
-          </p:nvPr>
-        </p:nvSpPr>
-        <p:spPr>
-          <a:xfrm>
-            <a:off x="27432" y="91440"/>
-            <a:ext cx="585216" cy="475488"/>
-          </a:xfrm>
-          <a:prstGeom prst="rect">
-            <a:avLst/>
-          </a:prstGeom>
-          <a:extLst>
-            <a:ext uri="{C572A759-6A51-4108-AA02-DFA0A04FC94B}">
-              <ma14:wrappingTextBoxFlag xmlns:ma14="http://schemas.microsoft.com/office/mac/drawingml/2011/main" val="0"/>
-            </a:ext>
-          </a:extLst>
-        </p:spPr>
-        <p:txBody>
-          <a:bodyPr/>
-          <a:lstStyle>
-            <a:lvl1pPr>
-              <a:defRPr sz="2000">
-                <a:solidFill>
-                  <a:srgbClr val="FFFFFF"/>
-                </a:solidFill>
-                <a:latin typeface="Calibri"/>
-                <a:ea typeface="Calibri"/>
-                <a:cs typeface="Calibri"/>
-              </a:defRPr>
-            </a:lvl1pPr>
-          </a:lstStyle>
-          <a:p>
-            <a:pPr algn="ctr"/>
-            <a:fld id="{F7021451-1387-4CA6-816F-3879F97B5CBC}" type="slidenum">
-              <a:rPr b="1" lang="en-US"/>
-              <a:t>5</a:t>
-            </a:fld>
-            <a:endParaRPr lang="en-US"/>
-          </a:p>
-        </p:txBody>
-      </p:sp>
-    </p:spTree>
-  </p:cSld>
-  <p:clrMapOvr>
-    <a:masterClrMapping/>
-  </p:clrMapOvr>
-</p:sld>
-</file>
-
-<file path=ppt/slides/slide50.xml><?xml version="1.0" encoding="utf-8"?>
-<p:sld xmlns:a="http://schemas.openxmlformats.org/drawingml/2006/main" xmlns:r="http://schemas.openxmlformats.org/officeDocument/2006/relationships" xmlns:p="http://schemas.openxmlformats.org/presentationml/2006/main">
-  <p:cSld name="Slide 50">
-    <p:spTree>
-      <p:nvGrpSpPr>
-        <p:cNvPr id="1" name=""/>
-        <p:cNvGrpSpPr/>
-        <p:nvPr/>
-      </p:nvGrpSpPr>
-      <p:grpSpPr>
-        <a:xfrm>
-          <a:off x="0" y="0"/>
-          <a:ext cx="0" cy="0"/>
-          <a:chOff x="0" y="0"/>
-          <a:chExt cx="0" cy="0"/>
-        </a:xfrm>
-      </p:grpSpPr>
-      <p:sp>
-        <p:nvSpPr>
-          <p:cNvPr id="2" name="Text 0"/>
-          <p:cNvSpPr/>
-          <p:nvPr/>
-        </p:nvSpPr>
-        <p:spPr>
-          <a:xfrm>
-            <a:off x="457200" y="713232"/>
-            <a:ext cx="11368735" cy="274320"/>
-          </a:xfrm>
-          <a:prstGeom prst="rect">
-            <a:avLst/>
-          </a:prstGeom>
-          <a:noFill/>
-          <a:ln/>
-        </p:spPr>
-        <p:txBody>
-          <a:bodyPr wrap="square" lIns="0" tIns="0" rIns="0" bIns="0" rtlCol="0" anchor="ctr"/>
-          <a:lstStyle/>
-          <a:p>
-            <a:pPr algn="r" indent="0" marL="0">
-              <a:buNone/>
-            </a:pPr>
-            <a:r>
-              <a:rPr lang="en-US" sz="1400" b="1" dirty="0">
-                <a:solidFill>
-                  <a:srgbClr val="1C3F6E"/>
-                </a:solidFill>
-                <a:latin typeface="Calibri" pitchFamily="34" charset="0"/>
-                <a:ea typeface="Calibri" pitchFamily="34" charset="-122"/>
-                <a:cs typeface="Calibri" pitchFamily="34" charset="-120"/>
-              </a:rPr>
               <a:t>LOGBOOK</a:t>
             </a:r>
             <a:endParaRPr lang="en-US" sz="1400" dirty="0"/>
@@ -19068,7 +18561,7 @@
       </p:sp>
       <p:graphicFrame>
         <p:nvGraphicFramePr>
-          <p:cNvPr id="51" name="Table 0"/>
+          <p:cNvPr id="50" name="Table 0"/>
           <p:cNvGraphicFramePr>
             <a:graphicFrameLocks noGrp="1"/>
           </p:cNvGraphicFramePr>
@@ -19690,7 +19183,7 @@
             <a:pPr algn="ctr"/>
             <a:fld id="{F7021451-1387-4CA6-816F-3879F97B5CBC}" type="slidenum">
               <a:rPr b="1" lang="en-US"/>
-              <a:t>50</a:t>
+              <a:t>49</a:t>
             </a:fld>
             <a:endParaRPr lang="en-US"/>
           </a:p>
@@ -19704,9 +19197,9 @@
 </p:sld>
 </file>
 
-<file path=ppt/slides/slide51.xml><?xml version="1.0" encoding="utf-8"?>
+<file path=ppt/slides/slide5.xml><?xml version="1.0" encoding="utf-8"?>
 <p:sld xmlns:a="http://schemas.openxmlformats.org/drawingml/2006/main" xmlns:r="http://schemas.openxmlformats.org/officeDocument/2006/relationships" xmlns:p="http://schemas.openxmlformats.org/presentationml/2006/main">
-  <p:cSld name="Slide 51">
+  <p:cSld name="Slide 5">
     <p:spTree>
       <p:nvGrpSpPr>
         <p:cNvPr id="1" name=""/>
@@ -19754,6 +19247,225 @@
                 <a:ea typeface="Calibri" pitchFamily="34" charset="-122"/>
                 <a:cs typeface="Calibri" pitchFamily="34" charset="-120"/>
               </a:rPr>
+              <a:t>HOMEWORK CORRECTION</a:t>
+            </a:r>
+            <a:endParaRPr lang="en-US" sz="1400" dirty="0"/>
+          </a:p>
+        </p:txBody>
+      </p:sp>
+      <p:pic>
+        <p:nvPicPr>
+          <p:cNvPr id="3" name="Image 0" descr="/home/claude/f4/img/minesec_sheet.png">    </p:cNvPr>
+          <p:cNvPicPr>
+            <a:picLocks noChangeAspect="1"/>
+          </p:cNvPicPr>
+          <p:nvPr/>
+        </p:nvPicPr>
+        <p:blipFill>
+          <a:blip r:embed="rId1"/>
+          <a:stretch>
+            <a:fillRect/>
+          </a:stretch>
+        </p:blipFill>
+        <p:spPr>
+          <a:xfrm>
+            <a:off x="0" y="658368"/>
+            <a:ext cx="5120640" cy="5833872"/>
+          </a:xfrm>
+          <a:prstGeom prst="rect">
+            <a:avLst/>
+          </a:prstGeom>
+        </p:spPr>
+      </p:pic>
+      <p:sp>
+        <p:nvSpPr>
+          <p:cNvPr id="4" name="Text 1"/>
+          <p:cNvSpPr/>
+          <p:nvPr/>
+        </p:nvSpPr>
+        <p:spPr>
+          <a:xfrm>
+            <a:off x="5349240" y="1005840"/>
+            <a:ext cx="6522415" cy="731520"/>
+          </a:xfrm>
+          <a:prstGeom prst="rect">
+            <a:avLst/>
+          </a:prstGeom>
+          <a:noFill/>
+          <a:ln/>
+        </p:spPr>
+        <p:txBody>
+          <a:bodyPr wrap="square" lIns="0" tIns="0" rIns="0" bIns="0" rtlCol="0" anchor="ctr">
+            <a:normAutofit/>
+          </a:bodyPr>
+          <a:lstStyle/>
+          <a:p>
+            <a:pPr algn="ctr" indent="0" marL="0">
+              <a:buNone/>
+            </a:pPr>
+            <a:r>
+              <a:rPr lang="en-US" sz="3600" b="1" dirty="0">
+                <a:solidFill>
+                  <a:srgbClr val="990011"/>
+                </a:solidFill>
+                <a:latin typeface="Times New Roman" pitchFamily="34" charset="0"/>
+                <a:ea typeface="Times New Roman" pitchFamily="34" charset="-122"/>
+                <a:cs typeface="Times New Roman" pitchFamily="34" charset="-120"/>
+              </a:rPr>
+              <a:t>Correction: Possible Answer</a:t>
+            </a:r>
+            <a:endParaRPr lang="en-US" sz="3600" dirty="0"/>
+          </a:p>
+        </p:txBody>
+      </p:sp>
+      <p:sp>
+        <p:nvSpPr>
+          <p:cNvPr id="5" name="Text 2"/>
+          <p:cNvSpPr/>
+          <p:nvPr/>
+        </p:nvSpPr>
+        <p:spPr>
+          <a:xfrm>
+            <a:off x="5349240" y="1783080"/>
+            <a:ext cx="6522415" cy="4663440"/>
+          </a:xfrm>
+          <a:prstGeom prst="rect">
+            <a:avLst/>
+          </a:prstGeom>
+          <a:noFill/>
+          <a:ln/>
+        </p:spPr>
+        <p:txBody>
+          <a:bodyPr wrap="square" lIns="0" tIns="0" rIns="0" bIns="0" rtlCol="0" anchor="t"/>
+          <a:lstStyle/>
+          <a:p>
+            <a:pPr algn="l" indent="0" marL="0">
+              <a:spcAft>
+                <a:spcPts val="800"/>
+              </a:spcAft>
+              <a:buNone/>
+            </a:pPr>
+            <a:r>
+              <a:rPr lang="en-US" sz="4000" dirty="0">
+                <a:solidFill>
+                  <a:srgbClr val="111111"/>
+                </a:solidFill>
+                <a:latin typeface="Times New Roman" pitchFamily="34" charset="0"/>
+                <a:ea typeface="Times New Roman" pitchFamily="34" charset="-122"/>
+                <a:cs typeface="Times New Roman" pitchFamily="34" charset="-120"/>
+              </a:rPr>
+              <a:t>The formal sector and the informal sector.</a:t>
+            </a:r>
+            <a:endParaRPr lang="en-US" sz="4000" dirty="0"/>
+          </a:p>
+        </p:txBody>
+      </p:sp>
+      <p:sp>
+        <p:nvSpPr>
+          <p:cNvPr id="25" name="Slide Number Placeholder 0"/>
+          <p:cNvSpPr>
+            <a:spLocks noGrp="1"/>
+          </p:cNvSpPr>
+          <p:nvPr>
+            <p:ph type="sldNum" sz="quarter" idx="4294967295"/>
+          </p:nvPr>
+        </p:nvSpPr>
+        <p:spPr>
+          <a:xfrm>
+            <a:off x="27432" y="91440"/>
+            <a:ext cx="585216" cy="475488"/>
+          </a:xfrm>
+          <a:prstGeom prst="rect">
+            <a:avLst/>
+          </a:prstGeom>
+          <a:extLst>
+            <a:ext uri="{C572A759-6A51-4108-AA02-DFA0A04FC94B}">
+              <ma14:wrappingTextBoxFlag xmlns:ma14="http://schemas.microsoft.com/office/mac/drawingml/2011/main" val="0"/>
+            </a:ext>
+          </a:extLst>
+        </p:spPr>
+        <p:txBody>
+          <a:bodyPr/>
+          <a:lstStyle>
+            <a:lvl1pPr>
+              <a:defRPr sz="2000">
+                <a:solidFill>
+                  <a:srgbClr val="FFFFFF"/>
+                </a:solidFill>
+                <a:latin typeface="Calibri"/>
+                <a:ea typeface="Calibri"/>
+                <a:cs typeface="Calibri"/>
+              </a:defRPr>
+            </a:lvl1pPr>
+          </a:lstStyle>
+          <a:p>
+            <a:pPr algn="ctr"/>
+            <a:fld id="{F7021451-1387-4CA6-816F-3879F97B5CBC}" type="slidenum">
+              <a:rPr b="1" lang="en-US"/>
+              <a:t>5</a:t>
+            </a:fld>
+            <a:endParaRPr lang="en-US"/>
+          </a:p>
+        </p:txBody>
+      </p:sp>
+    </p:spTree>
+  </p:cSld>
+  <p:clrMapOvr>
+    <a:masterClrMapping/>
+  </p:clrMapOvr>
+</p:sld>
+</file>
+
+<file path=ppt/slides/slide50.xml><?xml version="1.0" encoding="utf-8"?>
+<p:sld xmlns:a="http://schemas.openxmlformats.org/drawingml/2006/main" xmlns:r="http://schemas.openxmlformats.org/officeDocument/2006/relationships" xmlns:p="http://schemas.openxmlformats.org/presentationml/2006/main">
+  <p:cSld name="Slide 50">
+    <p:spTree>
+      <p:nvGrpSpPr>
+        <p:cNvPr id="1" name=""/>
+        <p:cNvGrpSpPr/>
+        <p:nvPr/>
+      </p:nvGrpSpPr>
+      <p:grpSpPr>
+        <a:xfrm>
+          <a:off x="0" y="0"/>
+          <a:ext cx="0" cy="0"/>
+          <a:chOff x="0" y="0"/>
+          <a:chExt cx="0" cy="0"/>
+        </a:xfrm>
+      </p:grpSpPr>
+      <p:sp>
+        <p:nvSpPr>
+          <p:cNvPr id="2" name="Text 0"/>
+          <p:cNvSpPr/>
+          <p:nvPr/>
+        </p:nvSpPr>
+        <p:spPr>
+          <a:xfrm>
+            <a:off x="457200" y="713232"/>
+            <a:ext cx="11368735" cy="274320"/>
+          </a:xfrm>
+          <a:prstGeom prst="rect">
+            <a:avLst/>
+          </a:prstGeom>
+          <a:noFill/>
+          <a:ln/>
+        </p:spPr>
+        <p:txBody>
+          <a:bodyPr wrap="square" lIns="0" tIns="0" rIns="0" bIns="0" rtlCol="0" anchor="ctr"/>
+          <a:lstStyle/>
+          <a:p>
+            <a:pPr algn="r" indent="0" marL="0">
+              <a:buNone/>
+            </a:pPr>
+            <a:r>
+              <a:rPr lang="en-US" sz="1400" b="1" dirty="0">
+                <a:solidFill>
+                  <a:srgbClr val="1C3F6E"/>
+                </a:solidFill>
+                <a:latin typeface="Calibri" pitchFamily="34" charset="0"/>
+                <a:ea typeface="Calibri" pitchFamily="34" charset="-122"/>
+                <a:cs typeface="Calibri" pitchFamily="34" charset="-120"/>
+              </a:rPr>
               <a:t>LOGBOOK</a:t>
             </a:r>
             <a:endParaRPr lang="en-US" sz="1400" dirty="0"/>
@@ -19801,7 +19513,7 @@
       </p:sp>
       <p:graphicFrame>
         <p:nvGraphicFramePr>
-          <p:cNvPr id="52" name="Table 0"/>
+          <p:cNvPr id="51" name="Table 0"/>
           <p:cNvGraphicFramePr>
             <a:graphicFrameLocks noGrp="1"/>
           </p:cNvGraphicFramePr>
@@ -20187,7 +19899,7 @@
                           <a:ea typeface="Calibri" pitchFamily="34" charset="-122"/>
                           <a:cs typeface="Calibri" pitchFamily="34" charset="-120"/>
                         </a:rPr>
-                        <a:t>List four products of farming, fishing, forestry or mining found in the Garoua market, and say where each comes from.</a:t>
+                        <a:t>Give three primary activities.</a:t>
                       </a:r>
                       <a:endParaRPr lang="en-US" sz="1600" dirty="0">
                         <a:latin typeface="Calibri" charset="0"/>
@@ -20561,6 +20273,352 @@
             <a:pPr algn="ctr"/>
             <a:fld id="{F7021451-1387-4CA6-816F-3879F97B5CBC}" type="slidenum">
               <a:rPr b="1" lang="en-US"/>
+              <a:t>50</a:t>
+            </a:fld>
+            <a:endParaRPr lang="en-US"/>
+          </a:p>
+        </p:txBody>
+      </p:sp>
+    </p:spTree>
+  </p:cSld>
+  <p:clrMapOvr>
+    <a:masterClrMapping/>
+  </p:clrMapOvr>
+</p:sld>
+</file>
+
+<file path=ppt/slides/slide51.xml><?xml version="1.0" encoding="utf-8"?>
+<p:sld xmlns:a="http://schemas.openxmlformats.org/drawingml/2006/main" xmlns:r="http://schemas.openxmlformats.org/officeDocument/2006/relationships" xmlns:p="http://schemas.openxmlformats.org/presentationml/2006/main">
+  <p:cSld name="Slide 51">
+    <p:spTree>
+      <p:nvGrpSpPr>
+        <p:cNvPr id="1" name=""/>
+        <p:cNvGrpSpPr/>
+        <p:nvPr/>
+      </p:nvGrpSpPr>
+      <p:grpSpPr>
+        <a:xfrm>
+          <a:off x="0" y="0"/>
+          <a:ext cx="0" cy="0"/>
+          <a:chOff x="0" y="0"/>
+          <a:chExt cx="0" cy="0"/>
+        </a:xfrm>
+      </p:grpSpPr>
+      <p:sp>
+        <p:nvSpPr>
+          <p:cNvPr id="2" name="Text 0"/>
+          <p:cNvSpPr/>
+          <p:nvPr/>
+        </p:nvSpPr>
+        <p:spPr>
+          <a:xfrm>
+            <a:off x="457200" y="713232"/>
+            <a:ext cx="11368735" cy="274320"/>
+          </a:xfrm>
+          <a:prstGeom prst="rect">
+            <a:avLst/>
+          </a:prstGeom>
+          <a:noFill/>
+          <a:ln/>
+        </p:spPr>
+        <p:txBody>
+          <a:bodyPr wrap="square" lIns="0" tIns="0" rIns="0" bIns="0" rtlCol="0" anchor="ctr"/>
+          <a:lstStyle/>
+          <a:p>
+            <a:pPr algn="r" indent="0" marL="0">
+              <a:buNone/>
+            </a:pPr>
+            <a:r>
+              <a:rPr lang="en-US" sz="1400" b="1" dirty="0">
+                <a:solidFill>
+                  <a:srgbClr val="1C3F6E"/>
+                </a:solidFill>
+                <a:latin typeface="Calibri" pitchFamily="34" charset="0"/>
+                <a:ea typeface="Calibri" pitchFamily="34" charset="-122"/>
+                <a:cs typeface="Calibri" pitchFamily="34" charset="-120"/>
+              </a:rPr>
+              <a:t>TEACHER'S NOTE</a:t>
+            </a:r>
+            <a:endParaRPr lang="en-US" sz="1400" dirty="0"/>
+          </a:p>
+        </p:txBody>
+      </p:sp>
+      <p:pic>
+        <p:nvPicPr>
+          <p:cNvPr id="3" name="Image 0" descr="/home/claude/f4/img/minesec_sheet.png">    </p:cNvPr>
+          <p:cNvPicPr>
+            <a:picLocks noChangeAspect="1"/>
+          </p:cNvPicPr>
+          <p:nvPr/>
+        </p:nvPicPr>
+        <p:blipFill>
+          <a:blip r:embed="rId1"/>
+          <a:stretch>
+            <a:fillRect/>
+          </a:stretch>
+        </p:blipFill>
+        <p:spPr>
+          <a:xfrm>
+            <a:off x="0" y="658368"/>
+            <a:ext cx="2468880" cy="5833872"/>
+          </a:xfrm>
+          <a:prstGeom prst="rect">
+            <a:avLst/>
+          </a:prstGeom>
+        </p:spPr>
+      </p:pic>
+      <p:sp>
+        <p:nvSpPr>
+          <p:cNvPr id="4" name="Text 1"/>
+          <p:cNvSpPr/>
+          <p:nvPr/>
+        </p:nvSpPr>
+        <p:spPr>
+          <a:xfrm>
+            <a:off x="2697480" y="1005840"/>
+            <a:ext cx="9174175" cy="731520"/>
+          </a:xfrm>
+          <a:prstGeom prst="rect">
+            <a:avLst/>
+          </a:prstGeom>
+          <a:noFill/>
+          <a:ln/>
+        </p:spPr>
+        <p:txBody>
+          <a:bodyPr wrap="square" lIns="0" tIns="0" rIns="0" bIns="0" rtlCol="0" anchor="ctr">
+            <a:normAutofit/>
+          </a:bodyPr>
+          <a:lstStyle/>
+          <a:p>
+            <a:pPr algn="ctr" indent="0" marL="0">
+              <a:buNone/>
+            </a:pPr>
+            <a:r>
+              <a:rPr lang="en-US" sz="3600" b="1" dirty="0">
+                <a:solidFill>
+                  <a:srgbClr val="990011"/>
+                </a:solidFill>
+                <a:latin typeface="Times New Roman" pitchFamily="34" charset="0"/>
+                <a:ea typeface="Times New Roman" pitchFamily="34" charset="-122"/>
+                <a:cs typeface="Times New Roman" pitchFamily="34" charset="-120"/>
+              </a:rPr>
+              <a:t>Teacher's Note</a:t>
+            </a:r>
+            <a:endParaRPr lang="en-US" sz="3600" dirty="0"/>
+          </a:p>
+        </p:txBody>
+      </p:sp>
+      <p:sp>
+        <p:nvSpPr>
+          <p:cNvPr id="5" name="Text 2"/>
+          <p:cNvSpPr/>
+          <p:nvPr/>
+        </p:nvSpPr>
+        <p:spPr>
+          <a:xfrm>
+            <a:off x="2697480" y="1783080"/>
+            <a:ext cx="9174175" cy="4663440"/>
+          </a:xfrm>
+          <a:prstGeom prst="rect">
+            <a:avLst/>
+          </a:prstGeom>
+          <a:noFill/>
+          <a:ln/>
+        </p:spPr>
+        <p:txBody>
+          <a:bodyPr wrap="square" lIns="0" tIns="0" rIns="0" bIns="0" rtlCol="0" anchor="t"/>
+          <a:lstStyle/>
+          <a:p>
+            <a:pPr algn="l" marL="342900" indent="-342900">
+              <a:spcAft>
+                <a:spcPts val="800"/>
+              </a:spcAft>
+              <a:buSzPct val="100000"/>
+              <a:buChar char="•"/>
+            </a:pPr>
+            <a:r>
+              <a:rPr lang="en-US" sz="2000" dirty="0">
+                <a:solidFill>
+                  <a:srgbClr val="111111"/>
+                </a:solidFill>
+                <a:latin typeface="Calibri" pitchFamily="34" charset="0"/>
+                <a:ea typeface="Calibri" pitchFamily="34" charset="-122"/>
+                <a:cs typeface="Calibri" pitchFamily="34" charset="-120"/>
+              </a:rPr>
+              <a:t>Timing: Homework correction, plan, objectives 8 min | Recall, situation, action 10 min | 5 activities 30 min | Board summary (copying) 30 min | Evaluation, remediation 10 min | Homework, next lesson 5 min | Logbook 7 min</a:t>
+            </a:r>
+            <a:endParaRPr lang="en-US" sz="2000" dirty="0"/>
+          </a:p>
+          <a:p>
+            <a:pPr algn="l" marL="342900" indent="-342900">
+              <a:spcAft>
+                <a:spcPts val="800"/>
+              </a:spcAft>
+              <a:buSzPct val="100000"/>
+              <a:buChar char="•"/>
+            </a:pPr>
+            <a:r>
+              <a:rPr lang="en-US" sz="2000" dirty="0">
+                <a:solidFill>
+                  <a:srgbClr val="111111"/>
+                </a:solidFill>
+                <a:latin typeface="Calibri" pitchFamily="34" charset="0"/>
+                <a:ea typeface="Calibri" pitchFamily="34" charset="-122"/>
+                <a:cs typeface="Calibri" pitchFamily="34" charset="-120"/>
+              </a:rPr>
+              <a:t>CNPS: Caisse Nationale de Prévoyance Sociale (national social insurance fund). About 9 workers out of 10 in Cameroon work in the informal sector.</a:t>
+            </a:r>
+            <a:endParaRPr lang="en-US" sz="2000" dirty="0"/>
+          </a:p>
+          <a:p>
+            <a:pPr algn="l" marL="342900" indent="-342900">
+              <a:spcAft>
+                <a:spcPts val="800"/>
+              </a:spcAft>
+              <a:buSzPct val="100000"/>
+              <a:buChar char="•"/>
+            </a:pPr>
+            <a:r>
+              <a:rPr lang="en-US" sz="2000" dirty="0">
+                <a:solidFill>
+                  <a:srgbClr val="111111"/>
+                </a:solidFill>
+                <a:latin typeface="Calibri" pitchFamily="34" charset="0"/>
+                <a:ea typeface="Calibri" pitchFamily="34" charset="-122"/>
+                <a:cs typeface="Calibri" pitchFamily="34" charset="-120"/>
+              </a:rPr>
+              <a:t>Without the projector (Activity 1): name registered companies in Garoua.</a:t>
+            </a:r>
+            <a:endParaRPr lang="en-US" sz="2000" dirty="0"/>
+          </a:p>
+          <a:p>
+            <a:pPr algn="l" marL="342900" indent="-342900">
+              <a:spcAft>
+                <a:spcPts val="800"/>
+              </a:spcAft>
+              <a:buSzPct val="100000"/>
+              <a:buChar char="•"/>
+            </a:pPr>
+            <a:r>
+              <a:rPr lang="en-US" sz="2000" dirty="0">
+                <a:solidFill>
+                  <a:srgbClr val="111111"/>
+                </a:solidFill>
+                <a:latin typeface="Calibri" pitchFamily="34" charset="0"/>
+                <a:ea typeface="Calibri" pitchFamily="34" charset="-122"/>
+                <a:cs typeface="Calibri" pitchFamily="34" charset="-120"/>
+              </a:rPr>
+              <a:t>Without the projector (Activity 2): ask about a salary.</a:t>
+            </a:r>
+            <a:endParaRPr lang="en-US" sz="2000" dirty="0"/>
+          </a:p>
+          <a:p>
+            <a:pPr algn="l" marL="342900" indent="-342900">
+              <a:spcAft>
+                <a:spcPts val="800"/>
+              </a:spcAft>
+              <a:buSzPct val="100000"/>
+              <a:buChar char="•"/>
+            </a:pPr>
+            <a:r>
+              <a:rPr lang="en-US" sz="2000" dirty="0">
+                <a:solidFill>
+                  <a:srgbClr val="111111"/>
+                </a:solidFill>
+                <a:latin typeface="Calibri" pitchFamily="34" charset="0"/>
+                <a:ea typeface="Calibri" pitchFamily="34" charset="-122"/>
+                <a:cs typeface="Calibri" pitchFamily="34" charset="-120"/>
+              </a:rPr>
+              <a:t>Without the projector (Activity 3): count moto-taxis.</a:t>
+            </a:r>
+            <a:endParaRPr lang="en-US" sz="2000" dirty="0"/>
+          </a:p>
+          <a:p>
+            <a:pPr algn="l" marL="342900" indent="-342900">
+              <a:spcAft>
+                <a:spcPts val="800"/>
+              </a:spcAft>
+              <a:buSzPct val="100000"/>
+              <a:buChar char="•"/>
+            </a:pPr>
+            <a:r>
+              <a:rPr lang="en-US" sz="2000" dirty="0">
+                <a:solidFill>
+                  <a:srgbClr val="111111"/>
+                </a:solidFill>
+                <a:latin typeface="Calibri" pitchFamily="34" charset="0"/>
+                <a:ea typeface="Calibri" pitchFamily="34" charset="-122"/>
+                <a:cs typeface="Calibri" pitchFamily="34" charset="-120"/>
+              </a:rPr>
+              <a:t>Without the projector (Activity 4): list small trades.</a:t>
+            </a:r>
+            <a:endParaRPr lang="en-US" sz="2000" dirty="0"/>
+          </a:p>
+          <a:p>
+            <a:pPr algn="l" marL="342900" indent="-342900">
+              <a:spcAft>
+                <a:spcPts val="800"/>
+              </a:spcAft>
+              <a:buSzPct val="100000"/>
+              <a:buChar char="•"/>
+            </a:pPr>
+            <a:r>
+              <a:rPr lang="en-US" sz="2000" dirty="0">
+                <a:solidFill>
+                  <a:srgbClr val="111111"/>
+                </a:solidFill>
+                <a:latin typeface="Calibri" pitchFamily="34" charset="0"/>
+                <a:ea typeface="Calibri" pitchFamily="34" charset="-122"/>
+                <a:cs typeface="Calibri" pitchFamily="34" charset="-120"/>
+              </a:rPr>
+              <a:t>Without the projector (Activity 5): draw two columns.</a:t>
+            </a:r>
+            <a:endParaRPr lang="en-US" sz="2000" dirty="0"/>
+          </a:p>
+        </p:txBody>
+      </p:sp>
+      <p:sp>
+        <p:nvSpPr>
+          <p:cNvPr id="25" name="Slide Number Placeholder 0"/>
+          <p:cNvSpPr>
+            <a:spLocks noGrp="1"/>
+          </p:cNvSpPr>
+          <p:nvPr>
+            <p:ph type="sldNum" sz="quarter" idx="4294967295"/>
+          </p:nvPr>
+        </p:nvSpPr>
+        <p:spPr>
+          <a:xfrm>
+            <a:off x="27432" y="91440"/>
+            <a:ext cx="585216" cy="475488"/>
+          </a:xfrm>
+          <a:prstGeom prst="rect">
+            <a:avLst/>
+          </a:prstGeom>
+          <a:extLst>
+            <a:ext uri="{C572A759-6A51-4108-AA02-DFA0A04FC94B}">
+              <ma14:wrappingTextBoxFlag xmlns:ma14="http://schemas.microsoft.com/office/mac/drawingml/2011/main" val="0"/>
+            </a:ext>
+          </a:extLst>
+        </p:spPr>
+        <p:txBody>
+          <a:bodyPr/>
+          <a:lstStyle>
+            <a:lvl1pPr>
+              <a:defRPr sz="2000">
+                <a:solidFill>
+                  <a:srgbClr val="FFFFFF"/>
+                </a:solidFill>
+                <a:latin typeface="Calibri"/>
+                <a:ea typeface="Calibri"/>
+                <a:cs typeface="Calibri"/>
+              </a:defRPr>
+            </a:lvl1pPr>
+          </a:lstStyle>
+          <a:p>
+            <a:pPr algn="ctr"/>
+            <a:fld id="{F7021451-1387-4CA6-816F-3879F97B5CBC}" type="slidenum">
+              <a:rPr b="1" lang="en-US"/>
               <a:t>51</a:t>
             </a:fld>
             <a:endParaRPr lang="en-US"/>
@@ -20625,7 +20683,7 @@
                 <a:ea typeface="Calibri" pitchFamily="34" charset="-122"/>
                 <a:cs typeface="Calibri" pitchFamily="34" charset="-120"/>
               </a:rPr>
-              <a:t>TEACHER'S NOTE</a:t>
+              <a:t>REFERENCES</a:t>
             </a:r>
             <a:endParaRPr lang="en-US" sz="1400" dirty="0"/>
           </a:p>
@@ -20690,7 +20748,7 @@
                 <a:ea typeface="Times New Roman" pitchFamily="34" charset="-122"/>
                 <a:cs typeface="Times New Roman" pitchFamily="34" charset="-120"/>
               </a:rPr>
-              <a:t>Teacher's Note</a:t>
+              <a:t>References</a:t>
             </a:r>
             <a:endParaRPr lang="en-US" sz="3600" dirty="0"/>
           </a:p>
@@ -20725,7 +20783,7 @@
               <a:buChar char="•"/>
             </a:pPr>
             <a:r>
-              <a:rPr lang="en-US" sz="2000" dirty="0">
+              <a:rPr lang="en-US" sz="1800" dirty="0">
                 <a:solidFill>
                   <a:srgbClr val="111111"/>
                 </a:solidFill>
@@ -20733,9 +20791,9 @@
                 <a:ea typeface="Calibri" pitchFamily="34" charset="-122"/>
                 <a:cs typeface="Calibri" pitchFamily="34" charset="-120"/>
               </a:rPr>
-              <a:t>Timing: Homework correction, plan, objectives 8 min | Recall, situation, action 10 min | 5 activities 30 min | Board summary (copying) 30 min | Evaluation, remediation 10 min | Homework, next lesson 5 min | Logbook 7 min</a:t>
-            </a:r>
-            <a:endParaRPr lang="en-US" sz="2000" dirty="0"/>
+              <a:t>Harmonised Progression Sheet, Economic Geography (5051), Form 2.</a:t>
+            </a:r>
+            <a:endParaRPr lang="en-US" sz="1800" dirty="0"/>
           </a:p>
           <a:p>
             <a:pPr algn="l" marL="342900" indent="-342900">
@@ -20746,7 +20804,7 @@
               <a:buChar char="•"/>
             </a:pPr>
             <a:r>
-              <a:rPr lang="en-US" sz="2000" dirty="0">
+              <a:rPr lang="en-US" sz="1800" dirty="0">
                 <a:solidFill>
                   <a:srgbClr val="111111"/>
                 </a:solidFill>
@@ -20754,9 +20812,9 @@
                 <a:ea typeface="Calibri" pitchFamily="34" charset="-122"/>
                 <a:cs typeface="Calibri" pitchFamily="34" charset="-120"/>
               </a:rPr>
-              <a:t>CNPS: Caisse Nationale de Prévoyance Sociale (national social insurance fund). About 9 workers out of 10 in Cameroon work in the informal sector.</a:t>
-            </a:r>
-            <a:endParaRPr lang="en-US" sz="2000" dirty="0"/>
+              <a:t>Institut National de la Statistique (INS), Enquêtes sur l'Emploi et le Secteur Informel (EESI).</a:t>
+            </a:r>
+            <a:endParaRPr lang="en-US" sz="1800" dirty="0"/>
           </a:p>
           <a:p>
             <a:pPr algn="l" marL="342900" indent="-342900">
@@ -20767,7 +20825,7 @@
               <a:buChar char="•"/>
             </a:pPr>
             <a:r>
-              <a:rPr lang="en-US" sz="2000" dirty="0">
+              <a:rPr lang="en-US" sz="1800" dirty="0">
                 <a:solidFill>
                   <a:srgbClr val="111111"/>
                 </a:solidFill>
@@ -20775,9 +20833,9 @@
                 <a:ea typeface="Calibri" pitchFamily="34" charset="-122"/>
                 <a:cs typeface="Calibri" pitchFamily="34" charset="-120"/>
               </a:rPr>
-              <a:t>Without the projector (Activity 1): name registered companies in Garoua.</a:t>
-            </a:r>
-            <a:endParaRPr lang="en-US" sz="2000" dirty="0"/>
+              <a:t>Photo, Activity 1: “Thibault Square, Cape Town” by World Bank Photo Collection, CC BY-NC-ND 2.0, via Flickr (https://www.flickr.com/photos/10816734@N03/7825576852)</a:t>
+            </a:r>
+            <a:endParaRPr lang="en-US" sz="1800" dirty="0"/>
           </a:p>
           <a:p>
             <a:pPr algn="l" marL="342900" indent="-342900">
@@ -20788,7 +20846,7 @@
               <a:buChar char="•"/>
             </a:pPr>
             <a:r>
-              <a:rPr lang="en-US" sz="2000" dirty="0">
+              <a:rPr lang="en-US" sz="1800" dirty="0">
                 <a:solidFill>
                   <a:srgbClr val="111111"/>
                 </a:solidFill>
@@ -20796,9 +20854,9 @@
                 <a:ea typeface="Calibri" pitchFamily="34" charset="-122"/>
                 <a:cs typeface="Calibri" pitchFamily="34" charset="-120"/>
               </a:rPr>
-              <a:t>Without the projector (Activity 2): ask about a salary.</a:t>
-            </a:r>
-            <a:endParaRPr lang="en-US" sz="2000" dirty="0"/>
+              <a:t>Photo, Activity 2: “Photo by USAID East Africa” by U.S. Agency for International Development, CC0 1.0, via rawpixel (https://www.rawpixel.com/image/4051097/image-public-domain-person-building)</a:t>
+            </a:r>
+            <a:endParaRPr lang="en-US" sz="1800" dirty="0"/>
           </a:p>
           <a:p>
             <a:pPr algn="l" marL="342900" indent="-342900">
@@ -20809,7 +20867,7 @@
               <a:buChar char="•"/>
             </a:pPr>
             <a:r>
-              <a:rPr lang="en-US" sz="2000" dirty="0">
+              <a:rPr lang="en-US" sz="1800" dirty="0">
                 <a:solidFill>
                   <a:srgbClr val="111111"/>
                 </a:solidFill>
@@ -20817,9 +20875,9 @@
                 <a:ea typeface="Calibri" pitchFamily="34" charset="-122"/>
                 <a:cs typeface="Calibri" pitchFamily="34" charset="-120"/>
               </a:rPr>
-              <a:t>Without the projector (Activity 3): count moto-taxis.</a:t>
-            </a:r>
-            <a:endParaRPr lang="en-US" sz="2000" dirty="0"/>
+              <a:t>Photo, Activity 3: “Cameroon - UN Women's Gender Road Project” by UN Women Gallery, CC BY-NC-ND 2.0, via Flickr (https://www.flickr.com/photos/51431730@N04/47586053052)</a:t>
+            </a:r>
+            <a:endParaRPr lang="en-US" sz="1800" dirty="0"/>
           </a:p>
           <a:p>
             <a:pPr algn="l" marL="342900" indent="-342900">
@@ -20830,7 +20888,7 @@
               <a:buChar char="•"/>
             </a:pPr>
             <a:r>
-              <a:rPr lang="en-US" sz="2000" dirty="0">
+              <a:rPr lang="en-US" sz="1800" dirty="0">
                 <a:solidFill>
                   <a:srgbClr val="111111"/>
                 </a:solidFill>
@@ -20838,9 +20896,9 @@
                 <a:ea typeface="Calibri" pitchFamily="34" charset="-122"/>
                 <a:cs typeface="Calibri" pitchFamily="34" charset="-120"/>
               </a:rPr>
-              <a:t>Without the projector (Activity 4): list small trades.</a:t>
-            </a:r>
-            <a:endParaRPr lang="en-US" sz="2000" dirty="0"/>
+              <a:t>Photo, Activity 4: “Roadside vendor roasts maize cobs for sale in Timau” by CIMMYT, CC BY-NC 2.0, via Flickr (https://www.flickr.com/photos/44760652@N05/25375356457)</a:t>
+            </a:r>
+            <a:endParaRPr lang="en-US" sz="1800" dirty="0"/>
           </a:p>
           <a:p>
             <a:pPr algn="l" marL="342900" indent="-342900">
@@ -20851,7 +20909,7 @@
               <a:buChar char="•"/>
             </a:pPr>
             <a:r>
-              <a:rPr lang="en-US" sz="2000" dirty="0">
+              <a:rPr lang="en-US" sz="1800" dirty="0">
                 <a:solidFill>
                   <a:srgbClr val="111111"/>
                 </a:solidFill>
@@ -20859,9 +20917,9 @@
                 <a:ea typeface="Calibri" pitchFamily="34" charset="-122"/>
                 <a:cs typeface="Calibri" pitchFamily="34" charset="-120"/>
               </a:rPr>
-              <a:t>Without the projector (Activity 5): draw two columns.</a:t>
-            </a:r>
-            <a:endParaRPr lang="en-US" sz="2000" dirty="0"/>
+              <a:t>Diagrams and animations: drawn for this lesson (Geography Department).</a:t>
+            </a:r>
+            <a:endParaRPr lang="en-US" sz="1800" dirty="0"/>
           </a:p>
         </p:txBody>
       </p:sp>
@@ -20908,352 +20966,6 @@
             <a:fld id="{F7021451-1387-4CA6-816F-3879F97B5CBC}" type="slidenum">
               <a:rPr b="1" lang="en-US"/>
               <a:t>52</a:t>
-            </a:fld>
-            <a:endParaRPr lang="en-US"/>
-          </a:p>
-        </p:txBody>
-      </p:sp>
-    </p:spTree>
-  </p:cSld>
-  <p:clrMapOvr>
-    <a:masterClrMapping/>
-  </p:clrMapOvr>
-</p:sld>
-</file>
-
-<file path=ppt/slides/slide53.xml><?xml version="1.0" encoding="utf-8"?>
-<p:sld xmlns:a="http://schemas.openxmlformats.org/drawingml/2006/main" xmlns:r="http://schemas.openxmlformats.org/officeDocument/2006/relationships" xmlns:p="http://schemas.openxmlformats.org/presentationml/2006/main">
-  <p:cSld name="Slide 53">
-    <p:spTree>
-      <p:nvGrpSpPr>
-        <p:cNvPr id="1" name=""/>
-        <p:cNvGrpSpPr/>
-        <p:nvPr/>
-      </p:nvGrpSpPr>
-      <p:grpSpPr>
-        <a:xfrm>
-          <a:off x="0" y="0"/>
-          <a:ext cx="0" cy="0"/>
-          <a:chOff x="0" y="0"/>
-          <a:chExt cx="0" cy="0"/>
-        </a:xfrm>
-      </p:grpSpPr>
-      <p:sp>
-        <p:nvSpPr>
-          <p:cNvPr id="2" name="Text 0"/>
-          <p:cNvSpPr/>
-          <p:nvPr/>
-        </p:nvSpPr>
-        <p:spPr>
-          <a:xfrm>
-            <a:off x="457200" y="713232"/>
-            <a:ext cx="11368735" cy="274320"/>
-          </a:xfrm>
-          <a:prstGeom prst="rect">
-            <a:avLst/>
-          </a:prstGeom>
-          <a:noFill/>
-          <a:ln/>
-        </p:spPr>
-        <p:txBody>
-          <a:bodyPr wrap="square" lIns="0" tIns="0" rIns="0" bIns="0" rtlCol="0" anchor="ctr"/>
-          <a:lstStyle/>
-          <a:p>
-            <a:pPr algn="r" indent="0" marL="0">
-              <a:buNone/>
-            </a:pPr>
-            <a:r>
-              <a:rPr lang="en-US" sz="1400" b="1" dirty="0">
-                <a:solidFill>
-                  <a:srgbClr val="1C3F6E"/>
-                </a:solidFill>
-                <a:latin typeface="Calibri" pitchFamily="34" charset="0"/>
-                <a:ea typeface="Calibri" pitchFamily="34" charset="-122"/>
-                <a:cs typeface="Calibri" pitchFamily="34" charset="-120"/>
-              </a:rPr>
-              <a:t>REFERENCES</a:t>
-            </a:r>
-            <a:endParaRPr lang="en-US" sz="1400" dirty="0"/>
-          </a:p>
-        </p:txBody>
-      </p:sp>
-      <p:pic>
-        <p:nvPicPr>
-          <p:cNvPr id="3" name="Image 0" descr="/home/claude/f4/img/minesec_sheet.png">    </p:cNvPr>
-          <p:cNvPicPr>
-            <a:picLocks noChangeAspect="1"/>
-          </p:cNvPicPr>
-          <p:nvPr/>
-        </p:nvPicPr>
-        <p:blipFill>
-          <a:blip r:embed="rId1"/>
-          <a:stretch>
-            <a:fillRect/>
-          </a:stretch>
-        </p:blipFill>
-        <p:spPr>
-          <a:xfrm>
-            <a:off x="0" y="658368"/>
-            <a:ext cx="2468880" cy="5833872"/>
-          </a:xfrm>
-          <a:prstGeom prst="rect">
-            <a:avLst/>
-          </a:prstGeom>
-        </p:spPr>
-      </p:pic>
-      <p:sp>
-        <p:nvSpPr>
-          <p:cNvPr id="4" name="Text 1"/>
-          <p:cNvSpPr/>
-          <p:nvPr/>
-        </p:nvSpPr>
-        <p:spPr>
-          <a:xfrm>
-            <a:off x="2697480" y="1005840"/>
-            <a:ext cx="9174175" cy="731520"/>
-          </a:xfrm>
-          <a:prstGeom prst="rect">
-            <a:avLst/>
-          </a:prstGeom>
-          <a:noFill/>
-          <a:ln/>
-        </p:spPr>
-        <p:txBody>
-          <a:bodyPr wrap="square" lIns="0" tIns="0" rIns="0" bIns="0" rtlCol="0" anchor="ctr">
-            <a:normAutofit/>
-          </a:bodyPr>
-          <a:lstStyle/>
-          <a:p>
-            <a:pPr algn="ctr" indent="0" marL="0">
-              <a:buNone/>
-            </a:pPr>
-            <a:r>
-              <a:rPr lang="en-US" sz="3600" b="1" dirty="0">
-                <a:solidFill>
-                  <a:srgbClr val="990011"/>
-                </a:solidFill>
-                <a:latin typeface="Times New Roman" pitchFamily="34" charset="0"/>
-                <a:ea typeface="Times New Roman" pitchFamily="34" charset="-122"/>
-                <a:cs typeface="Times New Roman" pitchFamily="34" charset="-120"/>
-              </a:rPr>
-              <a:t>References</a:t>
-            </a:r>
-            <a:endParaRPr lang="en-US" sz="3600" dirty="0"/>
-          </a:p>
-        </p:txBody>
-      </p:sp>
-      <p:sp>
-        <p:nvSpPr>
-          <p:cNvPr id="5" name="Text 2"/>
-          <p:cNvSpPr/>
-          <p:nvPr/>
-        </p:nvSpPr>
-        <p:spPr>
-          <a:xfrm>
-            <a:off x="2697480" y="1783080"/>
-            <a:ext cx="9174175" cy="4663440"/>
-          </a:xfrm>
-          <a:prstGeom prst="rect">
-            <a:avLst/>
-          </a:prstGeom>
-          <a:noFill/>
-          <a:ln/>
-        </p:spPr>
-        <p:txBody>
-          <a:bodyPr wrap="square" lIns="0" tIns="0" rIns="0" bIns="0" rtlCol="0" anchor="t"/>
-          <a:lstStyle/>
-          <a:p>
-            <a:pPr algn="l" marL="342900" indent="-342900">
-              <a:spcAft>
-                <a:spcPts val="800"/>
-              </a:spcAft>
-              <a:buSzPct val="100000"/>
-              <a:buChar char="•"/>
-            </a:pPr>
-            <a:r>
-              <a:rPr lang="en-US" sz="1800" dirty="0">
-                <a:solidFill>
-                  <a:srgbClr val="111111"/>
-                </a:solidFill>
-                <a:latin typeface="Calibri" pitchFamily="34" charset="0"/>
-                <a:ea typeface="Calibri" pitchFamily="34" charset="-122"/>
-                <a:cs typeface="Calibri" pitchFamily="34" charset="-120"/>
-              </a:rPr>
-              <a:t>Harmonised Progression Sheet, Economic Geography (5051), Form 2.</a:t>
-            </a:r>
-            <a:endParaRPr lang="en-US" sz="1800" dirty="0"/>
-          </a:p>
-          <a:p>
-            <a:pPr algn="l" marL="342900" indent="-342900">
-              <a:spcAft>
-                <a:spcPts val="800"/>
-              </a:spcAft>
-              <a:buSzPct val="100000"/>
-              <a:buChar char="•"/>
-            </a:pPr>
-            <a:r>
-              <a:rPr lang="en-US" sz="1800" dirty="0">
-                <a:solidFill>
-                  <a:srgbClr val="111111"/>
-                </a:solidFill>
-                <a:latin typeface="Calibri" pitchFamily="34" charset="0"/>
-                <a:ea typeface="Calibri" pitchFamily="34" charset="-122"/>
-                <a:cs typeface="Calibri" pitchFamily="34" charset="-120"/>
-              </a:rPr>
-              <a:t>Institut National de la Statistique (INS), Enquêtes sur l'Emploi et le Secteur Informel (EESI).</a:t>
-            </a:r>
-            <a:endParaRPr lang="en-US" sz="1800" dirty="0"/>
-          </a:p>
-          <a:p>
-            <a:pPr algn="l" marL="342900" indent="-342900">
-              <a:spcAft>
-                <a:spcPts val="800"/>
-              </a:spcAft>
-              <a:buSzPct val="100000"/>
-              <a:buChar char="•"/>
-            </a:pPr>
-            <a:r>
-              <a:rPr lang="en-US" sz="1800" dirty="0">
-                <a:solidFill>
-                  <a:srgbClr val="111111"/>
-                </a:solidFill>
-                <a:latin typeface="Calibri" pitchFamily="34" charset="0"/>
-                <a:ea typeface="Calibri" pitchFamily="34" charset="-122"/>
-                <a:cs typeface="Calibri" pitchFamily="34" charset="-120"/>
-              </a:rPr>
-              <a:t>Photo, Activity 1: “Thibault Square, Cape Town” by World Bank Photo Collection, CC BY-NC-ND 2.0, via Flickr (https://www.flickr.com/photos/10816734@N03/7825576852)</a:t>
-            </a:r>
-            <a:endParaRPr lang="en-US" sz="1800" dirty="0"/>
-          </a:p>
-          <a:p>
-            <a:pPr algn="l" marL="342900" indent="-342900">
-              <a:spcAft>
-                <a:spcPts val="800"/>
-              </a:spcAft>
-              <a:buSzPct val="100000"/>
-              <a:buChar char="•"/>
-            </a:pPr>
-            <a:r>
-              <a:rPr lang="en-US" sz="1800" dirty="0">
-                <a:solidFill>
-                  <a:srgbClr val="111111"/>
-                </a:solidFill>
-                <a:latin typeface="Calibri" pitchFamily="34" charset="0"/>
-                <a:ea typeface="Calibri" pitchFamily="34" charset="-122"/>
-                <a:cs typeface="Calibri" pitchFamily="34" charset="-120"/>
-              </a:rPr>
-              <a:t>Photo, Activity 2: “Photo by USAID East Africa” by U.S. Agency for International Development, CC0 1.0, via rawpixel (https://www.rawpixel.com/image/4051097/image-public-domain-person-building)</a:t>
-            </a:r>
-            <a:endParaRPr lang="en-US" sz="1800" dirty="0"/>
-          </a:p>
-          <a:p>
-            <a:pPr algn="l" marL="342900" indent="-342900">
-              <a:spcAft>
-                <a:spcPts val="800"/>
-              </a:spcAft>
-              <a:buSzPct val="100000"/>
-              <a:buChar char="•"/>
-            </a:pPr>
-            <a:r>
-              <a:rPr lang="en-US" sz="1800" dirty="0">
-                <a:solidFill>
-                  <a:srgbClr val="111111"/>
-                </a:solidFill>
-                <a:latin typeface="Calibri" pitchFamily="34" charset="0"/>
-                <a:ea typeface="Calibri" pitchFamily="34" charset="-122"/>
-                <a:cs typeface="Calibri" pitchFamily="34" charset="-120"/>
-              </a:rPr>
-              <a:t>Photo, Activity 3: “Cameroon - UN Women's Gender Road Project” by UN Women Gallery, CC BY-NC-ND 2.0, via Flickr (https://www.flickr.com/photos/51431730@N04/47586053052)</a:t>
-            </a:r>
-            <a:endParaRPr lang="en-US" sz="1800" dirty="0"/>
-          </a:p>
-          <a:p>
-            <a:pPr algn="l" marL="342900" indent="-342900">
-              <a:spcAft>
-                <a:spcPts val="800"/>
-              </a:spcAft>
-              <a:buSzPct val="100000"/>
-              <a:buChar char="•"/>
-            </a:pPr>
-            <a:r>
-              <a:rPr lang="en-US" sz="1800" dirty="0">
-                <a:solidFill>
-                  <a:srgbClr val="111111"/>
-                </a:solidFill>
-                <a:latin typeface="Calibri" pitchFamily="34" charset="0"/>
-                <a:ea typeface="Calibri" pitchFamily="34" charset="-122"/>
-                <a:cs typeface="Calibri" pitchFamily="34" charset="-120"/>
-              </a:rPr>
-              <a:t>Photo, Activity 4: “Roadside vendor roasts maize cobs for sale in Timau” by CIMMYT, CC BY-NC 2.0, via Flickr (https://www.flickr.com/photos/44760652@N05/25375356457)</a:t>
-            </a:r>
-            <a:endParaRPr lang="en-US" sz="1800" dirty="0"/>
-          </a:p>
-          <a:p>
-            <a:pPr algn="l" marL="342900" indent="-342900">
-              <a:spcAft>
-                <a:spcPts val="800"/>
-              </a:spcAft>
-              <a:buSzPct val="100000"/>
-              <a:buChar char="•"/>
-            </a:pPr>
-            <a:r>
-              <a:rPr lang="en-US" sz="1800" dirty="0">
-                <a:solidFill>
-                  <a:srgbClr val="111111"/>
-                </a:solidFill>
-                <a:latin typeface="Calibri" pitchFamily="34" charset="0"/>
-                <a:ea typeface="Calibri" pitchFamily="34" charset="-122"/>
-                <a:cs typeface="Calibri" pitchFamily="34" charset="-120"/>
-              </a:rPr>
-              <a:t>Diagrams and animations: drawn for this lesson (Geography Department).</a:t>
-            </a:r>
-            <a:endParaRPr lang="en-US" sz="1800" dirty="0"/>
-          </a:p>
-        </p:txBody>
-      </p:sp>
-      <p:sp>
-        <p:nvSpPr>
-          <p:cNvPr id="25" name="Slide Number Placeholder 0"/>
-          <p:cNvSpPr>
-            <a:spLocks noGrp="1"/>
-          </p:cNvSpPr>
-          <p:nvPr>
-            <p:ph type="sldNum" sz="quarter" idx="4294967295"/>
-          </p:nvPr>
-        </p:nvSpPr>
-        <p:spPr>
-          <a:xfrm>
-            <a:off x="27432" y="91440"/>
-            <a:ext cx="585216" cy="475488"/>
-          </a:xfrm>
-          <a:prstGeom prst="rect">
-            <a:avLst/>
-          </a:prstGeom>
-          <a:extLst>
-            <a:ext uri="{C572A759-6A51-4108-AA02-DFA0A04FC94B}">
-              <ma14:wrappingTextBoxFlag xmlns:ma14="http://schemas.microsoft.com/office/mac/drawingml/2011/main" val="0"/>
-            </a:ext>
-          </a:extLst>
-        </p:spPr>
-        <p:txBody>
-          <a:bodyPr/>
-          <a:lstStyle>
-            <a:lvl1pPr>
-              <a:defRPr sz="2000">
-                <a:solidFill>
-                  <a:srgbClr val="FFFFFF"/>
-                </a:solidFill>
-                <a:latin typeface="Calibri"/>
-                <a:ea typeface="Calibri"/>
-                <a:cs typeface="Calibri"/>
-              </a:defRPr>
-            </a:lvl1pPr>
-          </a:lstStyle>
-          <a:p>
-            <a:pPr algn="ctr"/>
-            <a:fld id="{F7021451-1387-4CA6-816F-3879F97B5CBC}" type="slidenum">
-              <a:rPr b="1" lang="en-US"/>
-              <a:t>53</a:t>
             </a:fld>
             <a:endParaRPr lang="en-US"/>
           </a:p>
@@ -21317,7 +21029,7 @@
                 <a:ea typeface="Calibri" pitchFamily="34" charset="-122"/>
                 <a:cs typeface="Calibri" pitchFamily="34" charset="-120"/>
               </a:rPr>
-              <a:t>HOMEWORK CORRECTION</a:t>
+              <a:t>LESSON PLAN</a:t>
             </a:r>
             <a:endParaRPr lang="en-US" sz="1400" dirty="0"/>
           </a:p>
@@ -21340,7 +21052,7 @@
         <p:spPr>
           <a:xfrm>
             <a:off x="0" y="658368"/>
-            <a:ext cx="5120640" cy="5833872"/>
+            <a:ext cx="2468880" cy="5833872"/>
           </a:xfrm>
           <a:prstGeom prst="rect">
             <a:avLst/>
@@ -21355,8 +21067,8 @@
         </p:nvSpPr>
         <p:spPr>
           <a:xfrm>
-            <a:off x="5349240" y="1005840"/>
-            <a:ext cx="6522415" cy="731520"/>
+            <a:off x="2697480" y="1005840"/>
+            <a:ext cx="9174175" cy="731520"/>
           </a:xfrm>
           <a:prstGeom prst="rect">
             <a:avLst/>
@@ -21382,7 +21094,7 @@
                 <a:ea typeface="Times New Roman" pitchFamily="34" charset="-122"/>
                 <a:cs typeface="Times New Roman" pitchFamily="34" charset="-120"/>
               </a:rPr>
-              <a:t>Correction: Possible Answer</a:t>
+              <a:t>Lesson Plan</a:t>
             </a:r>
             <a:endParaRPr lang="en-US" sz="3600" dirty="0"/>
           </a:p>
@@ -21396,8 +21108,8 @@
         </p:nvSpPr>
         <p:spPr>
           <a:xfrm>
-            <a:off x="5349240" y="1783080"/>
-            <a:ext cx="6522415" cy="4663440"/>
+            <a:off x="2697480" y="1783080"/>
+            <a:ext cx="9174175" cy="4663440"/>
           </a:xfrm>
           <a:prstGeom prst="rect">
             <a:avLst/>
@@ -21409,11 +21121,13 @@
           <a:bodyPr wrap="square" lIns="0" tIns="0" rIns="0" bIns="0" rtlCol="0" anchor="t"/>
           <a:lstStyle/>
           <a:p>
-            <a:pPr algn="l" indent="0" marL="0">
+            <a:pPr algn="l" marL="342900" indent="-342900">
               <a:spcAft>
                 <a:spcPts val="800"/>
               </a:spcAft>
-              <a:buNone/>
+              <a:buSzPct val="100000"/>
+              <a:buFont typeface="+mj-lt"/>
+              <a:buAutoNum type="arabicPeriod" startAt="1"/>
             </a:pPr>
             <a:r>
               <a:rPr lang="en-US" sz="4000" dirty="0">
@@ -21424,7 +21138,117 @@
                 <a:ea typeface="Times New Roman" pitchFamily="34" charset="-122"/>
                 <a:cs typeface="Times New Roman" pitchFamily="34" charset="-120"/>
               </a:rPr>
-              <a:t>Example: a SODECOTON worker has a contract, a monthly salary and CNPS insurance, while a moto-taxi driver works alone, earns money daily and has no contract or pension.</a:t>
+              <a:t>Correction of the homework</a:t>
+            </a:r>
+            <a:endParaRPr lang="en-US" sz="4000" dirty="0"/>
+          </a:p>
+          <a:p>
+            <a:pPr algn="l" marL="342900" indent="-342900">
+              <a:spcAft>
+                <a:spcPts val="800"/>
+              </a:spcAft>
+              <a:buSzPct val="100000"/>
+              <a:buFont typeface="+mj-lt"/>
+              <a:buAutoNum type="arabicPeriod" startAt="1"/>
+            </a:pPr>
+            <a:r>
+              <a:rPr lang="en-US" sz="4000" dirty="0">
+                <a:solidFill>
+                  <a:srgbClr val="111111"/>
+                </a:solidFill>
+                <a:latin typeface="Times New Roman" pitchFamily="34" charset="0"/>
+                <a:ea typeface="Times New Roman" pitchFamily="34" charset="-122"/>
+                <a:cs typeface="Times New Roman" pitchFamily="34" charset="-120"/>
+              </a:rPr>
+              <a:t>Objectives and recall</a:t>
+            </a:r>
+            <a:endParaRPr lang="en-US" sz="4000" dirty="0"/>
+          </a:p>
+          <a:p>
+            <a:pPr algn="l" marL="342900" indent="-342900">
+              <a:spcAft>
+                <a:spcPts val="800"/>
+              </a:spcAft>
+              <a:buSzPct val="100000"/>
+              <a:buFont typeface="+mj-lt"/>
+              <a:buAutoNum type="arabicPeriod" startAt="1"/>
+            </a:pPr>
+            <a:r>
+              <a:rPr lang="en-US" sz="4000" dirty="0">
+                <a:solidFill>
+                  <a:srgbClr val="111111"/>
+                </a:solidFill>
+                <a:latin typeface="Times New Roman" pitchFamily="34" charset="0"/>
+                <a:ea typeface="Times New Roman" pitchFamily="34" charset="-122"/>
+                <a:cs typeface="Times New Roman" pitchFamily="34" charset="-120"/>
+              </a:rPr>
+              <a:t>Real-life situation and action to take</a:t>
+            </a:r>
+            <a:endParaRPr lang="en-US" sz="4000" dirty="0"/>
+          </a:p>
+          <a:p>
+            <a:pPr algn="l" marL="342900" indent="-342900">
+              <a:spcAft>
+                <a:spcPts val="800"/>
+              </a:spcAft>
+              <a:buSzPct val="100000"/>
+              <a:buFont typeface="+mj-lt"/>
+              <a:buAutoNum type="arabicPeriod" startAt="1"/>
+            </a:pPr>
+            <a:r>
+              <a:rPr lang="en-US" sz="4000" dirty="0">
+                <a:solidFill>
+                  <a:srgbClr val="111111"/>
+                </a:solidFill>
+                <a:latin typeface="Times New Roman" pitchFamily="34" charset="0"/>
+                <a:ea typeface="Times New Roman" pitchFamily="34" charset="-122"/>
+                <a:cs typeface="Times New Roman" pitchFamily="34" charset="-120"/>
+              </a:rPr>
+              <a:t>Learning activities</a:t>
+            </a:r>
+            <a:endParaRPr lang="en-US" sz="4000" dirty="0"/>
+          </a:p>
+          <a:p>
+            <a:pPr algn="l" marL="342900" indent="-342900">
+              <a:spcAft>
+                <a:spcPts val="800"/>
+              </a:spcAft>
+              <a:buSzPct val="100000"/>
+              <a:buFont typeface="+mj-lt"/>
+              <a:buAutoNum type="arabicPeriod" startAt="1"/>
+            </a:pPr>
+            <a:r>
+              <a:rPr lang="en-US" sz="4000" dirty="0">
+                <a:solidFill>
+                  <a:srgbClr val="111111"/>
+                </a:solidFill>
+                <a:latin typeface="Times New Roman" pitchFamily="34" charset="0"/>
+                <a:ea typeface="Times New Roman" pitchFamily="34" charset="-122"/>
+                <a:cs typeface="Times New Roman" pitchFamily="34" charset="-120"/>
+              </a:rPr>
+              <a:t>Board summary</a:t>
+            </a:r>
+            <a:endParaRPr lang="en-US" sz="4000" dirty="0"/>
+          </a:p>
+          <a:p>
+            <a:pPr algn="l" marL="342900" indent="-342900">
+              <a:spcAft>
+                <a:spcPts val="800"/>
+              </a:spcAft>
+              <a:buSzPct val="100000"/>
+              <a:buFont typeface="+mj-lt"/>
+              <a:buAutoNum type="arabicPeriod" startAt="1"/>
+            </a:pPr>
+            <a:r>
+              <a:rPr lang="en-US" sz="4000" dirty="0">
+                <a:solidFill>
+                  <a:srgbClr val="111111"/>
+                </a:solidFill>
+                <a:latin typeface="Times New Roman" pitchFamily="34" charset="0"/>
+                <a:ea typeface="Times New Roman" pitchFamily="34" charset="-122"/>
+                <a:cs typeface="Times New Roman" pitchFamily="34" charset="-120"/>
+              </a:rPr>
+              <a:t>Evaluation, remediation and homework</a:t>
             </a:r>
             <a:endParaRPr lang="en-US" sz="4000" dirty="0"/>
           </a:p>
@@ -21536,7 +21360,7 @@
                 <a:ea typeface="Calibri" pitchFamily="34" charset="-122"/>
                 <a:cs typeface="Calibri" pitchFamily="34" charset="-120"/>
               </a:rPr>
-              <a:t>LESSON PLAN</a:t>
+              <a:t>OBJECTIVES</a:t>
             </a:r>
             <a:endParaRPr lang="en-US" sz="1400" dirty="0"/>
           </a:p>
@@ -21559,7 +21383,7 @@
         <p:spPr>
           <a:xfrm>
             <a:off x="0" y="658368"/>
-            <a:ext cx="2468880" cy="5833872"/>
+            <a:ext cx="1463040" cy="5833872"/>
           </a:xfrm>
           <a:prstGeom prst="rect">
             <a:avLst/>
@@ -21574,8 +21398,8 @@
         </p:nvSpPr>
         <p:spPr>
           <a:xfrm>
-            <a:off x="2697480" y="1005840"/>
-            <a:ext cx="9174175" cy="731520"/>
+            <a:off x="1691640" y="1005840"/>
+            <a:ext cx="10180015" cy="731520"/>
           </a:xfrm>
           <a:prstGeom prst="rect">
             <a:avLst/>
@@ -21601,7 +21425,7 @@
                 <a:ea typeface="Times New Roman" pitchFamily="34" charset="-122"/>
                 <a:cs typeface="Times New Roman" pitchFamily="34" charset="-120"/>
               </a:rPr>
-              <a:t>Lesson Plan</a:t>
+              <a:t>Objectives</a:t>
             </a:r>
             <a:endParaRPr lang="en-US" sz="3600" dirty="0"/>
           </a:p>
@@ -21615,8 +21439,8 @@
         </p:nvSpPr>
         <p:spPr>
           <a:xfrm>
-            <a:off x="2697480" y="1783080"/>
-            <a:ext cx="9174175" cy="4663440"/>
+            <a:off x="1691640" y="1783080"/>
+            <a:ext cx="10180015" cy="4663440"/>
           </a:xfrm>
           <a:prstGeom prst="rect">
             <a:avLst/>
@@ -21627,6 +21451,26 @@
         <p:txBody>
           <a:bodyPr wrap="square" lIns="0" tIns="0" rIns="0" bIns="0" rtlCol="0" anchor="t"/>
           <a:lstStyle/>
+          <a:p>
+            <a:pPr algn="l" indent="0" marL="0">
+              <a:spcAft>
+                <a:spcPts val="800"/>
+              </a:spcAft>
+              <a:buNone/>
+            </a:pPr>
+            <a:r>
+              <a:rPr lang="en-US" sz="4000" b="1" dirty="0">
+                <a:solidFill>
+                  <a:srgbClr val="111111"/>
+                </a:solidFill>
+                <a:latin typeface="Times New Roman" pitchFamily="34" charset="0"/>
+                <a:ea typeface="Times New Roman" pitchFamily="34" charset="-122"/>
+                <a:cs typeface="Times New Roman" pitchFamily="34" charset="-120"/>
+              </a:rPr>
+              <a:t>By the end of this lesson, you should be able to:</a:t>
+            </a:r>
+            <a:endParaRPr lang="en-US" sz="4000" dirty="0"/>
+          </a:p>
           <a:p>
             <a:pPr algn="l" marL="342900" indent="-342900">
               <a:spcAft>
@@ -21645,7 +21489,7 @@
                 <a:ea typeface="Times New Roman" pitchFamily="34" charset="-122"/>
                 <a:cs typeface="Times New Roman" pitchFamily="34" charset="-120"/>
               </a:rPr>
-              <a:t>Correction of the homework</a:t>
+              <a:t>Define the formal and the informal sectors.</a:t>
             </a:r>
             <a:endParaRPr lang="en-US" sz="4000" dirty="0"/>
           </a:p>
@@ -21667,7 +21511,7 @@
                 <a:ea typeface="Times New Roman" pitchFamily="34" charset="-122"/>
                 <a:cs typeface="Times New Roman" pitchFamily="34" charset="-120"/>
               </a:rPr>
-              <a:t>Objectives and recall</a:t>
+              <a:t>Give the characteristics of each sector.</a:t>
             </a:r>
             <a:endParaRPr lang="en-US" sz="4000" dirty="0"/>
           </a:p>
@@ -21689,73 +21533,7 @@
                 <a:ea typeface="Times New Roman" pitchFamily="34" charset="-122"/>
                 <a:cs typeface="Times New Roman" pitchFamily="34" charset="-120"/>
               </a:rPr>
-              <a:t>Real-life situation and action to take</a:t>
-            </a:r>
-            <a:endParaRPr lang="en-US" sz="4000" dirty="0"/>
-          </a:p>
-          <a:p>
-            <a:pPr algn="l" marL="342900" indent="-342900">
-              <a:spcAft>
-                <a:spcPts val="800"/>
-              </a:spcAft>
-              <a:buSzPct val="100000"/>
-              <a:buFont typeface="+mj-lt"/>
-              <a:buAutoNum type="arabicPeriod" startAt="1"/>
-            </a:pPr>
-            <a:r>
-              <a:rPr lang="en-US" sz="4000" dirty="0">
-                <a:solidFill>
-                  <a:srgbClr val="111111"/>
-                </a:solidFill>
-                <a:latin typeface="Times New Roman" pitchFamily="34" charset="0"/>
-                <a:ea typeface="Times New Roman" pitchFamily="34" charset="-122"/>
-                <a:cs typeface="Times New Roman" pitchFamily="34" charset="-120"/>
-              </a:rPr>
-              <a:t>Learning activities</a:t>
-            </a:r>
-            <a:endParaRPr lang="en-US" sz="4000" dirty="0"/>
-          </a:p>
-          <a:p>
-            <a:pPr algn="l" marL="342900" indent="-342900">
-              <a:spcAft>
-                <a:spcPts val="800"/>
-              </a:spcAft>
-              <a:buSzPct val="100000"/>
-              <a:buFont typeface="+mj-lt"/>
-              <a:buAutoNum type="arabicPeriod" startAt="1"/>
-            </a:pPr>
-            <a:r>
-              <a:rPr lang="en-US" sz="4000" dirty="0">
-                <a:solidFill>
-                  <a:srgbClr val="111111"/>
-                </a:solidFill>
-                <a:latin typeface="Times New Roman" pitchFamily="34" charset="0"/>
-                <a:ea typeface="Times New Roman" pitchFamily="34" charset="-122"/>
-                <a:cs typeface="Times New Roman" pitchFamily="34" charset="-120"/>
-              </a:rPr>
-              <a:t>Board summary</a:t>
-            </a:r>
-            <a:endParaRPr lang="en-US" sz="4000" dirty="0"/>
-          </a:p>
-          <a:p>
-            <a:pPr algn="l" marL="342900" indent="-342900">
-              <a:spcAft>
-                <a:spcPts val="800"/>
-              </a:spcAft>
-              <a:buSzPct val="100000"/>
-              <a:buFont typeface="+mj-lt"/>
-              <a:buAutoNum type="arabicPeriod" startAt="1"/>
-            </a:pPr>
-            <a:r>
-              <a:rPr lang="en-US" sz="4000" dirty="0">
-                <a:solidFill>
-                  <a:srgbClr val="111111"/>
-                </a:solidFill>
-                <a:latin typeface="Times New Roman" pitchFamily="34" charset="0"/>
-                <a:ea typeface="Times New Roman" pitchFamily="34" charset="-122"/>
-                <a:cs typeface="Times New Roman" pitchFamily="34" charset="-120"/>
-              </a:rPr>
-              <a:t>Evaluation, remediation and homework</a:t>
+              <a:t>Give examples of each sector in Cameroon.</a:t>
             </a:r>
             <a:endParaRPr lang="en-US" sz="4000" dirty="0"/>
           </a:p>
@@ -21867,7 +21645,7 @@
                 <a:ea typeface="Calibri" pitchFamily="34" charset="-122"/>
                 <a:cs typeface="Calibri" pitchFamily="34" charset="-120"/>
               </a:rPr>
-              <a:t>OBJECTIVES</a:t>
+              <a:t>PREVIOUS KNOWLEDGE</a:t>
             </a:r>
             <a:endParaRPr lang="en-US" sz="1400" dirty="0"/>
           </a:p>
@@ -21890,7 +21668,7 @@
         <p:spPr>
           <a:xfrm>
             <a:off x="0" y="658368"/>
-            <a:ext cx="1463040" cy="5833872"/>
+            <a:ext cx="3840480" cy="5833872"/>
           </a:xfrm>
           <a:prstGeom prst="rect">
             <a:avLst/>
@@ -21905,8 +21683,8 @@
         </p:nvSpPr>
         <p:spPr>
           <a:xfrm>
-            <a:off x="1691640" y="1005840"/>
-            <a:ext cx="10180015" cy="731520"/>
+            <a:off x="4069080" y="1005840"/>
+            <a:ext cx="7802575" cy="731520"/>
           </a:xfrm>
           <a:prstGeom prst="rect">
             <a:avLst/>
@@ -21932,7 +21710,7 @@
                 <a:ea typeface="Times New Roman" pitchFamily="34" charset="-122"/>
                 <a:cs typeface="Times New Roman" pitchFamily="34" charset="-120"/>
               </a:rPr>
-              <a:t>Objectives</a:t>
+              <a:t>Previous Knowledge</a:t>
             </a:r>
             <a:endParaRPr lang="en-US" sz="3600" dirty="0"/>
           </a:p>
@@ -21946,8 +21724,8 @@
         </p:nvSpPr>
         <p:spPr>
           <a:xfrm>
-            <a:off x="1691640" y="1783080"/>
-            <a:ext cx="10180015" cy="4663440"/>
+            <a:off x="4069080" y="1783080"/>
+            <a:ext cx="7802575" cy="4663440"/>
           </a:xfrm>
           <a:prstGeom prst="rect">
             <a:avLst/>
@@ -21958,34 +21736,13 @@
         <p:txBody>
           <a:bodyPr wrap="square" lIns="0" tIns="0" rIns="0" bIns="0" rtlCol="0" anchor="t"/>
           <a:lstStyle/>
-          <a:p>
-            <a:pPr algn="l" indent="0" marL="0">
-              <a:spcAft>
-                <a:spcPts val="800"/>
-              </a:spcAft>
-              <a:buNone/>
-            </a:pPr>
-            <a:r>
-              <a:rPr lang="en-US" sz="4000" b="1" dirty="0">
-                <a:solidFill>
-                  <a:srgbClr val="111111"/>
-                </a:solidFill>
-                <a:latin typeface="Times New Roman" pitchFamily="34" charset="0"/>
-                <a:ea typeface="Times New Roman" pitchFamily="34" charset="-122"/>
-                <a:cs typeface="Times New Roman" pitchFamily="34" charset="-120"/>
-              </a:rPr>
-              <a:t>By the end of this lesson, you should be able to:</a:t>
-            </a:r>
-            <a:endParaRPr lang="en-US" sz="4000" dirty="0"/>
-          </a:p>
           <a:p>
             <a:pPr algn="l" marL="342900" indent="-342900">
               <a:spcAft>
                 <a:spcPts val="800"/>
               </a:spcAft>
               <a:buSzPct val="100000"/>
-              <a:buFont typeface="+mj-lt"/>
-              <a:buAutoNum type="arabicPeriod" startAt="1"/>
+              <a:buChar char="•"/>
             </a:pPr>
             <a:r>
               <a:rPr lang="en-US" sz="4000" dirty="0">
@@ -21996,7 +21753,7 @@
                 <a:ea typeface="Times New Roman" pitchFamily="34" charset="-122"/>
                 <a:cs typeface="Times New Roman" pitchFamily="34" charset="-120"/>
               </a:rPr>
-              <a:t>Define the formal and the informal sectors.</a:t>
+              <a:t>The economy has four sectors: primary, secondary, tertiary and quaternary.</a:t>
             </a:r>
             <a:endParaRPr lang="en-US" sz="4000" dirty="0"/>
           </a:p>
@@ -22006,8 +21763,7 @@
                 <a:spcPts val="800"/>
               </a:spcAft>
               <a:buSzPct val="100000"/>
-              <a:buFont typeface="+mj-lt"/>
-              <a:buAutoNum type="arabicPeriod" startAt="1"/>
+              <a:buChar char="•"/>
             </a:pPr>
             <a:r>
               <a:rPr lang="en-US" sz="4000" dirty="0">
@@ -22018,29 +21774,7 @@
                 <a:ea typeface="Times New Roman" pitchFamily="34" charset="-122"/>
                 <a:cs typeface="Times New Roman" pitchFamily="34" charset="-120"/>
               </a:rPr>
-              <a:t>Give the characteristics of each sector.</a:t>
-            </a:r>
-            <a:endParaRPr lang="en-US" sz="4000" dirty="0"/>
-          </a:p>
-          <a:p>
-            <a:pPr algn="l" marL="342900" indent="-342900">
-              <a:spcAft>
-                <a:spcPts val="800"/>
-              </a:spcAft>
-              <a:buSzPct val="100000"/>
-              <a:buFont typeface="+mj-lt"/>
-              <a:buAutoNum type="arabicPeriod" startAt="1"/>
-            </a:pPr>
-            <a:r>
-              <a:rPr lang="en-US" sz="4000" dirty="0">
-                <a:solidFill>
-                  <a:srgbClr val="111111"/>
-                </a:solidFill>
-                <a:latin typeface="Times New Roman" pitchFamily="34" charset="0"/>
-                <a:ea typeface="Times New Roman" pitchFamily="34" charset="-122"/>
-                <a:cs typeface="Times New Roman" pitchFamily="34" charset="-120"/>
-              </a:rPr>
-              <a:t>Give examples of each sector in Cameroon.</a:t>
+              <a:t>The primary sector extracts, the secondary transforms, the tertiary serves and the quaternary researches.</a:t>
             </a:r>
             <a:endParaRPr lang="en-US" sz="4000" dirty="0"/>
           </a:p>
@@ -22152,7 +21886,7 @@
                 <a:ea typeface="Calibri" pitchFamily="34" charset="-122"/>
                 <a:cs typeface="Calibri" pitchFamily="34" charset="-120"/>
               </a:rPr>
-              <a:t>PREVIOUS KNOWLEDGE</a:t>
+              <a:t>REAL-LIFE SITUATION</a:t>
             </a:r>
             <a:endParaRPr lang="en-US" sz="1400" dirty="0"/>
           </a:p>
@@ -22175,7 +21909,7 @@
         <p:spPr>
           <a:xfrm>
             <a:off x="0" y="658368"/>
-            <a:ext cx="3840480" cy="5833872"/>
+            <a:ext cx="2468880" cy="5833872"/>
           </a:xfrm>
           <a:prstGeom prst="rect">
             <a:avLst/>
@@ -22190,8 +21924,8 @@
         </p:nvSpPr>
         <p:spPr>
           <a:xfrm>
-            <a:off x="4069080" y="1005840"/>
-            <a:ext cx="7802575" cy="731520"/>
+            <a:off x="2697480" y="1005840"/>
+            <a:ext cx="9174175" cy="731520"/>
           </a:xfrm>
           <a:prstGeom prst="rect">
             <a:avLst/>
@@ -22217,7 +21951,7 @@
                 <a:ea typeface="Times New Roman" pitchFamily="34" charset="-122"/>
                 <a:cs typeface="Times New Roman" pitchFamily="34" charset="-120"/>
               </a:rPr>
-              <a:t>Previous Knowledge</a:t>
+              <a:t>Situation in Real Life</a:t>
             </a:r>
             <a:endParaRPr lang="en-US" sz="3600" dirty="0"/>
           </a:p>
@@ -22231,8 +21965,8 @@
         </p:nvSpPr>
         <p:spPr>
           <a:xfrm>
-            <a:off x="4069080" y="1783080"/>
-            <a:ext cx="7802575" cy="4663440"/>
+            <a:off x="2697480" y="1783080"/>
+            <a:ext cx="9174175" cy="4663440"/>
           </a:xfrm>
           <a:prstGeom prst="rect">
             <a:avLst/>
@@ -22244,12 +21978,11 @@
           <a:bodyPr wrap="square" lIns="0" tIns="0" rIns="0" bIns="0" rtlCol="0" anchor="t"/>
           <a:lstStyle/>
           <a:p>
-            <a:pPr algn="l" marL="342900" indent="-342900">
+            <a:pPr algn="l" indent="0" marL="0">
               <a:spcAft>
                 <a:spcPts val="800"/>
               </a:spcAft>
-              <a:buSzPct val="100000"/>
-              <a:buChar char="•"/>
+              <a:buNone/>
             </a:pPr>
             <a:r>
               <a:rPr lang="en-US" sz="4000" dirty="0">
@@ -22260,28 +21993,7 @@
                 <a:ea typeface="Times New Roman" pitchFamily="34" charset="-122"/>
                 <a:cs typeface="Times New Roman" pitchFamily="34" charset="-120"/>
               </a:rPr>
-              <a:t>The economy has four sectors: primary, secondary, tertiary and quaternary.</a:t>
-            </a:r>
-            <a:endParaRPr lang="en-US" sz="4000" dirty="0"/>
-          </a:p>
-          <a:p>
-            <a:pPr algn="l" marL="342900" indent="-342900">
-              <a:spcAft>
-                <a:spcPts val="800"/>
-              </a:spcAft>
-              <a:buSzPct val="100000"/>
-              <a:buChar char="•"/>
-            </a:pPr>
-            <a:r>
-              <a:rPr lang="en-US" sz="4000" dirty="0">
-                <a:solidFill>
-                  <a:srgbClr val="111111"/>
-                </a:solidFill>
-                <a:latin typeface="Times New Roman" pitchFamily="34" charset="0"/>
-                <a:ea typeface="Times New Roman" pitchFamily="34" charset="-122"/>
-                <a:cs typeface="Times New Roman" pitchFamily="34" charset="-120"/>
-              </a:rPr>
-              <a:t>The primary sector extracts, the secondary transforms, the tertiary serves and the quaternary researches.</a:t>
+              <a:t>Mr Bello works in a bank in Garoua: he has a contract and a salary every month. His neighbour Moussa is a moto-taxi driver: he has no contract, and his money changes every day. Moussa's son asks: "Why are the two jobs so different?"</a:t>
             </a:r>
             <a:endParaRPr lang="en-US" sz="4000" dirty="0"/>
           </a:p>
